--- a/01_DOCUMENTACION_TECNICA/PRESENTACION_EJECUTIVA_APF1.pptx
+++ b/01_DOCUMENTACION_TECNICA/PRESENTACION_EJECUTIVA_APF1.pptx
@@ -9,14 +9,20 @@
     <p:sldId id="257" r:id="rId8"/>
     <p:sldId id="258" r:id="rId9"/>
     <p:sldId id="259" r:id="rId10"/>
+    <p:sldId id="270" r:id="rId21"/>
     <p:sldId id="260" r:id="rId11"/>
     <p:sldId id="261" r:id="rId12"/>
+    <p:sldId id="271" r:id="rId22"/>
     <p:sldId id="262" r:id="rId13"/>
     <p:sldId id="263" r:id="rId14"/>
     <p:sldId id="264" r:id="rId15"/>
     <p:sldId id="265" r:id="rId16"/>
+    <p:sldId id="272" r:id="rId23"/>
+    <p:sldId id="273" r:id="rId24"/>
     <p:sldId id="266" r:id="rId17"/>
     <p:sldId id="267" r:id="rId18"/>
+    <p:sldId id="274" r:id="rId25"/>
+    <p:sldId id="275" r:id="rId26"/>
     <p:sldId id="268" r:id="rId19"/>
     <p:sldId id="269" r:id="rId20"/>
   </p:sldIdLst>
@@ -3260,7 +3266,7 @@
               </a:defRPr>
             </a:pPr>
             <a:r>
-              <a:t>Prototipo de Telemetría y Supervisión Continua de Pagos Interoperables (APF1)</a:t>
+              <a:t>Prototipo de Telemetría y Supervisión Continua de Pagos Interoperables (APF2)</a:t>
             </a:r>
           </a:p>
         </p:txBody>
@@ -3347,7 +3353,7 @@
               </a:defRPr>
             </a:pPr>
             <a:r>
-              <a:t>   Código: U23243651  |  Líder Técnico</a:t>
+              <a:t>   Código: U23243651  |  Líder Técnico &amp; Arquitecto</a:t>
             </a:r>
           </a:p>
           <a:p>
@@ -3376,7 +3382,7 @@
               </a:defRPr>
             </a:pPr>
             <a:r>
-              <a:t>   Código: U21216410  |  Desarrollo / Requisitos</a:t>
+              <a:t>   Código: U21216410  |  Ingeniero de Requisitos</a:t>
             </a:r>
           </a:p>
           <a:p>
@@ -3405,36 +3411,7 @@
               </a:defRPr>
             </a:pPr>
             <a:r>
-              <a:t>   Código: U21221688  |  Desarrollo / QA</a:t>
-            </a:r>
-          </a:p>
-          <a:p>
-            <a:pPr>
-              <a:defRPr sz="1300" b="1">
-                <a:solidFill>
-                  <a:srgbClr val="0F172A"/>
-                </a:solidFill>
-                <a:latin typeface="Calibri"/>
-              </a:defRPr>
-            </a:pPr>
-            <a:r>
-              <a:t>• Luis Tapia Ignacio</a:t>
-            </a:r>
-          </a:p>
-          <a:p>
-            <a:pPr>
-              <a:spcAft>
-                <a:spcPts val="400"/>
-              </a:spcAft>
-              <a:defRPr sz="1150">
-                <a:solidFill>
-                  <a:srgbClr val="334155"/>
-                </a:solidFill>
-                <a:latin typeface="Calibri"/>
-              </a:defRPr>
-            </a:pPr>
-            <a:r>
-              <a:t>   Código: U25239074  |  Desarrollo / Datos</a:t>
+              <a:t>   Código: U21221688  |  Ingeniero de Software &amp; QA</a:t>
             </a:r>
           </a:p>
         </p:txBody>
@@ -3601,74 +3578,36 @@
           <a:bodyPr rtlCol="0" anchor="t" wrap="square" tIns="182880" lIns="182880"/>
           <a:lstStyle/>
           <a:p>
-            <a:pPr algn="ctr">
-              <a:spcAft>
-                <a:spcPts val="400"/>
-              </a:spcAft>
-              <a:defRPr sz="1400" b="1">
-                <a:solidFill>
-                  <a:srgbClr val="059669"/>
-                </a:solidFill>
-                <a:latin typeface="Calibri"/>
-              </a:defRPr>
-            </a:pPr>
             <a:r>
               <a:t>🎯 META DE EVALUACIÓN</a:t>
             </a:r>
           </a:p>
           <a:p>
-            <a:pPr algn="ctr">
-              <a:spcAft>
-                <a:spcPts val="300"/>
-              </a:spcAft>
-              <a:defRPr sz="5000" b="1">
-                <a:solidFill>
-                  <a:srgbClr val="059669"/>
-                </a:solidFill>
-                <a:latin typeface="Calibri"/>
-              </a:defRPr>
-            </a:pPr>
             <a:r>
               <a:t>20 / 20</a:t>
             </a:r>
           </a:p>
           <a:p>
-            <a:pPr algn="ctr">
-              <a:spcAft>
-                <a:spcPts val="1000"/>
-              </a:spcAft>
-              <a:defRPr sz="1300" b="1">
-                <a:solidFill>
-                  <a:srgbClr val="0B1F3A"/>
-                </a:solidFill>
-                <a:latin typeface="Calibri"/>
-              </a:defRPr>
-            </a:pPr>
             <a:r>
               <a:t>Calificación Máxima Oficial</a:t>
             </a:r>
           </a:p>
           <a:p>
-            <a:pPr>
-              <a:defRPr sz="1200" b="1">
-                <a:solidFill>
-                  <a:srgbClr val="334155"/>
-                </a:solidFill>
-                <a:latin typeface="Calibri"/>
-              </a:defRPr>
-            </a:pPr>
             <a:r>
               <a:t>✓ Cobertura 100% Rúbrica</a:t>
             </a:r>
-            <a:br/>
+          </a:p>
+          <a:p>
             <a:r>
               <a:t>✓ &gt;50% Java 17 + Spring Boot 3</a:t>
             </a:r>
-            <a:br/>
-            <a:r>
-              <a:t>✓ 5 Pantallas Funcionales</a:t>
-            </a:r>
-            <a:br/>
+          </a:p>
+          <a:p>
+            <a:r>
+              <a:t>✓ 15 Mockups de Pantalla</a:t>
+            </a:r>
+          </a:p>
+          <a:p>
             <a:r>
               <a:t>✓ PostgreSQL 15 Inmutable</a:t>
             </a:r>
@@ -5888,11 +5827,376 @@
           <a:bodyPr rtlCol="0" anchor="t" wrap="square" tIns="365760"/>
           <a:lstStyle/>
           <a:p>
+            <a:r>
+              <a:t>UNIVERSIDAD TECNOLÓGICA DEL PERÚ</a:t>
+            </a:r>
+          </a:p>
+          <a:p>
+            <a:r>
+              <a:t>¡MUCHAS GRACIAS POR SU ATENCIÓN!</a:t>
+            </a:r>
+          </a:p>
+          <a:p/>
+          <a:p>
+            <a:r>
+              <a:t>SIGIR - BCRP: Sistema de Gestión de Incidentes Regulatorios para Pagos Digitales</a:t>
+            </a:r>
+          </a:p>
+          <a:p>
+            <a:r>
+              <a:t>Prototipo de Telemetría, Supervisión Continua de Pagos Interoperables y Reportes Normativos (APF2)</a:t>
+            </a:r>
+          </a:p>
+          <a:p/>
+          <a:p>
+            <a:r>
+              <a:t>Quedamos a su entera disposición, profesor Ing. Yony Zamata Condori,</a:t>
+            </a:r>
+          </a:p>
+          <a:p>
+            <a:r>
+              <a:t>para responder a satisfacción todas las preguntas técnicas del jurado.</a:t>
+            </a:r>
+          </a:p>
+          <a:p/>
+          <a:p>
+            <a:r>
+              <a:t>Frank Vargas (Líder Técnico &amp; Arquitecto)  •  Fernando Romero (Requisitos)  •  Joel Olaya (QA &amp; Software)</a:t>
+            </a:r>
+          </a:p>
+          <a:p>
+            <a:r>
+              <a:t>Sección 57524 • 2026</a:t>
+            </a:r>
+          </a:p>
+        </p:txBody>
+      </p:sp>
+    </p:spTree>
+  </p:cSld>
+  <p:clrMapOvr>
+    <a:masterClrMapping/>
+  </p:clrMapOvr>
+</p:sld>
+</file>
+
+<file path=ppt/slides/slide15.xml><?xml version="1.0" encoding="utf-8"?>
+<p:sld xmlns:a="http://schemas.openxmlformats.org/drawingml/2006/main" xmlns:p="http://schemas.openxmlformats.org/presentationml/2006/main" xmlns:r="http://schemas.openxmlformats.org/officeDocument/2006/relationships">
+  <p:cSld>
+    <p:spTree>
+      <p:nvGrpSpPr>
+        <p:cNvPr id="1" name=""/>
+        <p:cNvGrpSpPr/>
+        <p:nvPr/>
+      </p:nvGrpSpPr>
+      <p:grpSpPr/>
+      <p:sp>
+        <p:nvSpPr>
+          <p:cNvPr id="2" name="Rectangle 1"/>
+          <p:cNvSpPr/>
+          <p:nvPr/>
+        </p:nvSpPr>
+        <p:spPr>
+          <a:xfrm>
+            <a:off x="0" y="0"/>
+            <a:ext cx="12191695" cy="6858000"/>
+          </a:xfrm>
+          <a:prstGeom prst="rect">
+            <a:avLst/>
+          </a:prstGeom>
+          <a:solidFill>
+            <a:srgbClr val="F8FAFC"/>
+          </a:solidFill>
+          <a:ln>
+            <a:noFill/>
+          </a:ln>
+        </p:spPr>
+        <p:style>
+          <a:lnRef idx="1">
+            <a:schemeClr val="accent1"/>
+          </a:lnRef>
+          <a:fillRef idx="3">
+            <a:schemeClr val="accent1"/>
+          </a:fillRef>
+          <a:effectRef idx="2">
+            <a:schemeClr val="accent1"/>
+          </a:effectRef>
+          <a:fontRef idx="minor">
+            <a:schemeClr val="lt1"/>
+          </a:fontRef>
+        </p:style>
+        <p:txBody>
+          <a:bodyPr rtlCol="0" anchor="ctr"/>
+          <a:lstStyle/>
+          <a:p>
+            <a:pPr algn="ctr"/>
+          </a:p>
+        </p:txBody>
+      </p:sp>
+      <p:sp>
+        <p:nvSpPr>
+          <p:cNvPr id="3" name="Rounded Rectangle 2"/>
+          <p:cNvSpPr/>
+          <p:nvPr/>
+        </p:nvSpPr>
+        <p:spPr>
+          <a:xfrm>
+            <a:off x="731520" y="320040"/>
+            <a:ext cx="10728655" cy="987552"/>
+          </a:xfrm>
+          <a:prstGeom prst="roundRect">
+            <a:avLst/>
+          </a:prstGeom>
+          <a:solidFill>
+            <a:srgbClr val="FFFFFF"/>
+          </a:solidFill>
+          <a:ln w="12700">
+            <a:solidFill>
+              <a:srgbClr val="E2E8F0"/>
+            </a:solidFill>
+          </a:ln>
+        </p:spPr>
+        <p:style>
+          <a:lnRef idx="1">
+            <a:schemeClr val="accent1"/>
+          </a:lnRef>
+          <a:fillRef idx="3">
+            <a:schemeClr val="accent1"/>
+          </a:fillRef>
+          <a:effectRef idx="2">
+            <a:schemeClr val="accent1"/>
+          </a:effectRef>
+          <a:fontRef idx="minor">
+            <a:schemeClr val="lt1"/>
+          </a:fontRef>
+        </p:style>
+        <p:txBody>
+          <a:bodyPr rtlCol="0" anchor="ctr"/>
+          <a:lstStyle/>
+          <a:p>
+            <a:pPr algn="ctr"/>
+          </a:p>
+        </p:txBody>
+      </p:sp>
+      <p:sp>
+        <p:nvSpPr>
+          <p:cNvPr id="4" name="Rounded Rectangle 3"/>
+          <p:cNvSpPr/>
+          <p:nvPr/>
+        </p:nvSpPr>
+        <p:spPr>
+          <a:xfrm>
+            <a:off x="731520" y="320040"/>
+            <a:ext cx="128016" cy="987552"/>
+          </a:xfrm>
+          <a:prstGeom prst="roundRect">
+            <a:avLst/>
+          </a:prstGeom>
+          <a:solidFill>
+            <a:srgbClr val="0284C7"/>
+          </a:solidFill>
+          <a:ln>
+            <a:noFill/>
+          </a:ln>
+        </p:spPr>
+        <p:style>
+          <a:lnRef idx="1">
+            <a:schemeClr val="accent1"/>
+          </a:lnRef>
+          <a:fillRef idx="3">
+            <a:schemeClr val="accent1"/>
+          </a:fillRef>
+          <a:effectRef idx="2">
+            <a:schemeClr val="accent1"/>
+          </a:effectRef>
+          <a:fontRef idx="minor">
+            <a:schemeClr val="lt1"/>
+          </a:fontRef>
+        </p:style>
+        <p:txBody>
+          <a:bodyPr rtlCol="0" anchor="ctr"/>
+          <a:lstStyle/>
+          <a:p>
+            <a:pPr algn="ctr"/>
+          </a:p>
+        </p:txBody>
+      </p:sp>
+      <p:sp>
+        <p:nvSpPr>
+          <p:cNvPr id="5" name="TextBox 4"/>
+          <p:cNvSpPr txBox="1"/>
+          <p:nvPr/>
+        </p:nvSpPr>
+        <p:spPr>
+          <a:xfrm>
+            <a:off x="1051560" y="347472"/>
+            <a:ext cx="10149840" cy="914400"/>
+          </a:xfrm>
+          <a:prstGeom prst="rect">
+            <a:avLst/>
+          </a:prstGeom>
+          <a:noFill/>
+        </p:spPr>
+        <p:txBody>
+          <a:bodyPr wrap="square" lIns="0" tIns="0" rIns="0" bIns="0">
+            <a:spAutoFit/>
+          </a:bodyPr>
+          <a:lstStyle/>
+          <a:p>
+            <a:pPr>
+              <a:defRPr sz="1100" b="1">
+                <a:solidFill>
+                  <a:srgbClr val="0284C7"/>
+                </a:solidFill>
+                <a:latin typeface="Calibri"/>
+              </a:defRPr>
+            </a:pPr>
+            <a:r>
+              <a:t>CRITERIO 2 DE RÚBRICA • 2.0 PUNTOS</a:t>
+            </a:r>
+          </a:p>
+          <a:p>
+            <a:pPr>
+              <a:defRPr sz="1600" b="1">
+                <a:solidFill>
+                  <a:srgbClr val="0F172A"/>
+                </a:solidFill>
+                <a:latin typeface="Calibri"/>
+              </a:defRPr>
+            </a:pPr>
+            <a:r>
+              <a:t>Galería de 15 Mockups de Interfaces Diseñadas (5 por Alternativa TIC)</a:t>
+            </a:r>
+          </a:p>
+          <a:p>
+            <a:pPr>
+              <a:defRPr sz="1050">
+                <a:solidFill>
+                  <a:srgbClr val="64748B"/>
+                </a:solidFill>
+                <a:latin typeface="Calibri"/>
+              </a:defRPr>
+            </a:pPr>
+            <a:r>
+              <a:t>Cumplimiento estricto: Cada una de las 3 alternativas cuenta con &gt;= 50% Java y 5 pantallas completas</a:t>
+            </a:r>
+          </a:p>
+        </p:txBody>
+      </p:sp>
+      <p:sp>
+        <p:nvSpPr>
+          <p:cNvPr id="6" name="Rounded Rectangle 5"/>
+          <p:cNvSpPr/>
+          <p:nvPr/>
+        </p:nvSpPr>
+        <p:spPr>
+          <a:xfrm>
+            <a:off x="731520" y="1389888"/>
+            <a:ext cx="10728655" cy="3977639"/>
+          </a:xfrm>
+          <a:prstGeom prst="roundRect">
+            <a:avLst/>
+          </a:prstGeom>
+          <a:solidFill>
+            <a:srgbClr val="0F172A"/>
+          </a:solidFill>
+          <a:ln w="12700">
+            <a:solidFill>
+              <a:srgbClr val="1E293B"/>
+            </a:solidFill>
+          </a:ln>
+        </p:spPr>
+        <p:style>
+          <a:lnRef idx="1">
+            <a:schemeClr val="accent1"/>
+          </a:lnRef>
+          <a:fillRef idx="3">
+            <a:schemeClr val="accent1"/>
+          </a:fillRef>
+          <a:effectRef idx="2">
+            <a:schemeClr val="accent1"/>
+          </a:effectRef>
+          <a:fontRef idx="minor">
+            <a:schemeClr val="lt1"/>
+          </a:fontRef>
+        </p:style>
+        <p:txBody>
+          <a:bodyPr rtlCol="0" anchor="ctr"/>
+          <a:lstStyle/>
+          <a:p>
+            <a:pPr algn="ctr"/>
+          </a:p>
+        </p:txBody>
+      </p:sp>
+      <p:pic>
+        <p:nvPicPr>
+          <p:cNvPr id="7" name="Picture 6" descr="figura9_mockups_alt2_clean_api.png"/>
+          <p:cNvPicPr>
+            <a:picLocks noChangeAspect="1"/>
+          </p:cNvPicPr>
+          <p:nvPr/>
+        </p:nvPicPr>
+        <p:blipFill>
+          <a:blip r:embed="rId2"/>
+          <a:stretch>
+            <a:fillRect/>
+          </a:stretch>
+        </p:blipFill>
+        <p:spPr>
+          <a:xfrm>
+            <a:off x="883767" y="2105146"/>
+            <a:ext cx="10424160" cy="2547122"/>
+          </a:xfrm>
+          <a:prstGeom prst="rect">
+            <a:avLst/>
+          </a:prstGeom>
+        </p:spPr>
+      </p:pic>
+      <p:sp>
+        <p:nvSpPr>
+          <p:cNvPr id="8" name="Rounded Rectangle 7"/>
+          <p:cNvSpPr/>
+          <p:nvPr/>
+        </p:nvSpPr>
+        <p:spPr>
+          <a:xfrm>
+            <a:off x="731520" y="5468112"/>
+            <a:ext cx="3447288" cy="1115568"/>
+          </a:xfrm>
+          <a:prstGeom prst="roundRect">
+            <a:avLst/>
+          </a:prstGeom>
+          <a:solidFill>
+            <a:srgbClr val="FFFFFF"/>
+          </a:solidFill>
+          <a:ln w="12700">
+            <a:solidFill>
+              <a:srgbClr val="E2E8F0"/>
+            </a:solidFill>
+          </a:ln>
+        </p:spPr>
+        <p:style>
+          <a:lnRef idx="1">
+            <a:schemeClr val="accent1"/>
+          </a:lnRef>
+          <a:fillRef idx="3">
+            <a:schemeClr val="accent1"/>
+          </a:fillRef>
+          <a:effectRef idx="2">
+            <a:schemeClr val="accent1"/>
+          </a:effectRef>
+          <a:fontRef idx="minor">
+            <a:schemeClr val="lt1"/>
+          </a:fontRef>
+        </p:style>
+        <p:txBody>
+          <a:bodyPr rtlCol="0" anchor="ctr" wrap="square" lIns="109728" rIns="109728" tIns="73152" bIns="36576"/>
+          <a:lstStyle/>
+          <a:p>
             <a:pPr algn="ctr">
               <a:spcAft>
-                <a:spcPts val="1400"/>
-              </a:spcAft>
-              <a:defRPr sz="1400" b="1">
+                <a:spcPts val="200"/>
+              </a:spcAft>
+              <a:defRPr sz="1050" b="1">
                 <a:solidFill>
                   <a:srgbClr val="0B1F3A"/>
                 </a:solidFill>
@@ -5900,31 +6204,2076 @@
               </a:defRPr>
             </a:pPr>
             <a:r>
-              <a:t>UNIVERSIDAD TECNOLÓGICA DEL PERÚ</a:t>
-            </a:r>
-          </a:p>
+              <a:t>ALTERNATIVA 1 (MONOLITO)</a:t>
+            </a:r>
+          </a:p>
+          <a:p>
+            <a:pPr algn="left">
+              <a:defRPr sz="900">
+                <a:solidFill>
+                  <a:srgbClr val="334155"/>
+                </a:solidFill>
+                <a:latin typeface="Calibri"/>
+              </a:defRPr>
+            </a:pPr>
+            <a:r>
+              <a:t>5 Pantallas SSR con Thymeleaf / HTMX: Login AD, Tablero Entidades, Registro Ticket, Bitácora y Reporte SFT.</a:t>
+            </a:r>
+          </a:p>
+        </p:txBody>
+      </p:sp>
+      <p:sp>
+        <p:nvSpPr>
+          <p:cNvPr id="9" name="Rounded Rectangle 8"/>
+          <p:cNvSpPr/>
+          <p:nvPr/>
+        </p:nvSpPr>
+        <p:spPr>
+          <a:xfrm>
+            <a:off x="4370832" y="5468112"/>
+            <a:ext cx="3447288" cy="1115568"/>
+          </a:xfrm>
+          <a:prstGeom prst="roundRect">
+            <a:avLst/>
+          </a:prstGeom>
+          <a:solidFill>
+            <a:srgbClr val="FFFFFF"/>
+          </a:solidFill>
+          <a:ln w="12700">
+            <a:solidFill>
+              <a:srgbClr val="E2E8F0"/>
+            </a:solidFill>
+          </a:ln>
+        </p:spPr>
+        <p:style>
+          <a:lnRef idx="1">
+            <a:schemeClr val="accent1"/>
+          </a:lnRef>
+          <a:fillRef idx="3">
+            <a:schemeClr val="accent1"/>
+          </a:fillRef>
+          <a:effectRef idx="2">
+            <a:schemeClr val="accent1"/>
+          </a:effectRef>
+          <a:fontRef idx="minor">
+            <a:schemeClr val="lt1"/>
+          </a:fontRef>
+        </p:style>
+        <p:txBody>
+          <a:bodyPr rtlCol="0" anchor="ctr" wrap="square" lIns="109728" rIns="109728" tIns="73152" bIns="36576"/>
+          <a:lstStyle/>
           <a:p>
             <a:pPr algn="ctr">
               <a:spcAft>
-                <a:spcPts val="1200"/>
-              </a:spcAft>
-              <a:defRPr sz="3800" b="1">
-                <a:solidFill>
-                  <a:srgbClr val="B45309"/>
-                </a:solidFill>
-                <a:latin typeface="Calibri"/>
-              </a:defRPr>
-            </a:pPr>
-            <a:r>
-              <a:t>¡MUCHAS GRACIAS POR SU ATENCIÓN!</a:t>
-            </a:r>
-          </a:p>
+                <a:spcPts val="200"/>
+              </a:spcAft>
+              <a:defRPr sz="1050" b="1">
+                <a:solidFill>
+                  <a:srgbClr val="0B1F3A"/>
+                </a:solidFill>
+                <a:latin typeface="Calibri"/>
+              </a:defRPr>
+            </a:pPr>
+            <a:r>
+              <a:t>ALTERNATIVA 2 (GANADORA - 4.97)</a:t>
+            </a:r>
+          </a:p>
+          <a:p>
+            <a:pPr algn="left">
+              <a:defRPr sz="900">
+                <a:solidFill>
+                  <a:srgbClr val="334155"/>
+                </a:solidFill>
+                <a:latin typeface="Calibri"/>
+              </a:defRPr>
+            </a:pPr>
+            <a:r>
+              <a:t>5 Pantallas Reactivas NOC: Dashboard en Vivo, Simulador 503, Registro RN-01, Auditoría Append-Only y SFT SHA-256.</a:t>
+            </a:r>
+          </a:p>
+        </p:txBody>
+      </p:sp>
+      <p:sp>
+        <p:nvSpPr>
+          <p:cNvPr id="10" name="Rounded Rectangle 9"/>
+          <p:cNvSpPr/>
+          <p:nvPr/>
+        </p:nvSpPr>
+        <p:spPr>
+          <a:xfrm>
+            <a:off x="8010144" y="5468112"/>
+            <a:ext cx="3447288" cy="1115568"/>
+          </a:xfrm>
+          <a:prstGeom prst="roundRect">
+            <a:avLst/>
+          </a:prstGeom>
+          <a:solidFill>
+            <a:srgbClr val="FFFFFF"/>
+          </a:solidFill>
+          <a:ln w="12700">
+            <a:solidFill>
+              <a:srgbClr val="E2E8F0"/>
+            </a:solidFill>
+          </a:ln>
+        </p:spPr>
+        <p:style>
+          <a:lnRef idx="1">
+            <a:schemeClr val="accent1"/>
+          </a:lnRef>
+          <a:fillRef idx="3">
+            <a:schemeClr val="accent1"/>
+          </a:fillRef>
+          <a:effectRef idx="2">
+            <a:schemeClr val="accent1"/>
+          </a:effectRef>
+          <a:fontRef idx="minor">
+            <a:schemeClr val="lt1"/>
+          </a:fontRef>
+        </p:style>
+        <p:txBody>
+          <a:bodyPr rtlCol="0" anchor="ctr" wrap="square" lIns="109728" rIns="109728" tIns="73152" bIns="36576"/>
+          <a:lstStyle/>
           <a:p>
             <a:pPr algn="ctr">
               <a:spcAft>
+                <a:spcPts val="200"/>
+              </a:spcAft>
+              <a:defRPr sz="1050" b="1">
+                <a:solidFill>
+                  <a:srgbClr val="0B1F3A"/>
+                </a:solidFill>
+                <a:latin typeface="Calibri"/>
+              </a:defRPr>
+            </a:pPr>
+            <a:r>
+              <a:t>ALTERNATIVA 3 (MICROSERVICIOS)</a:t>
+            </a:r>
+          </a:p>
+          <a:p>
+            <a:pPr algn="left">
+              <a:defRPr sz="900">
+                <a:solidFill>
+                  <a:srgbClr val="334155"/>
+                </a:solidFill>
+                <a:latin typeface="Calibri"/>
+              </a:defRPr>
+            </a:pPr>
+            <a:r>
+              <a:t>5 Pantallas Distribuidas: Gateway SSO OAuth2, Monitor Tópicos Kafka, Consola DLQ, Trazas y Panel SFTP.</a:t>
+            </a:r>
+          </a:p>
+        </p:txBody>
+      </p:sp>
+    </p:spTree>
+  </p:cSld>
+  <p:clrMapOvr>
+    <a:masterClrMapping/>
+  </p:clrMapOvr>
+</p:sld>
+</file>
+
+<file path=ppt/slides/slide16.xml><?xml version="1.0" encoding="utf-8"?>
+<p:sld xmlns:a="http://schemas.openxmlformats.org/drawingml/2006/main" xmlns:p="http://schemas.openxmlformats.org/presentationml/2006/main" xmlns:r="http://schemas.openxmlformats.org/officeDocument/2006/relationships">
+  <p:cSld>
+    <p:spTree>
+      <p:nvGrpSpPr>
+        <p:cNvPr id="1" name=""/>
+        <p:cNvGrpSpPr/>
+        <p:nvPr/>
+      </p:nvGrpSpPr>
+      <p:grpSpPr/>
+      <p:sp>
+        <p:nvSpPr>
+          <p:cNvPr id="2" name="Rectangle 1"/>
+          <p:cNvSpPr/>
+          <p:nvPr/>
+        </p:nvSpPr>
+        <p:spPr>
+          <a:xfrm>
+            <a:off x="0" y="0"/>
+            <a:ext cx="12191695" cy="6858000"/>
+          </a:xfrm>
+          <a:prstGeom prst="rect">
+            <a:avLst/>
+          </a:prstGeom>
+          <a:solidFill>
+            <a:srgbClr val="F8FAFC"/>
+          </a:solidFill>
+          <a:ln>
+            <a:noFill/>
+          </a:ln>
+        </p:spPr>
+        <p:style>
+          <a:lnRef idx="1">
+            <a:schemeClr val="accent1"/>
+          </a:lnRef>
+          <a:fillRef idx="3">
+            <a:schemeClr val="accent1"/>
+          </a:fillRef>
+          <a:effectRef idx="2">
+            <a:schemeClr val="accent1"/>
+          </a:effectRef>
+          <a:fontRef idx="minor">
+            <a:schemeClr val="lt1"/>
+          </a:fontRef>
+        </p:style>
+        <p:txBody>
+          <a:bodyPr rtlCol="0" anchor="ctr"/>
+          <a:lstStyle/>
+          <a:p>
+            <a:pPr algn="ctr"/>
+          </a:p>
+        </p:txBody>
+      </p:sp>
+      <p:sp>
+        <p:nvSpPr>
+          <p:cNvPr id="3" name="Rounded Rectangle 2"/>
+          <p:cNvSpPr/>
+          <p:nvPr/>
+        </p:nvSpPr>
+        <p:spPr>
+          <a:xfrm>
+            <a:off x="731520" y="320040"/>
+            <a:ext cx="10728655" cy="987552"/>
+          </a:xfrm>
+          <a:prstGeom prst="roundRect">
+            <a:avLst/>
+          </a:prstGeom>
+          <a:solidFill>
+            <a:srgbClr val="FFFFFF"/>
+          </a:solidFill>
+          <a:ln w="12700">
+            <a:solidFill>
+              <a:srgbClr val="E2E8F0"/>
+            </a:solidFill>
+          </a:ln>
+        </p:spPr>
+        <p:style>
+          <a:lnRef idx="1">
+            <a:schemeClr val="accent1"/>
+          </a:lnRef>
+          <a:fillRef idx="3">
+            <a:schemeClr val="accent1"/>
+          </a:fillRef>
+          <a:effectRef idx="2">
+            <a:schemeClr val="accent1"/>
+          </a:effectRef>
+          <a:fontRef idx="minor">
+            <a:schemeClr val="lt1"/>
+          </a:fontRef>
+        </p:style>
+        <p:txBody>
+          <a:bodyPr rtlCol="0" anchor="ctr"/>
+          <a:lstStyle/>
+          <a:p>
+            <a:pPr algn="ctr"/>
+          </a:p>
+        </p:txBody>
+      </p:sp>
+      <p:sp>
+        <p:nvSpPr>
+          <p:cNvPr id="4" name="Rounded Rectangle 3"/>
+          <p:cNvSpPr/>
+          <p:nvPr/>
+        </p:nvSpPr>
+        <p:spPr>
+          <a:xfrm>
+            <a:off x="731520" y="320040"/>
+            <a:ext cx="128016" cy="987552"/>
+          </a:xfrm>
+          <a:prstGeom prst="roundRect">
+            <a:avLst/>
+          </a:prstGeom>
+          <a:solidFill>
+            <a:srgbClr val="0284C7"/>
+          </a:solidFill>
+          <a:ln>
+            <a:noFill/>
+          </a:ln>
+        </p:spPr>
+        <p:style>
+          <a:lnRef idx="1">
+            <a:schemeClr val="accent1"/>
+          </a:lnRef>
+          <a:fillRef idx="3">
+            <a:schemeClr val="accent1"/>
+          </a:fillRef>
+          <a:effectRef idx="2">
+            <a:schemeClr val="accent1"/>
+          </a:effectRef>
+          <a:fontRef idx="minor">
+            <a:schemeClr val="lt1"/>
+          </a:fontRef>
+        </p:style>
+        <p:txBody>
+          <a:bodyPr rtlCol="0" anchor="ctr"/>
+          <a:lstStyle/>
+          <a:p>
+            <a:pPr algn="ctr"/>
+          </a:p>
+        </p:txBody>
+      </p:sp>
+      <p:sp>
+        <p:nvSpPr>
+          <p:cNvPr id="5" name="TextBox 4"/>
+          <p:cNvSpPr txBox="1"/>
+          <p:nvPr/>
+        </p:nvSpPr>
+        <p:spPr>
+          <a:xfrm>
+            <a:off x="1051560" y="347472"/>
+            <a:ext cx="10149840" cy="914400"/>
+          </a:xfrm>
+          <a:prstGeom prst="rect">
+            <a:avLst/>
+          </a:prstGeom>
+          <a:noFill/>
+        </p:spPr>
+        <p:txBody>
+          <a:bodyPr wrap="square" lIns="0" tIns="0" rIns="0" bIns="0">
+            <a:spAutoFit/>
+          </a:bodyPr>
+          <a:lstStyle/>
+          <a:p>
+            <a:pPr>
+              <a:defRPr sz="1100" b="1">
+                <a:solidFill>
+                  <a:srgbClr val="0284C7"/>
+                </a:solidFill>
+                <a:latin typeface="Calibri"/>
+              </a:defRPr>
+            </a:pPr>
+            <a:r>
+              <a:t>CRITERIO 3 DE RÚBRICA • 3.0 PUNTOS</a:t>
+            </a:r>
+          </a:p>
+          <a:p>
+            <a:pPr>
+              <a:defRPr sz="1600" b="1">
+                <a:solidFill>
+                  <a:srgbClr val="0F172A"/>
+                </a:solidFill>
+                <a:latin typeface="Calibri"/>
+              </a:defRPr>
+            </a:pPr>
+            <a:r>
+              <a:t>Cronograma Visual Gantt de Avance de Ingeniería — Hito APF2 (Semana 8)</a:t>
+            </a:r>
+          </a:p>
+          <a:p>
+            <a:pPr>
+              <a:defRPr sz="1050">
+                <a:solidFill>
+                  <a:srgbClr val="64748B"/>
+                </a:solidFill>
+                <a:latin typeface="Calibri"/>
+              </a:defRPr>
+            </a:pPr>
+            <a:r>
+              <a:t>Seguimiento temporal estricto del Product Backlog, Sprints 1 a 4 completados y ruta crítica final</a:t>
+            </a:r>
+          </a:p>
+        </p:txBody>
+      </p:sp>
+      <p:sp>
+        <p:nvSpPr>
+          <p:cNvPr id="6" name="Rounded Rectangle 5"/>
+          <p:cNvSpPr/>
+          <p:nvPr/>
+        </p:nvSpPr>
+        <p:spPr>
+          <a:xfrm>
+            <a:off x="731520" y="1389888"/>
+            <a:ext cx="10728655" cy="3977639"/>
+          </a:xfrm>
+          <a:prstGeom prst="roundRect">
+            <a:avLst/>
+          </a:prstGeom>
+          <a:solidFill>
+            <a:srgbClr val="0F172A"/>
+          </a:solidFill>
+          <a:ln w="12700">
+            <a:solidFill>
+              <a:srgbClr val="1E293B"/>
+            </a:solidFill>
+          </a:ln>
+        </p:spPr>
+        <p:style>
+          <a:lnRef idx="1">
+            <a:schemeClr val="accent1"/>
+          </a:lnRef>
+          <a:fillRef idx="3">
+            <a:schemeClr val="accent1"/>
+          </a:fillRef>
+          <a:effectRef idx="2">
+            <a:schemeClr val="accent1"/>
+          </a:effectRef>
+          <a:fontRef idx="minor">
+            <a:schemeClr val="lt1"/>
+          </a:fontRef>
+        </p:style>
+        <p:txBody>
+          <a:bodyPr rtlCol="0" anchor="ctr"/>
+          <a:lstStyle/>
+          <a:p>
+            <a:pPr algn="ctr"/>
+          </a:p>
+        </p:txBody>
+      </p:sp>
+      <p:pic>
+        <p:nvPicPr>
+          <p:cNvPr id="7" name="Picture 6" descr="figura13_gantt_avance_apf2.png"/>
+          <p:cNvPicPr>
+            <a:picLocks noChangeAspect="1"/>
+          </p:cNvPicPr>
+          <p:nvPr/>
+        </p:nvPicPr>
+        <p:blipFill>
+          <a:blip r:embed="rId2"/>
+          <a:stretch>
+            <a:fillRect/>
+          </a:stretch>
+        </p:blipFill>
+        <p:spPr>
+          <a:xfrm>
+            <a:off x="2267317" y="1481327"/>
+            <a:ext cx="7657060" cy="3794760"/>
+          </a:xfrm>
+          <a:prstGeom prst="rect">
+            <a:avLst/>
+          </a:prstGeom>
+        </p:spPr>
+      </p:pic>
+      <p:sp>
+        <p:nvSpPr>
+          <p:cNvPr id="8" name="Rounded Rectangle 7"/>
+          <p:cNvSpPr/>
+          <p:nvPr/>
+        </p:nvSpPr>
+        <p:spPr>
+          <a:xfrm>
+            <a:off x="731520" y="5468112"/>
+            <a:ext cx="3447288" cy="1115568"/>
+          </a:xfrm>
+          <a:prstGeom prst="roundRect">
+            <a:avLst/>
+          </a:prstGeom>
+          <a:solidFill>
+            <a:srgbClr val="FFFFFF"/>
+          </a:solidFill>
+          <a:ln w="12700">
+            <a:solidFill>
+              <a:srgbClr val="E2E8F0"/>
+            </a:solidFill>
+          </a:ln>
+        </p:spPr>
+        <p:style>
+          <a:lnRef idx="1">
+            <a:schemeClr val="accent1"/>
+          </a:lnRef>
+          <a:fillRef idx="3">
+            <a:schemeClr val="accent1"/>
+          </a:fillRef>
+          <a:effectRef idx="2">
+            <a:schemeClr val="accent1"/>
+          </a:effectRef>
+          <a:fontRef idx="minor">
+            <a:schemeClr val="lt1"/>
+          </a:fontRef>
+        </p:style>
+        <p:txBody>
+          <a:bodyPr rtlCol="0" anchor="ctr" wrap="square" lIns="109728" rIns="109728" tIns="73152" bIns="36576"/>
+          <a:lstStyle/>
+          <a:p>
+            <a:pPr algn="ctr">
+              <a:spcAft>
+                <a:spcPts val="200"/>
+              </a:spcAft>
+              <a:defRPr sz="1050" b="1">
+                <a:solidFill>
+                  <a:srgbClr val="0B1F3A"/>
+                </a:solidFill>
+                <a:latin typeface="Calibri"/>
+              </a:defRPr>
+            </a:pPr>
+            <a:r>
+              <a:t>SPRINTS 1 AL 4 (100% COMPLETOS)</a:t>
+            </a:r>
+          </a:p>
+          <a:p>
+            <a:pPr algn="left">
+              <a:defRPr sz="900">
+                <a:solidFill>
+                  <a:srgbClr val="334155"/>
+                </a:solidFill>
+                <a:latin typeface="Calibri"/>
+              </a:defRPr>
+            </a:pPr>
+            <a:r>
+              <a:t>Culminación de levantamiento normativo, especificación SRS IEEE 830, arquitectura hexagonal y persistencia inmutable.</a:t>
+            </a:r>
+          </a:p>
+        </p:txBody>
+      </p:sp>
+      <p:sp>
+        <p:nvSpPr>
+          <p:cNvPr id="9" name="Rounded Rectangle 8"/>
+          <p:cNvSpPr/>
+          <p:nvPr/>
+        </p:nvSpPr>
+        <p:spPr>
+          <a:xfrm>
+            <a:off x="4370832" y="5468112"/>
+            <a:ext cx="3447288" cy="1115568"/>
+          </a:xfrm>
+          <a:prstGeom prst="roundRect">
+            <a:avLst/>
+          </a:prstGeom>
+          <a:solidFill>
+            <a:srgbClr val="FFFFFF"/>
+          </a:solidFill>
+          <a:ln w="12700">
+            <a:solidFill>
+              <a:srgbClr val="E2E8F0"/>
+            </a:solidFill>
+          </a:ln>
+        </p:spPr>
+        <p:style>
+          <a:lnRef idx="1">
+            <a:schemeClr val="accent1"/>
+          </a:lnRef>
+          <a:fillRef idx="3">
+            <a:schemeClr val="accent1"/>
+          </a:fillRef>
+          <a:effectRef idx="2">
+            <a:schemeClr val="accent1"/>
+          </a:effectRef>
+          <a:fontRef idx="minor">
+            <a:schemeClr val="lt1"/>
+          </a:fontRef>
+        </p:style>
+        <p:txBody>
+          <a:bodyPr rtlCol="0" anchor="ctr" wrap="square" lIns="109728" rIns="109728" tIns="73152" bIns="36576"/>
+          <a:lstStyle/>
+          <a:p>
+            <a:pPr algn="ctr">
+              <a:spcAft>
+                <a:spcPts val="200"/>
+              </a:spcAft>
+              <a:defRPr sz="1050" b="1">
+                <a:solidFill>
+                  <a:srgbClr val="0B1F3A"/>
+                </a:solidFill>
+                <a:latin typeface="Calibri"/>
+              </a:defRPr>
+            </a:pPr>
+            <a:r>
+              <a:t>ENTREGA APF2 (SEMANA 8)</a:t>
+            </a:r>
+          </a:p>
+          <a:p>
+            <a:pPr algn="left">
+              <a:defRPr sz="900">
+                <a:solidFill>
+                  <a:srgbClr val="334155"/>
+                </a:solidFill>
+                <a:latin typeface="Calibri"/>
+              </a:defRPr>
+            </a:pPr>
+            <a:r>
+              <a:t>15 mockups de pantallas, DER relacional en PostgreSQL 15, clases de diseño Spring Boot 3 y módulo de reportes SFT.</a:t>
+            </a:r>
+          </a:p>
+        </p:txBody>
+      </p:sp>
+      <p:sp>
+        <p:nvSpPr>
+          <p:cNvPr id="10" name="Rounded Rectangle 9"/>
+          <p:cNvSpPr/>
+          <p:nvPr/>
+        </p:nvSpPr>
+        <p:spPr>
+          <a:xfrm>
+            <a:off x="8010144" y="5468112"/>
+            <a:ext cx="3447288" cy="1115568"/>
+          </a:xfrm>
+          <a:prstGeom prst="roundRect">
+            <a:avLst/>
+          </a:prstGeom>
+          <a:solidFill>
+            <a:srgbClr val="FFFFFF"/>
+          </a:solidFill>
+          <a:ln w="12700">
+            <a:solidFill>
+              <a:srgbClr val="E2E8F0"/>
+            </a:solidFill>
+          </a:ln>
+        </p:spPr>
+        <p:style>
+          <a:lnRef idx="1">
+            <a:schemeClr val="accent1"/>
+          </a:lnRef>
+          <a:fillRef idx="3">
+            <a:schemeClr val="accent1"/>
+          </a:fillRef>
+          <a:effectRef idx="2">
+            <a:schemeClr val="accent1"/>
+          </a:effectRef>
+          <a:fontRef idx="minor">
+            <a:schemeClr val="lt1"/>
+          </a:fontRef>
+        </p:style>
+        <p:txBody>
+          <a:bodyPr rtlCol="0" anchor="ctr" wrap="square" lIns="109728" rIns="109728" tIns="73152" bIns="36576"/>
+          <a:lstStyle/>
+          <a:p>
+            <a:pPr algn="ctr">
+              <a:spcAft>
+                <a:spcPts val="200"/>
+              </a:spcAft>
+              <a:defRPr sz="1050" b="1">
+                <a:solidFill>
+                  <a:srgbClr val="0B1F3A"/>
+                </a:solidFill>
+                <a:latin typeface="Calibri"/>
+              </a:defRPr>
+            </a:pPr>
+            <a:r>
+              <a:t>RUTA CRÍTICA (SEMANAS 9 A 14)</a:t>
+            </a:r>
+          </a:p>
+          <a:p>
+            <a:pPr algn="left">
+              <a:defRPr sz="900">
+                <a:solidFill>
+                  <a:srgbClr val="334155"/>
+                </a:solidFill>
+                <a:latin typeface="Calibri"/>
+              </a:defRPr>
+            </a:pPr>
+            <a:r>
+              <a:t>Despacho de alertas SMTP, portal bancario de descargo, analítica predictiva MTTR/MTTD y cierre Docker Compose.</a:t>
+            </a:r>
+          </a:p>
+        </p:txBody>
+      </p:sp>
+    </p:spTree>
+  </p:cSld>
+  <p:clrMapOvr>
+    <a:masterClrMapping/>
+  </p:clrMapOvr>
+</p:sld>
+</file>
+
+<file path=ppt/slides/slide17.xml><?xml version="1.0" encoding="utf-8"?>
+<p:sld xmlns:a="http://schemas.openxmlformats.org/drawingml/2006/main" xmlns:p="http://schemas.openxmlformats.org/presentationml/2006/main" xmlns:r="http://schemas.openxmlformats.org/officeDocument/2006/relationships">
+  <p:cSld>
+    <p:spTree>
+      <p:nvGrpSpPr>
+        <p:cNvPr id="1" name=""/>
+        <p:cNvGrpSpPr/>
+        <p:nvPr/>
+      </p:nvGrpSpPr>
+      <p:grpSpPr/>
+      <p:sp>
+        <p:nvSpPr>
+          <p:cNvPr id="2" name="Rectangle 1"/>
+          <p:cNvSpPr/>
+          <p:nvPr/>
+        </p:nvSpPr>
+        <p:spPr>
+          <a:xfrm>
+            <a:off x="0" y="0"/>
+            <a:ext cx="12191695" cy="6858000"/>
+          </a:xfrm>
+          <a:prstGeom prst="rect">
+            <a:avLst/>
+          </a:prstGeom>
+          <a:solidFill>
+            <a:srgbClr val="F8FAFC"/>
+          </a:solidFill>
+          <a:ln>
+            <a:noFill/>
+          </a:ln>
+        </p:spPr>
+        <p:style>
+          <a:lnRef idx="1">
+            <a:schemeClr val="accent1"/>
+          </a:lnRef>
+          <a:fillRef idx="3">
+            <a:schemeClr val="accent1"/>
+          </a:fillRef>
+          <a:effectRef idx="2">
+            <a:schemeClr val="accent1"/>
+          </a:effectRef>
+          <a:fontRef idx="minor">
+            <a:schemeClr val="lt1"/>
+          </a:fontRef>
+        </p:style>
+        <p:txBody>
+          <a:bodyPr rtlCol="0" anchor="ctr"/>
+          <a:lstStyle/>
+          <a:p>
+            <a:pPr algn="ctr"/>
+          </a:p>
+        </p:txBody>
+      </p:sp>
+      <p:sp>
+        <p:nvSpPr>
+          <p:cNvPr id="3" name="Rounded Rectangle 2"/>
+          <p:cNvSpPr/>
+          <p:nvPr/>
+        </p:nvSpPr>
+        <p:spPr>
+          <a:xfrm>
+            <a:off x="731520" y="320040"/>
+            <a:ext cx="10728655" cy="987552"/>
+          </a:xfrm>
+          <a:prstGeom prst="roundRect">
+            <a:avLst/>
+          </a:prstGeom>
+          <a:solidFill>
+            <a:srgbClr val="FFFFFF"/>
+          </a:solidFill>
+          <a:ln w="12700">
+            <a:solidFill>
+              <a:srgbClr val="E2E8F0"/>
+            </a:solidFill>
+          </a:ln>
+        </p:spPr>
+        <p:style>
+          <a:lnRef idx="1">
+            <a:schemeClr val="accent1"/>
+          </a:lnRef>
+          <a:fillRef idx="3">
+            <a:schemeClr val="accent1"/>
+          </a:fillRef>
+          <a:effectRef idx="2">
+            <a:schemeClr val="accent1"/>
+          </a:effectRef>
+          <a:fontRef idx="minor">
+            <a:schemeClr val="lt1"/>
+          </a:fontRef>
+        </p:style>
+        <p:txBody>
+          <a:bodyPr rtlCol="0" anchor="ctr"/>
+          <a:lstStyle/>
+          <a:p>
+            <a:pPr algn="ctr"/>
+          </a:p>
+        </p:txBody>
+      </p:sp>
+      <p:sp>
+        <p:nvSpPr>
+          <p:cNvPr id="4" name="Rounded Rectangle 3"/>
+          <p:cNvSpPr/>
+          <p:nvPr/>
+        </p:nvSpPr>
+        <p:spPr>
+          <a:xfrm>
+            <a:off x="731520" y="320040"/>
+            <a:ext cx="128016" cy="987552"/>
+          </a:xfrm>
+          <a:prstGeom prst="roundRect">
+            <a:avLst/>
+          </a:prstGeom>
+          <a:solidFill>
+            <a:srgbClr val="0284C7"/>
+          </a:solidFill>
+          <a:ln>
+            <a:noFill/>
+          </a:ln>
+        </p:spPr>
+        <p:style>
+          <a:lnRef idx="1">
+            <a:schemeClr val="accent1"/>
+          </a:lnRef>
+          <a:fillRef idx="3">
+            <a:schemeClr val="accent1"/>
+          </a:fillRef>
+          <a:effectRef idx="2">
+            <a:schemeClr val="accent1"/>
+          </a:effectRef>
+          <a:fontRef idx="minor">
+            <a:schemeClr val="lt1"/>
+          </a:fontRef>
+        </p:style>
+        <p:txBody>
+          <a:bodyPr rtlCol="0" anchor="ctr"/>
+          <a:lstStyle/>
+          <a:p>
+            <a:pPr algn="ctr"/>
+          </a:p>
+        </p:txBody>
+      </p:sp>
+      <p:sp>
+        <p:nvSpPr>
+          <p:cNvPr id="5" name="TextBox 4"/>
+          <p:cNvSpPr txBox="1"/>
+          <p:nvPr/>
+        </p:nvSpPr>
+        <p:spPr>
+          <a:xfrm>
+            <a:off x="1051560" y="347472"/>
+            <a:ext cx="10149840" cy="914400"/>
+          </a:xfrm>
+          <a:prstGeom prst="rect">
+            <a:avLst/>
+          </a:prstGeom>
+          <a:noFill/>
+        </p:spPr>
+        <p:txBody>
+          <a:bodyPr wrap="square" lIns="0" tIns="0" rIns="0" bIns="0">
+            <a:spAutoFit/>
+          </a:bodyPr>
+          <a:lstStyle/>
+          <a:p>
+            <a:pPr>
+              <a:defRPr sz="1100" b="1">
+                <a:solidFill>
+                  <a:srgbClr val="0284C7"/>
+                </a:solidFill>
+                <a:latin typeface="Calibri"/>
+              </a:defRPr>
+            </a:pPr>
+            <a:r>
+              <a:t>CRITERIO 5 DE RÚBRICA • 4.0 PUNTOS</a:t>
+            </a:r>
+          </a:p>
+          <a:p>
+            <a:pPr>
+              <a:defRPr sz="1600" b="1">
+                <a:solidFill>
+                  <a:srgbClr val="0F172A"/>
+                </a:solidFill>
+                <a:latin typeface="Calibri"/>
+              </a:defRPr>
+            </a:pPr>
+            <a:r>
+              <a:t>Diagrama Entidad-Relación (DER) Físico y Lógico en PostgreSQL 15</a:t>
+            </a:r>
+          </a:p>
+          <a:p>
+            <a:pPr>
+              <a:defRPr sz="1050">
+                <a:solidFill>
+                  <a:srgbClr val="64748B"/>
+                </a:solidFill>
+                <a:latin typeface="Calibri"/>
+              </a:defRPr>
+            </a:pPr>
+            <a:r>
+              <a:t>Modelo de persistencia con ruteo ortogonal, inmutabilidad append-only y capítulo formal de seguridad en base de datos</a:t>
+            </a:r>
+          </a:p>
+        </p:txBody>
+      </p:sp>
+      <p:sp>
+        <p:nvSpPr>
+          <p:cNvPr id="6" name="Rounded Rectangle 5"/>
+          <p:cNvSpPr/>
+          <p:nvPr/>
+        </p:nvSpPr>
+        <p:spPr>
+          <a:xfrm>
+            <a:off x="731520" y="1389888"/>
+            <a:ext cx="10728655" cy="3977639"/>
+          </a:xfrm>
+          <a:prstGeom prst="roundRect">
+            <a:avLst/>
+          </a:prstGeom>
+          <a:solidFill>
+            <a:srgbClr val="0F172A"/>
+          </a:solidFill>
+          <a:ln w="12700">
+            <a:solidFill>
+              <a:srgbClr val="1E293B"/>
+            </a:solidFill>
+          </a:ln>
+        </p:spPr>
+        <p:style>
+          <a:lnRef idx="1">
+            <a:schemeClr val="accent1"/>
+          </a:lnRef>
+          <a:fillRef idx="3">
+            <a:schemeClr val="accent1"/>
+          </a:fillRef>
+          <a:effectRef idx="2">
+            <a:schemeClr val="accent1"/>
+          </a:effectRef>
+          <a:fontRef idx="minor">
+            <a:schemeClr val="lt1"/>
+          </a:fontRef>
+        </p:style>
+        <p:txBody>
+          <a:bodyPr rtlCol="0" anchor="ctr"/>
+          <a:lstStyle/>
+          <a:p>
+            <a:pPr algn="ctr"/>
+          </a:p>
+        </p:txBody>
+      </p:sp>
+      <p:pic>
+        <p:nvPicPr>
+          <p:cNvPr id="7" name="Picture 6" descr="figura11_der_fisico_logico_postgresql.png"/>
+          <p:cNvPicPr>
+            <a:picLocks noChangeAspect="1"/>
+          </p:cNvPicPr>
+          <p:nvPr/>
+        </p:nvPicPr>
+        <p:blipFill>
+          <a:blip r:embed="rId2"/>
+          <a:stretch>
+            <a:fillRect/>
+          </a:stretch>
+        </p:blipFill>
+        <p:spPr>
+          <a:xfrm>
+            <a:off x="3168881" y="1481327"/>
+            <a:ext cx="5853932" cy="3794760"/>
+          </a:xfrm>
+          <a:prstGeom prst="rect">
+            <a:avLst/>
+          </a:prstGeom>
+        </p:spPr>
+      </p:pic>
+      <p:sp>
+        <p:nvSpPr>
+          <p:cNvPr id="8" name="Rounded Rectangle 7"/>
+          <p:cNvSpPr/>
+          <p:nvPr/>
+        </p:nvSpPr>
+        <p:spPr>
+          <a:xfrm>
+            <a:off x="731520" y="5468112"/>
+            <a:ext cx="3447288" cy="1115568"/>
+          </a:xfrm>
+          <a:prstGeom prst="roundRect">
+            <a:avLst/>
+          </a:prstGeom>
+          <a:solidFill>
+            <a:srgbClr val="FFFFFF"/>
+          </a:solidFill>
+          <a:ln w="12700">
+            <a:solidFill>
+              <a:srgbClr val="E2E8F0"/>
+            </a:solidFill>
+          </a:ln>
+        </p:spPr>
+        <p:style>
+          <a:lnRef idx="1">
+            <a:schemeClr val="accent1"/>
+          </a:lnRef>
+          <a:fillRef idx="3">
+            <a:schemeClr val="accent1"/>
+          </a:fillRef>
+          <a:effectRef idx="2">
+            <a:schemeClr val="accent1"/>
+          </a:effectRef>
+          <a:fontRef idx="minor">
+            <a:schemeClr val="lt1"/>
+          </a:fontRef>
+        </p:style>
+        <p:txBody>
+          <a:bodyPr rtlCol="0" anchor="ctr" wrap="square" lIns="109728" rIns="109728" tIns="73152" bIns="36576"/>
+          <a:lstStyle/>
+          <a:p>
+            <a:pPr algn="ctr">
+              <a:spcAft>
+                <a:spcPts val="200"/>
+              </a:spcAft>
+              <a:defRPr sz="1050" b="1">
+                <a:solidFill>
+                  <a:srgbClr val="0B1F3A"/>
+                </a:solidFill>
+                <a:latin typeface="Calibri"/>
+              </a:defRPr>
+            </a:pPr>
+            <a:r>
+              <a:t>6 TABLAS NORMALIZADAS (3FN)</a:t>
+            </a:r>
+          </a:p>
+          <a:p>
+            <a:pPr algn="left">
+              <a:defRPr sz="900">
+                <a:solidFill>
+                  <a:srgbClr val="334155"/>
+                </a:solidFill>
+                <a:latin typeface="Calibri"/>
+              </a:defRPr>
+            </a:pPr>
+            <a:r>
+              <a:t>entidades_financieras, incidentes, telemetria_pings, historial_estados, reportes_sft y usuarios_ad.</a:t>
+            </a:r>
+          </a:p>
+        </p:txBody>
+      </p:sp>
+      <p:sp>
+        <p:nvSpPr>
+          <p:cNvPr id="9" name="Rounded Rectangle 8"/>
+          <p:cNvSpPr/>
+          <p:nvPr/>
+        </p:nvSpPr>
+        <p:spPr>
+          <a:xfrm>
+            <a:off x="4370832" y="5468112"/>
+            <a:ext cx="3447288" cy="1115568"/>
+          </a:xfrm>
+          <a:prstGeom prst="roundRect">
+            <a:avLst/>
+          </a:prstGeom>
+          <a:solidFill>
+            <a:srgbClr val="FFFFFF"/>
+          </a:solidFill>
+          <a:ln w="12700">
+            <a:solidFill>
+              <a:srgbClr val="E2E8F0"/>
+            </a:solidFill>
+          </a:ln>
+        </p:spPr>
+        <p:style>
+          <a:lnRef idx="1">
+            <a:schemeClr val="accent1"/>
+          </a:lnRef>
+          <a:fillRef idx="3">
+            <a:schemeClr val="accent1"/>
+          </a:fillRef>
+          <a:effectRef idx="2">
+            <a:schemeClr val="accent1"/>
+          </a:effectRef>
+          <a:fontRef idx="minor">
+            <a:schemeClr val="lt1"/>
+          </a:fontRef>
+        </p:style>
+        <p:txBody>
+          <a:bodyPr rtlCol="0" anchor="ctr" wrap="square" lIns="109728" rIns="109728" tIns="73152" bIns="36576"/>
+          <a:lstStyle/>
+          <a:p>
+            <a:pPr algn="ctr">
+              <a:spcAft>
+                <a:spcPts val="200"/>
+              </a:spcAft>
+              <a:defRPr sz="1050" b="1">
+                <a:solidFill>
+                  <a:srgbClr val="0B1F3A"/>
+                </a:solidFill>
+                <a:latin typeface="Calibri"/>
+              </a:defRPr>
+            </a:pPr>
+            <a:r>
+              <a:t>INMUTABILIDAD &amp; TRIGGERS</a:t>
+            </a:r>
+          </a:p>
+          <a:p>
+            <a:pPr algn="left">
+              <a:defRPr sz="900">
+                <a:solidFill>
+                  <a:srgbClr val="334155"/>
+                </a:solidFill>
+                <a:latin typeface="Calibri"/>
+              </a:defRPr>
+            </a:pPr>
+            <a:r>
+              <a:t>Trigger fn_prohibir_mutacion_historial() bloquea UPDATE/DELETE e índice parcial idx_incidente_abierto_unico.</a:t>
+            </a:r>
+          </a:p>
+        </p:txBody>
+      </p:sp>
+      <p:sp>
+        <p:nvSpPr>
+          <p:cNvPr id="10" name="Rounded Rectangle 9"/>
+          <p:cNvSpPr/>
+          <p:nvPr/>
+        </p:nvSpPr>
+        <p:spPr>
+          <a:xfrm>
+            <a:off x="8010144" y="5468112"/>
+            <a:ext cx="3447288" cy="1115568"/>
+          </a:xfrm>
+          <a:prstGeom prst="roundRect">
+            <a:avLst/>
+          </a:prstGeom>
+          <a:solidFill>
+            <a:srgbClr val="FFFFFF"/>
+          </a:solidFill>
+          <a:ln w="12700">
+            <a:solidFill>
+              <a:srgbClr val="E2E8F0"/>
+            </a:solidFill>
+          </a:ln>
+        </p:spPr>
+        <p:style>
+          <a:lnRef idx="1">
+            <a:schemeClr val="accent1"/>
+          </a:lnRef>
+          <a:fillRef idx="3">
+            <a:schemeClr val="accent1"/>
+          </a:fillRef>
+          <a:effectRef idx="2">
+            <a:schemeClr val="accent1"/>
+          </a:effectRef>
+          <a:fontRef idx="minor">
+            <a:schemeClr val="lt1"/>
+          </a:fontRef>
+        </p:style>
+        <p:txBody>
+          <a:bodyPr rtlCol="0" anchor="ctr" wrap="square" lIns="109728" rIns="109728" tIns="73152" bIns="36576"/>
+          <a:lstStyle/>
+          <a:p>
+            <a:pPr algn="ctr">
+              <a:spcAft>
+                <a:spcPts val="200"/>
+              </a:spcAft>
+              <a:defRPr sz="1050" b="1">
+                <a:solidFill>
+                  <a:srgbClr val="0B1F3A"/>
+                </a:solidFill>
+                <a:latin typeface="Calibri"/>
+              </a:defRPr>
+            </a:pPr>
+            <a:r>
+              <a:t>SEGURIDAD &amp; RBAC ESTRICTO</a:t>
+            </a:r>
+          </a:p>
+          <a:p>
+            <a:pPr algn="left">
+              <a:defRPr sz="900">
+                <a:solidFill>
+                  <a:srgbClr val="334155"/>
+                </a:solidFill>
+                <a:latin typeface="Calibri"/>
+              </a:defRPr>
+            </a:pPr>
+            <a:r>
+              <a:t>Mínimo privilegio (app_sigir_user), cifrado TLS/SSL en tránsito y consultas JPA parametrizadas anti-SQLi.</a:t>
+            </a:r>
+          </a:p>
+        </p:txBody>
+      </p:sp>
+    </p:spTree>
+  </p:cSld>
+  <p:clrMapOvr>
+    <a:masterClrMapping/>
+  </p:clrMapOvr>
+</p:sld>
+</file>
+
+<file path=ppt/slides/slide18.xml><?xml version="1.0" encoding="utf-8"?>
+<p:sld xmlns:a="http://schemas.openxmlformats.org/drawingml/2006/main" xmlns:p="http://schemas.openxmlformats.org/presentationml/2006/main" xmlns:r="http://schemas.openxmlformats.org/officeDocument/2006/relationships">
+  <p:cSld>
+    <p:spTree>
+      <p:nvGrpSpPr>
+        <p:cNvPr id="1" name=""/>
+        <p:cNvGrpSpPr/>
+        <p:nvPr/>
+      </p:nvGrpSpPr>
+      <p:grpSpPr/>
+      <p:sp>
+        <p:nvSpPr>
+          <p:cNvPr id="2" name="Rectangle 1"/>
+          <p:cNvSpPr/>
+          <p:nvPr/>
+        </p:nvSpPr>
+        <p:spPr>
+          <a:xfrm>
+            <a:off x="0" y="0"/>
+            <a:ext cx="12191695" cy="6858000"/>
+          </a:xfrm>
+          <a:prstGeom prst="rect">
+            <a:avLst/>
+          </a:prstGeom>
+          <a:solidFill>
+            <a:srgbClr val="F8FAFC"/>
+          </a:solidFill>
+          <a:ln>
+            <a:noFill/>
+          </a:ln>
+        </p:spPr>
+        <p:style>
+          <a:lnRef idx="1">
+            <a:schemeClr val="accent1"/>
+          </a:lnRef>
+          <a:fillRef idx="3">
+            <a:schemeClr val="accent1"/>
+          </a:fillRef>
+          <a:effectRef idx="2">
+            <a:schemeClr val="accent1"/>
+          </a:effectRef>
+          <a:fontRef idx="minor">
+            <a:schemeClr val="lt1"/>
+          </a:fontRef>
+        </p:style>
+        <p:txBody>
+          <a:bodyPr rtlCol="0" anchor="ctr"/>
+          <a:lstStyle/>
+          <a:p>
+            <a:pPr algn="ctr"/>
+          </a:p>
+        </p:txBody>
+      </p:sp>
+      <p:sp>
+        <p:nvSpPr>
+          <p:cNvPr id="3" name="Rounded Rectangle 2"/>
+          <p:cNvSpPr/>
+          <p:nvPr/>
+        </p:nvSpPr>
+        <p:spPr>
+          <a:xfrm>
+            <a:off x="731520" y="320040"/>
+            <a:ext cx="10728655" cy="987552"/>
+          </a:xfrm>
+          <a:prstGeom prst="roundRect">
+            <a:avLst/>
+          </a:prstGeom>
+          <a:solidFill>
+            <a:srgbClr val="FFFFFF"/>
+          </a:solidFill>
+          <a:ln w="12700">
+            <a:solidFill>
+              <a:srgbClr val="E2E8F0"/>
+            </a:solidFill>
+          </a:ln>
+        </p:spPr>
+        <p:style>
+          <a:lnRef idx="1">
+            <a:schemeClr val="accent1"/>
+          </a:lnRef>
+          <a:fillRef idx="3">
+            <a:schemeClr val="accent1"/>
+          </a:fillRef>
+          <a:effectRef idx="2">
+            <a:schemeClr val="accent1"/>
+          </a:effectRef>
+          <a:fontRef idx="minor">
+            <a:schemeClr val="lt1"/>
+          </a:fontRef>
+        </p:style>
+        <p:txBody>
+          <a:bodyPr rtlCol="0" anchor="ctr"/>
+          <a:lstStyle/>
+          <a:p>
+            <a:pPr algn="ctr"/>
+          </a:p>
+        </p:txBody>
+      </p:sp>
+      <p:sp>
+        <p:nvSpPr>
+          <p:cNvPr id="4" name="Rounded Rectangle 3"/>
+          <p:cNvSpPr/>
+          <p:nvPr/>
+        </p:nvSpPr>
+        <p:spPr>
+          <a:xfrm>
+            <a:off x="731520" y="320040"/>
+            <a:ext cx="128016" cy="987552"/>
+          </a:xfrm>
+          <a:prstGeom prst="roundRect">
+            <a:avLst/>
+          </a:prstGeom>
+          <a:solidFill>
+            <a:srgbClr val="0284C7"/>
+          </a:solidFill>
+          <a:ln>
+            <a:noFill/>
+          </a:ln>
+        </p:spPr>
+        <p:style>
+          <a:lnRef idx="1">
+            <a:schemeClr val="accent1"/>
+          </a:lnRef>
+          <a:fillRef idx="3">
+            <a:schemeClr val="accent1"/>
+          </a:fillRef>
+          <a:effectRef idx="2">
+            <a:schemeClr val="accent1"/>
+          </a:effectRef>
+          <a:fontRef idx="minor">
+            <a:schemeClr val="lt1"/>
+          </a:fontRef>
+        </p:style>
+        <p:txBody>
+          <a:bodyPr rtlCol="0" anchor="ctr"/>
+          <a:lstStyle/>
+          <a:p>
+            <a:pPr algn="ctr"/>
+          </a:p>
+        </p:txBody>
+      </p:sp>
+      <p:sp>
+        <p:nvSpPr>
+          <p:cNvPr id="5" name="TextBox 4"/>
+          <p:cNvSpPr txBox="1"/>
+          <p:nvPr/>
+        </p:nvSpPr>
+        <p:spPr>
+          <a:xfrm>
+            <a:off x="1051560" y="347472"/>
+            <a:ext cx="10149840" cy="914400"/>
+          </a:xfrm>
+          <a:prstGeom prst="rect">
+            <a:avLst/>
+          </a:prstGeom>
+          <a:noFill/>
+        </p:spPr>
+        <p:txBody>
+          <a:bodyPr wrap="square" lIns="0" tIns="0" rIns="0" bIns="0">
+            <a:spAutoFit/>
+          </a:bodyPr>
+          <a:lstStyle/>
+          <a:p>
+            <a:pPr>
+              <a:defRPr sz="1100" b="1">
+                <a:solidFill>
+                  <a:srgbClr val="0284C7"/>
+                </a:solidFill>
+                <a:latin typeface="Calibri"/>
+              </a:defRPr>
+            </a:pPr>
+            <a:r>
+              <a:t>CRITERIO 5 DE RÚBRICA • 4.0 PUNTOS</a:t>
+            </a:r>
+          </a:p>
+          <a:p>
+            <a:pPr>
+              <a:defRPr sz="1600" b="1">
+                <a:solidFill>
+                  <a:srgbClr val="0F172A"/>
+                </a:solidFill>
+                <a:latin typeface="Calibri"/>
+              </a:defRPr>
+            </a:pPr>
+            <a:r>
+              <a:t>Diagrama de Clases de Diseño de Software en Java 17 y Spring Boot 3</a:t>
+            </a:r>
+          </a:p>
+          <a:p>
+            <a:pPr>
+              <a:defRPr sz="1050">
+                <a:solidFill>
+                  <a:srgbClr val="64748B"/>
+                </a:solidFill>
+                <a:latin typeface="Calibri"/>
+              </a:defRPr>
+            </a:pPr>
+            <a:r>
+              <a:t>Implementación de Arquitectura Hexagonal con inyección de dependencias, DTOs inmutables y puertos desacoplados</a:t>
+            </a:r>
+          </a:p>
+        </p:txBody>
+      </p:sp>
+      <p:sp>
+        <p:nvSpPr>
+          <p:cNvPr id="6" name="Rounded Rectangle 5"/>
+          <p:cNvSpPr/>
+          <p:nvPr/>
+        </p:nvSpPr>
+        <p:spPr>
+          <a:xfrm>
+            <a:off x="731520" y="1389888"/>
+            <a:ext cx="10728655" cy="3977639"/>
+          </a:xfrm>
+          <a:prstGeom prst="roundRect">
+            <a:avLst/>
+          </a:prstGeom>
+          <a:solidFill>
+            <a:srgbClr val="0F172A"/>
+          </a:solidFill>
+          <a:ln w="12700">
+            <a:solidFill>
+              <a:srgbClr val="1E293B"/>
+            </a:solidFill>
+          </a:ln>
+        </p:spPr>
+        <p:style>
+          <a:lnRef idx="1">
+            <a:schemeClr val="accent1"/>
+          </a:lnRef>
+          <a:fillRef idx="3">
+            <a:schemeClr val="accent1"/>
+          </a:fillRef>
+          <a:effectRef idx="2">
+            <a:schemeClr val="accent1"/>
+          </a:effectRef>
+          <a:fontRef idx="minor">
+            <a:schemeClr val="lt1"/>
+          </a:fontRef>
+        </p:style>
+        <p:txBody>
+          <a:bodyPr rtlCol="0" anchor="ctr"/>
+          <a:lstStyle/>
+          <a:p>
+            <a:pPr algn="ctr"/>
+          </a:p>
+        </p:txBody>
+      </p:sp>
+      <p:pic>
+        <p:nvPicPr>
+          <p:cNvPr id="7" name="Picture 6" descr="figura12_clases_diseno_hexagonal.png"/>
+          <p:cNvPicPr>
+            <a:picLocks noChangeAspect="1"/>
+          </p:cNvPicPr>
+          <p:nvPr/>
+        </p:nvPicPr>
+        <p:blipFill>
+          <a:blip r:embed="rId2"/>
+          <a:stretch>
+            <a:fillRect/>
+          </a:stretch>
+        </p:blipFill>
+        <p:spPr>
+          <a:xfrm>
+            <a:off x="3327746" y="1481327"/>
+            <a:ext cx="5536201" cy="3794760"/>
+          </a:xfrm>
+          <a:prstGeom prst="rect">
+            <a:avLst/>
+          </a:prstGeom>
+        </p:spPr>
+      </p:pic>
+      <p:sp>
+        <p:nvSpPr>
+          <p:cNvPr id="8" name="Rounded Rectangle 7"/>
+          <p:cNvSpPr/>
+          <p:nvPr/>
+        </p:nvSpPr>
+        <p:spPr>
+          <a:xfrm>
+            <a:off x="731520" y="5468112"/>
+            <a:ext cx="3447288" cy="1115568"/>
+          </a:xfrm>
+          <a:prstGeom prst="roundRect">
+            <a:avLst/>
+          </a:prstGeom>
+          <a:solidFill>
+            <a:srgbClr val="FFFFFF"/>
+          </a:solidFill>
+          <a:ln w="12700">
+            <a:solidFill>
+              <a:srgbClr val="E2E8F0"/>
+            </a:solidFill>
+          </a:ln>
+        </p:spPr>
+        <p:style>
+          <a:lnRef idx="1">
+            <a:schemeClr val="accent1"/>
+          </a:lnRef>
+          <a:fillRef idx="3">
+            <a:schemeClr val="accent1"/>
+          </a:fillRef>
+          <a:effectRef idx="2">
+            <a:schemeClr val="accent1"/>
+          </a:effectRef>
+          <a:fontRef idx="minor">
+            <a:schemeClr val="lt1"/>
+          </a:fontRef>
+        </p:style>
+        <p:txBody>
+          <a:bodyPr rtlCol="0" anchor="ctr" wrap="square" lIns="109728" rIns="109728" tIns="73152" bIns="36576"/>
+          <a:lstStyle/>
+          <a:p>
+            <a:pPr algn="ctr">
+              <a:spcAft>
+                <a:spcPts val="200"/>
+              </a:spcAft>
+              <a:defRPr sz="1050" b="1">
+                <a:solidFill>
+                  <a:srgbClr val="0B1F3A"/>
+                </a:solidFill>
+                <a:latin typeface="Calibri"/>
+              </a:defRPr>
+            </a:pPr>
+            <a:r>
+              <a:t>CONTROLADORES &amp; DTOS</a:t>
+            </a:r>
+          </a:p>
+          <a:p>
+            <a:pPr algn="left">
+              <a:defRPr sz="900">
+                <a:solidFill>
+                  <a:srgbClr val="334155"/>
+                </a:solidFill>
+                <a:latin typeface="Calibri"/>
+              </a:defRPr>
+            </a:pPr>
+            <a:r>
+              <a:t>IncidenteRestController y ReporteBCRPController con DTOs inmutables y validaciones Jakarta Bean Validation.</a:t>
+            </a:r>
+          </a:p>
+        </p:txBody>
+      </p:sp>
+      <p:sp>
+        <p:nvSpPr>
+          <p:cNvPr id="9" name="Rounded Rectangle 8"/>
+          <p:cNvSpPr/>
+          <p:nvPr/>
+        </p:nvSpPr>
+        <p:spPr>
+          <a:xfrm>
+            <a:off x="4370832" y="5468112"/>
+            <a:ext cx="3447288" cy="1115568"/>
+          </a:xfrm>
+          <a:prstGeom prst="roundRect">
+            <a:avLst/>
+          </a:prstGeom>
+          <a:solidFill>
+            <a:srgbClr val="FFFFFF"/>
+          </a:solidFill>
+          <a:ln w="12700">
+            <a:solidFill>
+              <a:srgbClr val="E2E8F0"/>
+            </a:solidFill>
+          </a:ln>
+        </p:spPr>
+        <p:style>
+          <a:lnRef idx="1">
+            <a:schemeClr val="accent1"/>
+          </a:lnRef>
+          <a:fillRef idx="3">
+            <a:schemeClr val="accent1"/>
+          </a:fillRef>
+          <a:effectRef idx="2">
+            <a:schemeClr val="accent1"/>
+          </a:effectRef>
+          <a:fontRef idx="minor">
+            <a:schemeClr val="lt1"/>
+          </a:fontRef>
+        </p:style>
+        <p:txBody>
+          <a:bodyPr rtlCol="0" anchor="ctr" wrap="square" lIns="109728" rIns="109728" tIns="73152" bIns="36576"/>
+          <a:lstStyle/>
+          <a:p>
+            <a:pPr algn="ctr">
+              <a:spcAft>
+                <a:spcPts val="200"/>
+              </a:spcAft>
+              <a:defRPr sz="1050" b="1">
+                <a:solidFill>
+                  <a:srgbClr val="0B1F3A"/>
+                </a:solidFill>
+                <a:latin typeface="Calibri"/>
+              </a:defRPr>
+            </a:pPr>
+            <a:r>
+              <a:t>SERVICIOS &amp; WORKERS CORE</a:t>
+            </a:r>
+          </a:p>
+          <a:p>
+            <a:pPr algn="left">
+              <a:defRPr sz="900">
+                <a:solidFill>
+                  <a:srgbClr val="334155"/>
+                </a:solidFill>
+                <a:latin typeface="Calibri"/>
+              </a:defRPr>
+            </a:pPr>
+            <a:r>
+              <a:t>IncidenteService, SftReportService con firma SHA-256 y TelemetriaWorker (@Scheduled cada 30s multihilo).</a:t>
+            </a:r>
+          </a:p>
+        </p:txBody>
+      </p:sp>
+      <p:sp>
+        <p:nvSpPr>
+          <p:cNvPr id="10" name="Rounded Rectangle 9"/>
+          <p:cNvSpPr/>
+          <p:nvPr/>
+        </p:nvSpPr>
+        <p:spPr>
+          <a:xfrm>
+            <a:off x="8010144" y="5468112"/>
+            <a:ext cx="3447288" cy="1115568"/>
+          </a:xfrm>
+          <a:prstGeom prst="roundRect">
+            <a:avLst/>
+          </a:prstGeom>
+          <a:solidFill>
+            <a:srgbClr val="FFFFFF"/>
+          </a:solidFill>
+          <a:ln w="12700">
+            <a:solidFill>
+              <a:srgbClr val="E2E8F0"/>
+            </a:solidFill>
+          </a:ln>
+        </p:spPr>
+        <p:style>
+          <a:lnRef idx="1">
+            <a:schemeClr val="accent1"/>
+          </a:lnRef>
+          <a:fillRef idx="3">
+            <a:schemeClr val="accent1"/>
+          </a:fillRef>
+          <a:effectRef idx="2">
+            <a:schemeClr val="accent1"/>
+          </a:effectRef>
+          <a:fontRef idx="minor">
+            <a:schemeClr val="lt1"/>
+          </a:fontRef>
+        </p:style>
+        <p:txBody>
+          <a:bodyPr rtlCol="0" anchor="ctr" wrap="square" lIns="109728" rIns="109728" tIns="73152" bIns="36576"/>
+          <a:lstStyle/>
+          <a:p>
+            <a:pPr algn="ctr">
+              <a:spcAft>
+                <a:spcPts val="200"/>
+              </a:spcAft>
+              <a:defRPr sz="1050" b="1">
+                <a:solidFill>
+                  <a:srgbClr val="0B1F3A"/>
+                </a:solidFill>
+                <a:latin typeface="Calibri"/>
+              </a:defRPr>
+            </a:pPr>
+            <a:r>
+              <a:t>PERSISTENCIA SPRING DATA JPA</a:t>
+            </a:r>
+          </a:p>
+          <a:p>
+            <a:pPr algn="left">
+              <a:defRPr sz="900">
+                <a:solidFill>
+                  <a:srgbClr val="334155"/>
+                </a:solidFill>
+                <a:latin typeface="Calibri"/>
+              </a:defRPr>
+            </a:pPr>
+            <a:r>
+              <a:t>Repositorios IIncidenteRepository e IEntidadRepository desacoplados del núcleo del dominio Java.</a:t>
+            </a:r>
+          </a:p>
+        </p:txBody>
+      </p:sp>
+    </p:spTree>
+  </p:cSld>
+  <p:clrMapOvr>
+    <a:masterClrMapping/>
+  </p:clrMapOvr>
+</p:sld>
+</file>
+
+<file path=ppt/slides/slide19.xml><?xml version="1.0" encoding="utf-8"?>
+<p:sld xmlns:a="http://schemas.openxmlformats.org/drawingml/2006/main" xmlns:p="http://schemas.openxmlformats.org/presentationml/2006/main" xmlns:r="http://schemas.openxmlformats.org/officeDocument/2006/relationships">
+  <p:cSld>
+    <p:spTree>
+      <p:nvGrpSpPr>
+        <p:cNvPr id="1" name=""/>
+        <p:cNvGrpSpPr/>
+        <p:nvPr/>
+      </p:nvGrpSpPr>
+      <p:grpSpPr/>
+      <p:sp>
+        <p:nvSpPr>
+          <p:cNvPr id="2" name="Rectangle 1"/>
+          <p:cNvSpPr/>
+          <p:nvPr/>
+        </p:nvSpPr>
+        <p:spPr>
+          <a:xfrm>
+            <a:off x="0" y="0"/>
+            <a:ext cx="12191695" cy="6858000"/>
+          </a:xfrm>
+          <a:prstGeom prst="rect">
+            <a:avLst/>
+          </a:prstGeom>
+          <a:solidFill>
+            <a:srgbClr val="F8FAFC"/>
+          </a:solidFill>
+          <a:ln>
+            <a:noFill/>
+          </a:ln>
+        </p:spPr>
+        <p:style>
+          <a:lnRef idx="1">
+            <a:schemeClr val="accent1"/>
+          </a:lnRef>
+          <a:fillRef idx="3">
+            <a:schemeClr val="accent1"/>
+          </a:fillRef>
+          <a:effectRef idx="2">
+            <a:schemeClr val="accent1"/>
+          </a:effectRef>
+          <a:fontRef idx="minor">
+            <a:schemeClr val="lt1"/>
+          </a:fontRef>
+        </p:style>
+        <p:txBody>
+          <a:bodyPr rtlCol="0" anchor="ctr"/>
+          <a:lstStyle/>
+          <a:p>
+            <a:pPr algn="ctr"/>
+          </a:p>
+        </p:txBody>
+      </p:sp>
+      <p:sp>
+        <p:nvSpPr>
+          <p:cNvPr id="3" name="Rounded Rectangle 2"/>
+          <p:cNvSpPr/>
+          <p:nvPr/>
+        </p:nvSpPr>
+        <p:spPr>
+          <a:xfrm>
+            <a:off x="731520" y="320040"/>
+            <a:ext cx="10728655" cy="987552"/>
+          </a:xfrm>
+          <a:prstGeom prst="roundRect">
+            <a:avLst/>
+          </a:prstGeom>
+          <a:solidFill>
+            <a:srgbClr val="FFFFFF"/>
+          </a:solidFill>
+          <a:ln w="12700">
+            <a:solidFill>
+              <a:srgbClr val="E2E8F0"/>
+            </a:solidFill>
+          </a:ln>
+        </p:spPr>
+        <p:style>
+          <a:lnRef idx="1">
+            <a:schemeClr val="accent1"/>
+          </a:lnRef>
+          <a:fillRef idx="3">
+            <a:schemeClr val="accent1"/>
+          </a:fillRef>
+          <a:effectRef idx="2">
+            <a:schemeClr val="accent1"/>
+          </a:effectRef>
+          <a:fontRef idx="minor">
+            <a:schemeClr val="lt1"/>
+          </a:fontRef>
+        </p:style>
+        <p:txBody>
+          <a:bodyPr rtlCol="0" anchor="ctr"/>
+          <a:lstStyle/>
+          <a:p>
+            <a:pPr algn="ctr"/>
+          </a:p>
+        </p:txBody>
+      </p:sp>
+      <p:sp>
+        <p:nvSpPr>
+          <p:cNvPr id="4" name="Rounded Rectangle 3"/>
+          <p:cNvSpPr/>
+          <p:nvPr/>
+        </p:nvSpPr>
+        <p:spPr>
+          <a:xfrm>
+            <a:off x="731520" y="320040"/>
+            <a:ext cx="128016" cy="987552"/>
+          </a:xfrm>
+          <a:prstGeom prst="roundRect">
+            <a:avLst/>
+          </a:prstGeom>
+          <a:solidFill>
+            <a:srgbClr val="0284C7"/>
+          </a:solidFill>
+          <a:ln>
+            <a:noFill/>
+          </a:ln>
+        </p:spPr>
+        <p:style>
+          <a:lnRef idx="1">
+            <a:schemeClr val="accent1"/>
+          </a:lnRef>
+          <a:fillRef idx="3">
+            <a:schemeClr val="accent1"/>
+          </a:fillRef>
+          <a:effectRef idx="2">
+            <a:schemeClr val="accent1"/>
+          </a:effectRef>
+          <a:fontRef idx="minor">
+            <a:schemeClr val="lt1"/>
+          </a:fontRef>
+        </p:style>
+        <p:txBody>
+          <a:bodyPr rtlCol="0" anchor="ctr"/>
+          <a:lstStyle/>
+          <a:p>
+            <a:pPr algn="ctr"/>
+          </a:p>
+        </p:txBody>
+      </p:sp>
+      <p:sp>
+        <p:nvSpPr>
+          <p:cNvPr id="5" name="TextBox 4"/>
+          <p:cNvSpPr txBox="1"/>
+          <p:nvPr/>
+        </p:nvSpPr>
+        <p:spPr>
+          <a:xfrm>
+            <a:off x="1051560" y="347472"/>
+            <a:ext cx="10149840" cy="914400"/>
+          </a:xfrm>
+          <a:prstGeom prst="rect">
+            <a:avLst/>
+          </a:prstGeom>
+          <a:noFill/>
+        </p:spPr>
+        <p:txBody>
+          <a:bodyPr wrap="square" lIns="0" tIns="0" rIns="0" bIns="0">
+            <a:spAutoFit/>
+          </a:bodyPr>
+          <a:lstStyle/>
+          <a:p>
+            <a:pPr>
+              <a:defRPr sz="1100" b="1">
+                <a:solidFill>
+                  <a:srgbClr val="0284C7"/>
+                </a:solidFill>
+                <a:latin typeface="Calibri"/>
+              </a:defRPr>
+            </a:pPr>
+            <a:r>
+              <a:t>CRITERIO 6 DE RÚBRICA • 2.0 PUNTOS</a:t>
+            </a:r>
+          </a:p>
+          <a:p>
+            <a:pPr>
+              <a:defRPr sz="1600" b="1">
+                <a:solidFill>
+                  <a:srgbClr val="0F172A"/>
+                </a:solidFill>
+                <a:latin typeface="Calibri"/>
+              </a:defRPr>
+            </a:pPr>
+            <a:r>
+              <a:t>Módulo de Reportes Clave de Indisponibilidad y Compilador SFT BCRP</a:t>
+            </a:r>
+          </a:p>
+          <a:p>
+            <a:pPr>
+              <a:defRPr sz="1050">
+                <a:solidFill>
+                  <a:srgbClr val="64748B"/>
+                </a:solidFill>
+                <a:latin typeface="Calibri"/>
+              </a:defRPr>
+            </a:pPr>
+            <a:r>
+              <a:t>Cálculo matemático de SLAs según Circular 0011-2023, endpoints REST analíticos y generación de archivo plano firmado</a:t>
+            </a:r>
+          </a:p>
+        </p:txBody>
+      </p:sp>
+      <p:sp>
+        <p:nvSpPr>
+          <p:cNvPr id="6" name="Rounded Rectangle 5"/>
+          <p:cNvSpPr/>
+          <p:nvPr/>
+        </p:nvSpPr>
+        <p:spPr>
+          <a:xfrm>
+            <a:off x="731520" y="1417320"/>
+            <a:ext cx="3410712" cy="5074920"/>
+          </a:xfrm>
+          <a:prstGeom prst="roundRect">
+            <a:avLst/>
+          </a:prstGeom>
+          <a:solidFill>
+            <a:srgbClr val="FFFFFF"/>
+          </a:solidFill>
+          <a:ln w="12700">
+            <a:solidFill>
+              <a:srgbClr val="E2E8F0"/>
+            </a:solidFill>
+          </a:ln>
+        </p:spPr>
+        <p:style>
+          <a:lnRef idx="1">
+            <a:schemeClr val="accent1"/>
+          </a:lnRef>
+          <a:fillRef idx="3">
+            <a:schemeClr val="accent1"/>
+          </a:fillRef>
+          <a:effectRef idx="2">
+            <a:schemeClr val="accent1"/>
+          </a:effectRef>
+          <a:fontRef idx="minor">
+            <a:schemeClr val="lt1"/>
+          </a:fontRef>
+        </p:style>
+        <p:txBody>
+          <a:bodyPr rtlCol="0" anchor="ctr" wrap="square" lIns="182880" rIns="182880" tIns="182880" bIns="137160"/>
+          <a:lstStyle/>
+          <a:p>
+            <a:pPr algn="ctr">
+              <a:spcAft>
+                <a:spcPts val="200"/>
+              </a:spcAft>
+              <a:defRPr sz="1050" b="1">
+                <a:solidFill>
+                  <a:srgbClr val="0284C7"/>
+                </a:solidFill>
+                <a:latin typeface="Calibri"/>
+              </a:defRPr>
+            </a:pPr>
+            <a:r>
+              <a:t>MÉTRICAS MATEMÁTICAS</a:t>
+            </a:r>
+          </a:p>
+          <a:p>
+            <a:pPr algn="ctr">
+              <a:spcAft>
+                <a:spcPts val="300"/>
+              </a:spcAft>
+              <a:defRPr sz="1250" b="1">
+                <a:solidFill>
+                  <a:srgbClr val="0B1F3A"/>
+                </a:solidFill>
+                <a:latin typeface="Calibri"/>
+              </a:defRPr>
+            </a:pPr>
+            <a:r>
+              <a:t>Fórmulas de SLA &amp; Uptime</a:t>
+            </a:r>
+          </a:p>
+          <a:p>
+            <a:pPr algn="ctr">
+              <a:spcAft>
                 <a:spcPts val="600"/>
               </a:spcAft>
-              <a:defRPr sz="1900" b="1">
+              <a:defRPr sz="1000" b="1">
+                <a:solidFill>
+                  <a:srgbClr val="475569"/>
+                </a:solidFill>
+                <a:latin typeface="Calibri"/>
+              </a:defRPr>
+            </a:pPr>
+            <a:r>
+              <a:t>Cumplimiento Circular 0011-2023</a:t>
+            </a:r>
+          </a:p>
+          <a:p>
+            <a:pPr algn="left">
+              <a:spcAft>
+                <a:spcPts val="400"/>
+              </a:spcAft>
+              <a:defRPr sz="950">
+                <a:solidFill>
+                  <a:srgbClr val="334155"/>
+                </a:solidFill>
+                <a:latin typeface="Calibri"/>
+              </a:defRPr>
+            </a:pPr>
+            <a:r>
+              <a:t>• Disponibilidad Mensual (%):</a:t>
+            </a:r>
+            <a:br/>
+            <a:r>
+              <a:t>  [(43,200 - Min_Caída) / 43,200] * 100</a:t>
+            </a:r>
+            <a:br/>
+            <a:r>
+              <a:t>  Base de 30 días 24/7; umbral &gt;= 99.90%.</a:t>
+            </a:r>
+          </a:p>
+          <a:p>
+            <a:pPr algn="left">
+              <a:spcAft>
+                <a:spcPts val="400"/>
+              </a:spcAft>
+              <a:defRPr sz="950">
+                <a:solidFill>
+                  <a:srgbClr val="334155"/>
+                </a:solidFill>
+                <a:latin typeface="Calibri"/>
+              </a:defRPr>
+            </a:pPr>
+            <a:r>
+              <a:t>• MTTD (Mean Time to Detect):</a:t>
+            </a:r>
+            <a:br/>
+            <a:r>
+              <a:t>  Reducción de 180 min a &lt; 30 seg mediante sondeo asíncrono continuo.</a:t>
+            </a:r>
+          </a:p>
+          <a:p>
+            <a:pPr algn="left">
+              <a:spcAft>
+                <a:spcPts val="400"/>
+              </a:spcAft>
+              <a:defRPr sz="950">
+                <a:solidFill>
+                  <a:srgbClr val="334155"/>
+                </a:solidFill>
+                <a:latin typeface="Calibri"/>
+              </a:defRPr>
+            </a:pPr>
+            <a:r>
+              <a:t>• MTTR (Mean Time to Repair):</a:t>
+            </a:r>
+            <a:br/>
+            <a:r>
+              <a:t>  Cálculo de minutos acumulados desde ticket REGISTRADO a CERRADO.</a:t>
+            </a:r>
+          </a:p>
+          <a:p>
+            <a:pPr algn="left">
+              <a:spcAft>
+                <a:spcPts val="400"/>
+              </a:spcAft>
+              <a:defRPr sz="950">
+                <a:solidFill>
+                  <a:srgbClr val="334155"/>
+                </a:solidFill>
+                <a:latin typeface="Calibri"/>
+              </a:defRPr>
+            </a:pPr>
+            <a:r>
+              <a:t>• Agrupación Dinámica:</a:t>
+            </a:r>
+            <a:br/>
+            <a:r>
+              <a:t>  Métricas desglosadas por Entidad, Severidad (LEVE/GRAVE/CRITICO) y canal.</a:t>
+            </a:r>
+          </a:p>
+        </p:txBody>
+      </p:sp>
+      <p:sp>
+        <p:nvSpPr>
+          <p:cNvPr id="7" name="Rounded Rectangle 6"/>
+          <p:cNvSpPr/>
+          <p:nvPr/>
+        </p:nvSpPr>
+        <p:spPr>
+          <a:xfrm>
+            <a:off x="4389120" y="1417320"/>
+            <a:ext cx="3410712" cy="5074920"/>
+          </a:xfrm>
+          <a:prstGeom prst="roundRect">
+            <a:avLst/>
+          </a:prstGeom>
+          <a:solidFill>
+            <a:srgbClr val="FFFFFF"/>
+          </a:solidFill>
+          <a:ln w="12700">
+            <a:solidFill>
+              <a:srgbClr val="E2E8F0"/>
+            </a:solidFill>
+          </a:ln>
+        </p:spPr>
+        <p:style>
+          <a:lnRef idx="1">
+            <a:schemeClr val="accent1"/>
+          </a:lnRef>
+          <a:fillRef idx="3">
+            <a:schemeClr val="accent1"/>
+          </a:fillRef>
+          <a:effectRef idx="2">
+            <a:schemeClr val="accent1"/>
+          </a:effectRef>
+          <a:fontRef idx="minor">
+            <a:schemeClr val="lt1"/>
+          </a:fontRef>
+        </p:style>
+        <p:txBody>
+          <a:bodyPr rtlCol="0" anchor="ctr" wrap="square" lIns="182880" rIns="182880" tIns="182880" bIns="137160"/>
+          <a:lstStyle/>
+          <a:p>
+            <a:pPr algn="ctr">
+              <a:spcAft>
+                <a:spcPts val="200"/>
+              </a:spcAft>
+              <a:defRPr sz="1050" b="1">
                 <a:solidFill>
                   <a:srgbClr val="0284C7"/>
                 </a:solidFill>
@@ -5932,48 +8281,217 @@
               </a:defRPr>
             </a:pPr>
             <a:r>
-              <a:t>SIGIR - BCRP: Sistema de Gestión de Incidentes Regulatorios para Pagos Digitales</a:t>
+              <a:t>FORMATO REGULATORIO</a:t>
             </a:r>
           </a:p>
           <a:p>
             <a:pPr algn="ctr">
               <a:spcAft>
-                <a:spcPts val="2000"/>
-              </a:spcAft>
-              <a:defRPr sz="1400">
-                <a:solidFill>
-                  <a:srgbClr val="64748B"/>
-                </a:solidFill>
-                <a:latin typeface="Calibri"/>
-              </a:defRPr>
-            </a:pPr>
-            <a:r>
-              <a:t>Prototipo de Telemetría y Supervisión Continua de Pagos Interoperables (APF1)</a:t>
+                <a:spcPts val="300"/>
+              </a:spcAft>
+              <a:defRPr sz="1250" b="1">
+                <a:solidFill>
+                  <a:srgbClr val="0B1F3A"/>
+                </a:solidFill>
+                <a:latin typeface="Calibri"/>
+              </a:defRPr>
+            </a:pPr>
+            <a:r>
+              <a:t>Archivo Normativo SFT</a:t>
             </a:r>
           </a:p>
           <a:p>
             <a:pPr algn="ctr">
               <a:spcAft>
-                <a:spcPts val="1600"/>
-              </a:spcAft>
-              <a:defRPr sz="1500" b="1">
-                <a:solidFill>
-                  <a:srgbClr val="0F172A"/>
-                </a:solidFill>
-                <a:latin typeface="Calibri"/>
-              </a:defRPr>
-            </a:pPr>
-            <a:r>
-              <a:t>Quedamos a su entera disposición, profesor Ing. Yony Zamata Condori,</a:t>
+                <a:spcPts val="600"/>
+              </a:spcAft>
+              <a:defRPr sz="1000" b="1">
+                <a:solidFill>
+                  <a:srgbClr val="475569"/>
+                </a:solidFill>
+                <a:latin typeface="Calibri"/>
+              </a:defRPr>
+            </a:pPr>
+            <a:r>
+              <a:t>Estructura Oficial Pipe Delimited</a:t>
+            </a:r>
+          </a:p>
+          <a:p>
+            <a:pPr algn="left">
+              <a:spcAft>
+                <a:spcPts val="400"/>
+              </a:spcAft>
+              <a:defRPr sz="950">
+                <a:solidFill>
+                  <a:srgbClr val="334155"/>
+                </a:solidFill>
+                <a:latin typeface="Calibri"/>
+              </a:defRPr>
+            </a:pPr>
+            <a:r>
+              <a:t>• Segmento 01 (Cabecera):</a:t>
             </a:r>
             <a:br/>
             <a:r>
-              <a:t>para responder a satisfacción todas las preguntas técnicas del jurado.</a:t>
-            </a:r>
-          </a:p>
+              <a:t>  Código sistema, periodo (YYYYMM), RUC supervisora y mesa reguladora BCRP.</a:t>
+            </a:r>
+          </a:p>
+          <a:p>
+            <a:pPr algn="left">
+              <a:spcAft>
+                <a:spcPts val="400"/>
+              </a:spcAft>
+              <a:defRPr sz="950">
+                <a:solidFill>
+                  <a:srgbClr val="334155"/>
+                </a:solidFill>
+                <a:latin typeface="Calibri"/>
+              </a:defRPr>
+            </a:pPr>
+            <a:r>
+              <a:t>• Segmento 02 (Detalle Contingencias):</a:t>
+            </a:r>
+            <a:br/>
+            <a:r>
+              <a:t>  Correlativo ticket, entidad afectada, tipo evento, timestamps y duración min.</a:t>
+            </a:r>
+          </a:p>
+          <a:p>
+            <a:pPr algn="left">
+              <a:spcAft>
+                <a:spcPts val="400"/>
+              </a:spcAft>
+              <a:defRPr sz="950">
+                <a:solidFill>
+                  <a:srgbClr val="334155"/>
+                </a:solidFill>
+                <a:latin typeface="Calibri"/>
+              </a:defRPr>
+            </a:pPr>
+            <a:r>
+              <a:t>• Segmento 03 (Pie Criptográfico):</a:t>
+            </a:r>
+            <a:br/>
+            <a:r>
+              <a:t>  Total registros, minutos sumados y firma digital SHA-256 de 64 hex.</a:t>
+            </a:r>
+          </a:p>
+          <a:p>
+            <a:pPr algn="left">
+              <a:spcAft>
+                <a:spcPts val="400"/>
+              </a:spcAft>
+              <a:defRPr sz="950">
+                <a:solidFill>
+                  <a:srgbClr val="334155"/>
+                </a:solidFill>
+                <a:latin typeface="Calibri"/>
+              </a:defRPr>
+            </a:pPr>
+            <a:r>
+              <a:t>• Garantía de No Repudio:</a:t>
+            </a:r>
+            <a:br/>
+            <a:r>
+              <a:t>  Cualquier alteración en el TXT invalida el hash criptográfico del pie.</a:t>
+            </a:r>
+          </a:p>
+        </p:txBody>
+      </p:sp>
+      <p:sp>
+        <p:nvSpPr>
+          <p:cNvPr id="8" name="Rounded Rectangle 7"/>
+          <p:cNvSpPr/>
+          <p:nvPr/>
+        </p:nvSpPr>
+        <p:spPr>
+          <a:xfrm>
+            <a:off x="8046720" y="1417320"/>
+            <a:ext cx="3410712" cy="5074920"/>
+          </a:xfrm>
+          <a:prstGeom prst="roundRect">
+            <a:avLst/>
+          </a:prstGeom>
+          <a:solidFill>
+            <a:srgbClr val="FFFFFF"/>
+          </a:solidFill>
+          <a:ln w="12700">
+            <a:solidFill>
+              <a:srgbClr val="E2E8F0"/>
+            </a:solidFill>
+          </a:ln>
+        </p:spPr>
+        <p:style>
+          <a:lnRef idx="1">
+            <a:schemeClr val="accent1"/>
+          </a:lnRef>
+          <a:fillRef idx="3">
+            <a:schemeClr val="accent1"/>
+          </a:fillRef>
+          <a:effectRef idx="2">
+            <a:schemeClr val="accent1"/>
+          </a:effectRef>
+          <a:fontRef idx="minor">
+            <a:schemeClr val="lt1"/>
+          </a:fontRef>
+        </p:style>
+        <p:txBody>
+          <a:bodyPr rtlCol="0" anchor="ctr" wrap="square" lIns="182880" rIns="182880" tIns="182880" bIns="137160"/>
+          <a:lstStyle/>
           <a:p>
             <a:pPr algn="ctr">
-              <a:defRPr sz="1300" b="1">
+              <a:spcAft>
+                <a:spcPts val="200"/>
+              </a:spcAft>
+              <a:defRPr sz="1050" b="1">
+                <a:solidFill>
+                  <a:srgbClr val="0284C7"/>
+                </a:solidFill>
+                <a:latin typeface="Calibri"/>
+              </a:defRPr>
+            </a:pPr>
+            <a:r>
+              <a:t>ARQUITECTURA API REST</a:t>
+            </a:r>
+          </a:p>
+          <a:p>
+            <a:pPr algn="ctr">
+              <a:spcAft>
+                <a:spcPts val="300"/>
+              </a:spcAft>
+              <a:defRPr sz="1250" b="1">
+                <a:solidFill>
+                  <a:srgbClr val="0B1F3A"/>
+                </a:solidFill>
+                <a:latin typeface="Calibri"/>
+              </a:defRPr>
+            </a:pPr>
+            <a:r>
+              <a:t>Endpoints Analíticos</a:t>
+            </a:r>
+          </a:p>
+          <a:p>
+            <a:pPr algn="ctr">
+              <a:spcAft>
+                <a:spcPts val="600"/>
+              </a:spcAft>
+              <a:defRPr sz="1000" b="1">
+                <a:solidFill>
+                  <a:srgbClr val="475569"/>
+                </a:solidFill>
+                <a:latin typeface="Calibri"/>
+              </a:defRPr>
+            </a:pPr>
+            <a:r>
+              <a:t>Integración Consola NOC &amp; Swagger</a:t>
+            </a:r>
+          </a:p>
+          <a:p>
+            <a:pPr algn="left">
+              <a:spcAft>
+                <a:spcPts val="400"/>
+              </a:spcAft>
+              <a:defRPr sz="950">
                 <a:solidFill>
                   <a:srgbClr val="334155"/>
                 </a:solidFill>
@@ -5981,11 +8499,71 @@
               </a:defRPr>
             </a:pPr>
             <a:r>
-              <a:t>Frank Vargas (Líder Técnico)  •  Fernando Romero  •  Joel Olaya  •  Luis Tapia</a:t>
+              <a:t>• GET /api/reportes/indisponibilidad:</a:t>
             </a:r>
             <a:br/>
             <a:r>
-              <a:t>Sección 57524 • 2026</a:t>
+              <a:t>  Consolidado mensual con filtros por entidad, rango de fechas y severidad.</a:t>
+            </a:r>
+          </a:p>
+          <a:p>
+            <a:pPr algn="left">
+              <a:spcAft>
+                <a:spcPts val="400"/>
+              </a:spcAft>
+              <a:defRPr sz="950">
+                <a:solidFill>
+                  <a:srgbClr val="334155"/>
+                </a:solidFill>
+                <a:latin typeface="Calibri"/>
+              </a:defRPr>
+            </a:pPr>
+            <a:r>
+              <a:t>• GET /api/reportes/kpis-dashboard:</a:t>
+            </a:r>
+            <a:br/>
+            <a:r>
+              <a:t>  Uptime global, incidentes activos y estado de salud en tiempo real.</a:t>
+            </a:r>
+          </a:p>
+          <a:p>
+            <a:pPr algn="left">
+              <a:spcAft>
+                <a:spcPts val="400"/>
+              </a:spcAft>
+              <a:defRPr sz="950">
+                <a:solidFill>
+                  <a:srgbClr val="334155"/>
+                </a:solidFill>
+                <a:latin typeface="Calibri"/>
+              </a:defRPr>
+            </a:pPr>
+            <a:r>
+              <a:t>• GET /api/reportes/sft/compilar:</a:t>
+            </a:r>
+            <a:br/>
+            <a:r>
+              <a:t>  Generación atómica y descarga del archivo plano listo para mesa BCRP.</a:t>
+            </a:r>
+          </a:p>
+          <a:p>
+            <a:pPr algn="left">
+              <a:spcAft>
+                <a:spcPts val="400"/>
+              </a:spcAft>
+              <a:defRPr sz="950">
+                <a:solidFill>
+                  <a:srgbClr val="334155"/>
+                </a:solidFill>
+                <a:latin typeface="Calibri"/>
+              </a:defRPr>
+            </a:pPr>
+            <a:r>
+              <a:t>• Documentación OpenAPI 3.0:</a:t>
+            </a:r>
+            <a:br/>
+            <a:r>
+              <a:t>  100% testeable en /swagger-ui.html.</a:t>
             </a:r>
           </a:p>
         </p:txBody>
@@ -6666,6 +9244,727 @@
 </p:sld>
 </file>
 
+<file path=ppt/slides/slide20.xml><?xml version="1.0" encoding="utf-8"?>
+<p:sld xmlns:a="http://schemas.openxmlformats.org/drawingml/2006/main" xmlns:p="http://schemas.openxmlformats.org/presentationml/2006/main" xmlns:r="http://schemas.openxmlformats.org/officeDocument/2006/relationships">
+  <p:cSld>
+    <p:spTree>
+      <p:nvGrpSpPr>
+        <p:cNvPr id="1" name=""/>
+        <p:cNvGrpSpPr/>
+        <p:nvPr/>
+      </p:nvGrpSpPr>
+      <p:grpSpPr/>
+      <p:sp>
+        <p:nvSpPr>
+          <p:cNvPr id="2" name="Rectangle 1"/>
+          <p:cNvSpPr/>
+          <p:nvPr/>
+        </p:nvSpPr>
+        <p:spPr>
+          <a:xfrm>
+            <a:off x="0" y="0"/>
+            <a:ext cx="12191695" cy="6858000"/>
+          </a:xfrm>
+          <a:prstGeom prst="rect">
+            <a:avLst/>
+          </a:prstGeom>
+          <a:solidFill>
+            <a:srgbClr val="F8FAFC"/>
+          </a:solidFill>
+          <a:ln>
+            <a:noFill/>
+          </a:ln>
+        </p:spPr>
+        <p:style>
+          <a:lnRef idx="1">
+            <a:schemeClr val="accent1"/>
+          </a:lnRef>
+          <a:fillRef idx="3">
+            <a:schemeClr val="accent1"/>
+          </a:fillRef>
+          <a:effectRef idx="2">
+            <a:schemeClr val="accent1"/>
+          </a:effectRef>
+          <a:fontRef idx="minor">
+            <a:schemeClr val="lt1"/>
+          </a:fontRef>
+        </p:style>
+        <p:txBody>
+          <a:bodyPr rtlCol="0" anchor="ctr"/>
+          <a:lstStyle/>
+          <a:p>
+            <a:pPr algn="ctr"/>
+          </a:p>
+        </p:txBody>
+      </p:sp>
+      <p:sp>
+        <p:nvSpPr>
+          <p:cNvPr id="3" name="Rounded Rectangle 2"/>
+          <p:cNvSpPr/>
+          <p:nvPr/>
+        </p:nvSpPr>
+        <p:spPr>
+          <a:xfrm>
+            <a:off x="731520" y="320040"/>
+            <a:ext cx="10728655" cy="987552"/>
+          </a:xfrm>
+          <a:prstGeom prst="roundRect">
+            <a:avLst/>
+          </a:prstGeom>
+          <a:solidFill>
+            <a:srgbClr val="FFFFFF"/>
+          </a:solidFill>
+          <a:ln w="12700">
+            <a:solidFill>
+              <a:srgbClr val="E2E8F0"/>
+            </a:solidFill>
+          </a:ln>
+        </p:spPr>
+        <p:style>
+          <a:lnRef idx="1">
+            <a:schemeClr val="accent1"/>
+          </a:lnRef>
+          <a:fillRef idx="3">
+            <a:schemeClr val="accent1"/>
+          </a:fillRef>
+          <a:effectRef idx="2">
+            <a:schemeClr val="accent1"/>
+          </a:effectRef>
+          <a:fontRef idx="minor">
+            <a:schemeClr val="lt1"/>
+          </a:fontRef>
+        </p:style>
+        <p:txBody>
+          <a:bodyPr rtlCol="0" anchor="ctr"/>
+          <a:lstStyle/>
+          <a:p>
+            <a:pPr algn="ctr"/>
+          </a:p>
+        </p:txBody>
+      </p:sp>
+      <p:sp>
+        <p:nvSpPr>
+          <p:cNvPr id="4" name="Rounded Rectangle 3"/>
+          <p:cNvSpPr/>
+          <p:nvPr/>
+        </p:nvSpPr>
+        <p:spPr>
+          <a:xfrm>
+            <a:off x="731520" y="320040"/>
+            <a:ext cx="128016" cy="987552"/>
+          </a:xfrm>
+          <a:prstGeom prst="roundRect">
+            <a:avLst/>
+          </a:prstGeom>
+          <a:solidFill>
+            <a:srgbClr val="0284C7"/>
+          </a:solidFill>
+          <a:ln>
+            <a:noFill/>
+          </a:ln>
+        </p:spPr>
+        <p:style>
+          <a:lnRef idx="1">
+            <a:schemeClr val="accent1"/>
+          </a:lnRef>
+          <a:fillRef idx="3">
+            <a:schemeClr val="accent1"/>
+          </a:fillRef>
+          <a:effectRef idx="2">
+            <a:schemeClr val="accent1"/>
+          </a:effectRef>
+          <a:fontRef idx="minor">
+            <a:schemeClr val="lt1"/>
+          </a:fontRef>
+        </p:style>
+        <p:txBody>
+          <a:bodyPr rtlCol="0" anchor="ctr"/>
+          <a:lstStyle/>
+          <a:p>
+            <a:pPr algn="ctr"/>
+          </a:p>
+        </p:txBody>
+      </p:sp>
+      <p:sp>
+        <p:nvSpPr>
+          <p:cNvPr id="5" name="TextBox 4"/>
+          <p:cNvSpPr txBox="1"/>
+          <p:nvPr/>
+        </p:nvSpPr>
+        <p:spPr>
+          <a:xfrm>
+            <a:off x="1051560" y="347472"/>
+            <a:ext cx="10149840" cy="914400"/>
+          </a:xfrm>
+          <a:prstGeom prst="rect">
+            <a:avLst/>
+          </a:prstGeom>
+          <a:noFill/>
+        </p:spPr>
+        <p:txBody>
+          <a:bodyPr wrap="square" lIns="0" tIns="0" rIns="0" bIns="0">
+            <a:spAutoFit/>
+          </a:bodyPr>
+          <a:lstStyle/>
+          <a:p>
+            <a:pPr>
+              <a:defRPr sz="1100" b="1">
+                <a:solidFill>
+                  <a:srgbClr val="0284C7"/>
+                </a:solidFill>
+                <a:latin typeface="Calibri"/>
+              </a:defRPr>
+            </a:pPr>
+            <a:r>
+              <a:t>SUSTENTACIÓN ORAL APF2 • RÚBRICA 20/20</a:t>
+            </a:r>
+          </a:p>
+          <a:p>
+            <a:pPr>
+              <a:defRPr sz="1600" b="1">
+                <a:solidFill>
+                  <a:srgbClr val="0F172A"/>
+                </a:solidFill>
+                <a:latin typeface="Calibri"/>
+              </a:defRPr>
+            </a:pPr>
+            <a:r>
+              <a:t>Defensa Ejecutiva: Guion de 10 Minutos Equitativo (Solo 3 Integrantes)</a:t>
+            </a:r>
+          </a:p>
+          <a:p>
+            <a:pPr>
+              <a:defRPr sz="1050">
+                <a:solidFill>
+                  <a:srgbClr val="64748B"/>
+                </a:solidFill>
+                <a:latin typeface="Calibri"/>
+              </a:defRPr>
+            </a:pPr>
+            <a:r>
+              <a:t>Distribución estratégica del tiempo para la presentación ante el jurado e Ing. Yony Zamata Condori</a:t>
+            </a:r>
+          </a:p>
+        </p:txBody>
+      </p:sp>
+      <p:sp>
+        <p:nvSpPr>
+          <p:cNvPr id="6" name="Rounded Rectangle 5"/>
+          <p:cNvSpPr/>
+          <p:nvPr/>
+        </p:nvSpPr>
+        <p:spPr>
+          <a:xfrm>
+            <a:off x="731520" y="1417320"/>
+            <a:ext cx="3410712" cy="5074920"/>
+          </a:xfrm>
+          <a:prstGeom prst="roundRect">
+            <a:avLst/>
+          </a:prstGeom>
+          <a:solidFill>
+            <a:srgbClr val="FFFFFF"/>
+          </a:solidFill>
+          <a:ln w="12700">
+            <a:solidFill>
+              <a:srgbClr val="E2E8F0"/>
+            </a:solidFill>
+          </a:ln>
+        </p:spPr>
+        <p:style>
+          <a:lnRef idx="1">
+            <a:schemeClr val="accent1"/>
+          </a:lnRef>
+          <a:fillRef idx="3">
+            <a:schemeClr val="accent1"/>
+          </a:fillRef>
+          <a:effectRef idx="2">
+            <a:schemeClr val="accent1"/>
+          </a:effectRef>
+          <a:fontRef idx="minor">
+            <a:schemeClr val="lt1"/>
+          </a:fontRef>
+        </p:style>
+        <p:txBody>
+          <a:bodyPr rtlCol="0" anchor="ctr" wrap="square" lIns="182880" rIns="182880" tIns="182880" bIns="137160"/>
+          <a:lstStyle/>
+          <a:p>
+            <a:pPr algn="ctr">
+              <a:spcAft>
+                <a:spcPts val="200"/>
+              </a:spcAft>
+              <a:defRPr sz="1050" b="1">
+                <a:solidFill>
+                  <a:srgbClr val="0284C7"/>
+                </a:solidFill>
+                <a:latin typeface="Calibri"/>
+              </a:defRPr>
+            </a:pPr>
+            <a:r>
+              <a:t>BLOQUE 1 • 00:00 - 03:00</a:t>
+            </a:r>
+          </a:p>
+          <a:p>
+            <a:pPr algn="ctr">
+              <a:spcAft>
+                <a:spcPts val="300"/>
+              </a:spcAft>
+              <a:defRPr sz="1250" b="1">
+                <a:solidFill>
+                  <a:srgbClr val="0B1F3A"/>
+                </a:solidFill>
+                <a:latin typeface="Calibri"/>
+              </a:defRPr>
+            </a:pPr>
+            <a:r>
+              <a:t>Fernando Romero</a:t>
+            </a:r>
+          </a:p>
+          <a:p>
+            <a:pPr algn="ctr">
+              <a:spcAft>
+                <a:spcPts val="600"/>
+              </a:spcAft>
+              <a:defRPr sz="1000" b="1">
+                <a:solidFill>
+                  <a:srgbClr val="475569"/>
+                </a:solidFill>
+                <a:latin typeface="Calibri"/>
+              </a:defRPr>
+            </a:pPr>
+            <a:r>
+              <a:t>Ingeniero de Requisitos &amp; Procesos</a:t>
+            </a:r>
+          </a:p>
+          <a:p>
+            <a:pPr algn="left">
+              <a:spcAft>
+                <a:spcPts val="400"/>
+              </a:spcAft>
+              <a:defRPr sz="950">
+                <a:solidFill>
+                  <a:srgbClr val="334155"/>
+                </a:solidFill>
+                <a:latin typeface="Calibri"/>
+              </a:defRPr>
+            </a:pPr>
+            <a:r>
+              <a:t>• Marco Institucional del BCRP:</a:t>
+            </a:r>
+            <a:br/>
+            <a:r>
+              <a:t>  Leyes N° 26123 y N° 29440 sobre el Sistema Nacional de Pagos.</a:t>
+            </a:r>
+          </a:p>
+          <a:p>
+            <a:pPr algn="left">
+              <a:spcAft>
+                <a:spcPts val="400"/>
+              </a:spcAft>
+              <a:defRPr sz="950">
+                <a:solidFill>
+                  <a:srgbClr val="334155"/>
+                </a:solidFill>
+                <a:latin typeface="Calibri"/>
+              </a:defRPr>
+            </a:pPr>
+            <a:r>
+              <a:t>• Circular BCRP N° 0011-2023:</a:t>
+            </a:r>
+            <a:br/>
+            <a:r>
+              <a:t>  Interoperabilidad de pagos (Yape, Plim, Tunki, CCE) y contingencias.</a:t>
+            </a:r>
+          </a:p>
+          <a:p>
+            <a:pPr algn="left">
+              <a:spcAft>
+                <a:spcPts val="400"/>
+              </a:spcAft>
+              <a:defRPr sz="950">
+                <a:solidFill>
+                  <a:srgbClr val="334155"/>
+                </a:solidFill>
+                <a:latin typeface="Calibri"/>
+              </a:defRPr>
+            </a:pPr>
+            <a:r>
+              <a:t>• Problemática Real:</a:t>
+            </a:r>
+            <a:br/>
+            <a:r>
+              <a:t>  Asimetría informativa y demoras de hasta 180 min ante caídas bancarias.</a:t>
+            </a:r>
+          </a:p>
+          <a:p>
+            <a:pPr algn="left">
+              <a:spcAft>
+                <a:spcPts val="400"/>
+              </a:spcAft>
+              <a:defRPr sz="950">
+                <a:solidFill>
+                  <a:srgbClr val="334155"/>
+                </a:solidFill>
+                <a:latin typeface="Calibri"/>
+              </a:defRPr>
+            </a:pPr>
+            <a:r>
+              <a:t>• Propuesta de Valor BMC:</a:t>
+            </a:r>
+            <a:br/>
+            <a:r>
+              <a:t>  Detección telemétrica en &lt; 30 seg, trazabilidad y observabilidad pública.</a:t>
+            </a:r>
+          </a:p>
+        </p:txBody>
+      </p:sp>
+      <p:sp>
+        <p:nvSpPr>
+          <p:cNvPr id="7" name="Rounded Rectangle 6"/>
+          <p:cNvSpPr/>
+          <p:nvPr/>
+        </p:nvSpPr>
+        <p:spPr>
+          <a:xfrm>
+            <a:off x="4389120" y="1417320"/>
+            <a:ext cx="3410712" cy="5074920"/>
+          </a:xfrm>
+          <a:prstGeom prst="roundRect">
+            <a:avLst/>
+          </a:prstGeom>
+          <a:solidFill>
+            <a:srgbClr val="FFFFFF"/>
+          </a:solidFill>
+          <a:ln w="12700">
+            <a:solidFill>
+              <a:srgbClr val="E2E8F0"/>
+            </a:solidFill>
+          </a:ln>
+        </p:spPr>
+        <p:style>
+          <a:lnRef idx="1">
+            <a:schemeClr val="accent1"/>
+          </a:lnRef>
+          <a:fillRef idx="3">
+            <a:schemeClr val="accent1"/>
+          </a:fillRef>
+          <a:effectRef idx="2">
+            <a:schemeClr val="accent1"/>
+          </a:effectRef>
+          <a:fontRef idx="minor">
+            <a:schemeClr val="lt1"/>
+          </a:fontRef>
+        </p:style>
+        <p:txBody>
+          <a:bodyPr rtlCol="0" anchor="ctr" wrap="square" lIns="182880" rIns="182880" tIns="182880" bIns="137160"/>
+          <a:lstStyle/>
+          <a:p>
+            <a:pPr algn="ctr">
+              <a:spcAft>
+                <a:spcPts val="200"/>
+              </a:spcAft>
+              <a:defRPr sz="1050" b="1">
+                <a:solidFill>
+                  <a:srgbClr val="0284C7"/>
+                </a:solidFill>
+                <a:latin typeface="Calibri"/>
+              </a:defRPr>
+            </a:pPr>
+            <a:r>
+              <a:t>BLOQUE 2 • 03:00 - 07:00</a:t>
+            </a:r>
+          </a:p>
+          <a:p>
+            <a:pPr algn="ctr">
+              <a:spcAft>
+                <a:spcPts val="300"/>
+              </a:spcAft>
+              <a:defRPr sz="1250" b="1">
+                <a:solidFill>
+                  <a:srgbClr val="0B1F3A"/>
+                </a:solidFill>
+                <a:latin typeface="Calibri"/>
+              </a:defRPr>
+            </a:pPr>
+            <a:r>
+              <a:t>Frank Vargas</a:t>
+            </a:r>
+          </a:p>
+          <a:p>
+            <a:pPr algn="ctr">
+              <a:spcAft>
+                <a:spcPts val="600"/>
+              </a:spcAft>
+              <a:defRPr sz="1000" b="1">
+                <a:solidFill>
+                  <a:srgbClr val="475569"/>
+                </a:solidFill>
+                <a:latin typeface="Calibri"/>
+              </a:defRPr>
+            </a:pPr>
+            <a:r>
+              <a:t>Líder Técnico &amp; Arquitecto de Software</a:t>
+            </a:r>
+          </a:p>
+          <a:p>
+            <a:pPr algn="left">
+              <a:spcAft>
+                <a:spcPts val="400"/>
+              </a:spcAft>
+              <a:defRPr sz="950">
+                <a:solidFill>
+                  <a:srgbClr val="334155"/>
+                </a:solidFill>
+                <a:latin typeface="Calibri"/>
+              </a:defRPr>
+            </a:pPr>
+            <a:r>
+              <a:t>• 3 Alternativas TIC (&gt;= 50% Java):</a:t>
+            </a:r>
+            <a:br/>
+            <a:r>
+              <a:t>  Justificación de la Alternativa 2 (Clean API + SPA NOC) con 4.97 pts.</a:t>
+            </a:r>
+          </a:p>
+          <a:p>
+            <a:pPr algn="left">
+              <a:spcAft>
+                <a:spcPts val="400"/>
+              </a:spcAft>
+              <a:defRPr sz="950">
+                <a:solidFill>
+                  <a:srgbClr val="334155"/>
+                </a:solidFill>
+                <a:latin typeface="Calibri"/>
+              </a:defRPr>
+            </a:pPr>
+            <a:r>
+              <a:t>• Galería de 15 Mockups:</a:t>
+            </a:r>
+            <a:br/>
+            <a:r>
+              <a:t>  Demostración de los 5 paneles diseñados por cada alternativa.</a:t>
+            </a:r>
+          </a:p>
+          <a:p>
+            <a:pPr algn="left">
+              <a:spcAft>
+                <a:spcPts val="400"/>
+              </a:spcAft>
+              <a:defRPr sz="950">
+                <a:solidFill>
+                  <a:srgbClr val="334155"/>
+                </a:solidFill>
+                <a:latin typeface="Calibri"/>
+              </a:defRPr>
+            </a:pPr>
+            <a:r>
+              <a:t>• Persistencia DER PostgreSQL 15:</a:t>
+            </a:r>
+            <a:br/>
+            <a:r>
+              <a:t>  6 tablas normalizadas, triggers append-only e índice anti-carreras.</a:t>
+            </a:r>
+          </a:p>
+          <a:p>
+            <a:pPr algn="left">
+              <a:spcAft>
+                <a:spcPts val="400"/>
+              </a:spcAft>
+              <a:defRPr sz="950">
+                <a:solidFill>
+                  <a:srgbClr val="334155"/>
+                </a:solidFill>
+                <a:latin typeface="Calibri"/>
+              </a:defRPr>
+            </a:pPr>
+            <a:r>
+              <a:t>• Clases de Diseño en Spring Boot 3:</a:t>
+            </a:r>
+            <a:br/>
+            <a:r>
+              <a:t>  Inyección de dependencias, desacoplamiento hexagonal y seguridad RBAC.</a:t>
+            </a:r>
+          </a:p>
+        </p:txBody>
+      </p:sp>
+      <p:sp>
+        <p:nvSpPr>
+          <p:cNvPr id="8" name="Rounded Rectangle 7"/>
+          <p:cNvSpPr/>
+          <p:nvPr/>
+        </p:nvSpPr>
+        <p:spPr>
+          <a:xfrm>
+            <a:off x="8046720" y="1417320"/>
+            <a:ext cx="3410712" cy="5074920"/>
+          </a:xfrm>
+          <a:prstGeom prst="roundRect">
+            <a:avLst/>
+          </a:prstGeom>
+          <a:solidFill>
+            <a:srgbClr val="FFFFFF"/>
+          </a:solidFill>
+          <a:ln w="12700">
+            <a:solidFill>
+              <a:srgbClr val="E2E8F0"/>
+            </a:solidFill>
+          </a:ln>
+        </p:spPr>
+        <p:style>
+          <a:lnRef idx="1">
+            <a:schemeClr val="accent1"/>
+          </a:lnRef>
+          <a:fillRef idx="3">
+            <a:schemeClr val="accent1"/>
+          </a:fillRef>
+          <a:effectRef idx="2">
+            <a:schemeClr val="accent1"/>
+          </a:effectRef>
+          <a:fontRef idx="minor">
+            <a:schemeClr val="lt1"/>
+          </a:fontRef>
+        </p:style>
+        <p:txBody>
+          <a:bodyPr rtlCol="0" anchor="ctr" wrap="square" lIns="182880" rIns="182880" tIns="182880" bIns="137160"/>
+          <a:lstStyle/>
+          <a:p>
+            <a:pPr algn="ctr">
+              <a:spcAft>
+                <a:spcPts val="200"/>
+              </a:spcAft>
+              <a:defRPr sz="1050" b="1">
+                <a:solidFill>
+                  <a:srgbClr val="0284C7"/>
+                </a:solidFill>
+                <a:latin typeface="Calibri"/>
+              </a:defRPr>
+            </a:pPr>
+            <a:r>
+              <a:t>BLOQUE 3 • 07:00 - 10:00</a:t>
+            </a:r>
+          </a:p>
+          <a:p>
+            <a:pPr algn="ctr">
+              <a:spcAft>
+                <a:spcPts val="300"/>
+              </a:spcAft>
+              <a:defRPr sz="1250" b="1">
+                <a:solidFill>
+                  <a:srgbClr val="0B1F3A"/>
+                </a:solidFill>
+                <a:latin typeface="Calibri"/>
+              </a:defRPr>
+            </a:pPr>
+            <a:r>
+              <a:t>Joel Olaya</a:t>
+            </a:r>
+          </a:p>
+          <a:p>
+            <a:pPr algn="ctr">
+              <a:spcAft>
+                <a:spcPts val="600"/>
+              </a:spcAft>
+              <a:defRPr sz="1000" b="1">
+                <a:solidFill>
+                  <a:srgbClr val="475569"/>
+                </a:solidFill>
+                <a:latin typeface="Calibri"/>
+              </a:defRPr>
+            </a:pPr>
+            <a:r>
+              <a:t>Ingeniero de Software &amp; QA</a:t>
+            </a:r>
+          </a:p>
+          <a:p>
+            <a:pPr algn="left">
+              <a:spcAft>
+                <a:spcPts val="400"/>
+              </a:spcAft>
+              <a:defRPr sz="950">
+                <a:solidFill>
+                  <a:srgbClr val="334155"/>
+                </a:solidFill>
+                <a:latin typeface="Calibri"/>
+              </a:defRPr>
+            </a:pPr>
+            <a:r>
+              <a:t>• Live Demo Consola NOC Web:</a:t>
+            </a:r>
+            <a:br/>
+            <a:r>
+              <a:t>  Login AD, barra de telemetría en vivo e inyección de contingencia 503.</a:t>
+            </a:r>
+          </a:p>
+          <a:p>
+            <a:pPr algn="left">
+              <a:spcAft>
+                <a:spcPts val="400"/>
+              </a:spcAft>
+              <a:defRPr sz="950">
+                <a:solidFill>
+                  <a:srgbClr val="334155"/>
+                </a:solidFill>
+                <a:latin typeface="Calibri"/>
+              </a:defRPr>
+            </a:pPr>
+            <a:r>
+              <a:t>• Creación Atómica de Incidentes:</a:t>
+            </a:r>
+            <a:br/>
+            <a:r>
+              <a:t>  Generación de ticket INC-YYYYMMDD-XXXXX y semáforo rojo en 30 seg.</a:t>
+            </a:r>
+          </a:p>
+          <a:p>
+            <a:pPr algn="left">
+              <a:spcAft>
+                <a:spcPts val="400"/>
+              </a:spcAft>
+              <a:defRPr sz="950">
+                <a:solidFill>
+                  <a:srgbClr val="334155"/>
+                </a:solidFill>
+                <a:latin typeface="Calibri"/>
+              </a:defRPr>
+            </a:pPr>
+            <a:r>
+              <a:t>• Suite Automatizada JUnit 5:</a:t>
+            </a:r>
+            <a:br/>
+            <a:r>
+              <a:t>  8/8 pruebas unitarias pasadas con Mockito en 4.8 segundos.</a:t>
+            </a:r>
+          </a:p>
+          <a:p>
+            <a:pPr algn="left">
+              <a:spcAft>
+                <a:spcPts val="400"/>
+              </a:spcAft>
+              <a:defRPr sz="950">
+                <a:solidFill>
+                  <a:srgbClr val="334155"/>
+                </a:solidFill>
+                <a:latin typeface="Calibri"/>
+              </a:defRPr>
+            </a:pPr>
+            <a:r>
+              <a:t>• Compilador Normativo SFT BCRP:</a:t>
+            </a:r>
+            <a:br/>
+            <a:r>
+              <a:t>  Generación del reporte de indisponibilidad y sellado criptográfico SHA-256.</a:t>
+            </a:r>
+          </a:p>
+        </p:txBody>
+      </p:sp>
+    </p:spTree>
+  </p:cSld>
+  <p:clrMapOvr>
+    <a:masterClrMapping/>
+  </p:clrMapOvr>
+</p:sld>
+</file>
+
 <file path=ppt/slides/slide3.xml><?xml version="1.0" encoding="utf-8"?>
 <p:sld xmlns:a="http://schemas.openxmlformats.org/drawingml/2006/main" xmlns:p="http://schemas.openxmlformats.org/presentationml/2006/main" xmlns:r="http://schemas.openxmlformats.org/officeDocument/2006/relationships">
   <p:cSld>
@@ -8351,7 +11650,7 @@
               </a:defRPr>
             </a:pPr>
             <a:r>
-              <a:t>Frank Emiliano Vargas Huamán (Líder Técnico):</a:t>
+              <a:t>Frank Emiliano Vargas Huamán (Líder Técnico &amp; Arquitecto):</a:t>
             </a:r>
           </a:p>
           <a:p>
@@ -8367,11 +11666,7 @@
               </a:defRPr>
             </a:pPr>
             <a:r>
-              <a:t>• Accountable (A) en Arquitectura Hexagonal y DDL SQL.</a:t>
-            </a:r>
-            <a:br/>
-            <a:r>
-              <a:t>• Responsible (R) en Backend Java 17, Spring Boot 3 y Docker.</a:t>
+              <a:t>• Accountable (A) y Responsible (R) en Arquitectura Hexagonal, Modelado DDL PostgreSQL 15, Core Java 17, Spring Boot 3 y Docker Compose.</a:t>
             </a:r>
           </a:p>
           <a:p>
@@ -8387,7 +11682,7 @@
               </a:defRPr>
             </a:pPr>
             <a:r>
-              <a:t>Fernando Alber Alfredo Romero Requejo:</a:t>
+              <a:t>Fernando Alber Alfredo Romero Requejo (Ingeniero de Requisitos):</a:t>
             </a:r>
           </a:p>
           <a:p>
@@ -8403,11 +11698,7 @@
               </a:defRPr>
             </a:pPr>
             <a:r>
-              <a:t>• Responsible (R) en Levantamiento SRS IEEE 830 y BPMN.</a:t>
-            </a:r>
-            <a:br/>
-            <a:r>
-              <a:t>• Consulted (C) en Casos de Uso y Reglas de Negocio.</a:t>
+              <a:t>• Responsible (R) en Levantamiento SRS IEEE 830 y Procesos BPMN 2.0. • Consulted (C) en Casos de Uso UML 2.5 y Reglas Normativas BCRP.</a:t>
             </a:r>
           </a:p>
           <a:p>
@@ -8423,7 +11714,7 @@
               </a:defRPr>
             </a:pPr>
             <a:r>
-              <a:t>Joel Leonardo Olaya Vivas:</a:t>
+              <a:t>Joel Leonardo Olaya Vivas (Ingeniero de Software &amp; QA):</a:t>
             </a:r>
           </a:p>
           <a:p>
@@ -8439,47 +11730,7 @@
               </a:defRPr>
             </a:pPr>
             <a:r>
-              <a:t>• Responsible (R) en Suite de Pruebas Unitarias JUnit 5.</a:t>
-            </a:r>
-            <a:br/>
-            <a:r>
-              <a:t>• Consulted (C) en Pruebas de Carga y Validación QA.</a:t>
-            </a:r>
-          </a:p>
-          <a:p>
-            <a:pPr>
-              <a:spcAft>
-                <a:spcPts val="200"/>
-              </a:spcAft>
-              <a:defRPr sz="1300" b="1">
-                <a:solidFill>
-                  <a:srgbClr val="0B1F3A"/>
-                </a:solidFill>
-                <a:latin typeface="Calibri"/>
-              </a:defRPr>
-            </a:pPr>
-            <a:r>
-              <a:t>Luis Tapia Ignacio:</a:t>
-            </a:r>
-          </a:p>
-          <a:p>
-            <a:pPr>
-              <a:spcAft>
-                <a:spcPts val="600"/>
-              </a:spcAft>
-              <a:defRPr sz="1200">
-                <a:solidFill>
-                  <a:srgbClr val="334155"/>
-                </a:solidFill>
-                <a:latin typeface="Calibri"/>
-              </a:defRPr>
-            </a:pPr>
-            <a:r>
-              <a:t>• Responsible (R) en Modelado de Datos y Script DDL Inmutable.</a:t>
-            </a:r>
-            <a:br/>
-            <a:r>
-              <a:t>• Informed (I) en Despliegue y Pruebas en Vivo.</a:t>
+              <a:t>• Responsible (R) en Suite JUnit 5 / Mockito (8/8 tests). • Responsible (R) en Módulo de Reportes de Indisponibilidad y Compilador SFT BCRP con SHA-256.</a:t>
             </a:r>
           </a:p>
         </p:txBody>

--- a/01_DOCUMENTACION_TECNICA/PRESENTACION_EJECUTIVA_APF1.pptx
+++ b/01_DOCUMENTACION_TECNICA/PRESENTACION_EJECUTIVA_APF1.pptx
@@ -3797,7 +3797,7 @@
               </a:defRPr>
             </a:pPr>
             <a:r>
-              <a:t>CRITERIO 5 DE RÚBRICA • 4.0 PUNTOS</a:t>
+              <a:t>CRITERIO 4 DE RÚBRICA • 6.0 PUNTOS</a:t>
             </a:r>
           </a:p>
           <a:p>
@@ -3813,7 +3813,7 @@
               </a:defRPr>
             </a:pPr>
             <a:r>
-              <a:t>Arquitectura Hexagonal en Java 17 y PostgreSQL Inmutable</a:t>
+              <a:t>Diagrama de Casos de Uso del Sistema (UML 2.5)</a:t>
             </a:r>
           </a:p>
           <a:p>
@@ -3826,7 +3826,7 @@
               </a:defRPr>
             </a:pPr>
             <a:r>
-              <a:t>Clean Architecture con principios SOLID e inmutabilidad garantizada a nivel de motor de base de datos</a:t>
+              <a:t>Modelado visual de la interacción entre los 4 actores y los casos de uso normativos del sistema</a:t>
             </a:r>
           </a:p>
         </p:txBody>
@@ -3850,7 +3850,7 @@
           </a:solidFill>
           <a:ln w="22860">
             <a:solidFill>
-              <a:srgbClr val="60A5FA"/>
+              <a:srgbClr val="38BDF8"/>
             </a:solidFill>
           </a:ln>
         </p:spPr>
@@ -3878,7 +3878,7 @@
       </p:sp>
       <p:pic>
         <p:nvPicPr>
-          <p:cNvPr id="7" name="Picture 6" descr="figura6_arquitectura_hexagonal.png"/>
+          <p:cNvPr id="7" name="Picture 6" descr="figura2_casos_de_uso.png"/>
           <p:cNvPicPr>
             <a:picLocks noChangeAspect="1"/>
           </p:cNvPicPr>
@@ -3892,8 +3892,8 @@
         </p:blipFill>
         <p:spPr>
           <a:xfrm>
-            <a:off x="1517904" y="1545336"/>
-            <a:ext cx="9144000" cy="3990109"/>
+            <a:off x="2066543" y="1490472"/>
+            <a:ext cx="8046720" cy="3704046"/>
           </a:xfrm>
           <a:prstGeom prst="rect">
             <a:avLst/>
@@ -3950,7 +3950,7 @@
               </a:defRPr>
             </a:pPr>
             <a:r>
-              <a:t>DOMINIO JAVA 17 PURO</a:t>
+              <a:t>4 ACTORES ROBUSTOS</a:t>
             </a:r>
           </a:p>
           <a:p>
@@ -3963,7 +3963,7 @@
               </a:defRPr>
             </a:pPr>
             <a:r>
-              <a:t>Entidades desacopladas de frameworks. Puertos IIncidenteService y repositorios.</a:t>
+              <a:t>Operador NOC, Worker Telemetría, Supervisor BCRP y Administrador TI.</a:t>
             </a:r>
           </a:p>
         </p:txBody>
@@ -4018,7 +4018,7 @@
               </a:defRPr>
             </a:pPr>
             <a:r>
-              <a:t>TRIGGER POSTGRESQL INMUTABLE</a:t>
+              <a:t>LÍMITES DEL SISTEMA</a:t>
             </a:r>
           </a:p>
           <a:p>
@@ -4031,7 +4031,7 @@
               </a:defRPr>
             </a:pPr>
             <a:r>
-              <a:t>trg_prohibir_mutacion_historial bloquea UPDATE/DELETE con RAISE EXCEPTION.</a:t>
+              <a:t>Aislamiento estricto de las entidades supervisadas vs el core del BCRP.</a:t>
             </a:r>
           </a:p>
         </p:txBody>
@@ -4086,7 +4086,7 @@
               </a:defRPr>
             </a:pPr>
             <a:r>
-              <a:t>INTEGRIDAD CRIPTOGRÁFICA</a:t>
+              <a:t>TRAZABILIDAD 100%</a:t>
             </a:r>
           </a:p>
           <a:p>
@@ -4099,7 +4099,7 @@
               </a:defRPr>
             </a:pPr>
             <a:r>
-              <a:t>Compilador normativo SFT sella cada archivo con firma digital SHA-256.</a:t>
+              <a:t>Cada caso de uso mapea directamente con los 12 RFs del estándar IEEE 830.</a:t>
             </a:r>
           </a:p>
         </p:txBody>
@@ -4287,7 +4287,7 @@
               </a:defRPr>
             </a:pPr>
             <a:r>
-              <a:t>CRITERIO 6 DE RÚBRICA • 2.0 PUNTOS</a:t>
+              <a:t>CRITERIO 5 DE RÚBRICA • 4.0 PUNTOS</a:t>
             </a:r>
           </a:p>
           <a:p>
@@ -4303,7 +4303,7 @@
               </a:defRPr>
             </a:pPr>
             <a:r>
-              <a:t>Demostración Práctica en Vivo: Consola NOC Web</a:t>
+              <a:t>Modelado de Procesos de Negocio en Notación BPMN 2.0</a:t>
             </a:r>
           </a:p>
           <a:p>
@@ -4316,7 +4316,7 @@
               </a:defRPr>
             </a:pPr>
             <a:r>
-              <a:t>Verificación en tiempo real de los requerimientos funcionales y telemetría de pagos interoperables</a:t>
+              <a:t>Optimización de Flujo: De un proceso manual reactivo (180 min) a detección autónoma en &lt; 30 segundos</a:t>
             </a:r>
           </a:p>
         </p:txBody>
@@ -4340,7 +4340,7 @@
           </a:solidFill>
           <a:ln w="22860">
             <a:solidFill>
-              <a:srgbClr val="38BDF8"/>
+              <a:srgbClr val="34D399"/>
             </a:solidFill>
           </a:ln>
         </p:spPr>
@@ -4368,7 +4368,7 @@
       </p:sp>
       <p:pic>
         <p:nvPicPr>
-          <p:cNvPr id="7" name="Picture 6" descr="figura7_dashboard_noc_web.png"/>
+          <p:cNvPr id="7" name="Picture 6" descr="figura1_bpmn_flujo_proceso.png"/>
           <p:cNvPicPr>
             <a:picLocks noChangeAspect="1"/>
           </p:cNvPicPr>
@@ -4382,8 +4382,8 @@
         </p:blipFill>
         <p:spPr>
           <a:xfrm>
-            <a:off x="2523744" y="1490472"/>
-            <a:ext cx="7132320" cy="4011930"/>
+            <a:off x="3346704" y="1508760"/>
+            <a:ext cx="5492930" cy="3977639"/>
           </a:xfrm>
           <a:prstGeom prst="rect">
             <a:avLst/>
@@ -4440,7 +4440,7 @@
               </a:defRPr>
             </a:pPr>
             <a:r>
-              <a:t>1. SESIÓN AD CORPORATIVA</a:t>
+              <a:t>SONDEO ASÍNCRONO (30s)</a:t>
             </a:r>
           </a:p>
           <a:p>
@@ -4453,7 +4453,7 @@
               </a:defRPr>
             </a:pPr>
             <a:r>
-              <a:t>Login único con dominio AD\frank.vargas (Rol NOC_LEAD).</a:t>
+              <a:t>Worker paralelo consulta endpoints sin bloquear el thread principal.</a:t>
             </a:r>
           </a:p>
         </p:txBody>
@@ -4508,7 +4508,7 @@
               </a:defRPr>
             </a:pPr>
             <a:r>
-              <a:t>2. TELEMETRÍA EN VIVO</a:t>
+              <a:t>REGLA RN-01 ANTI-DUPLICADOS</a:t>
             </a:r>
           </a:p>
           <a:p>
@@ -4521,7 +4521,7 @@
               </a:defRPr>
             </a:pPr>
             <a:r>
-              <a:t>Sondeo de Yape, Plim, Tunki y CCE con semáforos activos.</a:t>
+              <a:t>Si ya existe incidente abierto, acumula telemetría sin generar alertas falsas.</a:t>
             </a:r>
           </a:p>
         </p:txBody>
@@ -4576,7 +4576,7 @@
               </a:defRPr>
             </a:pPr>
             <a:r>
-              <a:t>3. SIMULACIÓN &amp; REPORTE SFT</a:t>
+              <a:t>ERRADICACIÓN DE ASIMETRÍA</a:t>
             </a:r>
           </a:p>
           <a:p>
@@ -4589,7 +4589,7 @@
               </a:defRPr>
             </a:pPr>
             <a:r>
-              <a:t>Inyección de caída 503 y descarga de archivo normativo SHA-256.</a:t>
+              <a:t>Se eliminan las llamadas y demoras de 3 horas; alerta inmediata en consola NOC.</a:t>
             </a:r>
           </a:p>
         </p:txBody>
@@ -4777,7 +4777,7 @@
               </a:defRPr>
             </a:pPr>
             <a:r>
-              <a:t>CRITERIO 6 DE RÚBRICA • 2.0 PUNTOS</a:t>
+              <a:t>CRITERIO 5 DE RÚBRICA • 4.0 PUNTOS</a:t>
             </a:r>
           </a:p>
           <a:p>
@@ -4793,7 +4793,7 @@
               </a:defRPr>
             </a:pPr>
             <a:r>
-              <a:t>Suite de Pruebas Automatizadas Backend (JUnit 5 &amp; Mockito)</a:t>
+              <a:t>Arquitectura Hexagonal en Java 17 y PostgreSQL Inmutable</a:t>
             </a:r>
           </a:p>
           <a:p>
@@ -4806,7 +4806,7 @@
               </a:defRPr>
             </a:pPr>
             <a:r>
-              <a:t>Validación rigurosa de lógica de dominio, reglas de negocio y compilador SFT con 100% de éxito</a:t>
+              <a:t>Clean Architecture con principios SOLID e inmutabilidad garantizada a nivel de motor de base de datos</a:t>
             </a:r>
           </a:p>
         </p:txBody>
@@ -4819,8 +4819,77 @@
         </p:nvSpPr>
         <p:spPr>
           <a:xfrm>
-            <a:off x="731520" y="1508760"/>
-            <a:ext cx="5212080" cy="4892040"/>
+            <a:off x="731520" y="1417320"/>
+            <a:ext cx="10728655" cy="4160520"/>
+          </a:xfrm>
+          <a:prstGeom prst="roundRect">
+            <a:avLst/>
+          </a:prstGeom>
+          <a:solidFill>
+            <a:srgbClr val="0F172A"/>
+          </a:solidFill>
+          <a:ln w="22860">
+            <a:solidFill>
+              <a:srgbClr val="60A5FA"/>
+            </a:solidFill>
+          </a:ln>
+        </p:spPr>
+        <p:style>
+          <a:lnRef idx="1">
+            <a:schemeClr val="accent1"/>
+          </a:lnRef>
+          <a:fillRef idx="3">
+            <a:schemeClr val="accent1"/>
+          </a:fillRef>
+          <a:effectRef idx="2">
+            <a:schemeClr val="accent1"/>
+          </a:effectRef>
+          <a:fontRef idx="minor">
+            <a:schemeClr val="lt1"/>
+          </a:fontRef>
+        </p:style>
+        <p:txBody>
+          <a:bodyPr rtlCol="0" anchor="ctr"/>
+          <a:lstStyle/>
+          <a:p>
+            <a:pPr algn="ctr"/>
+          </a:p>
+        </p:txBody>
+      </p:sp>
+      <p:pic>
+        <p:nvPicPr>
+          <p:cNvPr id="7" name="Picture 6" descr="figura6_arquitectura_hexagonal.png"/>
+          <p:cNvPicPr>
+            <a:picLocks noChangeAspect="1"/>
+          </p:cNvPicPr>
+          <p:nvPr/>
+        </p:nvPicPr>
+        <p:blipFill>
+          <a:blip r:embed="rId2"/>
+          <a:stretch>
+            <a:fillRect/>
+          </a:stretch>
+        </p:blipFill>
+        <p:spPr>
+          <a:xfrm>
+            <a:off x="1517904" y="1545336"/>
+            <a:ext cx="9144000" cy="3990109"/>
+          </a:xfrm>
+          <a:prstGeom prst="rect">
+            <a:avLst/>
+          </a:prstGeom>
+        </p:spPr>
+      </p:pic>
+      <p:sp>
+        <p:nvSpPr>
+          <p:cNvPr id="8" name="Rounded Rectangle 7"/>
+          <p:cNvSpPr/>
+          <p:nvPr/>
+        </p:nvSpPr>
+        <p:spPr>
+          <a:xfrm>
+            <a:off x="731520" y="5715000"/>
+            <a:ext cx="3447288" cy="777240"/>
           </a:xfrm>
           <a:prstGeom prst="roundRect">
             <a:avLst/>
@@ -4849,43 +4918,24 @@
           </a:fontRef>
         </p:style>
         <p:txBody>
-          <a:bodyPr rtlCol="0" anchor="t" wrap="square" tIns="182880" lIns="228600"/>
+          <a:bodyPr rtlCol="0" anchor="t" wrap="square" tIns="91440" lIns="164592"/>
           <a:lstStyle/>
           <a:p>
             <a:pPr algn="ctr">
-              <a:spcAft>
-                <a:spcPts val="800"/>
-              </a:spcAft>
-              <a:defRPr sz="1500" b="1">
-                <a:solidFill>
-                  <a:srgbClr val="0284C7"/>
-                </a:solidFill>
-                <a:latin typeface="Calibri"/>
-              </a:defRPr>
-            </a:pPr>
-            <a:r>
-              <a:t>🧪 8 PRUEBAS UNITARIAS DE INTEGRACIÓN</a:t>
-            </a:r>
-          </a:p>
-          <a:p>
-            <a:pPr>
-              <a:defRPr sz="1200" b="1">
-                <a:solidFill>
-                  <a:srgbClr val="0F172A"/>
-                </a:solidFill>
-                <a:latin typeface="Calibri"/>
-              </a:defRPr>
-            </a:pPr>
-            <a:r>
-              <a:t>✓ 1. IncidenteServiceTest.crearIncidente()</a:t>
-            </a:r>
-          </a:p>
-          <a:p>
-            <a:pPr>
-              <a:spcAft>
-                <a:spcPts val="200"/>
-              </a:spcAft>
-              <a:defRPr sz="1100">
+              <a:defRPr sz="1250" b="1">
+                <a:solidFill>
+                  <a:srgbClr val="0B1F3A"/>
+                </a:solidFill>
+                <a:latin typeface="Calibri"/>
+              </a:defRPr>
+            </a:pPr>
+            <a:r>
+              <a:t>DOMINIO JAVA 17 PURO</a:t>
+            </a:r>
+          </a:p>
+          <a:p>
+            <a:pPr>
+              <a:defRPr sz="1150">
                 <a:solidFill>
                   <a:srgbClr val="334155"/>
                 </a:solidFill>
@@ -4893,28 +4943,67 @@
               </a:defRPr>
             </a:pPr>
             <a:r>
-              <a:t>   Valida creación de incidente y regla RN-01.</a:t>
-            </a:r>
-          </a:p>
-          <a:p>
-            <a:pPr>
-              <a:defRPr sz="1200" b="1">
-                <a:solidFill>
-                  <a:srgbClr val="0F172A"/>
-                </a:solidFill>
-                <a:latin typeface="Calibri"/>
-              </a:defRPr>
-            </a:pPr>
-            <a:r>
-              <a:t>✓ 2. IncidenteServiceTest.actualizarEstado()</a:t>
-            </a:r>
-          </a:p>
-          <a:p>
-            <a:pPr>
-              <a:spcAft>
-                <a:spcPts val="200"/>
-              </a:spcAft>
-              <a:defRPr sz="1100">
+              <a:t>Entidades desacopladas de frameworks. Puertos IIncidenteService y repositorios.</a:t>
+            </a:r>
+          </a:p>
+        </p:txBody>
+      </p:sp>
+      <p:sp>
+        <p:nvSpPr>
+          <p:cNvPr id="9" name="Rounded Rectangle 8"/>
+          <p:cNvSpPr/>
+          <p:nvPr/>
+        </p:nvSpPr>
+        <p:spPr>
+          <a:xfrm>
+            <a:off x="4361688" y="5715000"/>
+            <a:ext cx="3447288" cy="777240"/>
+          </a:xfrm>
+          <a:prstGeom prst="roundRect">
+            <a:avLst/>
+          </a:prstGeom>
+          <a:solidFill>
+            <a:srgbClr val="FFFFFF"/>
+          </a:solidFill>
+          <a:ln w="25400">
+            <a:solidFill>
+              <a:srgbClr val="FCD34D"/>
+            </a:solidFill>
+          </a:ln>
+        </p:spPr>
+        <p:style>
+          <a:lnRef idx="1">
+            <a:schemeClr val="accent1"/>
+          </a:lnRef>
+          <a:fillRef idx="3">
+            <a:schemeClr val="accent1"/>
+          </a:fillRef>
+          <a:effectRef idx="2">
+            <a:schemeClr val="accent1"/>
+          </a:effectRef>
+          <a:fontRef idx="minor">
+            <a:schemeClr val="lt1"/>
+          </a:fontRef>
+        </p:style>
+        <p:txBody>
+          <a:bodyPr rtlCol="0" anchor="t" wrap="square" tIns="91440" lIns="164592"/>
+          <a:lstStyle/>
+          <a:p>
+            <a:pPr algn="ctr">
+              <a:defRPr sz="1250" b="1">
+                <a:solidFill>
+                  <a:srgbClr val="0B1F3A"/>
+                </a:solidFill>
+                <a:latin typeface="Calibri"/>
+              </a:defRPr>
+            </a:pPr>
+            <a:r>
+              <a:t>TRIGGER POSTGRESQL INMUTABLE</a:t>
+            </a:r>
+          </a:p>
+          <a:p>
+            <a:pPr>
+              <a:defRPr sz="1150">
                 <a:solidFill>
                   <a:srgbClr val="334155"/>
                 </a:solidFill>
@@ -4922,195 +5011,21 @@
               </a:defRPr>
             </a:pPr>
             <a:r>
-              <a:t>   Valida transiciones de la máquina de estados.</a:t>
-            </a:r>
-          </a:p>
-          <a:p>
-            <a:pPr>
-              <a:defRPr sz="1200" b="1">
-                <a:solidFill>
-                  <a:srgbClr val="0F172A"/>
-                </a:solidFill>
-                <a:latin typeface="Calibri"/>
-              </a:defRPr>
-            </a:pPr>
-            <a:r>
-              <a:t>✓ 3. IncidenteValidationTest.validarCampos()</a:t>
-            </a:r>
-          </a:p>
-          <a:p>
-            <a:pPr>
-              <a:spcAft>
-                <a:spcPts val="200"/>
-              </a:spcAft>
-              <a:defRPr sz="1100">
-                <a:solidFill>
-                  <a:srgbClr val="334155"/>
-                </a:solidFill>
-                <a:latin typeface="Calibri"/>
-              </a:defRPr>
-            </a:pPr>
-            <a:r>
-              <a:t>   Valida que descripción y severidad no sean nulos.</a:t>
-            </a:r>
-          </a:p>
-          <a:p>
-            <a:pPr>
-              <a:defRPr sz="1200" b="1">
-                <a:solidFill>
-                  <a:srgbClr val="0F172A"/>
-                </a:solidFill>
-                <a:latin typeface="Calibri"/>
-              </a:defRPr>
-            </a:pPr>
-            <a:r>
-              <a:t>✓ 4. SftCompilerTest.compilarArchivoSft()</a:t>
-            </a:r>
-          </a:p>
-          <a:p>
-            <a:pPr>
-              <a:spcAft>
-                <a:spcPts val="200"/>
-              </a:spcAft>
-              <a:defRPr sz="1100">
-                <a:solidFill>
-                  <a:srgbClr val="334155"/>
-                </a:solidFill>
-                <a:latin typeface="Calibri"/>
-              </a:defRPr>
-            </a:pPr>
-            <a:r>
-              <a:t>   Verifica estructura cabecera 01, detalle 02, pie 03.</a:t>
-            </a:r>
-          </a:p>
-          <a:p>
-            <a:pPr>
-              <a:defRPr sz="1200" b="1">
-                <a:solidFill>
-                  <a:srgbClr val="0F172A"/>
-                </a:solidFill>
-                <a:latin typeface="Calibri"/>
-              </a:defRPr>
-            </a:pPr>
-            <a:r>
-              <a:t>✓ 5. SftCompilerTest.verificarHashSha256()</a:t>
-            </a:r>
-          </a:p>
-          <a:p>
-            <a:pPr>
-              <a:spcAft>
-                <a:spcPts val="200"/>
-              </a:spcAft>
-              <a:defRPr sz="1100">
-                <a:solidFill>
-                  <a:srgbClr val="334155"/>
-                </a:solidFill>
-                <a:latin typeface="Calibri"/>
-              </a:defRPr>
-            </a:pPr>
-            <a:r>
-              <a:t>   Comprueba digest de 64 hex en el pie del archivo.</a:t>
-            </a:r>
-          </a:p>
-          <a:p>
-            <a:pPr>
-              <a:defRPr sz="1200" b="1">
-                <a:solidFill>
-                  <a:srgbClr val="0F172A"/>
-                </a:solidFill>
-                <a:latin typeface="Calibri"/>
-              </a:defRPr>
-            </a:pPr>
-            <a:r>
-              <a:t>✓ 6. TelemetryWorkerTest.procesarFalla()</a:t>
-            </a:r>
-          </a:p>
-          <a:p>
-            <a:pPr>
-              <a:spcAft>
-                <a:spcPts val="200"/>
-              </a:spcAft>
-              <a:defRPr sz="1100">
-                <a:solidFill>
-                  <a:srgbClr val="334155"/>
-                </a:solidFill>
-                <a:latin typeface="Calibri"/>
-              </a:defRPr>
-            </a:pPr>
-            <a:r>
-              <a:t>   Simula error 503 y auto-generación de ticket.</a:t>
-            </a:r>
-          </a:p>
-          <a:p>
-            <a:pPr>
-              <a:defRPr sz="1200" b="1">
-                <a:solidFill>
-                  <a:srgbClr val="0F172A"/>
-                </a:solidFill>
-                <a:latin typeface="Calibri"/>
-              </a:defRPr>
-            </a:pPr>
-            <a:r>
-              <a:t>✓ 7. TelemetryWorkerTest.sondeoExitoso()</a:t>
-            </a:r>
-          </a:p>
-          <a:p>
-            <a:pPr>
-              <a:spcAft>
-                <a:spcPts val="200"/>
-              </a:spcAft>
-              <a:defRPr sz="1100">
-                <a:solidFill>
-                  <a:srgbClr val="334155"/>
-                </a:solidFill>
-                <a:latin typeface="Calibri"/>
-              </a:defRPr>
-            </a:pPr>
-            <a:r>
-              <a:t>   Verifica actualización de latencia sin crear ticket.</a:t>
-            </a:r>
-          </a:p>
-          <a:p>
-            <a:pPr>
-              <a:defRPr sz="1200" b="1">
-                <a:solidFill>
-                  <a:srgbClr val="0F172A"/>
-                </a:solidFill>
-                <a:latin typeface="Calibri"/>
-              </a:defRPr>
-            </a:pPr>
-            <a:r>
-              <a:t>✓ 8. SecurityAuthTest.validarSesionAD()</a:t>
-            </a:r>
-          </a:p>
-          <a:p>
-            <a:pPr>
-              <a:spcAft>
-                <a:spcPts val="200"/>
-              </a:spcAft>
-              <a:defRPr sz="1100">
-                <a:solidFill>
-                  <a:srgbClr val="334155"/>
-                </a:solidFill>
-                <a:latin typeface="Calibri"/>
-              </a:defRPr>
-            </a:pPr>
-            <a:r>
-              <a:t>   Valida autenticación única corporativa LDAP.</a:t>
-            </a:r>
-          </a:p>
-        </p:txBody>
-      </p:sp>
-      <p:sp>
-        <p:nvSpPr>
-          <p:cNvPr id="7" name="Rounded Rectangle 6"/>
+              <a:t>trg_prohibir_mutacion_historial bloquea UPDATE/DELETE con RAISE EXCEPTION.</a:t>
+            </a:r>
+          </a:p>
+        </p:txBody>
+      </p:sp>
+      <p:sp>
+        <p:nvSpPr>
+          <p:cNvPr id="10" name="Rounded Rectangle 9"/>
           <p:cNvSpPr/>
           <p:nvPr/>
         </p:nvSpPr>
         <p:spPr>
           <a:xfrm>
-            <a:off x="6217920" y="1508760"/>
-            <a:ext cx="5242255" cy="4892040"/>
+            <a:off x="7991856" y="5715000"/>
+            <a:ext cx="3447288" cy="777240"/>
           </a:xfrm>
           <a:prstGeom prst="roundRect">
             <a:avLst/>
@@ -5139,30 +5054,11 @@
           </a:fontRef>
         </p:style>
         <p:txBody>
-          <a:bodyPr rtlCol="0" anchor="t" wrap="square" tIns="182880" lIns="228600"/>
+          <a:bodyPr rtlCol="0" anchor="t" wrap="square" tIns="91440" lIns="164592"/>
           <a:lstStyle/>
           <a:p>
             <a:pPr algn="ctr">
-              <a:spcAft>
-                <a:spcPts val="800"/>
-              </a:spcAft>
-              <a:defRPr sz="1500" b="1">
-                <a:solidFill>
-                  <a:srgbClr val="059669"/>
-                </a:solidFill>
-                <a:latin typeface="Calibri"/>
-              </a:defRPr>
-            </a:pPr>
-            <a:r>
-              <a:t>📊 MÉTRICAS DE CALIDAD Y EJECUCIÓN MAVEN</a:t>
-            </a:r>
-          </a:p>
-          <a:p>
-            <a:pPr>
-              <a:spcAft>
-                <a:spcPts val="200"/>
-              </a:spcAft>
-              <a:defRPr sz="1300" b="1">
+              <a:defRPr sz="1250" b="1">
                 <a:solidFill>
                   <a:srgbClr val="0B1F3A"/>
                 </a:solidFill>
@@ -5170,15 +5066,12 @@
               </a:defRPr>
             </a:pPr>
             <a:r>
-              <a:t>• Resultado del Build Oficial Maven:</a:t>
-            </a:r>
-          </a:p>
-          <a:p>
-            <a:pPr>
-              <a:spcAft>
-                <a:spcPts val="600"/>
-              </a:spcAft>
-              <a:defRPr sz="1200">
+              <a:t>INTEGRIDAD CRIPTOGRÁFICA</a:t>
+            </a:r>
+          </a:p>
+          <a:p>
+            <a:pPr>
+              <a:defRPr sz="1150">
                 <a:solidFill>
                   <a:srgbClr val="334155"/>
                 </a:solidFill>
@@ -5186,111 +5079,7 @@
               </a:defRPr>
             </a:pPr>
             <a:r>
-              <a:t>[INFO] BUILD SUCCESS</a:t>
-            </a:r>
-            <a:br/>
-            <a:r>
-              <a:t>[INFO] Total time: 4.823 s</a:t>
-            </a:r>
-            <a:br/>
-            <a:r>
-              <a:t>[INFO] Tests run: 8, Failures: 0, Errors: 0, Skipped: 0</a:t>
-            </a:r>
-          </a:p>
-          <a:p>
-            <a:pPr>
-              <a:spcAft>
-                <a:spcPts val="200"/>
-              </a:spcAft>
-              <a:defRPr sz="1300" b="1">
-                <a:solidFill>
-                  <a:srgbClr val="0B1F3A"/>
-                </a:solidFill>
-                <a:latin typeface="Calibri"/>
-              </a:defRPr>
-            </a:pPr>
-            <a:r>
-              <a:t>• Cobertura de Código en Capa de Dominio:</a:t>
-            </a:r>
-          </a:p>
-          <a:p>
-            <a:pPr>
-              <a:spcAft>
-                <a:spcPts val="600"/>
-              </a:spcAft>
-              <a:defRPr sz="1200">
-                <a:solidFill>
-                  <a:srgbClr val="334155"/>
-                </a:solidFill>
-                <a:latin typeface="Calibri"/>
-              </a:defRPr>
-            </a:pPr>
-            <a:r>
-              <a:t>&gt; 85% de cobertura de ramas y líneas evaluado con JaCoCo.</a:t>
-            </a:r>
-          </a:p>
-          <a:p>
-            <a:pPr>
-              <a:spcAft>
-                <a:spcPts val="200"/>
-              </a:spcAft>
-              <a:defRPr sz="1300" b="1">
-                <a:solidFill>
-                  <a:srgbClr val="0B1F3A"/>
-                </a:solidFill>
-                <a:latin typeface="Calibri"/>
-              </a:defRPr>
-            </a:pPr>
-            <a:r>
-              <a:t>• Aislamiento de Capas:</a:t>
-            </a:r>
-          </a:p>
-          <a:p>
-            <a:pPr>
-              <a:spcAft>
-                <a:spcPts val="600"/>
-              </a:spcAft>
-              <a:defRPr sz="1200">
-                <a:solidFill>
-                  <a:srgbClr val="334155"/>
-                </a:solidFill>
-                <a:latin typeface="Calibri"/>
-              </a:defRPr>
-            </a:pPr>
-            <a:r>
-              <a:t>Los tests unitarios utilizan mocks de Mockito sobre los puertos, garantizando que el dominio Java 17 no requiera base de datos levantada para ejecutarse.</a:t>
-            </a:r>
-          </a:p>
-          <a:p>
-            <a:pPr>
-              <a:spcAft>
-                <a:spcPts val="200"/>
-              </a:spcAft>
-              <a:defRPr sz="1300" b="1">
-                <a:solidFill>
-                  <a:srgbClr val="0B1F3A"/>
-                </a:solidFill>
-                <a:latin typeface="Calibri"/>
-              </a:defRPr>
-            </a:pPr>
-            <a:r>
-              <a:t>• Integración Continua (CI):</a:t>
-            </a:r>
-          </a:p>
-          <a:p>
-            <a:pPr>
-              <a:spcAft>
-                <a:spcPts val="600"/>
-              </a:spcAft>
-              <a:defRPr sz="1200">
-                <a:solidFill>
-                  <a:srgbClr val="334155"/>
-                </a:solidFill>
-                <a:latin typeface="Calibri"/>
-              </a:defRPr>
-            </a:pPr>
-            <a:r>
-              <a:t>La suite de pruebas corre automáticamente en cada commit a la rama main de GitHub.</a:t>
+              <a:t>Compilador normativo SFT sella cada archivo con firma digital SHA-256.</a:t>
             </a:r>
           </a:p>
         </p:txBody>
@@ -5358,7 +5147,7 @@
       </p:sp>
       <p:sp>
         <p:nvSpPr>
-          <p:cNvPr id="3" name="Rectangle 2"/>
+          <p:cNvPr id="3" name="Rounded Rectangle 2"/>
           <p:cNvSpPr/>
           <p:nvPr/>
         </p:nvSpPr>
@@ -5367,15 +5156,15 @@
             <a:off x="731520" y="320040"/>
             <a:ext cx="10728655" cy="987552"/>
           </a:xfrm>
-          <a:prstGeom prst="rect">
+          <a:prstGeom prst="roundRect">
             <a:avLst/>
           </a:prstGeom>
           <a:solidFill>
             <a:srgbClr val="FFFFFF"/>
           </a:solidFill>
-          <a:ln w="19050">
+          <a:ln w="12700">
             <a:solidFill>
-              <a:srgbClr val="CBD5E1"/>
+              <a:srgbClr val="E2E8F0"/>
             </a:solidFill>
           </a:ln>
         </p:spPr>
@@ -5403,7 +5192,7 @@
       </p:sp>
       <p:sp>
         <p:nvSpPr>
-          <p:cNvPr id="4" name="Rectangle 3"/>
+          <p:cNvPr id="4" name="Rounded Rectangle 3"/>
           <p:cNvSpPr/>
           <p:nvPr/>
         </p:nvSpPr>
@@ -5412,7 +5201,7 @@
             <a:off x="731520" y="320040"/>
             <a:ext cx="128016" cy="987552"/>
           </a:xfrm>
-          <a:prstGeom prst="rect">
+          <a:prstGeom prst="roundRect">
             <a:avLst/>
           </a:prstGeom>
           <a:solidFill>
@@ -5461,16 +5250,13 @@
           <a:noFill/>
         </p:spPr>
         <p:txBody>
-          <a:bodyPr wrap="square" lIns="0" tIns="0" rIns="0" bIns="0" anchor="t">
+          <a:bodyPr wrap="square" lIns="0" tIns="0" rIns="0" bIns="0">
             <a:spAutoFit/>
           </a:bodyPr>
           <a:lstStyle/>
           <a:p>
             <a:pPr>
-              <a:spcAft>
-                <a:spcPts val="200"/>
-              </a:spcAft>
-              <a:defRPr sz="1150" b="1">
+              <a:defRPr sz="1100" b="1">
                 <a:solidFill>
                   <a:srgbClr val="0284C7"/>
                 </a:solidFill>
@@ -5478,28 +5264,25 @@
               </a:defRPr>
             </a:pPr>
             <a:r>
-              <a:t>CIERRE ACADÉMICO</a:t>
-            </a:r>
-          </a:p>
-          <a:p>
-            <a:pPr>
-              <a:spcAft>
-                <a:spcPts val="200"/>
-              </a:spcAft>
-              <a:defRPr sz="2200" b="1">
-                <a:solidFill>
-                  <a:srgbClr val="0B1F3A"/>
-                </a:solidFill>
-                <a:latin typeface="Calibri"/>
-              </a:defRPr>
-            </a:pPr>
-            <a:r>
-              <a:t>Conclusiones del Proyecto y Hoja de Ruta Etapa 02</a:t>
-            </a:r>
-          </a:p>
-          <a:p>
-            <a:pPr>
-              <a:defRPr sz="1200">
+              <a:t>CRITERIO 5 DE RÚBRICA • 4.0 PUNTOS</a:t>
+            </a:r>
+          </a:p>
+          <a:p>
+            <a:pPr>
+              <a:defRPr sz="1600" b="1">
+                <a:solidFill>
+                  <a:srgbClr val="0F172A"/>
+                </a:solidFill>
+                <a:latin typeface="Calibri"/>
+              </a:defRPr>
+            </a:pPr>
+            <a:r>
+              <a:t>Diagrama Entidad-Relación (DER) Físico y Lógico en PostgreSQL 15</a:t>
+            </a:r>
+          </a:p>
+          <a:p>
+            <a:pPr>
+              <a:defRPr sz="1050">
                 <a:solidFill>
                   <a:srgbClr val="64748B"/>
                 </a:solidFill>
@@ -5507,7 +5290,7 @@
               </a:defRPr>
             </a:pPr>
             <a:r>
-              <a:t>Cumplimiento del 100% de los criterios de rúbrica y preparación para el Avance Final (APF2)</a:t>
+              <a:t>Modelo de persistencia con ruteo ortogonal, inmutabilidad append-only y capítulo formal de seguridad en base de datos</a:t>
             </a:r>
           </a:p>
         </p:txBody>
@@ -5520,18 +5303,18 @@
         </p:nvSpPr>
         <p:spPr>
           <a:xfrm>
-            <a:off x="731520" y="1508760"/>
-            <a:ext cx="3413455" cy="4892040"/>
+            <a:off x="731520" y="1389888"/>
+            <a:ext cx="10728655" cy="3977639"/>
           </a:xfrm>
           <a:prstGeom prst="roundRect">
             <a:avLst/>
           </a:prstGeom>
           <a:solidFill>
-            <a:srgbClr val="FFFFFF"/>
-          </a:solidFill>
-          <a:ln w="27940">
+            <a:srgbClr val="0F172A"/>
+          </a:solidFill>
+          <a:ln w="12700">
             <a:solidFill>
-              <a:srgbClr val="93C5FD"/>
+              <a:srgbClr val="1E293B"/>
             </a:solidFill>
           </a:ln>
         </p:spPr>
@@ -5550,49 +5333,47 @@
           </a:fontRef>
         </p:style>
         <p:txBody>
-          <a:bodyPr rtlCol="0" anchor="t" wrap="square" tIns="182880" lIns="182880"/>
-          <a:lstStyle/>
-          <a:p>
-            <a:pPr algn="ctr">
-              <a:spcAft>
-                <a:spcPts val="800"/>
-              </a:spcAft>
-              <a:defRPr sz="1500" b="1">
-                <a:solidFill>
-                  <a:srgbClr val="0B1F3A"/>
-                </a:solidFill>
-                <a:latin typeface="Calibri"/>
-              </a:defRPr>
-            </a:pPr>
-            <a:r>
-              <a:t>1. ERRADICACIÓN DE ASIMETRÍA</a:t>
-            </a:r>
-          </a:p>
-          <a:p>
-            <a:pPr>
-              <a:defRPr sz="1300">
-                <a:solidFill>
-                  <a:srgbClr val="334155"/>
-                </a:solidFill>
-                <a:latin typeface="Calibri"/>
-              </a:defRPr>
-            </a:pPr>
-            <a:r>
-              <a:t>Se redujo el tiempo de detección de contingencias de 180 minutos a menos de 30 segundos, salvaguardando la estabilidad del Sistema Nacional de Pagos ante caídas masivas de Yape o Plim.</a:t>
-            </a:r>
-          </a:p>
-        </p:txBody>
-      </p:sp>
-      <p:sp>
-        <p:nvSpPr>
-          <p:cNvPr id="7" name="Rounded Rectangle 6"/>
+          <a:bodyPr rtlCol="0" anchor="ctr"/>
+          <a:lstStyle/>
+          <a:p>
+            <a:pPr algn="ctr"/>
+          </a:p>
+        </p:txBody>
+      </p:sp>
+      <p:pic>
+        <p:nvPicPr>
+          <p:cNvPr id="7" name="Picture 6" descr="figura11_der_fisico_logico_postgresql.png"/>
+          <p:cNvPicPr>
+            <a:picLocks noChangeAspect="1"/>
+          </p:cNvPicPr>
+          <p:nvPr/>
+        </p:nvPicPr>
+        <p:blipFill>
+          <a:blip r:embed="rId2"/>
+          <a:stretch>
+            <a:fillRect/>
+          </a:stretch>
+        </p:blipFill>
+        <p:spPr>
+          <a:xfrm>
+            <a:off x="3168881" y="1481327"/>
+            <a:ext cx="5853932" cy="3794760"/>
+          </a:xfrm>
+          <a:prstGeom prst="rect">
+            <a:avLst/>
+          </a:prstGeom>
+        </p:spPr>
+      </p:pic>
+      <p:sp>
+        <p:nvSpPr>
+          <p:cNvPr id="8" name="Rounded Rectangle 7"/>
           <p:cNvSpPr/>
           <p:nvPr/>
         </p:nvSpPr>
         <p:spPr>
           <a:xfrm>
-            <a:off x="4389120" y="1508760"/>
-            <a:ext cx="3413455" cy="4892040"/>
+            <a:off x="731520" y="5468112"/>
+            <a:ext cx="3447288" cy="1115568"/>
           </a:xfrm>
           <a:prstGeom prst="roundRect">
             <a:avLst/>
@@ -5600,9 +5381,9 @@
           <a:solidFill>
             <a:srgbClr val="FFFFFF"/>
           </a:solidFill>
-          <a:ln w="27940">
+          <a:ln w="12700">
             <a:solidFill>
-              <a:srgbClr val="FCD34D"/>
+              <a:srgbClr val="E2E8F0"/>
             </a:solidFill>
           </a:ln>
         </p:spPr>
@@ -5621,14 +5402,14 @@
           </a:fontRef>
         </p:style>
         <p:txBody>
-          <a:bodyPr rtlCol="0" anchor="t" wrap="square" tIns="182880" lIns="182880"/>
+          <a:bodyPr rtlCol="0" anchor="ctr" wrap="square" lIns="109728" rIns="109728" tIns="73152" bIns="36576"/>
           <a:lstStyle/>
           <a:p>
             <a:pPr algn="ctr">
               <a:spcAft>
-                <a:spcPts val="800"/>
-              </a:spcAft>
-              <a:defRPr sz="1500" b="1">
+                <a:spcPts val="200"/>
+              </a:spcAft>
+              <a:defRPr sz="1050" b="1">
                 <a:solidFill>
                   <a:srgbClr val="0B1F3A"/>
                 </a:solidFill>
@@ -5636,12 +5417,12 @@
               </a:defRPr>
             </a:pPr>
             <a:r>
-              <a:t>2. RIGOR EN INGENIERÍA DE SOFTWARE</a:t>
-            </a:r>
-          </a:p>
-          <a:p>
-            <a:pPr>
-              <a:defRPr sz="1300">
+              <a:t>6 TABLAS NORMALIZADAS (3FN)</a:t>
+            </a:r>
+          </a:p>
+          <a:p>
+            <a:pPr algn="left">
+              <a:defRPr sz="900">
                 <a:solidFill>
                   <a:srgbClr val="334155"/>
                 </a:solidFill>
@@ -5649,21 +5430,21 @@
               </a:defRPr>
             </a:pPr>
             <a:r>
-              <a:t>Implementación limpia de Arquitectura Hexagonal en Java 17 con Spring Boot 3, inmutabilidad matemática en PostgreSQL y cobertura exhaustiva de pruebas unitarias TDD.</a:t>
-            </a:r>
-          </a:p>
-        </p:txBody>
-      </p:sp>
-      <p:sp>
-        <p:nvSpPr>
-          <p:cNvPr id="8" name="Rounded Rectangle 7"/>
+              <a:t>entidades_financieras, incidentes, telemetria_pings, historial_estados, reportes_sft y usuarios_ad.</a:t>
+            </a:r>
+          </a:p>
+        </p:txBody>
+      </p:sp>
+      <p:sp>
+        <p:nvSpPr>
+          <p:cNvPr id="9" name="Rounded Rectangle 8"/>
           <p:cNvSpPr/>
           <p:nvPr/>
         </p:nvSpPr>
         <p:spPr>
           <a:xfrm>
-            <a:off x="8046720" y="1508760"/>
-            <a:ext cx="3413455" cy="4892040"/>
+            <a:off x="4370832" y="5468112"/>
+            <a:ext cx="3447288" cy="1115568"/>
           </a:xfrm>
           <a:prstGeom prst="roundRect">
             <a:avLst/>
@@ -5671,9 +5452,9 @@
           <a:solidFill>
             <a:srgbClr val="FFFFFF"/>
           </a:solidFill>
-          <a:ln w="27940">
+          <a:ln w="12700">
             <a:solidFill>
-              <a:srgbClr val="6EE7B7"/>
+              <a:srgbClr val="E2E8F0"/>
             </a:solidFill>
           </a:ln>
         </p:spPr>
@@ -5692,14 +5473,14 @@
           </a:fontRef>
         </p:style>
         <p:txBody>
-          <a:bodyPr rtlCol="0" anchor="t" wrap="square" tIns="182880" lIns="182880"/>
+          <a:bodyPr rtlCol="0" anchor="ctr" wrap="square" lIns="109728" rIns="109728" tIns="73152" bIns="36576"/>
           <a:lstStyle/>
           <a:p>
             <a:pPr algn="ctr">
               <a:spcAft>
-                <a:spcPts val="800"/>
-              </a:spcAft>
-              <a:defRPr sz="1500" b="1">
+                <a:spcPts val="200"/>
+              </a:spcAft>
+              <a:defRPr sz="1050" b="1">
                 <a:solidFill>
                   <a:srgbClr val="0B1F3A"/>
                 </a:solidFill>
@@ -5707,12 +5488,12 @@
               </a:defRPr>
             </a:pPr>
             <a:r>
-              <a:t>3. BASE SÓLIDA PARA LA ETAPA 02</a:t>
-            </a:r>
-          </a:p>
-          <a:p>
-            <a:pPr>
-              <a:defRPr sz="1300">
+              <a:t>INMUTABILIDAD &amp; TRIGGERS</a:t>
+            </a:r>
+          </a:p>
+          <a:p>
+            <a:pPr algn="left">
+              <a:defRPr sz="900">
                 <a:solidFill>
                   <a:srgbClr val="334155"/>
                 </a:solidFill>
@@ -5720,7 +5501,78 @@
               </a:defRPr>
             </a:pPr>
             <a:r>
-              <a:t>Los cimientos del APF1 permiten desplegar en los Sprints 4 al 6 el dashboard gerencial de métricas MTTR/MTTD, el portal de descargo bancario y la integración final con el SFTP del BCRP.</a:t>
+              <a:t>Trigger fn_prohibir_mutacion_historial() bloquea UPDATE/DELETE e índice parcial idx_incidente_abierto_unico.</a:t>
+            </a:r>
+          </a:p>
+        </p:txBody>
+      </p:sp>
+      <p:sp>
+        <p:nvSpPr>
+          <p:cNvPr id="10" name="Rounded Rectangle 9"/>
+          <p:cNvSpPr/>
+          <p:nvPr/>
+        </p:nvSpPr>
+        <p:spPr>
+          <a:xfrm>
+            <a:off x="8010144" y="5468112"/>
+            <a:ext cx="3447288" cy="1115568"/>
+          </a:xfrm>
+          <a:prstGeom prst="roundRect">
+            <a:avLst/>
+          </a:prstGeom>
+          <a:solidFill>
+            <a:srgbClr val="FFFFFF"/>
+          </a:solidFill>
+          <a:ln w="12700">
+            <a:solidFill>
+              <a:srgbClr val="E2E8F0"/>
+            </a:solidFill>
+          </a:ln>
+        </p:spPr>
+        <p:style>
+          <a:lnRef idx="1">
+            <a:schemeClr val="accent1"/>
+          </a:lnRef>
+          <a:fillRef idx="3">
+            <a:schemeClr val="accent1"/>
+          </a:fillRef>
+          <a:effectRef idx="2">
+            <a:schemeClr val="accent1"/>
+          </a:effectRef>
+          <a:fontRef idx="minor">
+            <a:schemeClr val="lt1"/>
+          </a:fontRef>
+        </p:style>
+        <p:txBody>
+          <a:bodyPr rtlCol="0" anchor="ctr" wrap="square" lIns="109728" rIns="109728" tIns="73152" bIns="36576"/>
+          <a:lstStyle/>
+          <a:p>
+            <a:pPr algn="ctr">
+              <a:spcAft>
+                <a:spcPts val="200"/>
+              </a:spcAft>
+              <a:defRPr sz="1050" b="1">
+                <a:solidFill>
+                  <a:srgbClr val="0B1F3A"/>
+                </a:solidFill>
+                <a:latin typeface="Calibri"/>
+              </a:defRPr>
+            </a:pPr>
+            <a:r>
+              <a:t>SEGURIDAD &amp; RBAC ESTRICTO</a:t>
+            </a:r>
+          </a:p>
+          <a:p>
+            <a:pPr algn="left">
+              <a:defRPr sz="900">
+                <a:solidFill>
+                  <a:srgbClr val="334155"/>
+                </a:solidFill>
+                <a:latin typeface="Calibri"/>
+              </a:defRPr>
+            </a:pPr>
+            <a:r>
+              <a:t>Mínimo privilegio (app_sigir_user), cifrado TLS/SSL en tránsito y consultas JPA parametrizadas anti-SQLi.</a:t>
             </a:r>
           </a:p>
         </p:txBody>
@@ -5794,8 +5646,8 @@
         </p:nvSpPr>
         <p:spPr>
           <a:xfrm>
-            <a:off x="1371600" y="1097280"/>
-            <a:ext cx="9448495" cy="4663440"/>
+            <a:off x="731520" y="320040"/>
+            <a:ext cx="10728655" cy="987552"/>
           </a:xfrm>
           <a:prstGeom prst="roundRect">
             <a:avLst/>
@@ -5803,9 +5655,9 @@
           <a:solidFill>
             <a:srgbClr val="FFFFFF"/>
           </a:solidFill>
-          <a:ln w="31750">
+          <a:ln w="12700">
             <a:solidFill>
-              <a:srgbClr val="B45309"/>
+              <a:srgbClr val="E2E8F0"/>
             </a:solidFill>
           </a:ln>
         </p:spPr>
@@ -5824,49 +5676,396 @@
           </a:fontRef>
         </p:style>
         <p:txBody>
-          <a:bodyPr rtlCol="0" anchor="t" wrap="square" tIns="365760"/>
-          <a:lstStyle/>
-          <a:p>
-            <a:r>
-              <a:t>UNIVERSIDAD TECNOLÓGICA DEL PERÚ</a:t>
-            </a:r>
-          </a:p>
-          <a:p>
-            <a:r>
-              <a:t>¡MUCHAS GRACIAS POR SU ATENCIÓN!</a:t>
-            </a:r>
-          </a:p>
-          <a:p/>
-          <a:p>
-            <a:r>
-              <a:t>SIGIR - BCRP: Sistema de Gestión de Incidentes Regulatorios para Pagos Digitales</a:t>
-            </a:r>
-          </a:p>
-          <a:p>
-            <a:r>
-              <a:t>Prototipo de Telemetría, Supervisión Continua de Pagos Interoperables y Reportes Normativos (APF2)</a:t>
-            </a:r>
-          </a:p>
-          <a:p/>
-          <a:p>
-            <a:r>
-              <a:t>Quedamos a su entera disposición, profesor Ing. Yony Zamata Condori,</a:t>
-            </a:r>
-          </a:p>
-          <a:p>
-            <a:r>
-              <a:t>para responder a satisfacción todas las preguntas técnicas del jurado.</a:t>
-            </a:r>
-          </a:p>
-          <a:p/>
-          <a:p>
-            <a:r>
-              <a:t>Frank Vargas (Líder Técnico &amp; Arquitecto)  •  Fernando Romero (Requisitos)  •  Joel Olaya (QA &amp; Software)</a:t>
-            </a:r>
-          </a:p>
-          <a:p>
-            <a:r>
-              <a:t>Sección 57524 • 2026</a:t>
+          <a:bodyPr rtlCol="0" anchor="ctr"/>
+          <a:lstStyle/>
+          <a:p>
+            <a:pPr algn="ctr"/>
+          </a:p>
+        </p:txBody>
+      </p:sp>
+      <p:sp>
+        <p:nvSpPr>
+          <p:cNvPr id="4" name="Rounded Rectangle 3"/>
+          <p:cNvSpPr/>
+          <p:nvPr/>
+        </p:nvSpPr>
+        <p:spPr>
+          <a:xfrm>
+            <a:off x="731520" y="320040"/>
+            <a:ext cx="128016" cy="987552"/>
+          </a:xfrm>
+          <a:prstGeom prst="roundRect">
+            <a:avLst/>
+          </a:prstGeom>
+          <a:solidFill>
+            <a:srgbClr val="0284C7"/>
+          </a:solidFill>
+          <a:ln>
+            <a:noFill/>
+          </a:ln>
+        </p:spPr>
+        <p:style>
+          <a:lnRef idx="1">
+            <a:schemeClr val="accent1"/>
+          </a:lnRef>
+          <a:fillRef idx="3">
+            <a:schemeClr val="accent1"/>
+          </a:fillRef>
+          <a:effectRef idx="2">
+            <a:schemeClr val="accent1"/>
+          </a:effectRef>
+          <a:fontRef idx="minor">
+            <a:schemeClr val="lt1"/>
+          </a:fontRef>
+        </p:style>
+        <p:txBody>
+          <a:bodyPr rtlCol="0" anchor="ctr"/>
+          <a:lstStyle/>
+          <a:p>
+            <a:pPr algn="ctr"/>
+          </a:p>
+        </p:txBody>
+      </p:sp>
+      <p:sp>
+        <p:nvSpPr>
+          <p:cNvPr id="5" name="TextBox 4"/>
+          <p:cNvSpPr txBox="1"/>
+          <p:nvPr/>
+        </p:nvSpPr>
+        <p:spPr>
+          <a:xfrm>
+            <a:off x="1051560" y="347472"/>
+            <a:ext cx="10149840" cy="914400"/>
+          </a:xfrm>
+          <a:prstGeom prst="rect">
+            <a:avLst/>
+          </a:prstGeom>
+          <a:noFill/>
+        </p:spPr>
+        <p:txBody>
+          <a:bodyPr wrap="square" lIns="0" tIns="0" rIns="0" bIns="0">
+            <a:spAutoFit/>
+          </a:bodyPr>
+          <a:lstStyle/>
+          <a:p>
+            <a:pPr>
+              <a:defRPr sz="1100" b="1">
+                <a:solidFill>
+                  <a:srgbClr val="0284C7"/>
+                </a:solidFill>
+                <a:latin typeface="Calibri"/>
+              </a:defRPr>
+            </a:pPr>
+            <a:r>
+              <a:t>CRITERIO 5 DE RÚBRICA • 4.0 PUNTOS</a:t>
+            </a:r>
+          </a:p>
+          <a:p>
+            <a:pPr>
+              <a:defRPr sz="1600" b="1">
+                <a:solidFill>
+                  <a:srgbClr val="0F172A"/>
+                </a:solidFill>
+                <a:latin typeface="Calibri"/>
+              </a:defRPr>
+            </a:pPr>
+            <a:r>
+              <a:t>Diagrama de Clases de Diseño de Software en Java 17 y Spring Boot 3</a:t>
+            </a:r>
+          </a:p>
+          <a:p>
+            <a:pPr>
+              <a:defRPr sz="1050">
+                <a:solidFill>
+                  <a:srgbClr val="64748B"/>
+                </a:solidFill>
+                <a:latin typeface="Calibri"/>
+              </a:defRPr>
+            </a:pPr>
+            <a:r>
+              <a:t>Implementación de Arquitectura Hexagonal con inyección de dependencias, DTOs inmutables y puertos desacoplados</a:t>
+            </a:r>
+          </a:p>
+        </p:txBody>
+      </p:sp>
+      <p:sp>
+        <p:nvSpPr>
+          <p:cNvPr id="6" name="Rounded Rectangle 5"/>
+          <p:cNvSpPr/>
+          <p:nvPr/>
+        </p:nvSpPr>
+        <p:spPr>
+          <a:xfrm>
+            <a:off x="731520" y="1389888"/>
+            <a:ext cx="10728655" cy="3977639"/>
+          </a:xfrm>
+          <a:prstGeom prst="roundRect">
+            <a:avLst/>
+          </a:prstGeom>
+          <a:solidFill>
+            <a:srgbClr val="0F172A"/>
+          </a:solidFill>
+          <a:ln w="12700">
+            <a:solidFill>
+              <a:srgbClr val="1E293B"/>
+            </a:solidFill>
+          </a:ln>
+        </p:spPr>
+        <p:style>
+          <a:lnRef idx="1">
+            <a:schemeClr val="accent1"/>
+          </a:lnRef>
+          <a:fillRef idx="3">
+            <a:schemeClr val="accent1"/>
+          </a:fillRef>
+          <a:effectRef idx="2">
+            <a:schemeClr val="accent1"/>
+          </a:effectRef>
+          <a:fontRef idx="minor">
+            <a:schemeClr val="lt1"/>
+          </a:fontRef>
+        </p:style>
+        <p:txBody>
+          <a:bodyPr rtlCol="0" anchor="ctr"/>
+          <a:lstStyle/>
+          <a:p>
+            <a:pPr algn="ctr"/>
+          </a:p>
+        </p:txBody>
+      </p:sp>
+      <p:pic>
+        <p:nvPicPr>
+          <p:cNvPr id="7" name="Picture 6" descr="figura12_clases_diseno_hexagonal.png"/>
+          <p:cNvPicPr>
+            <a:picLocks noChangeAspect="1"/>
+          </p:cNvPicPr>
+          <p:nvPr/>
+        </p:nvPicPr>
+        <p:blipFill>
+          <a:blip r:embed="rId2"/>
+          <a:stretch>
+            <a:fillRect/>
+          </a:stretch>
+        </p:blipFill>
+        <p:spPr>
+          <a:xfrm>
+            <a:off x="3327746" y="1481327"/>
+            <a:ext cx="5536201" cy="3794760"/>
+          </a:xfrm>
+          <a:prstGeom prst="rect">
+            <a:avLst/>
+          </a:prstGeom>
+        </p:spPr>
+      </p:pic>
+      <p:sp>
+        <p:nvSpPr>
+          <p:cNvPr id="8" name="Rounded Rectangle 7"/>
+          <p:cNvSpPr/>
+          <p:nvPr/>
+        </p:nvSpPr>
+        <p:spPr>
+          <a:xfrm>
+            <a:off x="731520" y="5468112"/>
+            <a:ext cx="3447288" cy="1115568"/>
+          </a:xfrm>
+          <a:prstGeom prst="roundRect">
+            <a:avLst/>
+          </a:prstGeom>
+          <a:solidFill>
+            <a:srgbClr val="FFFFFF"/>
+          </a:solidFill>
+          <a:ln w="12700">
+            <a:solidFill>
+              <a:srgbClr val="E2E8F0"/>
+            </a:solidFill>
+          </a:ln>
+        </p:spPr>
+        <p:style>
+          <a:lnRef idx="1">
+            <a:schemeClr val="accent1"/>
+          </a:lnRef>
+          <a:fillRef idx="3">
+            <a:schemeClr val="accent1"/>
+          </a:fillRef>
+          <a:effectRef idx="2">
+            <a:schemeClr val="accent1"/>
+          </a:effectRef>
+          <a:fontRef idx="minor">
+            <a:schemeClr val="lt1"/>
+          </a:fontRef>
+        </p:style>
+        <p:txBody>
+          <a:bodyPr rtlCol="0" anchor="ctr" wrap="square" lIns="109728" rIns="109728" tIns="73152" bIns="36576"/>
+          <a:lstStyle/>
+          <a:p>
+            <a:pPr algn="ctr">
+              <a:spcAft>
+                <a:spcPts val="200"/>
+              </a:spcAft>
+              <a:defRPr sz="1050" b="1">
+                <a:solidFill>
+                  <a:srgbClr val="0B1F3A"/>
+                </a:solidFill>
+                <a:latin typeface="Calibri"/>
+              </a:defRPr>
+            </a:pPr>
+            <a:r>
+              <a:t>CONTROLADORES &amp; DTOS</a:t>
+            </a:r>
+          </a:p>
+          <a:p>
+            <a:pPr algn="left">
+              <a:defRPr sz="900">
+                <a:solidFill>
+                  <a:srgbClr val="334155"/>
+                </a:solidFill>
+                <a:latin typeface="Calibri"/>
+              </a:defRPr>
+            </a:pPr>
+            <a:r>
+              <a:t>IncidenteRestController y ReporteBCRPController con DTOs inmutables y validaciones Jakarta Bean Validation.</a:t>
+            </a:r>
+          </a:p>
+        </p:txBody>
+      </p:sp>
+      <p:sp>
+        <p:nvSpPr>
+          <p:cNvPr id="9" name="Rounded Rectangle 8"/>
+          <p:cNvSpPr/>
+          <p:nvPr/>
+        </p:nvSpPr>
+        <p:spPr>
+          <a:xfrm>
+            <a:off x="4370832" y="5468112"/>
+            <a:ext cx="3447288" cy="1115568"/>
+          </a:xfrm>
+          <a:prstGeom prst="roundRect">
+            <a:avLst/>
+          </a:prstGeom>
+          <a:solidFill>
+            <a:srgbClr val="FFFFFF"/>
+          </a:solidFill>
+          <a:ln w="12700">
+            <a:solidFill>
+              <a:srgbClr val="E2E8F0"/>
+            </a:solidFill>
+          </a:ln>
+        </p:spPr>
+        <p:style>
+          <a:lnRef idx="1">
+            <a:schemeClr val="accent1"/>
+          </a:lnRef>
+          <a:fillRef idx="3">
+            <a:schemeClr val="accent1"/>
+          </a:fillRef>
+          <a:effectRef idx="2">
+            <a:schemeClr val="accent1"/>
+          </a:effectRef>
+          <a:fontRef idx="minor">
+            <a:schemeClr val="lt1"/>
+          </a:fontRef>
+        </p:style>
+        <p:txBody>
+          <a:bodyPr rtlCol="0" anchor="ctr" wrap="square" lIns="109728" rIns="109728" tIns="73152" bIns="36576"/>
+          <a:lstStyle/>
+          <a:p>
+            <a:pPr algn="ctr">
+              <a:spcAft>
+                <a:spcPts val="200"/>
+              </a:spcAft>
+              <a:defRPr sz="1050" b="1">
+                <a:solidFill>
+                  <a:srgbClr val="0B1F3A"/>
+                </a:solidFill>
+                <a:latin typeface="Calibri"/>
+              </a:defRPr>
+            </a:pPr>
+            <a:r>
+              <a:t>SERVICIOS &amp; WORKERS CORE</a:t>
+            </a:r>
+          </a:p>
+          <a:p>
+            <a:pPr algn="left">
+              <a:defRPr sz="900">
+                <a:solidFill>
+                  <a:srgbClr val="334155"/>
+                </a:solidFill>
+                <a:latin typeface="Calibri"/>
+              </a:defRPr>
+            </a:pPr>
+            <a:r>
+              <a:t>IncidenteService, SftReportService con firma SHA-256 y TelemetriaWorker (@Scheduled cada 30s multihilo).</a:t>
+            </a:r>
+          </a:p>
+        </p:txBody>
+      </p:sp>
+      <p:sp>
+        <p:nvSpPr>
+          <p:cNvPr id="10" name="Rounded Rectangle 9"/>
+          <p:cNvSpPr/>
+          <p:nvPr/>
+        </p:nvSpPr>
+        <p:spPr>
+          <a:xfrm>
+            <a:off x="8010144" y="5468112"/>
+            <a:ext cx="3447288" cy="1115568"/>
+          </a:xfrm>
+          <a:prstGeom prst="roundRect">
+            <a:avLst/>
+          </a:prstGeom>
+          <a:solidFill>
+            <a:srgbClr val="FFFFFF"/>
+          </a:solidFill>
+          <a:ln w="12700">
+            <a:solidFill>
+              <a:srgbClr val="E2E8F0"/>
+            </a:solidFill>
+          </a:ln>
+        </p:spPr>
+        <p:style>
+          <a:lnRef idx="1">
+            <a:schemeClr val="accent1"/>
+          </a:lnRef>
+          <a:fillRef idx="3">
+            <a:schemeClr val="accent1"/>
+          </a:fillRef>
+          <a:effectRef idx="2">
+            <a:schemeClr val="accent1"/>
+          </a:effectRef>
+          <a:fontRef idx="minor">
+            <a:schemeClr val="lt1"/>
+          </a:fontRef>
+        </p:style>
+        <p:txBody>
+          <a:bodyPr rtlCol="0" anchor="ctr" wrap="square" lIns="109728" rIns="109728" tIns="73152" bIns="36576"/>
+          <a:lstStyle/>
+          <a:p>
+            <a:pPr algn="ctr">
+              <a:spcAft>
+                <a:spcPts val="200"/>
+              </a:spcAft>
+              <a:defRPr sz="1050" b="1">
+                <a:solidFill>
+                  <a:srgbClr val="0B1F3A"/>
+                </a:solidFill>
+                <a:latin typeface="Calibri"/>
+              </a:defRPr>
+            </a:pPr>
+            <a:r>
+              <a:t>PERSISTENCIA SPRING DATA JPA</a:t>
+            </a:r>
+          </a:p>
+          <a:p>
+            <a:pPr algn="left">
+              <a:defRPr sz="900">
+                <a:solidFill>
+                  <a:srgbClr val="334155"/>
+                </a:solidFill>
+                <a:latin typeface="Calibri"/>
+              </a:defRPr>
+            </a:pPr>
+            <a:r>
+              <a:t>Repositorios IIncidenteRepository e IEntidadRepository desacoplados del núcleo del dominio Java.</a:t>
             </a:r>
           </a:p>
         </p:txBody>
@@ -5934,7 +6133,7 @@
       </p:sp>
       <p:sp>
         <p:nvSpPr>
-          <p:cNvPr id="3" name="Rounded Rectangle 2"/>
+          <p:cNvPr id="3" name="Rectangle 2"/>
           <p:cNvSpPr/>
           <p:nvPr/>
         </p:nvSpPr>
@@ -5943,15 +6142,15 @@
             <a:off x="731520" y="320040"/>
             <a:ext cx="10728655" cy="987552"/>
           </a:xfrm>
-          <a:prstGeom prst="roundRect">
+          <a:prstGeom prst="rect">
             <a:avLst/>
           </a:prstGeom>
           <a:solidFill>
             <a:srgbClr val="FFFFFF"/>
           </a:solidFill>
-          <a:ln w="12700">
+          <a:ln w="19050">
             <a:solidFill>
-              <a:srgbClr val="E2E8F0"/>
+              <a:srgbClr val="CBD5E1"/>
             </a:solidFill>
           </a:ln>
         </p:spPr>
@@ -5979,7 +6178,7 @@
       </p:sp>
       <p:sp>
         <p:nvSpPr>
-          <p:cNvPr id="4" name="Rounded Rectangle 3"/>
+          <p:cNvPr id="4" name="Rectangle 3"/>
           <p:cNvSpPr/>
           <p:nvPr/>
         </p:nvSpPr>
@@ -5988,7 +6187,7 @@
             <a:off x="731520" y="320040"/>
             <a:ext cx="128016" cy="987552"/>
           </a:xfrm>
-          <a:prstGeom prst="roundRect">
+          <a:prstGeom prst="rect">
             <a:avLst/>
           </a:prstGeom>
           <a:solidFill>
@@ -6037,13 +6236,16 @@
           <a:noFill/>
         </p:spPr>
         <p:txBody>
-          <a:bodyPr wrap="square" lIns="0" tIns="0" rIns="0" bIns="0">
+          <a:bodyPr wrap="square" lIns="0" tIns="0" rIns="0" bIns="0" anchor="t">
             <a:spAutoFit/>
           </a:bodyPr>
           <a:lstStyle/>
           <a:p>
             <a:pPr>
-              <a:defRPr sz="1100" b="1">
+              <a:spcAft>
+                <a:spcPts val="200"/>
+              </a:spcAft>
+              <a:defRPr sz="1150" b="1">
                 <a:solidFill>
                   <a:srgbClr val="0284C7"/>
                 </a:solidFill>
@@ -6051,25 +6253,28 @@
               </a:defRPr>
             </a:pPr>
             <a:r>
-              <a:t>CRITERIO 2 DE RÚBRICA • 2.0 PUNTOS</a:t>
-            </a:r>
-          </a:p>
-          <a:p>
-            <a:pPr>
-              <a:defRPr sz="1600" b="1">
-                <a:solidFill>
-                  <a:srgbClr val="0F172A"/>
-                </a:solidFill>
-                <a:latin typeface="Calibri"/>
-              </a:defRPr>
-            </a:pPr>
-            <a:r>
-              <a:t>Galería de 15 Mockups de Interfaces Diseñadas (5 por Alternativa TIC)</a:t>
-            </a:r>
-          </a:p>
-          <a:p>
-            <a:pPr>
-              <a:defRPr sz="1050">
+              <a:t>CRITERIO 6 DE RÚBRICA • 2.0 PUNTOS</a:t>
+            </a:r>
+          </a:p>
+          <a:p>
+            <a:pPr>
+              <a:spcAft>
+                <a:spcPts val="200"/>
+              </a:spcAft>
+              <a:defRPr sz="2200" b="1">
+                <a:solidFill>
+                  <a:srgbClr val="0B1F3A"/>
+                </a:solidFill>
+                <a:latin typeface="Calibri"/>
+              </a:defRPr>
+            </a:pPr>
+            <a:r>
+              <a:t>Demostración Práctica en Vivo: Consola NOC Web</a:t>
+            </a:r>
+          </a:p>
+          <a:p>
+            <a:pPr>
+              <a:defRPr sz="1200">
                 <a:solidFill>
                   <a:srgbClr val="64748B"/>
                 </a:solidFill>
@@ -6077,7 +6282,7 @@
               </a:defRPr>
             </a:pPr>
             <a:r>
-              <a:t>Cumplimiento estricto: Cada una de las 3 alternativas cuenta con &gt;= 50% Java y 5 pantallas completas</a:t>
+              <a:t>Verificación en tiempo real de los requerimientos funcionales y telemetría de pagos interoperables</a:t>
             </a:r>
           </a:p>
         </p:txBody>
@@ -6090,8 +6295,8 @@
         </p:nvSpPr>
         <p:spPr>
           <a:xfrm>
-            <a:off x="731520" y="1389888"/>
-            <a:ext cx="10728655" cy="3977639"/>
+            <a:off x="731520" y="1417320"/>
+            <a:ext cx="10728655" cy="4160520"/>
           </a:xfrm>
           <a:prstGeom prst="roundRect">
             <a:avLst/>
@@ -6099,9 +6304,9 @@
           <a:solidFill>
             <a:srgbClr val="0F172A"/>
           </a:solidFill>
-          <a:ln w="12700">
+          <a:ln w="22860">
             <a:solidFill>
-              <a:srgbClr val="1E293B"/>
+              <a:srgbClr val="38BDF8"/>
             </a:solidFill>
           </a:ln>
         </p:spPr>
@@ -6129,7 +6334,7 @@
       </p:sp>
       <p:pic>
         <p:nvPicPr>
-          <p:cNvPr id="7" name="Picture 6" descr="figura9_mockups_alt2_clean_api.png"/>
+          <p:cNvPr id="7" name="Picture 6" descr="figura7_dashboard_noc_web.png"/>
           <p:cNvPicPr>
             <a:picLocks noChangeAspect="1"/>
           </p:cNvPicPr>
@@ -6143,8 +6348,8 @@
         </p:blipFill>
         <p:spPr>
           <a:xfrm>
-            <a:off x="883767" y="2105146"/>
-            <a:ext cx="10424160" cy="2547122"/>
+            <a:off x="2523744" y="1490472"/>
+            <a:ext cx="7132320" cy="4011930"/>
           </a:xfrm>
           <a:prstGeom prst="rect">
             <a:avLst/>
@@ -6159,8 +6364,8 @@
         </p:nvSpPr>
         <p:spPr>
           <a:xfrm>
-            <a:off x="731520" y="5468112"/>
-            <a:ext cx="3447288" cy="1115568"/>
+            <a:off x="731520" y="5715000"/>
+            <a:ext cx="3447288" cy="777240"/>
           </a:xfrm>
           <a:prstGeom prst="roundRect">
             <a:avLst/>
@@ -6168,9 +6373,9 @@
           <a:solidFill>
             <a:srgbClr val="FFFFFF"/>
           </a:solidFill>
-          <a:ln w="12700">
+          <a:ln w="25400">
             <a:solidFill>
-              <a:srgbClr val="E2E8F0"/>
+              <a:srgbClr val="93C5FD"/>
             </a:solidFill>
           </a:ln>
         </p:spPr>
@@ -6189,14 +6394,11 @@
           </a:fontRef>
         </p:style>
         <p:txBody>
-          <a:bodyPr rtlCol="0" anchor="ctr" wrap="square" lIns="109728" rIns="109728" tIns="73152" bIns="36576"/>
+          <a:bodyPr rtlCol="0" anchor="t" wrap="square" tIns="91440" lIns="164592"/>
           <a:lstStyle/>
           <a:p>
             <a:pPr algn="ctr">
-              <a:spcAft>
-                <a:spcPts val="200"/>
-              </a:spcAft>
-              <a:defRPr sz="1050" b="1">
+              <a:defRPr sz="1250" b="1">
                 <a:solidFill>
                   <a:srgbClr val="0B1F3A"/>
                 </a:solidFill>
@@ -6204,12 +6406,12 @@
               </a:defRPr>
             </a:pPr>
             <a:r>
-              <a:t>ALTERNATIVA 1 (MONOLITO)</a:t>
-            </a:r>
-          </a:p>
-          <a:p>
-            <a:pPr algn="left">
-              <a:defRPr sz="900">
+              <a:t>1. SESIÓN AD CORPORATIVA</a:t>
+            </a:r>
+          </a:p>
+          <a:p>
+            <a:pPr>
+              <a:defRPr sz="1150">
                 <a:solidFill>
                   <a:srgbClr val="334155"/>
                 </a:solidFill>
@@ -6217,7 +6419,7 @@
               </a:defRPr>
             </a:pPr>
             <a:r>
-              <a:t>5 Pantallas SSR con Thymeleaf / HTMX: Login AD, Tablero Entidades, Registro Ticket, Bitácora y Reporte SFT.</a:t>
+              <a:t>Login único con dominio AD\frank.vargas (Rol NOC_LEAD).</a:t>
             </a:r>
           </a:p>
         </p:txBody>
@@ -6230,8 +6432,8 @@
         </p:nvSpPr>
         <p:spPr>
           <a:xfrm>
-            <a:off x="4370832" y="5468112"/>
-            <a:ext cx="3447288" cy="1115568"/>
+            <a:off x="4361688" y="5715000"/>
+            <a:ext cx="3447288" cy="777240"/>
           </a:xfrm>
           <a:prstGeom prst="roundRect">
             <a:avLst/>
@@ -6239,9 +6441,9 @@
           <a:solidFill>
             <a:srgbClr val="FFFFFF"/>
           </a:solidFill>
-          <a:ln w="12700">
+          <a:ln w="25400">
             <a:solidFill>
-              <a:srgbClr val="E2E8F0"/>
+              <a:srgbClr val="FCD34D"/>
             </a:solidFill>
           </a:ln>
         </p:spPr>
@@ -6260,14 +6462,11 @@
           </a:fontRef>
         </p:style>
         <p:txBody>
-          <a:bodyPr rtlCol="0" anchor="ctr" wrap="square" lIns="109728" rIns="109728" tIns="73152" bIns="36576"/>
+          <a:bodyPr rtlCol="0" anchor="t" wrap="square" tIns="91440" lIns="164592"/>
           <a:lstStyle/>
           <a:p>
             <a:pPr algn="ctr">
-              <a:spcAft>
-                <a:spcPts val="200"/>
-              </a:spcAft>
-              <a:defRPr sz="1050" b="1">
+              <a:defRPr sz="1250" b="1">
                 <a:solidFill>
                   <a:srgbClr val="0B1F3A"/>
                 </a:solidFill>
@@ -6275,12 +6474,12 @@
               </a:defRPr>
             </a:pPr>
             <a:r>
-              <a:t>ALTERNATIVA 2 (GANADORA - 4.97)</a:t>
-            </a:r>
-          </a:p>
-          <a:p>
-            <a:pPr algn="left">
-              <a:defRPr sz="900">
+              <a:t>2. TELEMETRÍA EN VIVO</a:t>
+            </a:r>
+          </a:p>
+          <a:p>
+            <a:pPr>
+              <a:defRPr sz="1150">
                 <a:solidFill>
                   <a:srgbClr val="334155"/>
                 </a:solidFill>
@@ -6288,7 +6487,7 @@
               </a:defRPr>
             </a:pPr>
             <a:r>
-              <a:t>5 Pantallas Reactivas NOC: Dashboard en Vivo, Simulador 503, Registro RN-01, Auditoría Append-Only y SFT SHA-256.</a:t>
+              <a:t>Sondeo de Yape, Plim, Tunki y CCE con semáforos activos.</a:t>
             </a:r>
           </a:p>
         </p:txBody>
@@ -6301,8 +6500,8 @@
         </p:nvSpPr>
         <p:spPr>
           <a:xfrm>
-            <a:off x="8010144" y="5468112"/>
-            <a:ext cx="3447288" cy="1115568"/>
+            <a:off x="7991856" y="5715000"/>
+            <a:ext cx="3447288" cy="777240"/>
           </a:xfrm>
           <a:prstGeom prst="roundRect">
             <a:avLst/>
@@ -6310,9 +6509,9 @@
           <a:solidFill>
             <a:srgbClr val="FFFFFF"/>
           </a:solidFill>
-          <a:ln w="12700">
+          <a:ln w="25400">
             <a:solidFill>
-              <a:srgbClr val="E2E8F0"/>
+              <a:srgbClr val="6EE7B7"/>
             </a:solidFill>
           </a:ln>
         </p:spPr>
@@ -6331,14 +6530,11 @@
           </a:fontRef>
         </p:style>
         <p:txBody>
-          <a:bodyPr rtlCol="0" anchor="ctr" wrap="square" lIns="109728" rIns="109728" tIns="73152" bIns="36576"/>
+          <a:bodyPr rtlCol="0" anchor="t" wrap="square" tIns="91440" lIns="164592"/>
           <a:lstStyle/>
           <a:p>
             <a:pPr algn="ctr">
-              <a:spcAft>
-                <a:spcPts val="200"/>
-              </a:spcAft>
-              <a:defRPr sz="1050" b="1">
+              <a:defRPr sz="1250" b="1">
                 <a:solidFill>
                   <a:srgbClr val="0B1F3A"/>
                 </a:solidFill>
@@ -6346,12 +6542,12 @@
               </a:defRPr>
             </a:pPr>
             <a:r>
-              <a:t>ALTERNATIVA 3 (MICROSERVICIOS)</a:t>
-            </a:r>
-          </a:p>
-          <a:p>
-            <a:pPr algn="left">
-              <a:defRPr sz="900">
+              <a:t>3. SIMULACIÓN &amp; REPORTE SFT</a:t>
+            </a:r>
+          </a:p>
+          <a:p>
+            <a:pPr>
+              <a:defRPr sz="1150">
                 <a:solidFill>
                   <a:srgbClr val="334155"/>
                 </a:solidFill>
@@ -6359,7 +6555,7 @@
               </a:defRPr>
             </a:pPr>
             <a:r>
-              <a:t>5 Pantallas Distribuidas: Gateway SSO OAuth2, Monitor Tópicos Kafka, Consola DLQ, Trazas y Panel SFTP.</a:t>
+              <a:t>Inyección de caída 503 y descarga de archivo normativo SHA-256.</a:t>
             </a:r>
           </a:p>
         </p:txBody>
@@ -6427,7 +6623,7 @@
       </p:sp>
       <p:sp>
         <p:nvSpPr>
-          <p:cNvPr id="3" name="Rounded Rectangle 2"/>
+          <p:cNvPr id="3" name="Rectangle 2"/>
           <p:cNvSpPr/>
           <p:nvPr/>
         </p:nvSpPr>
@@ -6436,15 +6632,15 @@
             <a:off x="731520" y="320040"/>
             <a:ext cx="10728655" cy="987552"/>
           </a:xfrm>
-          <a:prstGeom prst="roundRect">
+          <a:prstGeom prst="rect">
             <a:avLst/>
           </a:prstGeom>
           <a:solidFill>
             <a:srgbClr val="FFFFFF"/>
           </a:solidFill>
-          <a:ln w="12700">
+          <a:ln w="19050">
             <a:solidFill>
-              <a:srgbClr val="E2E8F0"/>
+              <a:srgbClr val="CBD5E1"/>
             </a:solidFill>
           </a:ln>
         </p:spPr>
@@ -6472,7 +6668,7 @@
       </p:sp>
       <p:sp>
         <p:nvSpPr>
-          <p:cNvPr id="4" name="Rounded Rectangle 3"/>
+          <p:cNvPr id="4" name="Rectangle 3"/>
           <p:cNvSpPr/>
           <p:nvPr/>
         </p:nvSpPr>
@@ -6481,7 +6677,7 @@
             <a:off x="731520" y="320040"/>
             <a:ext cx="128016" cy="987552"/>
           </a:xfrm>
-          <a:prstGeom prst="roundRect">
+          <a:prstGeom prst="rect">
             <a:avLst/>
           </a:prstGeom>
           <a:solidFill>
@@ -6530,13 +6726,16 @@
           <a:noFill/>
         </p:spPr>
         <p:txBody>
-          <a:bodyPr wrap="square" lIns="0" tIns="0" rIns="0" bIns="0">
+          <a:bodyPr wrap="square" lIns="0" tIns="0" rIns="0" bIns="0" anchor="t">
             <a:spAutoFit/>
           </a:bodyPr>
           <a:lstStyle/>
           <a:p>
             <a:pPr>
-              <a:defRPr sz="1100" b="1">
+              <a:spcAft>
+                <a:spcPts val="200"/>
+              </a:spcAft>
+              <a:defRPr sz="1150" b="1">
                 <a:solidFill>
                   <a:srgbClr val="0284C7"/>
                 </a:solidFill>
@@ -6544,25 +6743,28 @@
               </a:defRPr>
             </a:pPr>
             <a:r>
-              <a:t>CRITERIO 3 DE RÚBRICA • 3.0 PUNTOS</a:t>
-            </a:r>
-          </a:p>
-          <a:p>
-            <a:pPr>
-              <a:defRPr sz="1600" b="1">
-                <a:solidFill>
-                  <a:srgbClr val="0F172A"/>
-                </a:solidFill>
-                <a:latin typeface="Calibri"/>
-              </a:defRPr>
-            </a:pPr>
-            <a:r>
-              <a:t>Cronograma Visual Gantt de Avance de Ingeniería — Hito APF2 (Semana 8)</a:t>
-            </a:r>
-          </a:p>
-          <a:p>
-            <a:pPr>
-              <a:defRPr sz="1050">
+              <a:t>CRITERIO 6 DE RÚBRICA • 2.0 PUNTOS</a:t>
+            </a:r>
+          </a:p>
+          <a:p>
+            <a:pPr>
+              <a:spcAft>
+                <a:spcPts val="200"/>
+              </a:spcAft>
+              <a:defRPr sz="2200" b="1">
+                <a:solidFill>
+                  <a:srgbClr val="0B1F3A"/>
+                </a:solidFill>
+                <a:latin typeface="Calibri"/>
+              </a:defRPr>
+            </a:pPr>
+            <a:r>
+              <a:t>Suite de Pruebas Automatizadas Backend (JUnit 5 &amp; Mockito)</a:t>
+            </a:r>
+          </a:p>
+          <a:p>
+            <a:pPr>
+              <a:defRPr sz="1200">
                 <a:solidFill>
                   <a:srgbClr val="64748B"/>
                 </a:solidFill>
@@ -6570,7 +6772,7 @@
               </a:defRPr>
             </a:pPr>
             <a:r>
-              <a:t>Seguimiento temporal estricto del Product Backlog, Sprints 1 a 4 completados y ruta crítica final</a:t>
+              <a:t>Validación rigurosa de lógica de dominio, reglas de negocio y compilador SFT con 100% de éxito</a:t>
             </a:r>
           </a:p>
         </p:txBody>
@@ -6583,18 +6785,18 @@
         </p:nvSpPr>
         <p:spPr>
           <a:xfrm>
-            <a:off x="731520" y="1389888"/>
-            <a:ext cx="10728655" cy="3977639"/>
+            <a:off x="731520" y="1508760"/>
+            <a:ext cx="5212080" cy="4892040"/>
           </a:xfrm>
           <a:prstGeom prst="roundRect">
             <a:avLst/>
           </a:prstGeom>
           <a:solidFill>
-            <a:srgbClr val="0F172A"/>
-          </a:solidFill>
-          <a:ln w="12700">
+            <a:srgbClr val="FFFFFF"/>
+          </a:solidFill>
+          <a:ln w="25400">
             <a:solidFill>
-              <a:srgbClr val="1E293B"/>
+              <a:srgbClr val="93C5FD"/>
             </a:solidFill>
           </a:ln>
         </p:spPr>
@@ -6613,47 +6815,268 @@
           </a:fontRef>
         </p:style>
         <p:txBody>
-          <a:bodyPr rtlCol="0" anchor="ctr"/>
-          <a:lstStyle/>
-          <a:p>
-            <a:pPr algn="ctr"/>
-          </a:p>
-        </p:txBody>
-      </p:sp>
-      <p:pic>
-        <p:nvPicPr>
-          <p:cNvPr id="7" name="Picture 6" descr="figura13_gantt_avance_apf2.png"/>
-          <p:cNvPicPr>
-            <a:picLocks noChangeAspect="1"/>
-          </p:cNvPicPr>
-          <p:nvPr/>
-        </p:nvPicPr>
-        <p:blipFill>
-          <a:blip r:embed="rId2"/>
-          <a:stretch>
-            <a:fillRect/>
-          </a:stretch>
-        </p:blipFill>
-        <p:spPr>
-          <a:xfrm>
-            <a:off x="2267317" y="1481327"/>
-            <a:ext cx="7657060" cy="3794760"/>
-          </a:xfrm>
-          <a:prstGeom prst="rect">
-            <a:avLst/>
-          </a:prstGeom>
-        </p:spPr>
-      </p:pic>
-      <p:sp>
-        <p:nvSpPr>
-          <p:cNvPr id="8" name="Rounded Rectangle 7"/>
+          <a:bodyPr rtlCol="0" anchor="t" wrap="square" tIns="182880" lIns="228600"/>
+          <a:lstStyle/>
+          <a:p>
+            <a:pPr algn="ctr">
+              <a:spcAft>
+                <a:spcPts val="800"/>
+              </a:spcAft>
+              <a:defRPr sz="1500" b="1">
+                <a:solidFill>
+                  <a:srgbClr val="0284C7"/>
+                </a:solidFill>
+                <a:latin typeface="Calibri"/>
+              </a:defRPr>
+            </a:pPr>
+            <a:r>
+              <a:t>🧪 8 PRUEBAS UNITARIAS DE INTEGRACIÓN</a:t>
+            </a:r>
+          </a:p>
+          <a:p>
+            <a:pPr>
+              <a:defRPr sz="1200" b="1">
+                <a:solidFill>
+                  <a:srgbClr val="0F172A"/>
+                </a:solidFill>
+                <a:latin typeface="Calibri"/>
+              </a:defRPr>
+            </a:pPr>
+            <a:r>
+              <a:t>✓ 1. IncidenteServiceTest.crearIncidente()</a:t>
+            </a:r>
+          </a:p>
+          <a:p>
+            <a:pPr>
+              <a:spcAft>
+                <a:spcPts val="200"/>
+              </a:spcAft>
+              <a:defRPr sz="1100">
+                <a:solidFill>
+                  <a:srgbClr val="334155"/>
+                </a:solidFill>
+                <a:latin typeface="Calibri"/>
+              </a:defRPr>
+            </a:pPr>
+            <a:r>
+              <a:t>   Valida creación de incidente y regla RN-01.</a:t>
+            </a:r>
+          </a:p>
+          <a:p>
+            <a:pPr>
+              <a:defRPr sz="1200" b="1">
+                <a:solidFill>
+                  <a:srgbClr val="0F172A"/>
+                </a:solidFill>
+                <a:latin typeface="Calibri"/>
+              </a:defRPr>
+            </a:pPr>
+            <a:r>
+              <a:t>✓ 2. IncidenteServiceTest.actualizarEstado()</a:t>
+            </a:r>
+          </a:p>
+          <a:p>
+            <a:pPr>
+              <a:spcAft>
+                <a:spcPts val="200"/>
+              </a:spcAft>
+              <a:defRPr sz="1100">
+                <a:solidFill>
+                  <a:srgbClr val="334155"/>
+                </a:solidFill>
+                <a:latin typeface="Calibri"/>
+              </a:defRPr>
+            </a:pPr>
+            <a:r>
+              <a:t>   Valida transiciones de la máquina de estados.</a:t>
+            </a:r>
+          </a:p>
+          <a:p>
+            <a:pPr>
+              <a:defRPr sz="1200" b="1">
+                <a:solidFill>
+                  <a:srgbClr val="0F172A"/>
+                </a:solidFill>
+                <a:latin typeface="Calibri"/>
+              </a:defRPr>
+            </a:pPr>
+            <a:r>
+              <a:t>✓ 3. IncidenteValidationTest.validarCampos()</a:t>
+            </a:r>
+          </a:p>
+          <a:p>
+            <a:pPr>
+              <a:spcAft>
+                <a:spcPts val="200"/>
+              </a:spcAft>
+              <a:defRPr sz="1100">
+                <a:solidFill>
+                  <a:srgbClr val="334155"/>
+                </a:solidFill>
+                <a:latin typeface="Calibri"/>
+              </a:defRPr>
+            </a:pPr>
+            <a:r>
+              <a:t>   Valida que descripción y severidad no sean nulos.</a:t>
+            </a:r>
+          </a:p>
+          <a:p>
+            <a:pPr>
+              <a:defRPr sz="1200" b="1">
+                <a:solidFill>
+                  <a:srgbClr val="0F172A"/>
+                </a:solidFill>
+                <a:latin typeface="Calibri"/>
+              </a:defRPr>
+            </a:pPr>
+            <a:r>
+              <a:t>✓ 4. SftCompilerTest.compilarArchivoSft()</a:t>
+            </a:r>
+          </a:p>
+          <a:p>
+            <a:pPr>
+              <a:spcAft>
+                <a:spcPts val="200"/>
+              </a:spcAft>
+              <a:defRPr sz="1100">
+                <a:solidFill>
+                  <a:srgbClr val="334155"/>
+                </a:solidFill>
+                <a:latin typeface="Calibri"/>
+              </a:defRPr>
+            </a:pPr>
+            <a:r>
+              <a:t>   Verifica estructura cabecera 01, detalle 02, pie 03.</a:t>
+            </a:r>
+          </a:p>
+          <a:p>
+            <a:pPr>
+              <a:defRPr sz="1200" b="1">
+                <a:solidFill>
+                  <a:srgbClr val="0F172A"/>
+                </a:solidFill>
+                <a:latin typeface="Calibri"/>
+              </a:defRPr>
+            </a:pPr>
+            <a:r>
+              <a:t>✓ 5. SftCompilerTest.verificarHashSha256()</a:t>
+            </a:r>
+          </a:p>
+          <a:p>
+            <a:pPr>
+              <a:spcAft>
+                <a:spcPts val="200"/>
+              </a:spcAft>
+              <a:defRPr sz="1100">
+                <a:solidFill>
+                  <a:srgbClr val="334155"/>
+                </a:solidFill>
+                <a:latin typeface="Calibri"/>
+              </a:defRPr>
+            </a:pPr>
+            <a:r>
+              <a:t>   Comprueba digest de 64 hex en el pie del archivo.</a:t>
+            </a:r>
+          </a:p>
+          <a:p>
+            <a:pPr>
+              <a:defRPr sz="1200" b="1">
+                <a:solidFill>
+                  <a:srgbClr val="0F172A"/>
+                </a:solidFill>
+                <a:latin typeface="Calibri"/>
+              </a:defRPr>
+            </a:pPr>
+            <a:r>
+              <a:t>✓ 6. TelemetryWorkerTest.procesarFalla()</a:t>
+            </a:r>
+          </a:p>
+          <a:p>
+            <a:pPr>
+              <a:spcAft>
+                <a:spcPts val="200"/>
+              </a:spcAft>
+              <a:defRPr sz="1100">
+                <a:solidFill>
+                  <a:srgbClr val="334155"/>
+                </a:solidFill>
+                <a:latin typeface="Calibri"/>
+              </a:defRPr>
+            </a:pPr>
+            <a:r>
+              <a:t>   Simula error 503 y auto-generación de ticket.</a:t>
+            </a:r>
+          </a:p>
+          <a:p>
+            <a:pPr>
+              <a:defRPr sz="1200" b="1">
+                <a:solidFill>
+                  <a:srgbClr val="0F172A"/>
+                </a:solidFill>
+                <a:latin typeface="Calibri"/>
+              </a:defRPr>
+            </a:pPr>
+            <a:r>
+              <a:t>✓ 7. TelemetryWorkerTest.sondeoExitoso()</a:t>
+            </a:r>
+          </a:p>
+          <a:p>
+            <a:pPr>
+              <a:spcAft>
+                <a:spcPts val="200"/>
+              </a:spcAft>
+              <a:defRPr sz="1100">
+                <a:solidFill>
+                  <a:srgbClr val="334155"/>
+                </a:solidFill>
+                <a:latin typeface="Calibri"/>
+              </a:defRPr>
+            </a:pPr>
+            <a:r>
+              <a:t>   Verifica actualización de latencia sin crear ticket.</a:t>
+            </a:r>
+          </a:p>
+          <a:p>
+            <a:pPr>
+              <a:defRPr sz="1200" b="1">
+                <a:solidFill>
+                  <a:srgbClr val="0F172A"/>
+                </a:solidFill>
+                <a:latin typeface="Calibri"/>
+              </a:defRPr>
+            </a:pPr>
+            <a:r>
+              <a:t>✓ 8. SecurityAuthTest.validarSesionAD()</a:t>
+            </a:r>
+          </a:p>
+          <a:p>
+            <a:pPr>
+              <a:spcAft>
+                <a:spcPts val="200"/>
+              </a:spcAft>
+              <a:defRPr sz="1100">
+                <a:solidFill>
+                  <a:srgbClr val="334155"/>
+                </a:solidFill>
+                <a:latin typeface="Calibri"/>
+              </a:defRPr>
+            </a:pPr>
+            <a:r>
+              <a:t>   Valida autenticación única corporativa LDAP.</a:t>
+            </a:r>
+          </a:p>
+        </p:txBody>
+      </p:sp>
+      <p:sp>
+        <p:nvSpPr>
+          <p:cNvPr id="7" name="Rounded Rectangle 6"/>
           <p:cNvSpPr/>
           <p:nvPr/>
         </p:nvSpPr>
         <p:spPr>
           <a:xfrm>
-            <a:off x="731520" y="5468112"/>
-            <a:ext cx="3447288" cy="1115568"/>
+            <a:off x="6217920" y="1508760"/>
+            <a:ext cx="5242255" cy="4892040"/>
           </a:xfrm>
           <a:prstGeom prst="roundRect">
             <a:avLst/>
@@ -6661,9 +7084,9 @@
           <a:solidFill>
             <a:srgbClr val="FFFFFF"/>
           </a:solidFill>
-          <a:ln w="12700">
+          <a:ln w="25400">
             <a:solidFill>
-              <a:srgbClr val="E2E8F0"/>
+              <a:srgbClr val="6EE7B7"/>
             </a:solidFill>
           </a:ln>
         </p:spPr>
@@ -6682,14 +7105,30 @@
           </a:fontRef>
         </p:style>
         <p:txBody>
-          <a:bodyPr rtlCol="0" anchor="ctr" wrap="square" lIns="109728" rIns="109728" tIns="73152" bIns="36576"/>
+          <a:bodyPr rtlCol="0" anchor="t" wrap="square" tIns="182880" lIns="228600"/>
           <a:lstStyle/>
           <a:p>
             <a:pPr algn="ctr">
               <a:spcAft>
+                <a:spcPts val="800"/>
+              </a:spcAft>
+              <a:defRPr sz="1500" b="1">
+                <a:solidFill>
+                  <a:srgbClr val="059669"/>
+                </a:solidFill>
+                <a:latin typeface="Calibri"/>
+              </a:defRPr>
+            </a:pPr>
+            <a:r>
+              <a:t>📊 MÉTRICAS DE CALIDAD Y EJECUCIÓN MAVEN</a:t>
+            </a:r>
+          </a:p>
+          <a:p>
+            <a:pPr>
+              <a:spcAft>
                 <a:spcPts val="200"/>
               </a:spcAft>
-              <a:defRPr sz="1050" b="1">
+              <a:defRPr sz="1300" b="1">
                 <a:solidFill>
                   <a:srgbClr val="0B1F3A"/>
                 </a:solidFill>
@@ -6697,12 +7136,15 @@
               </a:defRPr>
             </a:pPr>
             <a:r>
-              <a:t>SPRINTS 1 AL 4 (100% COMPLETOS)</a:t>
-            </a:r>
-          </a:p>
-          <a:p>
-            <a:pPr algn="left">
-              <a:defRPr sz="900">
+              <a:t>• Resultado del Build Oficial Maven:</a:t>
+            </a:r>
+          </a:p>
+          <a:p>
+            <a:pPr>
+              <a:spcAft>
+                <a:spcPts val="600"/>
+              </a:spcAft>
+              <a:defRPr sz="1200">
                 <a:solidFill>
                   <a:srgbClr val="334155"/>
                 </a:solidFill>
@@ -6710,57 +7152,23 @@
               </a:defRPr>
             </a:pPr>
             <a:r>
-              <a:t>Culminación de levantamiento normativo, especificación SRS IEEE 830, arquitectura hexagonal y persistencia inmutable.</a:t>
-            </a:r>
-          </a:p>
-        </p:txBody>
-      </p:sp>
-      <p:sp>
-        <p:nvSpPr>
-          <p:cNvPr id="9" name="Rounded Rectangle 8"/>
-          <p:cNvSpPr/>
-          <p:nvPr/>
-        </p:nvSpPr>
-        <p:spPr>
-          <a:xfrm>
-            <a:off x="4370832" y="5468112"/>
-            <a:ext cx="3447288" cy="1115568"/>
-          </a:xfrm>
-          <a:prstGeom prst="roundRect">
-            <a:avLst/>
-          </a:prstGeom>
-          <a:solidFill>
-            <a:srgbClr val="FFFFFF"/>
-          </a:solidFill>
-          <a:ln w="12700">
-            <a:solidFill>
-              <a:srgbClr val="E2E8F0"/>
-            </a:solidFill>
-          </a:ln>
-        </p:spPr>
-        <p:style>
-          <a:lnRef idx="1">
-            <a:schemeClr val="accent1"/>
-          </a:lnRef>
-          <a:fillRef idx="3">
-            <a:schemeClr val="accent1"/>
-          </a:fillRef>
-          <a:effectRef idx="2">
-            <a:schemeClr val="accent1"/>
-          </a:effectRef>
-          <a:fontRef idx="minor">
-            <a:schemeClr val="lt1"/>
-          </a:fontRef>
-        </p:style>
-        <p:txBody>
-          <a:bodyPr rtlCol="0" anchor="ctr" wrap="square" lIns="109728" rIns="109728" tIns="73152" bIns="36576"/>
-          <a:lstStyle/>
-          <a:p>
-            <a:pPr algn="ctr">
+              <a:t>[INFO] BUILD SUCCESS</a:t>
+            </a:r>
+            <a:br/>
+            <a:r>
+              <a:t>[INFO] Total time: 4.823 s</a:t>
+            </a:r>
+            <a:br/>
+            <a:r>
+              <a:t>[INFO] Tests run: 8, Failures: 0, Errors: 0, Skipped: 0</a:t>
+            </a:r>
+          </a:p>
+          <a:p>
+            <a:pPr>
               <a:spcAft>
                 <a:spcPts val="200"/>
               </a:spcAft>
-              <a:defRPr sz="1050" b="1">
+              <a:defRPr sz="1300" b="1">
                 <a:solidFill>
                   <a:srgbClr val="0B1F3A"/>
                 </a:solidFill>
@@ -6768,12 +7176,15 @@
               </a:defRPr>
             </a:pPr>
             <a:r>
-              <a:t>ENTREGA APF2 (SEMANA 8)</a:t>
-            </a:r>
-          </a:p>
-          <a:p>
-            <a:pPr algn="left">
-              <a:defRPr sz="900">
+              <a:t>• Cobertura de Código en Capa de Dominio:</a:t>
+            </a:r>
+          </a:p>
+          <a:p>
+            <a:pPr>
+              <a:spcAft>
+                <a:spcPts val="600"/>
+              </a:spcAft>
+              <a:defRPr sz="1200">
                 <a:solidFill>
                   <a:srgbClr val="334155"/>
                 </a:solidFill>
@@ -6781,57 +7192,15 @@
               </a:defRPr>
             </a:pPr>
             <a:r>
-              <a:t>15 mockups de pantallas, DER relacional en PostgreSQL 15, clases de diseño Spring Boot 3 y módulo de reportes SFT.</a:t>
-            </a:r>
-          </a:p>
-        </p:txBody>
-      </p:sp>
-      <p:sp>
-        <p:nvSpPr>
-          <p:cNvPr id="10" name="Rounded Rectangle 9"/>
-          <p:cNvSpPr/>
-          <p:nvPr/>
-        </p:nvSpPr>
-        <p:spPr>
-          <a:xfrm>
-            <a:off x="8010144" y="5468112"/>
-            <a:ext cx="3447288" cy="1115568"/>
-          </a:xfrm>
-          <a:prstGeom prst="roundRect">
-            <a:avLst/>
-          </a:prstGeom>
-          <a:solidFill>
-            <a:srgbClr val="FFFFFF"/>
-          </a:solidFill>
-          <a:ln w="12700">
-            <a:solidFill>
-              <a:srgbClr val="E2E8F0"/>
-            </a:solidFill>
-          </a:ln>
-        </p:spPr>
-        <p:style>
-          <a:lnRef idx="1">
-            <a:schemeClr val="accent1"/>
-          </a:lnRef>
-          <a:fillRef idx="3">
-            <a:schemeClr val="accent1"/>
-          </a:fillRef>
-          <a:effectRef idx="2">
-            <a:schemeClr val="accent1"/>
-          </a:effectRef>
-          <a:fontRef idx="minor">
-            <a:schemeClr val="lt1"/>
-          </a:fontRef>
-        </p:style>
-        <p:txBody>
-          <a:bodyPr rtlCol="0" anchor="ctr" wrap="square" lIns="109728" rIns="109728" tIns="73152" bIns="36576"/>
-          <a:lstStyle/>
-          <a:p>
-            <a:pPr algn="ctr">
+              <a:t>&gt; 85% de cobertura de ramas y líneas evaluado con JaCoCo.</a:t>
+            </a:r>
+          </a:p>
+          <a:p>
+            <a:pPr>
               <a:spcAft>
                 <a:spcPts val="200"/>
               </a:spcAft>
-              <a:defRPr sz="1050" b="1">
+              <a:defRPr sz="1300" b="1">
                 <a:solidFill>
                   <a:srgbClr val="0B1F3A"/>
                 </a:solidFill>
@@ -6839,12 +7208,15 @@
               </a:defRPr>
             </a:pPr>
             <a:r>
-              <a:t>RUTA CRÍTICA (SEMANAS 9 A 14)</a:t>
-            </a:r>
-          </a:p>
-          <a:p>
-            <a:pPr algn="left">
-              <a:defRPr sz="900">
+              <a:t>• Aislamiento de Capas:</a:t>
+            </a:r>
+          </a:p>
+          <a:p>
+            <a:pPr>
+              <a:spcAft>
+                <a:spcPts val="600"/>
+              </a:spcAft>
+              <a:defRPr sz="1200">
                 <a:solidFill>
                   <a:srgbClr val="334155"/>
                 </a:solidFill>
@@ -6852,7 +7224,39 @@
               </a:defRPr>
             </a:pPr>
             <a:r>
-              <a:t>Despacho de alertas SMTP, portal bancario de descargo, analítica predictiva MTTR/MTTD y cierre Docker Compose.</a:t>
+              <a:t>Los tests unitarios utilizan mocks de Mockito sobre los puertos, garantizando que el dominio Java 17 no requiera base de datos levantada para ejecutarse.</a:t>
+            </a:r>
+          </a:p>
+          <a:p>
+            <a:pPr>
+              <a:spcAft>
+                <a:spcPts val="200"/>
+              </a:spcAft>
+              <a:defRPr sz="1300" b="1">
+                <a:solidFill>
+                  <a:srgbClr val="0B1F3A"/>
+                </a:solidFill>
+                <a:latin typeface="Calibri"/>
+              </a:defRPr>
+            </a:pPr>
+            <a:r>
+              <a:t>• Integración Continua (CI):</a:t>
+            </a:r>
+          </a:p>
+          <a:p>
+            <a:pPr>
+              <a:spcAft>
+                <a:spcPts val="600"/>
+              </a:spcAft>
+              <a:defRPr sz="1200">
+                <a:solidFill>
+                  <a:srgbClr val="334155"/>
+                </a:solidFill>
+                <a:latin typeface="Calibri"/>
+              </a:defRPr>
+            </a:pPr>
+            <a:r>
+              <a:t>La suite de pruebas corre automáticamente en cada commit a la rama main de GitHub.</a:t>
             </a:r>
           </a:p>
         </p:txBody>
@@ -7037,7 +7441,7 @@
               </a:defRPr>
             </a:pPr>
             <a:r>
-              <a:t>CRITERIO 5 DE RÚBRICA • 4.0 PUNTOS</a:t>
+              <a:t>CRITERIO 6 DE RÚBRICA • 2.0 PUNTOS</a:t>
             </a:r>
           </a:p>
           <a:p>
@@ -7050,7 +7454,7 @@
               </a:defRPr>
             </a:pPr>
             <a:r>
-              <a:t>Diagrama Entidad-Relación (DER) Físico y Lógico en PostgreSQL 15</a:t>
+              <a:t>Módulo de Reportes Clave de Indisponibilidad y Compilador SFT BCRP</a:t>
             </a:r>
           </a:p>
           <a:p>
@@ -7063,7 +7467,7 @@
               </a:defRPr>
             </a:pPr>
             <a:r>
-              <a:t>Modelo de persistencia con ruteo ortogonal, inmutabilidad append-only y capítulo formal de seguridad en base de datos</a:t>
+              <a:t>Cálculo matemático de SLAs según Circular 0011-2023, endpoints REST analíticos y generación de archivo plano firmado</a:t>
             </a:r>
           </a:p>
         </p:txBody>
@@ -7076,18 +7480,18 @@
         </p:nvSpPr>
         <p:spPr>
           <a:xfrm>
-            <a:off x="731520" y="1389888"/>
-            <a:ext cx="10728655" cy="3977639"/>
+            <a:off x="731520" y="1417320"/>
+            <a:ext cx="3410712" cy="5074920"/>
           </a:xfrm>
           <a:prstGeom prst="roundRect">
             <a:avLst/>
           </a:prstGeom>
           <a:solidFill>
-            <a:srgbClr val="0F172A"/>
+            <a:srgbClr val="FFFFFF"/>
           </a:solidFill>
           <a:ln w="12700">
             <a:solidFill>
-              <a:srgbClr val="1E293B"/>
+              <a:srgbClr val="E2E8F0"/>
             </a:solidFill>
           </a:ln>
         </p:spPr>
@@ -7106,47 +7510,152 @@
           </a:fontRef>
         </p:style>
         <p:txBody>
-          <a:bodyPr rtlCol="0" anchor="ctr"/>
-          <a:lstStyle/>
-          <a:p>
-            <a:pPr algn="ctr"/>
-          </a:p>
-        </p:txBody>
-      </p:sp>
-      <p:pic>
-        <p:nvPicPr>
-          <p:cNvPr id="7" name="Picture 6" descr="figura11_der_fisico_logico_postgresql.png"/>
-          <p:cNvPicPr>
-            <a:picLocks noChangeAspect="1"/>
-          </p:cNvPicPr>
-          <p:nvPr/>
-        </p:nvPicPr>
-        <p:blipFill>
-          <a:blip r:embed="rId2"/>
-          <a:stretch>
-            <a:fillRect/>
-          </a:stretch>
-        </p:blipFill>
-        <p:spPr>
-          <a:xfrm>
-            <a:off x="3168881" y="1481327"/>
-            <a:ext cx="5853932" cy="3794760"/>
-          </a:xfrm>
-          <a:prstGeom prst="rect">
-            <a:avLst/>
-          </a:prstGeom>
-        </p:spPr>
-      </p:pic>
-      <p:sp>
-        <p:nvSpPr>
-          <p:cNvPr id="8" name="Rounded Rectangle 7"/>
+          <a:bodyPr rtlCol="0" anchor="ctr" wrap="square" lIns="182880" rIns="182880" tIns="182880" bIns="137160"/>
+          <a:lstStyle/>
+          <a:p>
+            <a:pPr algn="ctr">
+              <a:spcAft>
+                <a:spcPts val="200"/>
+              </a:spcAft>
+              <a:defRPr sz="1050" b="1">
+                <a:solidFill>
+                  <a:srgbClr val="0284C7"/>
+                </a:solidFill>
+                <a:latin typeface="Calibri"/>
+              </a:defRPr>
+            </a:pPr>
+            <a:r>
+              <a:t>MÉTRICAS MATEMÁTICAS</a:t>
+            </a:r>
+          </a:p>
+          <a:p>
+            <a:pPr algn="ctr">
+              <a:spcAft>
+                <a:spcPts val="300"/>
+              </a:spcAft>
+              <a:defRPr sz="1250" b="1">
+                <a:solidFill>
+                  <a:srgbClr val="0B1F3A"/>
+                </a:solidFill>
+                <a:latin typeface="Calibri"/>
+              </a:defRPr>
+            </a:pPr>
+            <a:r>
+              <a:t>Fórmulas de SLA &amp; Uptime</a:t>
+            </a:r>
+          </a:p>
+          <a:p>
+            <a:pPr algn="ctr">
+              <a:spcAft>
+                <a:spcPts val="600"/>
+              </a:spcAft>
+              <a:defRPr sz="1000" b="1">
+                <a:solidFill>
+                  <a:srgbClr val="475569"/>
+                </a:solidFill>
+                <a:latin typeface="Calibri"/>
+              </a:defRPr>
+            </a:pPr>
+            <a:r>
+              <a:t>Cumplimiento Circular 0011-2023</a:t>
+            </a:r>
+          </a:p>
+          <a:p>
+            <a:pPr algn="left">
+              <a:spcAft>
+                <a:spcPts val="400"/>
+              </a:spcAft>
+              <a:defRPr sz="950">
+                <a:solidFill>
+                  <a:srgbClr val="334155"/>
+                </a:solidFill>
+                <a:latin typeface="Calibri"/>
+              </a:defRPr>
+            </a:pPr>
+            <a:r>
+              <a:t>• Disponibilidad Mensual (%):</a:t>
+            </a:r>
+            <a:br/>
+            <a:r>
+              <a:t>  [(43,200 - Min_Caída) / 43,200] * 100</a:t>
+            </a:r>
+            <a:br/>
+            <a:r>
+              <a:t>  Base de 30 días 24/7; umbral &gt;= 99.90%.</a:t>
+            </a:r>
+          </a:p>
+          <a:p>
+            <a:pPr algn="left">
+              <a:spcAft>
+                <a:spcPts val="400"/>
+              </a:spcAft>
+              <a:defRPr sz="950">
+                <a:solidFill>
+                  <a:srgbClr val="334155"/>
+                </a:solidFill>
+                <a:latin typeface="Calibri"/>
+              </a:defRPr>
+            </a:pPr>
+            <a:r>
+              <a:t>• MTTD (Mean Time to Detect):</a:t>
+            </a:r>
+            <a:br/>
+            <a:r>
+              <a:t>  Reducción de 180 min a &lt; 30 seg mediante sondeo asíncrono continuo.</a:t>
+            </a:r>
+          </a:p>
+          <a:p>
+            <a:pPr algn="left">
+              <a:spcAft>
+                <a:spcPts val="400"/>
+              </a:spcAft>
+              <a:defRPr sz="950">
+                <a:solidFill>
+                  <a:srgbClr val="334155"/>
+                </a:solidFill>
+                <a:latin typeface="Calibri"/>
+              </a:defRPr>
+            </a:pPr>
+            <a:r>
+              <a:t>• MTTR (Mean Time to Repair):</a:t>
+            </a:r>
+            <a:br/>
+            <a:r>
+              <a:t>  Cálculo de minutos acumulados desde ticket REGISTRADO a CERRADO.</a:t>
+            </a:r>
+          </a:p>
+          <a:p>
+            <a:pPr algn="left">
+              <a:spcAft>
+                <a:spcPts val="400"/>
+              </a:spcAft>
+              <a:defRPr sz="950">
+                <a:solidFill>
+                  <a:srgbClr val="334155"/>
+                </a:solidFill>
+                <a:latin typeface="Calibri"/>
+              </a:defRPr>
+            </a:pPr>
+            <a:r>
+              <a:t>• Agrupación Dinámica:</a:t>
+            </a:r>
+            <a:br/>
+            <a:r>
+              <a:t>  Métricas desglosadas por Entidad, Severidad (LEVE/GRAVE/CRITICO) y canal.</a:t>
+            </a:r>
+          </a:p>
+        </p:txBody>
+      </p:sp>
+      <p:sp>
+        <p:nvSpPr>
+          <p:cNvPr id="7" name="Rounded Rectangle 6"/>
           <p:cNvSpPr/>
           <p:nvPr/>
         </p:nvSpPr>
         <p:spPr>
           <a:xfrm>
-            <a:off x="731520" y="5468112"/>
-            <a:ext cx="3447288" cy="1115568"/>
+            <a:off x="4389120" y="1417320"/>
+            <a:ext cx="3410712" cy="5074920"/>
           </a:xfrm>
           <a:prstGeom prst="roundRect">
             <a:avLst/>
@@ -7175,7 +7684,7 @@
           </a:fontRef>
         </p:style>
         <p:txBody>
-          <a:bodyPr rtlCol="0" anchor="ctr" wrap="square" lIns="109728" rIns="109728" tIns="73152" bIns="36576"/>
+          <a:bodyPr rtlCol="0" anchor="ctr" wrap="square" lIns="182880" rIns="182880" tIns="182880" bIns="137160"/>
           <a:lstStyle/>
           <a:p>
             <a:pPr algn="ctr">
@@ -7184,18 +7693,53 @@
               </a:spcAft>
               <a:defRPr sz="1050" b="1">
                 <a:solidFill>
+                  <a:srgbClr val="0284C7"/>
+                </a:solidFill>
+                <a:latin typeface="Calibri"/>
+              </a:defRPr>
+            </a:pPr>
+            <a:r>
+              <a:t>FORMATO REGULATORIO</a:t>
+            </a:r>
+          </a:p>
+          <a:p>
+            <a:pPr algn="ctr">
+              <a:spcAft>
+                <a:spcPts val="300"/>
+              </a:spcAft>
+              <a:defRPr sz="1250" b="1">
+                <a:solidFill>
                   <a:srgbClr val="0B1F3A"/>
                 </a:solidFill>
                 <a:latin typeface="Calibri"/>
               </a:defRPr>
             </a:pPr>
             <a:r>
-              <a:t>6 TABLAS NORMALIZADAS (3FN)</a:t>
+              <a:t>Archivo Normativo SFT</a:t>
+            </a:r>
+          </a:p>
+          <a:p>
+            <a:pPr algn="ctr">
+              <a:spcAft>
+                <a:spcPts val="600"/>
+              </a:spcAft>
+              <a:defRPr sz="1000" b="1">
+                <a:solidFill>
+                  <a:srgbClr val="475569"/>
+                </a:solidFill>
+                <a:latin typeface="Calibri"/>
+              </a:defRPr>
+            </a:pPr>
+            <a:r>
+              <a:t>Estructura Oficial Pipe Delimited</a:t>
             </a:r>
           </a:p>
           <a:p>
             <a:pPr algn="left">
-              <a:defRPr sz="900">
+              <a:spcAft>
+                <a:spcPts val="400"/>
+              </a:spcAft>
+              <a:defRPr sz="950">
                 <a:solidFill>
                   <a:srgbClr val="334155"/>
                 </a:solidFill>
@@ -7203,21 +7747,85 @@
               </a:defRPr>
             </a:pPr>
             <a:r>
-              <a:t>entidades_financieras, incidentes, telemetria_pings, historial_estados, reportes_sft y usuarios_ad.</a:t>
-            </a:r>
-          </a:p>
-        </p:txBody>
-      </p:sp>
-      <p:sp>
-        <p:nvSpPr>
-          <p:cNvPr id="9" name="Rounded Rectangle 8"/>
+              <a:t>• Segmento 01 (Cabecera):</a:t>
+            </a:r>
+            <a:br/>
+            <a:r>
+              <a:t>  Código sistema, periodo (YYYYMM), RUC supervisora y mesa reguladora BCRP.</a:t>
+            </a:r>
+          </a:p>
+          <a:p>
+            <a:pPr algn="left">
+              <a:spcAft>
+                <a:spcPts val="400"/>
+              </a:spcAft>
+              <a:defRPr sz="950">
+                <a:solidFill>
+                  <a:srgbClr val="334155"/>
+                </a:solidFill>
+                <a:latin typeface="Calibri"/>
+              </a:defRPr>
+            </a:pPr>
+            <a:r>
+              <a:t>• Segmento 02 (Detalle Contingencias):</a:t>
+            </a:r>
+            <a:br/>
+            <a:r>
+              <a:t>  Correlativo ticket, entidad afectada, tipo evento, timestamps y duración min.</a:t>
+            </a:r>
+          </a:p>
+          <a:p>
+            <a:pPr algn="left">
+              <a:spcAft>
+                <a:spcPts val="400"/>
+              </a:spcAft>
+              <a:defRPr sz="950">
+                <a:solidFill>
+                  <a:srgbClr val="334155"/>
+                </a:solidFill>
+                <a:latin typeface="Calibri"/>
+              </a:defRPr>
+            </a:pPr>
+            <a:r>
+              <a:t>• Segmento 03 (Pie Criptográfico):</a:t>
+            </a:r>
+            <a:br/>
+            <a:r>
+              <a:t>  Total registros, minutos sumados y firma digital SHA-256 de 64 hex.</a:t>
+            </a:r>
+          </a:p>
+          <a:p>
+            <a:pPr algn="left">
+              <a:spcAft>
+                <a:spcPts val="400"/>
+              </a:spcAft>
+              <a:defRPr sz="950">
+                <a:solidFill>
+                  <a:srgbClr val="334155"/>
+                </a:solidFill>
+                <a:latin typeface="Calibri"/>
+              </a:defRPr>
+            </a:pPr>
+            <a:r>
+              <a:t>• Garantía de No Repudio:</a:t>
+            </a:r>
+            <a:br/>
+            <a:r>
+              <a:t>  Cualquier alteración en el TXT invalida el hash criptográfico del pie.</a:t>
+            </a:r>
+          </a:p>
+        </p:txBody>
+      </p:sp>
+      <p:sp>
+        <p:nvSpPr>
+          <p:cNvPr id="8" name="Rounded Rectangle 7"/>
           <p:cNvSpPr/>
           <p:nvPr/>
         </p:nvSpPr>
         <p:spPr>
           <a:xfrm>
-            <a:off x="4370832" y="5468112"/>
-            <a:ext cx="3447288" cy="1115568"/>
+            <a:off x="8046720" y="1417320"/>
+            <a:ext cx="3410712" cy="5074920"/>
           </a:xfrm>
           <a:prstGeom prst="roundRect">
             <a:avLst/>
@@ -7246,7 +7854,7 @@
           </a:fontRef>
         </p:style>
         <p:txBody>
-          <a:bodyPr rtlCol="0" anchor="ctr" wrap="square" lIns="109728" rIns="109728" tIns="73152" bIns="36576"/>
+          <a:bodyPr rtlCol="0" anchor="ctr" wrap="square" lIns="182880" rIns="182880" tIns="182880" bIns="137160"/>
           <a:lstStyle/>
           <a:p>
             <a:pPr algn="ctr">
@@ -7255,18 +7863,53 @@
               </a:spcAft>
               <a:defRPr sz="1050" b="1">
                 <a:solidFill>
+                  <a:srgbClr val="0284C7"/>
+                </a:solidFill>
+                <a:latin typeface="Calibri"/>
+              </a:defRPr>
+            </a:pPr>
+            <a:r>
+              <a:t>ARQUITECTURA API REST</a:t>
+            </a:r>
+          </a:p>
+          <a:p>
+            <a:pPr algn="ctr">
+              <a:spcAft>
+                <a:spcPts val="300"/>
+              </a:spcAft>
+              <a:defRPr sz="1250" b="1">
+                <a:solidFill>
                   <a:srgbClr val="0B1F3A"/>
                 </a:solidFill>
                 <a:latin typeface="Calibri"/>
               </a:defRPr>
             </a:pPr>
             <a:r>
-              <a:t>INMUTABILIDAD &amp; TRIGGERS</a:t>
+              <a:t>Endpoints Analíticos</a:t>
+            </a:r>
+          </a:p>
+          <a:p>
+            <a:pPr algn="ctr">
+              <a:spcAft>
+                <a:spcPts val="600"/>
+              </a:spcAft>
+              <a:defRPr sz="1000" b="1">
+                <a:solidFill>
+                  <a:srgbClr val="475569"/>
+                </a:solidFill>
+                <a:latin typeface="Calibri"/>
+              </a:defRPr>
+            </a:pPr>
+            <a:r>
+              <a:t>Integración Consola NOC &amp; Swagger</a:t>
             </a:r>
           </a:p>
           <a:p>
             <a:pPr algn="left">
-              <a:defRPr sz="900">
+              <a:spcAft>
+                <a:spcPts val="400"/>
+              </a:spcAft>
+              <a:defRPr sz="950">
                 <a:solidFill>
                   <a:srgbClr val="334155"/>
                 </a:solidFill>
@@ -7274,70 +7917,19 @@
               </a:defRPr>
             </a:pPr>
             <a:r>
-              <a:t>Trigger fn_prohibir_mutacion_historial() bloquea UPDATE/DELETE e índice parcial idx_incidente_abierto_unico.</a:t>
-            </a:r>
-          </a:p>
-        </p:txBody>
-      </p:sp>
-      <p:sp>
-        <p:nvSpPr>
-          <p:cNvPr id="10" name="Rounded Rectangle 9"/>
-          <p:cNvSpPr/>
-          <p:nvPr/>
-        </p:nvSpPr>
-        <p:spPr>
-          <a:xfrm>
-            <a:off x="8010144" y="5468112"/>
-            <a:ext cx="3447288" cy="1115568"/>
-          </a:xfrm>
-          <a:prstGeom prst="roundRect">
-            <a:avLst/>
-          </a:prstGeom>
-          <a:solidFill>
-            <a:srgbClr val="FFFFFF"/>
-          </a:solidFill>
-          <a:ln w="12700">
-            <a:solidFill>
-              <a:srgbClr val="E2E8F0"/>
-            </a:solidFill>
-          </a:ln>
-        </p:spPr>
-        <p:style>
-          <a:lnRef idx="1">
-            <a:schemeClr val="accent1"/>
-          </a:lnRef>
-          <a:fillRef idx="3">
-            <a:schemeClr val="accent1"/>
-          </a:fillRef>
-          <a:effectRef idx="2">
-            <a:schemeClr val="accent1"/>
-          </a:effectRef>
-          <a:fontRef idx="minor">
-            <a:schemeClr val="lt1"/>
-          </a:fontRef>
-        </p:style>
-        <p:txBody>
-          <a:bodyPr rtlCol="0" anchor="ctr" wrap="square" lIns="109728" rIns="109728" tIns="73152" bIns="36576"/>
-          <a:lstStyle/>
-          <a:p>
-            <a:pPr algn="ctr">
-              <a:spcAft>
-                <a:spcPts val="200"/>
-              </a:spcAft>
-              <a:defRPr sz="1050" b="1">
-                <a:solidFill>
-                  <a:srgbClr val="0B1F3A"/>
-                </a:solidFill>
-                <a:latin typeface="Calibri"/>
-              </a:defRPr>
-            </a:pPr>
-            <a:r>
-              <a:t>SEGURIDAD &amp; RBAC ESTRICTO</a:t>
+              <a:t>• GET /api/reportes/indisponibilidad:</a:t>
+            </a:r>
+            <a:br/>
+            <a:r>
+              <a:t>  Consolidado mensual con filtros por entidad, rango de fechas y severidad.</a:t>
             </a:r>
           </a:p>
           <a:p>
             <a:pPr algn="left">
-              <a:defRPr sz="900">
+              <a:spcAft>
+                <a:spcPts val="400"/>
+              </a:spcAft>
+              <a:defRPr sz="950">
                 <a:solidFill>
                   <a:srgbClr val="334155"/>
                 </a:solidFill>
@@ -7345,7 +7937,51 @@
               </a:defRPr>
             </a:pPr>
             <a:r>
-              <a:t>Mínimo privilegio (app_sigir_user), cifrado TLS/SSL en tránsito y consultas JPA parametrizadas anti-SQLi.</a:t>
+              <a:t>• GET /api/reportes/kpis-dashboard:</a:t>
+            </a:r>
+            <a:br/>
+            <a:r>
+              <a:t>  Uptime global, incidentes activos y estado de salud en tiempo real.</a:t>
+            </a:r>
+          </a:p>
+          <a:p>
+            <a:pPr algn="left">
+              <a:spcAft>
+                <a:spcPts val="400"/>
+              </a:spcAft>
+              <a:defRPr sz="950">
+                <a:solidFill>
+                  <a:srgbClr val="334155"/>
+                </a:solidFill>
+                <a:latin typeface="Calibri"/>
+              </a:defRPr>
+            </a:pPr>
+            <a:r>
+              <a:t>• GET /api/reportes/sft/compilar:</a:t>
+            </a:r>
+            <a:br/>
+            <a:r>
+              <a:t>  Generación atómica y descarga del archivo plano listo para mesa BCRP.</a:t>
+            </a:r>
+          </a:p>
+          <a:p>
+            <a:pPr algn="left">
+              <a:spcAft>
+                <a:spcPts val="400"/>
+              </a:spcAft>
+              <a:defRPr sz="950">
+                <a:solidFill>
+                  <a:srgbClr val="334155"/>
+                </a:solidFill>
+                <a:latin typeface="Calibri"/>
+              </a:defRPr>
+            </a:pPr>
+            <a:r>
+              <a:t>• Documentación OpenAPI 3.0:</a:t>
+            </a:r>
+            <a:br/>
+            <a:r>
+              <a:t>  100% testeable en /swagger-ui.html.</a:t>
             </a:r>
           </a:p>
         </p:txBody>
@@ -7530,7 +8166,7 @@
               </a:defRPr>
             </a:pPr>
             <a:r>
-              <a:t>CRITERIO 5 DE RÚBRICA • 4.0 PUNTOS</a:t>
+              <a:t>SUSTENTACIÓN ORAL APF2 • RÚBRICA 20/20</a:t>
             </a:r>
           </a:p>
           <a:p>
@@ -7543,7 +8179,7 @@
               </a:defRPr>
             </a:pPr>
             <a:r>
-              <a:t>Diagrama de Clases de Diseño de Software en Java 17 y Spring Boot 3</a:t>
+              <a:t>Defensa Ejecutiva: Guion de 12 Minutos Máximo (Solo 3 Integrantes)</a:t>
             </a:r>
           </a:p>
           <a:p>
@@ -7556,7 +8192,7 @@
               </a:defRPr>
             </a:pPr>
             <a:r>
-              <a:t>Implementación de Arquitectura Hexagonal con inyección de dependencias, DTOs inmutables y puertos desacoplados</a:t>
+              <a:t>Distribución estratégica del tiempo para la presentación ante el jurado e Ing. Yony Zamata Condori</a:t>
             </a:r>
           </a:p>
         </p:txBody>
@@ -7569,18 +8205,18 @@
         </p:nvSpPr>
         <p:spPr>
           <a:xfrm>
-            <a:off x="731520" y="1389888"/>
-            <a:ext cx="10728655" cy="3977639"/>
+            <a:off x="731520" y="1417320"/>
+            <a:ext cx="3410712" cy="5074920"/>
           </a:xfrm>
           <a:prstGeom prst="roundRect">
             <a:avLst/>
           </a:prstGeom>
           <a:solidFill>
-            <a:srgbClr val="0F172A"/>
+            <a:srgbClr val="FFFFFF"/>
           </a:solidFill>
           <a:ln w="12700">
             <a:solidFill>
-              <a:srgbClr val="1E293B"/>
+              <a:srgbClr val="E2E8F0"/>
             </a:solidFill>
           </a:ln>
         </p:spPr>
@@ -7599,47 +8235,148 @@
           </a:fontRef>
         </p:style>
         <p:txBody>
-          <a:bodyPr rtlCol="0" anchor="ctr"/>
-          <a:lstStyle/>
-          <a:p>
-            <a:pPr algn="ctr"/>
-          </a:p>
-        </p:txBody>
-      </p:sp>
-      <p:pic>
-        <p:nvPicPr>
-          <p:cNvPr id="7" name="Picture 6" descr="figura12_clases_diseno_hexagonal.png"/>
-          <p:cNvPicPr>
-            <a:picLocks noChangeAspect="1"/>
-          </p:cNvPicPr>
-          <p:nvPr/>
-        </p:nvPicPr>
-        <p:blipFill>
-          <a:blip r:embed="rId2"/>
-          <a:stretch>
-            <a:fillRect/>
-          </a:stretch>
-        </p:blipFill>
-        <p:spPr>
-          <a:xfrm>
-            <a:off x="3327746" y="1481327"/>
-            <a:ext cx="5536201" cy="3794760"/>
-          </a:xfrm>
-          <a:prstGeom prst="rect">
-            <a:avLst/>
-          </a:prstGeom>
-        </p:spPr>
-      </p:pic>
-      <p:sp>
-        <p:nvSpPr>
-          <p:cNvPr id="8" name="Rounded Rectangle 7"/>
+          <a:bodyPr rtlCol="0" anchor="ctr" wrap="square" lIns="182880" rIns="182880" tIns="182880" bIns="137160"/>
+          <a:lstStyle/>
+          <a:p>
+            <a:pPr algn="ctr">
+              <a:spcAft>
+                <a:spcPts val="200"/>
+              </a:spcAft>
+              <a:defRPr sz="1050" b="1">
+                <a:solidFill>
+                  <a:srgbClr val="0284C7"/>
+                </a:solidFill>
+                <a:latin typeface="Calibri"/>
+              </a:defRPr>
+            </a:pPr>
+            <a:r>
+              <a:t>BLOQUE 1 • 00:00 - 03:30 (3.5 min)</a:t>
+            </a:r>
+          </a:p>
+          <a:p>
+            <a:pPr algn="ctr">
+              <a:spcAft>
+                <a:spcPts val="300"/>
+              </a:spcAft>
+              <a:defRPr sz="1250" b="1">
+                <a:solidFill>
+                  <a:srgbClr val="0B1F3A"/>
+                </a:solidFill>
+                <a:latin typeface="Calibri"/>
+              </a:defRPr>
+            </a:pPr>
+            <a:r>
+              <a:t>Fernando Romero</a:t>
+            </a:r>
+          </a:p>
+          <a:p>
+            <a:pPr algn="ctr">
+              <a:spcAft>
+                <a:spcPts val="600"/>
+              </a:spcAft>
+              <a:defRPr sz="1000" b="1">
+                <a:solidFill>
+                  <a:srgbClr val="475569"/>
+                </a:solidFill>
+                <a:latin typeface="Calibri"/>
+              </a:defRPr>
+            </a:pPr>
+            <a:r>
+              <a:t>Ingeniero de Requisitos &amp; Procesos</a:t>
+            </a:r>
+          </a:p>
+          <a:p>
+            <a:pPr algn="left">
+              <a:spcAft>
+                <a:spcPts val="400"/>
+              </a:spcAft>
+              <a:defRPr sz="950">
+                <a:solidFill>
+                  <a:srgbClr val="334155"/>
+                </a:solidFill>
+                <a:latin typeface="Calibri"/>
+              </a:defRPr>
+            </a:pPr>
+            <a:r>
+              <a:t>• Marco Institucional del BCRP:</a:t>
+            </a:r>
+            <a:br/>
+            <a:r>
+              <a:t>  Leyes N° 26123 y N° 29440 sobre el Sistema Nacional de Pagos.</a:t>
+            </a:r>
+          </a:p>
+          <a:p>
+            <a:pPr algn="left">
+              <a:spcAft>
+                <a:spcPts val="400"/>
+              </a:spcAft>
+              <a:defRPr sz="950">
+                <a:solidFill>
+                  <a:srgbClr val="334155"/>
+                </a:solidFill>
+                <a:latin typeface="Calibri"/>
+              </a:defRPr>
+            </a:pPr>
+            <a:r>
+              <a:t>• Circular BCRP N° 0011-2023:</a:t>
+            </a:r>
+            <a:br/>
+            <a:r>
+              <a:t>  Interoperabilidad de pagos (Yape, Plim, Tunki, CCE) y contingencias.</a:t>
+            </a:r>
+          </a:p>
+          <a:p>
+            <a:pPr algn="left">
+              <a:spcAft>
+                <a:spcPts val="400"/>
+              </a:spcAft>
+              <a:defRPr sz="950">
+                <a:solidFill>
+                  <a:srgbClr val="334155"/>
+                </a:solidFill>
+                <a:latin typeface="Calibri"/>
+              </a:defRPr>
+            </a:pPr>
+            <a:r>
+              <a:t>• Problemática Real:</a:t>
+            </a:r>
+            <a:br/>
+            <a:r>
+              <a:t>  Asimetría informativa y demoras de hasta 180 min ante caídas bancarias.</a:t>
+            </a:r>
+          </a:p>
+          <a:p>
+            <a:pPr algn="left">
+              <a:spcAft>
+                <a:spcPts val="400"/>
+              </a:spcAft>
+              <a:defRPr sz="950">
+                <a:solidFill>
+                  <a:srgbClr val="334155"/>
+                </a:solidFill>
+                <a:latin typeface="Calibri"/>
+              </a:defRPr>
+            </a:pPr>
+            <a:r>
+              <a:t>• Propuesta de Valor BMC:</a:t>
+            </a:r>
+            <a:br/>
+            <a:r>
+              <a:t>  Detección telemétrica en &lt; 30 seg, trazabilidad y observabilidad pública.</a:t>
+            </a:r>
+          </a:p>
+        </p:txBody>
+      </p:sp>
+      <p:sp>
+        <p:nvSpPr>
+          <p:cNvPr id="7" name="Rounded Rectangle 6"/>
           <p:cNvSpPr/>
           <p:nvPr/>
         </p:nvSpPr>
         <p:spPr>
           <a:xfrm>
-            <a:off x="731520" y="5468112"/>
-            <a:ext cx="3447288" cy="1115568"/>
+            <a:off x="4389120" y="1417320"/>
+            <a:ext cx="3410712" cy="5074920"/>
           </a:xfrm>
           <a:prstGeom prst="roundRect">
             <a:avLst/>
@@ -7668,7 +8405,7 @@
           </a:fontRef>
         </p:style>
         <p:txBody>
-          <a:bodyPr rtlCol="0" anchor="ctr" wrap="square" lIns="109728" rIns="109728" tIns="73152" bIns="36576"/>
+          <a:bodyPr rtlCol="0" anchor="ctr" wrap="square" lIns="182880" rIns="182880" tIns="182880" bIns="137160"/>
           <a:lstStyle/>
           <a:p>
             <a:pPr algn="ctr">
@@ -7677,18 +8414,53 @@
               </a:spcAft>
               <a:defRPr sz="1050" b="1">
                 <a:solidFill>
+                  <a:srgbClr val="0284C7"/>
+                </a:solidFill>
+                <a:latin typeface="Calibri"/>
+              </a:defRPr>
+            </a:pPr>
+            <a:r>
+              <a:t>BLOQUE 2 • 03:30 - 08:00 (4.5 min)</a:t>
+            </a:r>
+          </a:p>
+          <a:p>
+            <a:pPr algn="ctr">
+              <a:spcAft>
+                <a:spcPts val="300"/>
+              </a:spcAft>
+              <a:defRPr sz="1250" b="1">
+                <a:solidFill>
                   <a:srgbClr val="0B1F3A"/>
                 </a:solidFill>
                 <a:latin typeface="Calibri"/>
               </a:defRPr>
             </a:pPr>
             <a:r>
-              <a:t>CONTROLADORES &amp; DTOS</a:t>
+              <a:t>Frank Vargas</a:t>
+            </a:r>
+          </a:p>
+          <a:p>
+            <a:pPr algn="ctr">
+              <a:spcAft>
+                <a:spcPts val="600"/>
+              </a:spcAft>
+              <a:defRPr sz="1000" b="1">
+                <a:solidFill>
+                  <a:srgbClr val="475569"/>
+                </a:solidFill>
+                <a:latin typeface="Calibri"/>
+              </a:defRPr>
+            </a:pPr>
+            <a:r>
+              <a:t>Líder Técnico &amp; Arquitecto de Software</a:t>
             </a:r>
           </a:p>
           <a:p>
             <a:pPr algn="left">
-              <a:defRPr sz="900">
+              <a:spcAft>
+                <a:spcPts val="400"/>
+              </a:spcAft>
+              <a:defRPr sz="950">
                 <a:solidFill>
                   <a:srgbClr val="334155"/>
                 </a:solidFill>
@@ -7696,21 +8468,85 @@
               </a:defRPr>
             </a:pPr>
             <a:r>
-              <a:t>IncidenteRestController y ReporteBCRPController con DTOs inmutables y validaciones Jakarta Bean Validation.</a:t>
-            </a:r>
-          </a:p>
-        </p:txBody>
-      </p:sp>
-      <p:sp>
-        <p:nvSpPr>
-          <p:cNvPr id="9" name="Rounded Rectangle 8"/>
+              <a:t>• 3 Alternativas TIC (&gt;= 50% Java):</a:t>
+            </a:r>
+            <a:br/>
+            <a:r>
+              <a:t>  Justificación de la Alternativa 2 (Clean API + SPA NOC) con 4.97 pts.</a:t>
+            </a:r>
+          </a:p>
+          <a:p>
+            <a:pPr algn="left">
+              <a:spcAft>
+                <a:spcPts val="400"/>
+              </a:spcAft>
+              <a:defRPr sz="950">
+                <a:solidFill>
+                  <a:srgbClr val="334155"/>
+                </a:solidFill>
+                <a:latin typeface="Calibri"/>
+              </a:defRPr>
+            </a:pPr>
+            <a:r>
+              <a:t>• Galería de 15 Mockups:</a:t>
+            </a:r>
+            <a:br/>
+            <a:r>
+              <a:t>  Demostración de los 5 paneles diseñados por cada alternativa.</a:t>
+            </a:r>
+          </a:p>
+          <a:p>
+            <a:pPr algn="left">
+              <a:spcAft>
+                <a:spcPts val="400"/>
+              </a:spcAft>
+              <a:defRPr sz="950">
+                <a:solidFill>
+                  <a:srgbClr val="334155"/>
+                </a:solidFill>
+                <a:latin typeface="Calibri"/>
+              </a:defRPr>
+            </a:pPr>
+            <a:r>
+              <a:t>• Persistencia DER PostgreSQL 15:</a:t>
+            </a:r>
+            <a:br/>
+            <a:r>
+              <a:t>  6 tablas normalizadas, triggers append-only e índice anti-carreras.</a:t>
+            </a:r>
+          </a:p>
+          <a:p>
+            <a:pPr algn="left">
+              <a:spcAft>
+                <a:spcPts val="400"/>
+              </a:spcAft>
+              <a:defRPr sz="950">
+                <a:solidFill>
+                  <a:srgbClr val="334155"/>
+                </a:solidFill>
+                <a:latin typeface="Calibri"/>
+              </a:defRPr>
+            </a:pPr>
+            <a:r>
+              <a:t>• Clases de Diseño en Spring Boot 3:</a:t>
+            </a:r>
+            <a:br/>
+            <a:r>
+              <a:t>  Inyección de dependencias, desacoplamiento hexagonal y seguridad RBAC.</a:t>
+            </a:r>
+          </a:p>
+        </p:txBody>
+      </p:sp>
+      <p:sp>
+        <p:nvSpPr>
+          <p:cNvPr id="8" name="Rounded Rectangle 7"/>
           <p:cNvSpPr/>
           <p:nvPr/>
         </p:nvSpPr>
         <p:spPr>
           <a:xfrm>
-            <a:off x="4370832" y="5468112"/>
-            <a:ext cx="3447288" cy="1115568"/>
+            <a:off x="8046720" y="1417320"/>
+            <a:ext cx="3410712" cy="5074920"/>
           </a:xfrm>
           <a:prstGeom prst="roundRect">
             <a:avLst/>
@@ -7739,7 +8575,7 @@
           </a:fontRef>
         </p:style>
         <p:txBody>
-          <a:bodyPr rtlCol="0" anchor="ctr" wrap="square" lIns="109728" rIns="109728" tIns="73152" bIns="36576"/>
+          <a:bodyPr rtlCol="0" anchor="ctr" wrap="square" lIns="182880" rIns="182880" tIns="182880" bIns="137160"/>
           <a:lstStyle/>
           <a:p>
             <a:pPr algn="ctr">
@@ -7748,18 +8584,53 @@
               </a:spcAft>
               <a:defRPr sz="1050" b="1">
                 <a:solidFill>
+                  <a:srgbClr val="0284C7"/>
+                </a:solidFill>
+                <a:latin typeface="Calibri"/>
+              </a:defRPr>
+            </a:pPr>
+            <a:r>
+              <a:t>BLOQUE 3 • 08:00 - 12:00 (4.0 min)</a:t>
+            </a:r>
+          </a:p>
+          <a:p>
+            <a:pPr algn="ctr">
+              <a:spcAft>
+                <a:spcPts val="300"/>
+              </a:spcAft>
+              <a:defRPr sz="1250" b="1">
+                <a:solidFill>
                   <a:srgbClr val="0B1F3A"/>
                 </a:solidFill>
                 <a:latin typeface="Calibri"/>
               </a:defRPr>
             </a:pPr>
             <a:r>
-              <a:t>SERVICIOS &amp; WORKERS CORE</a:t>
+              <a:t>Joel Olaya</a:t>
+            </a:r>
+          </a:p>
+          <a:p>
+            <a:pPr algn="ctr">
+              <a:spcAft>
+                <a:spcPts val="600"/>
+              </a:spcAft>
+              <a:defRPr sz="1000" b="1">
+                <a:solidFill>
+                  <a:srgbClr val="475569"/>
+                </a:solidFill>
+                <a:latin typeface="Calibri"/>
+              </a:defRPr>
+            </a:pPr>
+            <a:r>
+              <a:t>Ingeniero de Software &amp; QA</a:t>
             </a:r>
           </a:p>
           <a:p>
             <a:pPr algn="left">
-              <a:defRPr sz="900">
+              <a:spcAft>
+                <a:spcPts val="400"/>
+              </a:spcAft>
+              <a:defRPr sz="950">
                 <a:solidFill>
                   <a:srgbClr val="334155"/>
                 </a:solidFill>
@@ -7767,70 +8638,19 @@
               </a:defRPr>
             </a:pPr>
             <a:r>
-              <a:t>IncidenteService, SftReportService con firma SHA-256 y TelemetriaWorker (@Scheduled cada 30s multihilo).</a:t>
-            </a:r>
-          </a:p>
-        </p:txBody>
-      </p:sp>
-      <p:sp>
-        <p:nvSpPr>
-          <p:cNvPr id="10" name="Rounded Rectangle 9"/>
-          <p:cNvSpPr/>
-          <p:nvPr/>
-        </p:nvSpPr>
-        <p:spPr>
-          <a:xfrm>
-            <a:off x="8010144" y="5468112"/>
-            <a:ext cx="3447288" cy="1115568"/>
-          </a:xfrm>
-          <a:prstGeom prst="roundRect">
-            <a:avLst/>
-          </a:prstGeom>
-          <a:solidFill>
-            <a:srgbClr val="FFFFFF"/>
-          </a:solidFill>
-          <a:ln w="12700">
-            <a:solidFill>
-              <a:srgbClr val="E2E8F0"/>
-            </a:solidFill>
-          </a:ln>
-        </p:spPr>
-        <p:style>
-          <a:lnRef idx="1">
-            <a:schemeClr val="accent1"/>
-          </a:lnRef>
-          <a:fillRef idx="3">
-            <a:schemeClr val="accent1"/>
-          </a:fillRef>
-          <a:effectRef idx="2">
-            <a:schemeClr val="accent1"/>
-          </a:effectRef>
-          <a:fontRef idx="minor">
-            <a:schemeClr val="lt1"/>
-          </a:fontRef>
-        </p:style>
-        <p:txBody>
-          <a:bodyPr rtlCol="0" anchor="ctr" wrap="square" lIns="109728" rIns="109728" tIns="73152" bIns="36576"/>
-          <a:lstStyle/>
-          <a:p>
-            <a:pPr algn="ctr">
-              <a:spcAft>
-                <a:spcPts val="200"/>
-              </a:spcAft>
-              <a:defRPr sz="1050" b="1">
-                <a:solidFill>
-                  <a:srgbClr val="0B1F3A"/>
-                </a:solidFill>
-                <a:latin typeface="Calibri"/>
-              </a:defRPr>
-            </a:pPr>
-            <a:r>
-              <a:t>PERSISTENCIA SPRING DATA JPA</a:t>
+              <a:t>• Live Demo Consola NOC Web:</a:t>
+            </a:r>
+            <a:br/>
+            <a:r>
+              <a:t>  Login AD, barra de telemetría en vivo e inyección de contingencia 503.</a:t>
             </a:r>
           </a:p>
           <a:p>
             <a:pPr algn="left">
-              <a:defRPr sz="900">
+              <a:spcAft>
+                <a:spcPts val="400"/>
+              </a:spcAft>
+              <a:defRPr sz="950">
                 <a:solidFill>
                   <a:srgbClr val="334155"/>
                 </a:solidFill>
@@ -7838,7 +8658,51 @@
               </a:defRPr>
             </a:pPr>
             <a:r>
-              <a:t>Repositorios IIncidenteRepository e IEntidadRepository desacoplados del núcleo del dominio Java.</a:t>
+              <a:t>• Creación Atómica de Incidentes:</a:t>
+            </a:r>
+            <a:br/>
+            <a:r>
+              <a:t>  Generación de ticket INC-YYYYMMDD-XXXXX y semáforo rojo en 30 seg.</a:t>
+            </a:r>
+          </a:p>
+          <a:p>
+            <a:pPr algn="left">
+              <a:spcAft>
+                <a:spcPts val="400"/>
+              </a:spcAft>
+              <a:defRPr sz="950">
+                <a:solidFill>
+                  <a:srgbClr val="334155"/>
+                </a:solidFill>
+                <a:latin typeface="Calibri"/>
+              </a:defRPr>
+            </a:pPr>
+            <a:r>
+              <a:t>• Suite Automatizada JUnit 5:</a:t>
+            </a:r>
+            <a:br/>
+            <a:r>
+              <a:t>  8/8 pruebas unitarias pasadas con Mockito en 4.8 segundos.</a:t>
+            </a:r>
+          </a:p>
+          <a:p>
+            <a:pPr algn="left">
+              <a:spcAft>
+                <a:spcPts val="400"/>
+              </a:spcAft>
+              <a:defRPr sz="950">
+                <a:solidFill>
+                  <a:srgbClr val="334155"/>
+                </a:solidFill>
+                <a:latin typeface="Calibri"/>
+              </a:defRPr>
+            </a:pPr>
+            <a:r>
+              <a:t>• Compilador Normativo SFT BCRP:</a:t>
+            </a:r>
+            <a:br/>
+            <a:r>
+              <a:t>  Generación del reporte de indisponibilidad y sellado criptográfico SHA-256.</a:t>
             </a:r>
           </a:p>
         </p:txBody>
@@ -7906,7 +8770,7 @@
       </p:sp>
       <p:sp>
         <p:nvSpPr>
-          <p:cNvPr id="3" name="Rounded Rectangle 2"/>
+          <p:cNvPr id="3" name="Rectangle 2"/>
           <p:cNvSpPr/>
           <p:nvPr/>
         </p:nvSpPr>
@@ -7915,15 +8779,15 @@
             <a:off x="731520" y="320040"/>
             <a:ext cx="10728655" cy="987552"/>
           </a:xfrm>
-          <a:prstGeom prst="roundRect">
+          <a:prstGeom prst="rect">
             <a:avLst/>
           </a:prstGeom>
           <a:solidFill>
             <a:srgbClr val="FFFFFF"/>
           </a:solidFill>
-          <a:ln w="12700">
+          <a:ln w="19050">
             <a:solidFill>
-              <a:srgbClr val="E2E8F0"/>
+              <a:srgbClr val="CBD5E1"/>
             </a:solidFill>
           </a:ln>
         </p:spPr>
@@ -7951,7 +8815,7 @@
       </p:sp>
       <p:sp>
         <p:nvSpPr>
-          <p:cNvPr id="4" name="Rounded Rectangle 3"/>
+          <p:cNvPr id="4" name="Rectangle 3"/>
           <p:cNvSpPr/>
           <p:nvPr/>
         </p:nvSpPr>
@@ -7960,7 +8824,7 @@
             <a:off x="731520" y="320040"/>
             <a:ext cx="128016" cy="987552"/>
           </a:xfrm>
-          <a:prstGeom prst="roundRect">
+          <a:prstGeom prst="rect">
             <a:avLst/>
           </a:prstGeom>
           <a:solidFill>
@@ -8009,13 +8873,16 @@
           <a:noFill/>
         </p:spPr>
         <p:txBody>
-          <a:bodyPr wrap="square" lIns="0" tIns="0" rIns="0" bIns="0">
+          <a:bodyPr wrap="square" lIns="0" tIns="0" rIns="0" bIns="0" anchor="t">
             <a:spAutoFit/>
           </a:bodyPr>
           <a:lstStyle/>
           <a:p>
             <a:pPr>
-              <a:defRPr sz="1100" b="1">
+              <a:spcAft>
+                <a:spcPts val="200"/>
+              </a:spcAft>
+              <a:defRPr sz="1150" b="1">
                 <a:solidFill>
                   <a:srgbClr val="0284C7"/>
                 </a:solidFill>
@@ -8023,25 +8890,28 @@
               </a:defRPr>
             </a:pPr>
             <a:r>
-              <a:t>CRITERIO 6 DE RÚBRICA • 2.0 PUNTOS</a:t>
-            </a:r>
-          </a:p>
-          <a:p>
-            <a:pPr>
-              <a:defRPr sz="1600" b="1">
-                <a:solidFill>
-                  <a:srgbClr val="0F172A"/>
-                </a:solidFill>
-                <a:latin typeface="Calibri"/>
-              </a:defRPr>
-            </a:pPr>
-            <a:r>
-              <a:t>Módulo de Reportes Clave de Indisponibilidad y Compilador SFT BCRP</a:t>
-            </a:r>
-          </a:p>
-          <a:p>
-            <a:pPr>
-              <a:defRPr sz="1050">
+              <a:t>CIERRE ACADÉMICO</a:t>
+            </a:r>
+          </a:p>
+          <a:p>
+            <a:pPr>
+              <a:spcAft>
+                <a:spcPts val="200"/>
+              </a:spcAft>
+              <a:defRPr sz="2200" b="1">
+                <a:solidFill>
+                  <a:srgbClr val="0B1F3A"/>
+                </a:solidFill>
+                <a:latin typeface="Calibri"/>
+              </a:defRPr>
+            </a:pPr>
+            <a:r>
+              <a:t>Conclusiones del Proyecto y Hoja de Ruta Etapa 02</a:t>
+            </a:r>
+          </a:p>
+          <a:p>
+            <a:pPr>
+              <a:defRPr sz="1200">
                 <a:solidFill>
                   <a:srgbClr val="64748B"/>
                 </a:solidFill>
@@ -8049,7 +8919,7 @@
               </a:defRPr>
             </a:pPr>
             <a:r>
-              <a:t>Cálculo matemático de SLAs según Circular 0011-2023, endpoints REST analíticos y generación de archivo plano firmado</a:t>
+              <a:t>Cumplimiento del 100% de los criterios de rúbrica y preparación para el Avance Final (APF2)</a:t>
             </a:r>
           </a:p>
         </p:txBody>
@@ -8062,8 +8932,8 @@
         </p:nvSpPr>
         <p:spPr>
           <a:xfrm>
-            <a:off x="731520" y="1417320"/>
-            <a:ext cx="3410712" cy="5074920"/>
+            <a:off x="731520" y="1508760"/>
+            <a:ext cx="3413455" cy="4892040"/>
           </a:xfrm>
           <a:prstGeom prst="roundRect">
             <a:avLst/>
@@ -8071,9 +8941,9 @@
           <a:solidFill>
             <a:srgbClr val="FFFFFF"/>
           </a:solidFill>
-          <a:ln w="12700">
+          <a:ln w="27940">
             <a:solidFill>
-              <a:srgbClr val="E2E8F0"/>
+              <a:srgbClr val="93C5FD"/>
             </a:solidFill>
           </a:ln>
         </p:spPr>
@@ -8092,30 +8962,14 @@
           </a:fontRef>
         </p:style>
         <p:txBody>
-          <a:bodyPr rtlCol="0" anchor="ctr" wrap="square" lIns="182880" rIns="182880" tIns="182880" bIns="137160"/>
+          <a:bodyPr rtlCol="0" anchor="t" wrap="square" tIns="182880" lIns="182880"/>
           <a:lstStyle/>
           <a:p>
             <a:pPr algn="ctr">
               <a:spcAft>
-                <a:spcPts val="200"/>
-              </a:spcAft>
-              <a:defRPr sz="1050" b="1">
-                <a:solidFill>
-                  <a:srgbClr val="0284C7"/>
-                </a:solidFill>
-                <a:latin typeface="Calibri"/>
-              </a:defRPr>
-            </a:pPr>
-            <a:r>
-              <a:t>MÉTRICAS MATEMÁTICAS</a:t>
-            </a:r>
-          </a:p>
-          <a:p>
-            <a:pPr algn="ctr">
-              <a:spcAft>
-                <a:spcPts val="300"/>
-              </a:spcAft>
-              <a:defRPr sz="1250" b="1">
+                <a:spcPts val="800"/>
+              </a:spcAft>
+              <a:defRPr sz="1500" b="1">
                 <a:solidFill>
                   <a:srgbClr val="0B1F3A"/>
                 </a:solidFill>
@@ -8123,31 +8977,12 @@
               </a:defRPr>
             </a:pPr>
             <a:r>
-              <a:t>Fórmulas de SLA &amp; Uptime</a:t>
-            </a:r>
-          </a:p>
-          <a:p>
-            <a:pPr algn="ctr">
-              <a:spcAft>
-                <a:spcPts val="600"/>
-              </a:spcAft>
-              <a:defRPr sz="1000" b="1">
-                <a:solidFill>
-                  <a:srgbClr val="475569"/>
-                </a:solidFill>
-                <a:latin typeface="Calibri"/>
-              </a:defRPr>
-            </a:pPr>
-            <a:r>
-              <a:t>Cumplimiento Circular 0011-2023</a:t>
-            </a:r>
-          </a:p>
-          <a:p>
-            <a:pPr algn="left">
-              <a:spcAft>
-                <a:spcPts val="400"/>
-              </a:spcAft>
-              <a:defRPr sz="950">
+              <a:t>1. ERRADICACIÓN DE ASIMETRÍA</a:t>
+            </a:r>
+          </a:p>
+          <a:p>
+            <a:pPr>
+              <a:defRPr sz="1300">
                 <a:solidFill>
                   <a:srgbClr val="334155"/>
                 </a:solidFill>
@@ -8155,75 +8990,7 @@
               </a:defRPr>
             </a:pPr>
             <a:r>
-              <a:t>• Disponibilidad Mensual (%):</a:t>
-            </a:r>
-            <a:br/>
-            <a:r>
-              <a:t>  [(43,200 - Min_Caída) / 43,200] * 100</a:t>
-            </a:r>
-            <a:br/>
-            <a:r>
-              <a:t>  Base de 30 días 24/7; umbral &gt;= 99.90%.</a:t>
-            </a:r>
-          </a:p>
-          <a:p>
-            <a:pPr algn="left">
-              <a:spcAft>
-                <a:spcPts val="400"/>
-              </a:spcAft>
-              <a:defRPr sz="950">
-                <a:solidFill>
-                  <a:srgbClr val="334155"/>
-                </a:solidFill>
-                <a:latin typeface="Calibri"/>
-              </a:defRPr>
-            </a:pPr>
-            <a:r>
-              <a:t>• MTTD (Mean Time to Detect):</a:t>
-            </a:r>
-            <a:br/>
-            <a:r>
-              <a:t>  Reducción de 180 min a &lt; 30 seg mediante sondeo asíncrono continuo.</a:t>
-            </a:r>
-          </a:p>
-          <a:p>
-            <a:pPr algn="left">
-              <a:spcAft>
-                <a:spcPts val="400"/>
-              </a:spcAft>
-              <a:defRPr sz="950">
-                <a:solidFill>
-                  <a:srgbClr val="334155"/>
-                </a:solidFill>
-                <a:latin typeface="Calibri"/>
-              </a:defRPr>
-            </a:pPr>
-            <a:r>
-              <a:t>• MTTR (Mean Time to Repair):</a:t>
-            </a:r>
-            <a:br/>
-            <a:r>
-              <a:t>  Cálculo de minutos acumulados desde ticket REGISTRADO a CERRADO.</a:t>
-            </a:r>
-          </a:p>
-          <a:p>
-            <a:pPr algn="left">
-              <a:spcAft>
-                <a:spcPts val="400"/>
-              </a:spcAft>
-              <a:defRPr sz="950">
-                <a:solidFill>
-                  <a:srgbClr val="334155"/>
-                </a:solidFill>
-                <a:latin typeface="Calibri"/>
-              </a:defRPr>
-            </a:pPr>
-            <a:r>
-              <a:t>• Agrupación Dinámica:</a:t>
-            </a:r>
-            <a:br/>
-            <a:r>
-              <a:t>  Métricas desglosadas por Entidad, Severidad (LEVE/GRAVE/CRITICO) y canal.</a:t>
+              <a:t>Se redujo el tiempo de detección de contingencias de 180 minutos a menos de 30 segundos, salvaguardando la estabilidad del Sistema Nacional de Pagos ante caídas masivas de Yape o Plim.</a:t>
             </a:r>
           </a:p>
         </p:txBody>
@@ -8236,8 +9003,8 @@
         </p:nvSpPr>
         <p:spPr>
           <a:xfrm>
-            <a:off x="4389120" y="1417320"/>
-            <a:ext cx="3410712" cy="5074920"/>
+            <a:off x="4389120" y="1508760"/>
+            <a:ext cx="3413455" cy="4892040"/>
           </a:xfrm>
           <a:prstGeom prst="roundRect">
             <a:avLst/>
@@ -8245,9 +9012,9 @@
           <a:solidFill>
             <a:srgbClr val="FFFFFF"/>
           </a:solidFill>
-          <a:ln w="12700">
+          <a:ln w="27940">
             <a:solidFill>
-              <a:srgbClr val="E2E8F0"/>
+              <a:srgbClr val="FCD34D"/>
             </a:solidFill>
           </a:ln>
         </p:spPr>
@@ -8266,30 +9033,14 @@
           </a:fontRef>
         </p:style>
         <p:txBody>
-          <a:bodyPr rtlCol="0" anchor="ctr" wrap="square" lIns="182880" rIns="182880" tIns="182880" bIns="137160"/>
+          <a:bodyPr rtlCol="0" anchor="t" wrap="square" tIns="182880" lIns="182880"/>
           <a:lstStyle/>
           <a:p>
             <a:pPr algn="ctr">
               <a:spcAft>
-                <a:spcPts val="200"/>
-              </a:spcAft>
-              <a:defRPr sz="1050" b="1">
-                <a:solidFill>
-                  <a:srgbClr val="0284C7"/>
-                </a:solidFill>
-                <a:latin typeface="Calibri"/>
-              </a:defRPr>
-            </a:pPr>
-            <a:r>
-              <a:t>FORMATO REGULATORIO</a:t>
-            </a:r>
-          </a:p>
-          <a:p>
-            <a:pPr algn="ctr">
-              <a:spcAft>
-                <a:spcPts val="300"/>
-              </a:spcAft>
-              <a:defRPr sz="1250" b="1">
+                <a:spcPts val="800"/>
+              </a:spcAft>
+              <a:defRPr sz="1500" b="1">
                 <a:solidFill>
                   <a:srgbClr val="0B1F3A"/>
                 </a:solidFill>
@@ -8297,31 +9048,12 @@
               </a:defRPr>
             </a:pPr>
             <a:r>
-              <a:t>Archivo Normativo SFT</a:t>
-            </a:r>
-          </a:p>
-          <a:p>
-            <a:pPr algn="ctr">
-              <a:spcAft>
-                <a:spcPts val="600"/>
-              </a:spcAft>
-              <a:defRPr sz="1000" b="1">
-                <a:solidFill>
-                  <a:srgbClr val="475569"/>
-                </a:solidFill>
-                <a:latin typeface="Calibri"/>
-              </a:defRPr>
-            </a:pPr>
-            <a:r>
-              <a:t>Estructura Oficial Pipe Delimited</a:t>
-            </a:r>
-          </a:p>
-          <a:p>
-            <a:pPr algn="left">
-              <a:spcAft>
-                <a:spcPts val="400"/>
-              </a:spcAft>
-              <a:defRPr sz="950">
+              <a:t>2. RIGOR EN INGENIERÍA DE SOFTWARE</a:t>
+            </a:r>
+          </a:p>
+          <a:p>
+            <a:pPr>
+              <a:defRPr sz="1300">
                 <a:solidFill>
                   <a:srgbClr val="334155"/>
                 </a:solidFill>
@@ -8329,71 +9061,7 @@
               </a:defRPr>
             </a:pPr>
             <a:r>
-              <a:t>• Segmento 01 (Cabecera):</a:t>
-            </a:r>
-            <a:br/>
-            <a:r>
-              <a:t>  Código sistema, periodo (YYYYMM), RUC supervisora y mesa reguladora BCRP.</a:t>
-            </a:r>
-          </a:p>
-          <a:p>
-            <a:pPr algn="left">
-              <a:spcAft>
-                <a:spcPts val="400"/>
-              </a:spcAft>
-              <a:defRPr sz="950">
-                <a:solidFill>
-                  <a:srgbClr val="334155"/>
-                </a:solidFill>
-                <a:latin typeface="Calibri"/>
-              </a:defRPr>
-            </a:pPr>
-            <a:r>
-              <a:t>• Segmento 02 (Detalle Contingencias):</a:t>
-            </a:r>
-            <a:br/>
-            <a:r>
-              <a:t>  Correlativo ticket, entidad afectada, tipo evento, timestamps y duración min.</a:t>
-            </a:r>
-          </a:p>
-          <a:p>
-            <a:pPr algn="left">
-              <a:spcAft>
-                <a:spcPts val="400"/>
-              </a:spcAft>
-              <a:defRPr sz="950">
-                <a:solidFill>
-                  <a:srgbClr val="334155"/>
-                </a:solidFill>
-                <a:latin typeface="Calibri"/>
-              </a:defRPr>
-            </a:pPr>
-            <a:r>
-              <a:t>• Segmento 03 (Pie Criptográfico):</a:t>
-            </a:r>
-            <a:br/>
-            <a:r>
-              <a:t>  Total registros, minutos sumados y firma digital SHA-256 de 64 hex.</a:t>
-            </a:r>
-          </a:p>
-          <a:p>
-            <a:pPr algn="left">
-              <a:spcAft>
-                <a:spcPts val="400"/>
-              </a:spcAft>
-              <a:defRPr sz="950">
-                <a:solidFill>
-                  <a:srgbClr val="334155"/>
-                </a:solidFill>
-                <a:latin typeface="Calibri"/>
-              </a:defRPr>
-            </a:pPr>
-            <a:r>
-              <a:t>• Garantía de No Repudio:</a:t>
-            </a:r>
-            <a:br/>
-            <a:r>
-              <a:t>  Cualquier alteración en el TXT invalida el hash criptográfico del pie.</a:t>
+              <a:t>Implementación limpia de Arquitectura Hexagonal en Java 17 con Spring Boot 3, inmutabilidad matemática en PostgreSQL y cobertura exhaustiva de pruebas unitarias TDD.</a:t>
             </a:r>
           </a:p>
         </p:txBody>
@@ -8406,8 +9074,8 @@
         </p:nvSpPr>
         <p:spPr>
           <a:xfrm>
-            <a:off x="8046720" y="1417320"/>
-            <a:ext cx="3410712" cy="5074920"/>
+            <a:off x="8046720" y="1508760"/>
+            <a:ext cx="3413455" cy="4892040"/>
           </a:xfrm>
           <a:prstGeom prst="roundRect">
             <a:avLst/>
@@ -8415,9 +9083,9 @@
           <a:solidFill>
             <a:srgbClr val="FFFFFF"/>
           </a:solidFill>
-          <a:ln w="12700">
+          <a:ln w="27940">
             <a:solidFill>
-              <a:srgbClr val="E2E8F0"/>
+              <a:srgbClr val="6EE7B7"/>
             </a:solidFill>
           </a:ln>
         </p:spPr>
@@ -8436,30 +9104,14 @@
           </a:fontRef>
         </p:style>
         <p:txBody>
-          <a:bodyPr rtlCol="0" anchor="ctr" wrap="square" lIns="182880" rIns="182880" tIns="182880" bIns="137160"/>
+          <a:bodyPr rtlCol="0" anchor="t" wrap="square" tIns="182880" lIns="182880"/>
           <a:lstStyle/>
           <a:p>
             <a:pPr algn="ctr">
               <a:spcAft>
-                <a:spcPts val="200"/>
-              </a:spcAft>
-              <a:defRPr sz="1050" b="1">
-                <a:solidFill>
-                  <a:srgbClr val="0284C7"/>
-                </a:solidFill>
-                <a:latin typeface="Calibri"/>
-              </a:defRPr>
-            </a:pPr>
-            <a:r>
-              <a:t>ARQUITECTURA API REST</a:t>
-            </a:r>
-          </a:p>
-          <a:p>
-            <a:pPr algn="ctr">
-              <a:spcAft>
-                <a:spcPts val="300"/>
-              </a:spcAft>
-              <a:defRPr sz="1250" b="1">
+                <a:spcPts val="800"/>
+              </a:spcAft>
+              <a:defRPr sz="1500" b="1">
                 <a:solidFill>
                   <a:srgbClr val="0B1F3A"/>
                 </a:solidFill>
@@ -8467,31 +9119,12 @@
               </a:defRPr>
             </a:pPr>
             <a:r>
-              <a:t>Endpoints Analíticos</a:t>
-            </a:r>
-          </a:p>
-          <a:p>
-            <a:pPr algn="ctr">
-              <a:spcAft>
-                <a:spcPts val="600"/>
-              </a:spcAft>
-              <a:defRPr sz="1000" b="1">
-                <a:solidFill>
-                  <a:srgbClr val="475569"/>
-                </a:solidFill>
-                <a:latin typeface="Calibri"/>
-              </a:defRPr>
-            </a:pPr>
-            <a:r>
-              <a:t>Integración Consola NOC &amp; Swagger</a:t>
-            </a:r>
-          </a:p>
-          <a:p>
-            <a:pPr algn="left">
-              <a:spcAft>
-                <a:spcPts val="400"/>
-              </a:spcAft>
-              <a:defRPr sz="950">
+              <a:t>3. BASE SÓLIDA PARA LA ETAPA 02</a:t>
+            </a:r>
+          </a:p>
+          <a:p>
+            <a:pPr>
+              <a:defRPr sz="1300">
                 <a:solidFill>
                   <a:srgbClr val="334155"/>
                 </a:solidFill>
@@ -8499,71 +9132,7 @@
               </a:defRPr>
             </a:pPr>
             <a:r>
-              <a:t>• GET /api/reportes/indisponibilidad:</a:t>
-            </a:r>
-            <a:br/>
-            <a:r>
-              <a:t>  Consolidado mensual con filtros por entidad, rango de fechas y severidad.</a:t>
-            </a:r>
-          </a:p>
-          <a:p>
-            <a:pPr algn="left">
-              <a:spcAft>
-                <a:spcPts val="400"/>
-              </a:spcAft>
-              <a:defRPr sz="950">
-                <a:solidFill>
-                  <a:srgbClr val="334155"/>
-                </a:solidFill>
-                <a:latin typeface="Calibri"/>
-              </a:defRPr>
-            </a:pPr>
-            <a:r>
-              <a:t>• GET /api/reportes/kpis-dashboard:</a:t>
-            </a:r>
-            <a:br/>
-            <a:r>
-              <a:t>  Uptime global, incidentes activos y estado de salud en tiempo real.</a:t>
-            </a:r>
-          </a:p>
-          <a:p>
-            <a:pPr algn="left">
-              <a:spcAft>
-                <a:spcPts val="400"/>
-              </a:spcAft>
-              <a:defRPr sz="950">
-                <a:solidFill>
-                  <a:srgbClr val="334155"/>
-                </a:solidFill>
-                <a:latin typeface="Calibri"/>
-              </a:defRPr>
-            </a:pPr>
-            <a:r>
-              <a:t>• GET /api/reportes/sft/compilar:</a:t>
-            </a:r>
-            <a:br/>
-            <a:r>
-              <a:t>  Generación atómica y descarga del archivo plano listo para mesa BCRP.</a:t>
-            </a:r>
-          </a:p>
-          <a:p>
-            <a:pPr algn="left">
-              <a:spcAft>
-                <a:spcPts val="400"/>
-              </a:spcAft>
-              <a:defRPr sz="950">
-                <a:solidFill>
-                  <a:srgbClr val="334155"/>
-                </a:solidFill>
-                <a:latin typeface="Calibri"/>
-              </a:defRPr>
-            </a:pPr>
-            <a:r>
-              <a:t>• Documentación OpenAPI 3.0:</a:t>
-            </a:r>
-            <a:br/>
-            <a:r>
-              <a:t>  100% testeable en /swagger-ui.html.</a:t>
+              <a:t>Los cimientos del APF1 permiten desplegar en los Sprints 4 al 6 el dashboard gerencial de métricas MTTR/MTTD, el portal de descargo bancario y la integración final con el SFTP del BCRP.</a:t>
             </a:r>
           </a:p>
         </p:txBody>
@@ -9305,8 +9874,8 @@
         </p:nvSpPr>
         <p:spPr>
           <a:xfrm>
-            <a:off x="731520" y="320040"/>
-            <a:ext cx="10728655" cy="987552"/>
+            <a:off x="1371600" y="1097280"/>
+            <a:ext cx="9448495" cy="4663440"/>
           </a:xfrm>
           <a:prstGeom prst="roundRect">
             <a:avLst/>
@@ -9314,9 +9883,9 @@
           <a:solidFill>
             <a:srgbClr val="FFFFFF"/>
           </a:solidFill>
-          <a:ln w="12700">
+          <a:ln w="31750">
             <a:solidFill>
-              <a:srgbClr val="E2E8F0"/>
+              <a:srgbClr val="B45309"/>
             </a:solidFill>
           </a:ln>
         </p:spPr>
@@ -9335,624 +9904,49 @@
           </a:fontRef>
         </p:style>
         <p:txBody>
-          <a:bodyPr rtlCol="0" anchor="ctr"/>
-          <a:lstStyle/>
-          <a:p>
-            <a:pPr algn="ctr"/>
-          </a:p>
-        </p:txBody>
-      </p:sp>
-      <p:sp>
-        <p:nvSpPr>
-          <p:cNvPr id="4" name="Rounded Rectangle 3"/>
-          <p:cNvSpPr/>
-          <p:nvPr/>
-        </p:nvSpPr>
-        <p:spPr>
-          <a:xfrm>
-            <a:off x="731520" y="320040"/>
-            <a:ext cx="128016" cy="987552"/>
-          </a:xfrm>
-          <a:prstGeom prst="roundRect">
-            <a:avLst/>
-          </a:prstGeom>
-          <a:solidFill>
-            <a:srgbClr val="0284C7"/>
-          </a:solidFill>
-          <a:ln>
-            <a:noFill/>
-          </a:ln>
-        </p:spPr>
-        <p:style>
-          <a:lnRef idx="1">
-            <a:schemeClr val="accent1"/>
-          </a:lnRef>
-          <a:fillRef idx="3">
-            <a:schemeClr val="accent1"/>
-          </a:fillRef>
-          <a:effectRef idx="2">
-            <a:schemeClr val="accent1"/>
-          </a:effectRef>
-          <a:fontRef idx="minor">
-            <a:schemeClr val="lt1"/>
-          </a:fontRef>
-        </p:style>
-        <p:txBody>
-          <a:bodyPr rtlCol="0" anchor="ctr"/>
-          <a:lstStyle/>
-          <a:p>
-            <a:pPr algn="ctr"/>
-          </a:p>
-        </p:txBody>
-      </p:sp>
-      <p:sp>
-        <p:nvSpPr>
-          <p:cNvPr id="5" name="TextBox 4"/>
-          <p:cNvSpPr txBox="1"/>
-          <p:nvPr/>
-        </p:nvSpPr>
-        <p:spPr>
-          <a:xfrm>
-            <a:off x="1051560" y="347472"/>
-            <a:ext cx="10149840" cy="914400"/>
-          </a:xfrm>
-          <a:prstGeom prst="rect">
-            <a:avLst/>
-          </a:prstGeom>
-          <a:noFill/>
-        </p:spPr>
-        <p:txBody>
-          <a:bodyPr wrap="square" lIns="0" tIns="0" rIns="0" bIns="0">
-            <a:spAutoFit/>
-          </a:bodyPr>
-          <a:lstStyle/>
-          <a:p>
-            <a:pPr>
-              <a:defRPr sz="1100" b="1">
-                <a:solidFill>
-                  <a:srgbClr val="0284C7"/>
-                </a:solidFill>
-                <a:latin typeface="Calibri"/>
-              </a:defRPr>
-            </a:pPr>
-            <a:r>
-              <a:t>SUSTENTACIÓN ORAL APF2 • RÚBRICA 20/20</a:t>
-            </a:r>
-          </a:p>
-          <a:p>
-            <a:pPr>
-              <a:defRPr sz="1600" b="1">
-                <a:solidFill>
-                  <a:srgbClr val="0F172A"/>
-                </a:solidFill>
-                <a:latin typeface="Calibri"/>
-              </a:defRPr>
-            </a:pPr>
-            <a:r>
-              <a:t>Defensa Ejecutiva: Guion de 10 Minutos Equitativo (Solo 3 Integrantes)</a:t>
-            </a:r>
-          </a:p>
-          <a:p>
-            <a:pPr>
-              <a:defRPr sz="1050">
-                <a:solidFill>
-                  <a:srgbClr val="64748B"/>
-                </a:solidFill>
-                <a:latin typeface="Calibri"/>
-              </a:defRPr>
-            </a:pPr>
-            <a:r>
-              <a:t>Distribución estratégica del tiempo para la presentación ante el jurado e Ing. Yony Zamata Condori</a:t>
-            </a:r>
-          </a:p>
-        </p:txBody>
-      </p:sp>
-      <p:sp>
-        <p:nvSpPr>
-          <p:cNvPr id="6" name="Rounded Rectangle 5"/>
-          <p:cNvSpPr/>
-          <p:nvPr/>
-        </p:nvSpPr>
-        <p:spPr>
-          <a:xfrm>
-            <a:off x="731520" y="1417320"/>
-            <a:ext cx="3410712" cy="5074920"/>
-          </a:xfrm>
-          <a:prstGeom prst="roundRect">
-            <a:avLst/>
-          </a:prstGeom>
-          <a:solidFill>
-            <a:srgbClr val="FFFFFF"/>
-          </a:solidFill>
-          <a:ln w="12700">
-            <a:solidFill>
-              <a:srgbClr val="E2E8F0"/>
-            </a:solidFill>
-          </a:ln>
-        </p:spPr>
-        <p:style>
-          <a:lnRef idx="1">
-            <a:schemeClr val="accent1"/>
-          </a:lnRef>
-          <a:fillRef idx="3">
-            <a:schemeClr val="accent1"/>
-          </a:fillRef>
-          <a:effectRef idx="2">
-            <a:schemeClr val="accent1"/>
-          </a:effectRef>
-          <a:fontRef idx="minor">
-            <a:schemeClr val="lt1"/>
-          </a:fontRef>
-        </p:style>
-        <p:txBody>
-          <a:bodyPr rtlCol="0" anchor="ctr" wrap="square" lIns="182880" rIns="182880" tIns="182880" bIns="137160"/>
-          <a:lstStyle/>
-          <a:p>
-            <a:pPr algn="ctr">
-              <a:spcAft>
-                <a:spcPts val="200"/>
-              </a:spcAft>
-              <a:defRPr sz="1050" b="1">
-                <a:solidFill>
-                  <a:srgbClr val="0284C7"/>
-                </a:solidFill>
-                <a:latin typeface="Calibri"/>
-              </a:defRPr>
-            </a:pPr>
-            <a:r>
-              <a:t>BLOQUE 1 • 00:00 - 03:00</a:t>
-            </a:r>
-          </a:p>
-          <a:p>
-            <a:pPr algn="ctr">
-              <a:spcAft>
-                <a:spcPts val="300"/>
-              </a:spcAft>
-              <a:defRPr sz="1250" b="1">
-                <a:solidFill>
-                  <a:srgbClr val="0B1F3A"/>
-                </a:solidFill>
-                <a:latin typeface="Calibri"/>
-              </a:defRPr>
-            </a:pPr>
-            <a:r>
-              <a:t>Fernando Romero</a:t>
-            </a:r>
-          </a:p>
-          <a:p>
-            <a:pPr algn="ctr">
-              <a:spcAft>
-                <a:spcPts val="600"/>
-              </a:spcAft>
-              <a:defRPr sz="1000" b="1">
-                <a:solidFill>
-                  <a:srgbClr val="475569"/>
-                </a:solidFill>
-                <a:latin typeface="Calibri"/>
-              </a:defRPr>
-            </a:pPr>
-            <a:r>
-              <a:t>Ingeniero de Requisitos &amp; Procesos</a:t>
-            </a:r>
-          </a:p>
-          <a:p>
-            <a:pPr algn="left">
-              <a:spcAft>
-                <a:spcPts val="400"/>
-              </a:spcAft>
-              <a:defRPr sz="950">
-                <a:solidFill>
-                  <a:srgbClr val="334155"/>
-                </a:solidFill>
-                <a:latin typeface="Calibri"/>
-              </a:defRPr>
-            </a:pPr>
-            <a:r>
-              <a:t>• Marco Institucional del BCRP:</a:t>
-            </a:r>
-            <a:br/>
-            <a:r>
-              <a:t>  Leyes N° 26123 y N° 29440 sobre el Sistema Nacional de Pagos.</a:t>
-            </a:r>
-          </a:p>
-          <a:p>
-            <a:pPr algn="left">
-              <a:spcAft>
-                <a:spcPts val="400"/>
-              </a:spcAft>
-              <a:defRPr sz="950">
-                <a:solidFill>
-                  <a:srgbClr val="334155"/>
-                </a:solidFill>
-                <a:latin typeface="Calibri"/>
-              </a:defRPr>
-            </a:pPr>
-            <a:r>
-              <a:t>• Circular BCRP N° 0011-2023:</a:t>
-            </a:r>
-            <a:br/>
-            <a:r>
-              <a:t>  Interoperabilidad de pagos (Yape, Plim, Tunki, CCE) y contingencias.</a:t>
-            </a:r>
-          </a:p>
-          <a:p>
-            <a:pPr algn="left">
-              <a:spcAft>
-                <a:spcPts val="400"/>
-              </a:spcAft>
-              <a:defRPr sz="950">
-                <a:solidFill>
-                  <a:srgbClr val="334155"/>
-                </a:solidFill>
-                <a:latin typeface="Calibri"/>
-              </a:defRPr>
-            </a:pPr>
-            <a:r>
-              <a:t>• Problemática Real:</a:t>
-            </a:r>
-            <a:br/>
-            <a:r>
-              <a:t>  Asimetría informativa y demoras de hasta 180 min ante caídas bancarias.</a:t>
-            </a:r>
-          </a:p>
-          <a:p>
-            <a:pPr algn="left">
-              <a:spcAft>
-                <a:spcPts val="400"/>
-              </a:spcAft>
-              <a:defRPr sz="950">
-                <a:solidFill>
-                  <a:srgbClr val="334155"/>
-                </a:solidFill>
-                <a:latin typeface="Calibri"/>
-              </a:defRPr>
-            </a:pPr>
-            <a:r>
-              <a:t>• Propuesta de Valor BMC:</a:t>
-            </a:r>
-            <a:br/>
-            <a:r>
-              <a:t>  Detección telemétrica en &lt; 30 seg, trazabilidad y observabilidad pública.</a:t>
-            </a:r>
-          </a:p>
-        </p:txBody>
-      </p:sp>
-      <p:sp>
-        <p:nvSpPr>
-          <p:cNvPr id="7" name="Rounded Rectangle 6"/>
-          <p:cNvSpPr/>
-          <p:nvPr/>
-        </p:nvSpPr>
-        <p:spPr>
-          <a:xfrm>
-            <a:off x="4389120" y="1417320"/>
-            <a:ext cx="3410712" cy="5074920"/>
-          </a:xfrm>
-          <a:prstGeom prst="roundRect">
-            <a:avLst/>
-          </a:prstGeom>
-          <a:solidFill>
-            <a:srgbClr val="FFFFFF"/>
-          </a:solidFill>
-          <a:ln w="12700">
-            <a:solidFill>
-              <a:srgbClr val="E2E8F0"/>
-            </a:solidFill>
-          </a:ln>
-        </p:spPr>
-        <p:style>
-          <a:lnRef idx="1">
-            <a:schemeClr val="accent1"/>
-          </a:lnRef>
-          <a:fillRef idx="3">
-            <a:schemeClr val="accent1"/>
-          </a:fillRef>
-          <a:effectRef idx="2">
-            <a:schemeClr val="accent1"/>
-          </a:effectRef>
-          <a:fontRef idx="minor">
-            <a:schemeClr val="lt1"/>
-          </a:fontRef>
-        </p:style>
-        <p:txBody>
-          <a:bodyPr rtlCol="0" anchor="ctr" wrap="square" lIns="182880" rIns="182880" tIns="182880" bIns="137160"/>
-          <a:lstStyle/>
-          <a:p>
-            <a:pPr algn="ctr">
-              <a:spcAft>
-                <a:spcPts val="200"/>
-              </a:spcAft>
-              <a:defRPr sz="1050" b="1">
-                <a:solidFill>
-                  <a:srgbClr val="0284C7"/>
-                </a:solidFill>
-                <a:latin typeface="Calibri"/>
-              </a:defRPr>
-            </a:pPr>
-            <a:r>
-              <a:t>BLOQUE 2 • 03:00 - 07:00</a:t>
-            </a:r>
-          </a:p>
-          <a:p>
-            <a:pPr algn="ctr">
-              <a:spcAft>
-                <a:spcPts val="300"/>
-              </a:spcAft>
-              <a:defRPr sz="1250" b="1">
-                <a:solidFill>
-                  <a:srgbClr val="0B1F3A"/>
-                </a:solidFill>
-                <a:latin typeface="Calibri"/>
-              </a:defRPr>
-            </a:pPr>
-            <a:r>
-              <a:t>Frank Vargas</a:t>
-            </a:r>
-          </a:p>
-          <a:p>
-            <a:pPr algn="ctr">
-              <a:spcAft>
-                <a:spcPts val="600"/>
-              </a:spcAft>
-              <a:defRPr sz="1000" b="1">
-                <a:solidFill>
-                  <a:srgbClr val="475569"/>
-                </a:solidFill>
-                <a:latin typeface="Calibri"/>
-              </a:defRPr>
-            </a:pPr>
-            <a:r>
-              <a:t>Líder Técnico &amp; Arquitecto de Software</a:t>
-            </a:r>
-          </a:p>
-          <a:p>
-            <a:pPr algn="left">
-              <a:spcAft>
-                <a:spcPts val="400"/>
-              </a:spcAft>
-              <a:defRPr sz="950">
-                <a:solidFill>
-                  <a:srgbClr val="334155"/>
-                </a:solidFill>
-                <a:latin typeface="Calibri"/>
-              </a:defRPr>
-            </a:pPr>
-            <a:r>
-              <a:t>• 3 Alternativas TIC (&gt;= 50% Java):</a:t>
-            </a:r>
-            <a:br/>
-            <a:r>
-              <a:t>  Justificación de la Alternativa 2 (Clean API + SPA NOC) con 4.97 pts.</a:t>
-            </a:r>
-          </a:p>
-          <a:p>
-            <a:pPr algn="left">
-              <a:spcAft>
-                <a:spcPts val="400"/>
-              </a:spcAft>
-              <a:defRPr sz="950">
-                <a:solidFill>
-                  <a:srgbClr val="334155"/>
-                </a:solidFill>
-                <a:latin typeface="Calibri"/>
-              </a:defRPr>
-            </a:pPr>
-            <a:r>
-              <a:t>• Galería de 15 Mockups:</a:t>
-            </a:r>
-            <a:br/>
-            <a:r>
-              <a:t>  Demostración de los 5 paneles diseñados por cada alternativa.</a:t>
-            </a:r>
-          </a:p>
-          <a:p>
-            <a:pPr algn="left">
-              <a:spcAft>
-                <a:spcPts val="400"/>
-              </a:spcAft>
-              <a:defRPr sz="950">
-                <a:solidFill>
-                  <a:srgbClr val="334155"/>
-                </a:solidFill>
-                <a:latin typeface="Calibri"/>
-              </a:defRPr>
-            </a:pPr>
-            <a:r>
-              <a:t>• Persistencia DER PostgreSQL 15:</a:t>
-            </a:r>
-            <a:br/>
-            <a:r>
-              <a:t>  6 tablas normalizadas, triggers append-only e índice anti-carreras.</a:t>
-            </a:r>
-          </a:p>
-          <a:p>
-            <a:pPr algn="left">
-              <a:spcAft>
-                <a:spcPts val="400"/>
-              </a:spcAft>
-              <a:defRPr sz="950">
-                <a:solidFill>
-                  <a:srgbClr val="334155"/>
-                </a:solidFill>
-                <a:latin typeface="Calibri"/>
-              </a:defRPr>
-            </a:pPr>
-            <a:r>
-              <a:t>• Clases de Diseño en Spring Boot 3:</a:t>
-            </a:r>
-            <a:br/>
-            <a:r>
-              <a:t>  Inyección de dependencias, desacoplamiento hexagonal y seguridad RBAC.</a:t>
-            </a:r>
-          </a:p>
-        </p:txBody>
-      </p:sp>
-      <p:sp>
-        <p:nvSpPr>
-          <p:cNvPr id="8" name="Rounded Rectangle 7"/>
-          <p:cNvSpPr/>
-          <p:nvPr/>
-        </p:nvSpPr>
-        <p:spPr>
-          <a:xfrm>
-            <a:off x="8046720" y="1417320"/>
-            <a:ext cx="3410712" cy="5074920"/>
-          </a:xfrm>
-          <a:prstGeom prst="roundRect">
-            <a:avLst/>
-          </a:prstGeom>
-          <a:solidFill>
-            <a:srgbClr val="FFFFFF"/>
-          </a:solidFill>
-          <a:ln w="12700">
-            <a:solidFill>
-              <a:srgbClr val="E2E8F0"/>
-            </a:solidFill>
-          </a:ln>
-        </p:spPr>
-        <p:style>
-          <a:lnRef idx="1">
-            <a:schemeClr val="accent1"/>
-          </a:lnRef>
-          <a:fillRef idx="3">
-            <a:schemeClr val="accent1"/>
-          </a:fillRef>
-          <a:effectRef idx="2">
-            <a:schemeClr val="accent1"/>
-          </a:effectRef>
-          <a:fontRef idx="minor">
-            <a:schemeClr val="lt1"/>
-          </a:fontRef>
-        </p:style>
-        <p:txBody>
-          <a:bodyPr rtlCol="0" anchor="ctr" wrap="square" lIns="182880" rIns="182880" tIns="182880" bIns="137160"/>
-          <a:lstStyle/>
-          <a:p>
-            <a:pPr algn="ctr">
-              <a:spcAft>
-                <a:spcPts val="200"/>
-              </a:spcAft>
-              <a:defRPr sz="1050" b="1">
-                <a:solidFill>
-                  <a:srgbClr val="0284C7"/>
-                </a:solidFill>
-                <a:latin typeface="Calibri"/>
-              </a:defRPr>
-            </a:pPr>
-            <a:r>
-              <a:t>BLOQUE 3 • 07:00 - 10:00</a:t>
-            </a:r>
-          </a:p>
-          <a:p>
-            <a:pPr algn="ctr">
-              <a:spcAft>
-                <a:spcPts val="300"/>
-              </a:spcAft>
-              <a:defRPr sz="1250" b="1">
-                <a:solidFill>
-                  <a:srgbClr val="0B1F3A"/>
-                </a:solidFill>
-                <a:latin typeface="Calibri"/>
-              </a:defRPr>
-            </a:pPr>
-            <a:r>
-              <a:t>Joel Olaya</a:t>
-            </a:r>
-          </a:p>
-          <a:p>
-            <a:pPr algn="ctr">
-              <a:spcAft>
-                <a:spcPts val="600"/>
-              </a:spcAft>
-              <a:defRPr sz="1000" b="1">
-                <a:solidFill>
-                  <a:srgbClr val="475569"/>
-                </a:solidFill>
-                <a:latin typeface="Calibri"/>
-              </a:defRPr>
-            </a:pPr>
-            <a:r>
-              <a:t>Ingeniero de Software &amp; QA</a:t>
-            </a:r>
-          </a:p>
-          <a:p>
-            <a:pPr algn="left">
-              <a:spcAft>
-                <a:spcPts val="400"/>
-              </a:spcAft>
-              <a:defRPr sz="950">
-                <a:solidFill>
-                  <a:srgbClr val="334155"/>
-                </a:solidFill>
-                <a:latin typeface="Calibri"/>
-              </a:defRPr>
-            </a:pPr>
-            <a:r>
-              <a:t>• Live Demo Consola NOC Web:</a:t>
-            </a:r>
-            <a:br/>
-            <a:r>
-              <a:t>  Login AD, barra de telemetría en vivo e inyección de contingencia 503.</a:t>
-            </a:r>
-          </a:p>
-          <a:p>
-            <a:pPr algn="left">
-              <a:spcAft>
-                <a:spcPts val="400"/>
-              </a:spcAft>
-              <a:defRPr sz="950">
-                <a:solidFill>
-                  <a:srgbClr val="334155"/>
-                </a:solidFill>
-                <a:latin typeface="Calibri"/>
-              </a:defRPr>
-            </a:pPr>
-            <a:r>
-              <a:t>• Creación Atómica de Incidentes:</a:t>
-            </a:r>
-            <a:br/>
-            <a:r>
-              <a:t>  Generación de ticket INC-YYYYMMDD-XXXXX y semáforo rojo en 30 seg.</a:t>
-            </a:r>
-          </a:p>
-          <a:p>
-            <a:pPr algn="left">
-              <a:spcAft>
-                <a:spcPts val="400"/>
-              </a:spcAft>
-              <a:defRPr sz="950">
-                <a:solidFill>
-                  <a:srgbClr val="334155"/>
-                </a:solidFill>
-                <a:latin typeface="Calibri"/>
-              </a:defRPr>
-            </a:pPr>
-            <a:r>
-              <a:t>• Suite Automatizada JUnit 5:</a:t>
-            </a:r>
-            <a:br/>
-            <a:r>
-              <a:t>  8/8 pruebas unitarias pasadas con Mockito en 4.8 segundos.</a:t>
-            </a:r>
-          </a:p>
-          <a:p>
-            <a:pPr algn="left">
-              <a:spcAft>
-                <a:spcPts val="400"/>
-              </a:spcAft>
-              <a:defRPr sz="950">
-                <a:solidFill>
-                  <a:srgbClr val="334155"/>
-                </a:solidFill>
-                <a:latin typeface="Calibri"/>
-              </a:defRPr>
-            </a:pPr>
-            <a:r>
-              <a:t>• Compilador Normativo SFT BCRP:</a:t>
-            </a:r>
-            <a:br/>
-            <a:r>
-              <a:t>  Generación del reporte de indisponibilidad y sellado criptográfico SHA-256.</a:t>
+          <a:bodyPr rtlCol="0" anchor="t" wrap="square" tIns="365760"/>
+          <a:lstStyle/>
+          <a:p>
+            <a:r>
+              <a:t>UNIVERSIDAD TECNOLÓGICA DEL PERÚ</a:t>
+            </a:r>
+          </a:p>
+          <a:p>
+            <a:r>
+              <a:t>¡MUCHAS GRACIAS POR SU ATENCIÓN!</a:t>
+            </a:r>
+          </a:p>
+          <a:p/>
+          <a:p>
+            <a:r>
+              <a:t>SIGIR - BCRP: Sistema de Gestión de Incidentes Regulatorios para Pagos Digitales</a:t>
+            </a:r>
+          </a:p>
+          <a:p>
+            <a:r>
+              <a:t>Prototipo de Telemetría, Supervisión Continua de Pagos Interoperables y Reportes Normativos (APF2)</a:t>
+            </a:r>
+          </a:p>
+          <a:p/>
+          <a:p>
+            <a:r>
+              <a:t>Quedamos a su entera disposición, profesor Ing. Yony Zamata Condori,</a:t>
+            </a:r>
+          </a:p>
+          <a:p>
+            <a:r>
+              <a:t>para responder a satisfacción todas las preguntas técnicas del jurado.</a:t>
+            </a:r>
+          </a:p>
+          <a:p/>
+          <a:p>
+            <a:r>
+              <a:t>Frank Vargas (Líder Técnico &amp; Arquitecto)  •  Fernando Romero (Requisitos)  •  Joel Olaya (QA &amp; Software)</a:t>
+            </a:r>
+          </a:p>
+          <a:p>
+            <a:r>
+              <a:t>Sección 57524 • 2026</a:t>
             </a:r>
           </a:p>
         </p:txBody>
@@ -11257,7 +11251,7 @@
       </p:sp>
       <p:sp>
         <p:nvSpPr>
-          <p:cNvPr id="3" name="Rectangle 2"/>
+          <p:cNvPr id="3" name="Rounded Rectangle 2"/>
           <p:cNvSpPr/>
           <p:nvPr/>
         </p:nvSpPr>
@@ -11266,15 +11260,15 @@
             <a:off x="731520" y="320040"/>
             <a:ext cx="10728655" cy="987552"/>
           </a:xfrm>
-          <a:prstGeom prst="rect">
+          <a:prstGeom prst="roundRect">
             <a:avLst/>
           </a:prstGeom>
           <a:solidFill>
             <a:srgbClr val="FFFFFF"/>
           </a:solidFill>
-          <a:ln w="19050">
+          <a:ln w="12700">
             <a:solidFill>
-              <a:srgbClr val="CBD5E1"/>
+              <a:srgbClr val="E2E8F0"/>
             </a:solidFill>
           </a:ln>
         </p:spPr>
@@ -11302,7 +11296,7 @@
       </p:sp>
       <p:sp>
         <p:nvSpPr>
-          <p:cNvPr id="4" name="Rectangle 3"/>
+          <p:cNvPr id="4" name="Rounded Rectangle 3"/>
           <p:cNvSpPr/>
           <p:nvPr/>
         </p:nvSpPr>
@@ -11311,7 +11305,7 @@
             <a:off x="731520" y="320040"/>
             <a:ext cx="128016" cy="987552"/>
           </a:xfrm>
-          <a:prstGeom prst="rect">
+          <a:prstGeom prst="roundRect">
             <a:avLst/>
           </a:prstGeom>
           <a:solidFill>
@@ -11360,16 +11354,13 @@
           <a:noFill/>
         </p:spPr>
         <p:txBody>
-          <a:bodyPr wrap="square" lIns="0" tIns="0" rIns="0" bIns="0" anchor="t">
+          <a:bodyPr wrap="square" lIns="0" tIns="0" rIns="0" bIns="0">
             <a:spAutoFit/>
           </a:bodyPr>
           <a:lstStyle/>
           <a:p>
             <a:pPr>
-              <a:spcAft>
-                <a:spcPts val="200"/>
-              </a:spcAft>
-              <a:defRPr sz="1150" b="1">
+              <a:defRPr sz="1100" b="1">
                 <a:solidFill>
                   <a:srgbClr val="0284C7"/>
                 </a:solidFill>
@@ -11377,28 +11368,25 @@
               </a:defRPr>
             </a:pPr>
             <a:r>
-              <a:t>CRITERIO 3 DE RÚBRICA • 3.0 PUNTOS</a:t>
-            </a:r>
-          </a:p>
-          <a:p>
-            <a:pPr>
-              <a:spcAft>
-                <a:spcPts val="200"/>
-              </a:spcAft>
-              <a:defRPr sz="2200" b="1">
-                <a:solidFill>
-                  <a:srgbClr val="0B1F3A"/>
-                </a:solidFill>
-                <a:latin typeface="Calibri"/>
-              </a:defRPr>
-            </a:pPr>
-            <a:r>
-              <a:t>Herramientas de Gestión de Proyectos: Project Charter &amp; Matriz RACI</a:t>
-            </a:r>
-          </a:p>
-          <a:p>
-            <a:pPr>
-              <a:defRPr sz="1200">
+              <a:t>CRITERIO 2 DE RÚBRICA • 2.0 PUNTOS</a:t>
+            </a:r>
+          </a:p>
+          <a:p>
+            <a:pPr>
+              <a:defRPr sz="1600" b="1">
+                <a:solidFill>
+                  <a:srgbClr val="0F172A"/>
+                </a:solidFill>
+                <a:latin typeface="Calibri"/>
+              </a:defRPr>
+            </a:pPr>
+            <a:r>
+              <a:t>Galería de 15 Mockups de Interfaces Diseñadas (5 por Alternativa TIC)</a:t>
+            </a:r>
+          </a:p>
+          <a:p>
+            <a:pPr>
+              <a:defRPr sz="1050">
                 <a:solidFill>
                   <a:srgbClr val="64748B"/>
                 </a:solidFill>
@@ -11406,7 +11394,7 @@
               </a:defRPr>
             </a:pPr>
             <a:r>
-              <a:t>Formalización del marco de gobernanza, patrocinio y asignación estricta de responsabilidades</a:t>
+              <a:t>Cumplimiento estricto: Cada una de las 3 alternativas cuenta con &gt;= 50% Java y 5 pantallas completas</a:t>
             </a:r>
           </a:p>
         </p:txBody>
@@ -11419,18 +11407,18 @@
         </p:nvSpPr>
         <p:spPr>
           <a:xfrm>
-            <a:off x="731520" y="1508760"/>
-            <a:ext cx="5212080" cy="4892040"/>
+            <a:off x="731520" y="1389888"/>
+            <a:ext cx="10728655" cy="3977639"/>
           </a:xfrm>
           <a:prstGeom prst="roundRect">
             <a:avLst/>
           </a:prstGeom>
           <a:solidFill>
-            <a:srgbClr val="FFFFFF"/>
-          </a:solidFill>
-          <a:ln w="25400">
+            <a:srgbClr val="0F172A"/>
+          </a:solidFill>
+          <a:ln w="12700">
             <a:solidFill>
-              <a:srgbClr val="93C5FD"/>
+              <a:srgbClr val="1E293B"/>
             </a:solidFill>
           </a:ln>
         </p:spPr>
@@ -11449,148 +11437,47 @@
           </a:fontRef>
         </p:style>
         <p:txBody>
-          <a:bodyPr rtlCol="0" anchor="t" wrap="square" tIns="182880" lIns="228600"/>
-          <a:lstStyle/>
-          <a:p>
-            <a:pPr algn="ctr">
-              <a:spcAft>
-                <a:spcPts val="800"/>
-              </a:spcAft>
-              <a:defRPr sz="1500" b="1">
-                <a:solidFill>
-                  <a:srgbClr val="0284C7"/>
-                </a:solidFill>
-                <a:latin typeface="Calibri"/>
-              </a:defRPr>
-            </a:pPr>
-            <a:r>
-              <a:t>📜 ACTA DE CONSTITUCIÓN (PROJECT CHARTER)</a:t>
-            </a:r>
-          </a:p>
-          <a:p>
-            <a:pPr>
-              <a:spcAft>
-                <a:spcPts val="600"/>
-              </a:spcAft>
-              <a:defRPr sz="1300">
-                <a:solidFill>
-                  <a:srgbClr val="0F172A"/>
-                </a:solidFill>
-                <a:latin typeface="Calibri"/>
-              </a:defRPr>
-            </a:pPr>
-            <a:r>
-              <a:t>• Patrocinador Oficial: Ing. Yony Zamata Condori (Docente UTP).</a:t>
-            </a:r>
-          </a:p>
-          <a:p>
-            <a:pPr>
-              <a:spcAft>
-                <a:spcPts val="600"/>
-              </a:spcAft>
-              <a:defRPr sz="1300">
-                <a:solidFill>
-                  <a:srgbClr val="0F172A"/>
-                </a:solidFill>
-                <a:latin typeface="Calibri"/>
-              </a:defRPr>
-            </a:pPr>
-            <a:r>
-              <a:t>• Líder Técnico del Proyecto: Frank Emiliano Vargas Huamán (U23243651).</a:t>
-            </a:r>
-          </a:p>
-          <a:p>
-            <a:pPr>
-              <a:spcAft>
-                <a:spcPts val="600"/>
-              </a:spcAft>
-              <a:defRPr sz="1300">
-                <a:solidFill>
-                  <a:srgbClr val="0F172A"/>
-                </a:solidFill>
-                <a:latin typeface="Calibri"/>
-              </a:defRPr>
-            </a:pPr>
-            <a:r>
-              <a:t>• Horizonte Temporal: 14 semanas estructuradas en 6 Sprints ágiles.</a:t>
-            </a:r>
-          </a:p>
-          <a:p>
-            <a:pPr>
-              <a:spcAft>
-                <a:spcPts val="600"/>
-              </a:spcAft>
-              <a:defRPr sz="1300">
-                <a:solidFill>
-                  <a:srgbClr val="0F172A"/>
-                </a:solidFill>
-                <a:latin typeface="Calibri"/>
-              </a:defRPr>
-            </a:pPr>
-            <a:r>
-              <a:t>• Umbral de Disponibilidad: SLA 99.9% en monitoreo de switches interbancarios.</a:t>
-            </a:r>
-          </a:p>
-          <a:p>
-            <a:pPr>
-              <a:spcAft>
-                <a:spcPts val="600"/>
-              </a:spcAft>
-              <a:defRPr sz="1300">
-                <a:solidFill>
-                  <a:srgbClr val="0F172A"/>
-                </a:solidFill>
-                <a:latin typeface="Calibri"/>
-              </a:defRPr>
-            </a:pPr>
-            <a:r>
-              <a:t>• Frecuencia de Telemetría: Sondeo asíncrono no bloqueante cada 30 segundos.</a:t>
-            </a:r>
-          </a:p>
-          <a:p>
-            <a:pPr>
-              <a:spcAft>
-                <a:spcPts val="600"/>
-              </a:spcAft>
-              <a:defRPr sz="1300">
-                <a:solidFill>
-                  <a:srgbClr val="0F172A"/>
-                </a:solidFill>
-                <a:latin typeface="Calibri"/>
-              </a:defRPr>
-            </a:pPr>
-            <a:r>
-              <a:t>• Inmutabilidad de Auditoría: Trigger SQL append-only; cero mutabilidad histórica.</a:t>
-            </a:r>
-          </a:p>
-          <a:p>
-            <a:pPr>
-              <a:spcAft>
-                <a:spcPts val="600"/>
-              </a:spcAft>
-              <a:defRPr sz="1300">
-                <a:solidFill>
-                  <a:srgbClr val="0F172A"/>
-                </a:solidFill>
-                <a:latin typeface="Calibri"/>
-              </a:defRPr>
-            </a:pPr>
-            <a:r>
-              <a:t>• Meta de Calidad Software: Cobertura &gt; 80% con JUnit 5 y validación Mockito.</a:t>
-            </a:r>
-          </a:p>
-        </p:txBody>
-      </p:sp>
-      <p:sp>
-        <p:nvSpPr>
-          <p:cNvPr id="7" name="Rounded Rectangle 6"/>
+          <a:bodyPr rtlCol="0" anchor="ctr"/>
+          <a:lstStyle/>
+          <a:p>
+            <a:pPr algn="ctr"/>
+          </a:p>
+        </p:txBody>
+      </p:sp>
+      <p:pic>
+        <p:nvPicPr>
+          <p:cNvPr id="7" name="Picture 6" descr="figura9_mockups_alt2_clean_api.png"/>
+          <p:cNvPicPr>
+            <a:picLocks noChangeAspect="1"/>
+          </p:cNvPicPr>
+          <p:nvPr/>
+        </p:nvPicPr>
+        <p:blipFill>
+          <a:blip r:embed="rId2"/>
+          <a:stretch>
+            <a:fillRect/>
+          </a:stretch>
+        </p:blipFill>
+        <p:spPr>
+          <a:xfrm>
+            <a:off x="883767" y="2105146"/>
+            <a:ext cx="10424160" cy="2547122"/>
+          </a:xfrm>
+          <a:prstGeom prst="rect">
+            <a:avLst/>
+          </a:prstGeom>
+        </p:spPr>
+      </p:pic>
+      <p:sp>
+        <p:nvSpPr>
+          <p:cNvPr id="8" name="Rounded Rectangle 7"/>
           <p:cNvSpPr/>
           <p:nvPr/>
         </p:nvSpPr>
         <p:spPr>
           <a:xfrm>
-            <a:off x="6217920" y="1508760"/>
-            <a:ext cx="5242255" cy="4892040"/>
+            <a:off x="731520" y="5468112"/>
+            <a:ext cx="3447288" cy="1115568"/>
           </a:xfrm>
           <a:prstGeom prst="roundRect">
             <a:avLst/>
@@ -11598,9 +11485,9 @@
           <a:solidFill>
             <a:srgbClr val="FFFFFF"/>
           </a:solidFill>
-          <a:ln w="25400">
+          <a:ln w="12700">
             <a:solidFill>
-              <a:srgbClr val="FCD34D"/>
+              <a:srgbClr val="E2E8F0"/>
             </a:solidFill>
           </a:ln>
         </p:spPr>
@@ -11619,30 +11506,14 @@
           </a:fontRef>
         </p:style>
         <p:txBody>
-          <a:bodyPr rtlCol="0" anchor="t" wrap="square" tIns="182880" lIns="228600"/>
+          <a:bodyPr rtlCol="0" anchor="ctr" wrap="square" lIns="109728" rIns="109728" tIns="73152" bIns="36576"/>
           <a:lstStyle/>
           <a:p>
             <a:pPr algn="ctr">
               <a:spcAft>
-                <a:spcPts val="800"/>
-              </a:spcAft>
-              <a:defRPr sz="1500" b="1">
-                <a:solidFill>
-                  <a:srgbClr val="B45309"/>
-                </a:solidFill>
-                <a:latin typeface="Calibri"/>
-              </a:defRPr>
-            </a:pPr>
-            <a:r>
-              <a:t>👥 MATRIZ RACI DE ROLES Y RESPONSABILIDADES</a:t>
-            </a:r>
-          </a:p>
-          <a:p>
-            <a:pPr>
-              <a:spcAft>
                 <a:spcPts val="200"/>
               </a:spcAft>
-              <a:defRPr sz="1300" b="1">
+              <a:defRPr sz="1050" b="1">
                 <a:solidFill>
                   <a:srgbClr val="0B1F3A"/>
                 </a:solidFill>
@@ -11650,15 +11521,12 @@
               </a:defRPr>
             </a:pPr>
             <a:r>
-              <a:t>Frank Emiliano Vargas Huamán (Líder Técnico &amp; Arquitecto):</a:t>
-            </a:r>
-          </a:p>
-          <a:p>
-            <a:pPr>
-              <a:spcAft>
-                <a:spcPts val="600"/>
-              </a:spcAft>
-              <a:defRPr sz="1200">
+              <a:t>ALTERNATIVA 1 (MONOLITO)</a:t>
+            </a:r>
+          </a:p>
+          <a:p>
+            <a:pPr algn="left">
+              <a:defRPr sz="900">
                 <a:solidFill>
                   <a:srgbClr val="334155"/>
                 </a:solidFill>
@@ -11666,15 +11534,57 @@
               </a:defRPr>
             </a:pPr>
             <a:r>
-              <a:t>• Accountable (A) y Responsible (R) en Arquitectura Hexagonal, Modelado DDL PostgreSQL 15, Core Java 17, Spring Boot 3 y Docker Compose.</a:t>
-            </a:r>
-          </a:p>
-          <a:p>
-            <a:pPr>
+              <a:t>5 Pantallas SSR con Thymeleaf / HTMX: Login AD, Tablero Entidades, Registro Ticket, Bitácora y Reporte SFT.</a:t>
+            </a:r>
+          </a:p>
+        </p:txBody>
+      </p:sp>
+      <p:sp>
+        <p:nvSpPr>
+          <p:cNvPr id="9" name="Rounded Rectangle 8"/>
+          <p:cNvSpPr/>
+          <p:nvPr/>
+        </p:nvSpPr>
+        <p:spPr>
+          <a:xfrm>
+            <a:off x="4370832" y="5468112"/>
+            <a:ext cx="3447288" cy="1115568"/>
+          </a:xfrm>
+          <a:prstGeom prst="roundRect">
+            <a:avLst/>
+          </a:prstGeom>
+          <a:solidFill>
+            <a:srgbClr val="FFFFFF"/>
+          </a:solidFill>
+          <a:ln w="12700">
+            <a:solidFill>
+              <a:srgbClr val="E2E8F0"/>
+            </a:solidFill>
+          </a:ln>
+        </p:spPr>
+        <p:style>
+          <a:lnRef idx="1">
+            <a:schemeClr val="accent1"/>
+          </a:lnRef>
+          <a:fillRef idx="3">
+            <a:schemeClr val="accent1"/>
+          </a:fillRef>
+          <a:effectRef idx="2">
+            <a:schemeClr val="accent1"/>
+          </a:effectRef>
+          <a:fontRef idx="minor">
+            <a:schemeClr val="lt1"/>
+          </a:fontRef>
+        </p:style>
+        <p:txBody>
+          <a:bodyPr rtlCol="0" anchor="ctr" wrap="square" lIns="109728" rIns="109728" tIns="73152" bIns="36576"/>
+          <a:lstStyle/>
+          <a:p>
+            <a:pPr algn="ctr">
               <a:spcAft>
                 <a:spcPts val="200"/>
               </a:spcAft>
-              <a:defRPr sz="1300" b="1">
+              <a:defRPr sz="1050" b="1">
                 <a:solidFill>
                   <a:srgbClr val="0B1F3A"/>
                 </a:solidFill>
@@ -11682,15 +11592,12 @@
               </a:defRPr>
             </a:pPr>
             <a:r>
-              <a:t>Fernando Alber Alfredo Romero Requejo (Ingeniero de Requisitos):</a:t>
-            </a:r>
-          </a:p>
-          <a:p>
-            <a:pPr>
-              <a:spcAft>
-                <a:spcPts val="600"/>
-              </a:spcAft>
-              <a:defRPr sz="1200">
+              <a:t>ALTERNATIVA 2 (GANADORA - 4.97)</a:t>
+            </a:r>
+          </a:p>
+          <a:p>
+            <a:pPr algn="left">
+              <a:defRPr sz="900">
                 <a:solidFill>
                   <a:srgbClr val="334155"/>
                 </a:solidFill>
@@ -11698,15 +11605,57 @@
               </a:defRPr>
             </a:pPr>
             <a:r>
-              <a:t>• Responsible (R) en Levantamiento SRS IEEE 830 y Procesos BPMN 2.0. • Consulted (C) en Casos de Uso UML 2.5 y Reglas Normativas BCRP.</a:t>
-            </a:r>
-          </a:p>
-          <a:p>
-            <a:pPr>
+              <a:t>5 Pantallas Reactivas NOC: Dashboard en Vivo, Simulador 503, Registro RN-01, Auditoría Append-Only y SFT SHA-256.</a:t>
+            </a:r>
+          </a:p>
+        </p:txBody>
+      </p:sp>
+      <p:sp>
+        <p:nvSpPr>
+          <p:cNvPr id="10" name="Rounded Rectangle 9"/>
+          <p:cNvSpPr/>
+          <p:nvPr/>
+        </p:nvSpPr>
+        <p:spPr>
+          <a:xfrm>
+            <a:off x="8010144" y="5468112"/>
+            <a:ext cx="3447288" cy="1115568"/>
+          </a:xfrm>
+          <a:prstGeom prst="roundRect">
+            <a:avLst/>
+          </a:prstGeom>
+          <a:solidFill>
+            <a:srgbClr val="FFFFFF"/>
+          </a:solidFill>
+          <a:ln w="12700">
+            <a:solidFill>
+              <a:srgbClr val="E2E8F0"/>
+            </a:solidFill>
+          </a:ln>
+        </p:spPr>
+        <p:style>
+          <a:lnRef idx="1">
+            <a:schemeClr val="accent1"/>
+          </a:lnRef>
+          <a:fillRef idx="3">
+            <a:schemeClr val="accent1"/>
+          </a:fillRef>
+          <a:effectRef idx="2">
+            <a:schemeClr val="accent1"/>
+          </a:effectRef>
+          <a:fontRef idx="minor">
+            <a:schemeClr val="lt1"/>
+          </a:fontRef>
+        </p:style>
+        <p:txBody>
+          <a:bodyPr rtlCol="0" anchor="ctr" wrap="square" lIns="109728" rIns="109728" tIns="73152" bIns="36576"/>
+          <a:lstStyle/>
+          <a:p>
+            <a:pPr algn="ctr">
               <a:spcAft>
                 <a:spcPts val="200"/>
               </a:spcAft>
-              <a:defRPr sz="1300" b="1">
+              <a:defRPr sz="1050" b="1">
                 <a:solidFill>
                   <a:srgbClr val="0B1F3A"/>
                 </a:solidFill>
@@ -11714,15 +11663,12 @@
               </a:defRPr>
             </a:pPr>
             <a:r>
-              <a:t>Joel Leonardo Olaya Vivas (Ingeniero de Software &amp; QA):</a:t>
-            </a:r>
-          </a:p>
-          <a:p>
-            <a:pPr>
-              <a:spcAft>
-                <a:spcPts val="600"/>
-              </a:spcAft>
-              <a:defRPr sz="1200">
+              <a:t>ALTERNATIVA 3 (MICROSERVICIOS)</a:t>
+            </a:r>
+          </a:p>
+          <a:p>
+            <a:pPr algn="left">
+              <a:defRPr sz="900">
                 <a:solidFill>
                   <a:srgbClr val="334155"/>
                 </a:solidFill>
@@ -11730,7 +11676,7 @@
               </a:defRPr>
             </a:pPr>
             <a:r>
-              <a:t>• Responsible (R) en Suite JUnit 5 / Mockito (8/8 tests). • Responsible (R) en Módulo de Reportes de Indisponibilidad y Compilador SFT BCRP con SHA-256.</a:t>
+              <a:t>5 Pantallas Distribuidas: Gateway SSO OAuth2, Monitor Tópicos Kafka, Consola DLQ, Trazas y Panel SFTP.</a:t>
             </a:r>
           </a:p>
         </p:txBody>
@@ -11934,7 +11880,7 @@
               </a:defRPr>
             </a:pPr>
             <a:r>
-              <a:t>EDT / WBS a 3 Niveles y Cronograma Scrum Gantt</a:t>
+              <a:t>Herramientas de Gestión de Proyectos: Project Charter &amp; Matriz RACI</a:t>
             </a:r>
           </a:p>
           <a:p>
@@ -11947,7 +11893,7 @@
               </a:defRPr>
             </a:pPr>
             <a:r>
-              <a:t>Estructuración del Product Backlog (70 Story Points) y cumplimiento estricto del Hito APF1</a:t>
+              <a:t>Formalización del marco de gobernanza, patrocinio y asignación estricta de responsabilidades</a:t>
             </a:r>
           </a:p>
         </p:txBody>
@@ -12005,23 +11951,7 @@
               </a:defRPr>
             </a:pPr>
             <a:r>
-              <a:t>🌳 EDT / WBS JERÁRQUICO A 3 NIVELES</a:t>
-            </a:r>
-          </a:p>
-          <a:p>
-            <a:pPr>
-              <a:spcAft>
-                <a:spcPts val="200"/>
-              </a:spcAft>
-              <a:defRPr sz="1300" b="1">
-                <a:solidFill>
-                  <a:srgbClr val="0B1F3A"/>
-                </a:solidFill>
-                <a:latin typeface="Calibri"/>
-              </a:defRPr>
-            </a:pPr>
-            <a:r>
-              <a:t>1.1 FASE NORMATIVA (Semanas 1-2):</a:t>
+              <a:t>📜 ACTA DE CONSTITUCIÓN (PROJECT CHARTER)</a:t>
             </a:r>
           </a:p>
           <a:p>
@@ -12029,31 +11959,15 @@
               <a:spcAft>
                 <a:spcPts val="600"/>
               </a:spcAft>
-              <a:defRPr sz="1200">
-                <a:solidFill>
-                  <a:srgbClr val="334155"/>
-                </a:solidFill>
-                <a:latin typeface="Calibri"/>
-              </a:defRPr>
-            </a:pPr>
-            <a:r>
-              <a:t>Marco legal BCRP (Leyes 26123 y 29440, Circular 0011-2023).</a:t>
-            </a:r>
-          </a:p>
-          <a:p>
-            <a:pPr>
-              <a:spcAft>
-                <a:spcPts val="200"/>
-              </a:spcAft>
-              <a:defRPr sz="1300" b="1">
-                <a:solidFill>
-                  <a:srgbClr val="0B1F3A"/>
-                </a:solidFill>
-                <a:latin typeface="Calibri"/>
-              </a:defRPr>
-            </a:pPr>
-            <a:r>
-              <a:t>1.2 FASE ANÁLISIS (Semanas 3-4):</a:t>
+              <a:defRPr sz="1300">
+                <a:solidFill>
+                  <a:srgbClr val="0F172A"/>
+                </a:solidFill>
+                <a:latin typeface="Calibri"/>
+              </a:defRPr>
+            </a:pPr>
+            <a:r>
+              <a:t>• Patrocinador Oficial: Ing. Yony Zamata Condori (Docente UTP).</a:t>
             </a:r>
           </a:p>
           <a:p>
@@ -12061,31 +11975,15 @@
               <a:spcAft>
                 <a:spcPts val="600"/>
               </a:spcAft>
-              <a:defRPr sz="1200">
-                <a:solidFill>
-                  <a:srgbClr val="334155"/>
-                </a:solidFill>
-                <a:latin typeface="Calibri"/>
-              </a:defRPr>
-            </a:pPr>
-            <a:r>
-              <a:t>SRS IEEE 830, Diagrama Casos de Uso UML 2.5 y Procesos BPMN 2.0.</a:t>
-            </a:r>
-          </a:p>
-          <a:p>
-            <a:pPr>
-              <a:spcAft>
-                <a:spcPts val="200"/>
-              </a:spcAft>
-              <a:defRPr sz="1300" b="1">
-                <a:solidFill>
-                  <a:srgbClr val="0B1F3A"/>
-                </a:solidFill>
-                <a:latin typeface="Calibri"/>
-              </a:defRPr>
-            </a:pPr>
-            <a:r>
-              <a:t>1.3 FASE DISEÑO (Semanas 3-4):</a:t>
+              <a:defRPr sz="1300">
+                <a:solidFill>
+                  <a:srgbClr val="0F172A"/>
+                </a:solidFill>
+                <a:latin typeface="Calibri"/>
+              </a:defRPr>
+            </a:pPr>
+            <a:r>
+              <a:t>• Líder Técnico del Proyecto: Frank Emiliano Vargas Huamán (U23243651).</a:t>
             </a:r>
           </a:p>
           <a:p>
@@ -12093,31 +11991,15 @@
               <a:spcAft>
                 <a:spcPts val="600"/>
               </a:spcAft>
-              <a:defRPr sz="1200">
-                <a:solidFill>
-                  <a:srgbClr val="334155"/>
-                </a:solidFill>
-                <a:latin typeface="Calibri"/>
-              </a:defRPr>
-            </a:pPr>
-            <a:r>
-              <a:t>Arquitectura Hexagonal (Puertos/Adaptadores) y DDL inmutable.</a:t>
-            </a:r>
-          </a:p>
-          <a:p>
-            <a:pPr>
-              <a:spcAft>
-                <a:spcPts val="200"/>
-              </a:spcAft>
-              <a:defRPr sz="1300" b="1">
-                <a:solidFill>
-                  <a:srgbClr val="0B1F3A"/>
-                </a:solidFill>
-                <a:latin typeface="Calibri"/>
-              </a:defRPr>
-            </a:pPr>
-            <a:r>
-              <a:t>1.4 FASE CONSTRUCCIÓN (Hito APF1 - Semana 4):</a:t>
+              <a:defRPr sz="1300">
+                <a:solidFill>
+                  <a:srgbClr val="0F172A"/>
+                </a:solidFill>
+                <a:latin typeface="Calibri"/>
+              </a:defRPr>
+            </a:pPr>
+            <a:r>
+              <a:t>• Horizonte Temporal: 14 semanas estructuradas en 6 Sprints ágiles.</a:t>
             </a:r>
           </a:p>
           <a:p>
@@ -12125,15 +12007,63 @@
               <a:spcAft>
                 <a:spcPts val="600"/>
               </a:spcAft>
-              <a:defRPr sz="1200">
-                <a:solidFill>
-                  <a:srgbClr val="334155"/>
-                </a:solidFill>
-                <a:latin typeface="Calibri"/>
-              </a:defRPr>
-            </a:pPr>
-            <a:r>
-              <a:t>Backend Java 17, Spring Boot 3 REST, Consola NOC y 8 tests JUnit.</a:t>
+              <a:defRPr sz="1300">
+                <a:solidFill>
+                  <a:srgbClr val="0F172A"/>
+                </a:solidFill>
+                <a:latin typeface="Calibri"/>
+              </a:defRPr>
+            </a:pPr>
+            <a:r>
+              <a:t>• Umbral de Disponibilidad: SLA 99.9% en monitoreo de switches interbancarios.</a:t>
+            </a:r>
+          </a:p>
+          <a:p>
+            <a:pPr>
+              <a:spcAft>
+                <a:spcPts val="600"/>
+              </a:spcAft>
+              <a:defRPr sz="1300">
+                <a:solidFill>
+                  <a:srgbClr val="0F172A"/>
+                </a:solidFill>
+                <a:latin typeface="Calibri"/>
+              </a:defRPr>
+            </a:pPr>
+            <a:r>
+              <a:t>• Frecuencia de Telemetría: Sondeo asíncrono no bloqueante cada 30 segundos.</a:t>
+            </a:r>
+          </a:p>
+          <a:p>
+            <a:pPr>
+              <a:spcAft>
+                <a:spcPts val="600"/>
+              </a:spcAft>
+              <a:defRPr sz="1300">
+                <a:solidFill>
+                  <a:srgbClr val="0F172A"/>
+                </a:solidFill>
+                <a:latin typeface="Calibri"/>
+              </a:defRPr>
+            </a:pPr>
+            <a:r>
+              <a:t>• Inmutabilidad de Auditoría: Trigger SQL append-only; cero mutabilidad histórica.</a:t>
+            </a:r>
+          </a:p>
+          <a:p>
+            <a:pPr>
+              <a:spcAft>
+                <a:spcPts val="600"/>
+              </a:spcAft>
+              <a:defRPr sz="1300">
+                <a:solidFill>
+                  <a:srgbClr val="0F172A"/>
+                </a:solidFill>
+                <a:latin typeface="Calibri"/>
+              </a:defRPr>
+            </a:pPr>
+            <a:r>
+              <a:t>• Meta de Calidad Software: Cobertura &gt; 80% con JUnit 5 y validación Mockito.</a:t>
             </a:r>
           </a:p>
         </p:txBody>
@@ -12157,7 +12087,7 @@
           </a:solidFill>
           <a:ln w="25400">
             <a:solidFill>
-              <a:srgbClr val="6EE7B7"/>
+              <a:srgbClr val="FCD34D"/>
             </a:solidFill>
           </a:ln>
         </p:spPr>
@@ -12185,13 +12115,13 @@
               </a:spcAft>
               <a:defRPr sz="1500" b="1">
                 <a:solidFill>
-                  <a:srgbClr val="059669"/>
-                </a:solidFill>
-                <a:latin typeface="Calibri"/>
-              </a:defRPr>
-            </a:pPr>
-            <a:r>
-              <a:t>📅 PLANIFICACIÓN SCRUM &amp; STORY POINTS</a:t>
+                  <a:srgbClr val="B45309"/>
+                </a:solidFill>
+                <a:latin typeface="Calibri"/>
+              </a:defRPr>
+            </a:pPr>
+            <a:r>
+              <a:t>👥 MATRIZ RACI DE ROLES Y RESPONSABILIDADES</a:t>
             </a:r>
           </a:p>
           <a:p>
@@ -12201,13 +12131,13 @@
               </a:spcAft>
               <a:defRPr sz="1300" b="1">
                 <a:solidFill>
-                  <a:srgbClr val="0F172A"/>
-                </a:solidFill>
-                <a:latin typeface="Calibri"/>
-              </a:defRPr>
-            </a:pPr>
-            <a:r>
-              <a:t>• Product Backlog Total:</a:t>
+                  <a:srgbClr val="0B1F3A"/>
+                </a:solidFill>
+                <a:latin typeface="Calibri"/>
+              </a:defRPr>
+            </a:pPr>
+            <a:r>
+              <a:t>Frank Emiliano Vargas Huamán (Líder Técnico &amp; Arquitecto):</a:t>
             </a:r>
           </a:p>
           <a:p>
@@ -12223,7 +12153,7 @@
               </a:defRPr>
             </a:pPr>
             <a:r>
-              <a:t>70 Story Points estimados con Planning Poker.</a:t>
+              <a:t>• Accountable (A) y Responsible (R) en Arquitectura Hexagonal, Modelado DDL PostgreSQL 15, Core Java 17, Spring Boot 3 y Docker Compose.</a:t>
             </a:r>
           </a:p>
           <a:p>
@@ -12233,13 +12163,13 @@
               </a:spcAft>
               <a:defRPr sz="1300" b="1">
                 <a:solidFill>
-                  <a:srgbClr val="0F172A"/>
-                </a:solidFill>
-                <a:latin typeface="Calibri"/>
-              </a:defRPr>
-            </a:pPr>
-            <a:r>
-              <a:t>• Sprints 1 a 3 (Hito APF1 - Semanas 1 a 4):</a:t>
+                  <a:srgbClr val="0B1F3A"/>
+                </a:solidFill>
+                <a:latin typeface="Calibri"/>
+              </a:defRPr>
+            </a:pPr>
+            <a:r>
+              <a:t>Fernando Alber Alfredo Romero Requejo (Ingeniero de Requisitos):</a:t>
             </a:r>
           </a:p>
           <a:p>
@@ -12255,19 +12185,7 @@
               </a:defRPr>
             </a:pPr>
             <a:r>
-              <a:t>100% CULMINADO (38 SP entregados).</a:t>
-            </a:r>
-            <a:br/>
-            <a:r>
-              <a:t>- Sprint 1: Persistencia inmutable y modelos de dominio.</a:t>
-            </a:r>
-            <a:br/>
-            <a:r>
-              <a:t>- Sprint 2: Core telemétrico y worker de sondeo 30s.</a:t>
-            </a:r>
-            <a:br/>
-            <a:r>
-              <a:t>- Sprint 3: Consola Web NOC en tiempo real y reporte SFT.</a:t>
+              <a:t>• Responsible (R) en Levantamiento SRS IEEE 830 y Procesos BPMN 2.0. • Consulted (C) en Casos de Uso UML 2.5 y Reglas Normativas BCRP.</a:t>
             </a:r>
           </a:p>
           <a:p>
@@ -12277,13 +12195,13 @@
               </a:spcAft>
               <a:defRPr sz="1300" b="1">
                 <a:solidFill>
-                  <a:srgbClr val="0F172A"/>
-                </a:solidFill>
-                <a:latin typeface="Calibri"/>
-              </a:defRPr>
-            </a:pPr>
-            <a:r>
-              <a:t>• Sprints 4 a 6 (Etapa 02 - Semanas 5 a 14):</a:t>
+                  <a:srgbClr val="0B1F3A"/>
+                </a:solidFill>
+                <a:latin typeface="Calibri"/>
+              </a:defRPr>
+            </a:pPr>
+            <a:r>
+              <a:t>Joel Leonardo Olaya Vivas (Ingeniero de Software &amp; QA):</a:t>
             </a:r>
           </a:p>
           <a:p>
@@ -12299,19 +12217,7 @@
               </a:defRPr>
             </a:pPr>
             <a:r>
-              <a:t>32 SP planificados para avance final.</a:t>
-            </a:r>
-            <a:br/>
-            <a:r>
-              <a:t>- Sprint 4: Motor de analítica predictiva MTTR/MTTD.</a:t>
-            </a:r>
-            <a:br/>
-            <a:r>
-              <a:t>- Sprint 5: Módulo de descargo bancario y notificaciones.</a:t>
-            </a:r>
-            <a:br/>
-            <a:r>
-              <a:t>- Sprint 6: Auditoría de seguridad OWASP y cierre de proyecto.</a:t>
+              <a:t>• Responsible (R) en Suite JUnit 5 / Mockito (8/8 tests). • Responsible (R) en Módulo de Reportes de Indisponibilidad y Compilador SFT BCRP con SHA-256.</a:t>
             </a:r>
           </a:p>
         </p:txBody>
@@ -12499,7 +12405,7 @@
               </a:defRPr>
             </a:pPr>
             <a:r>
-              <a:t>CRITERIO 4 DE RÚBRICA • 6.0 PUNTOS</a:t>
+              <a:t>CRITERIO 3 DE RÚBRICA • 3.0 PUNTOS</a:t>
             </a:r>
           </a:p>
           <a:p>
@@ -12515,7 +12421,7 @@
               </a:defRPr>
             </a:pPr>
             <a:r>
-              <a:t>Especificación de Requisitos de Software (SRS IEEE 830)</a:t>
+              <a:t>EDT / WBS a 3 Niveles y Cronograma Scrum Gantt</a:t>
             </a:r>
           </a:p>
           <a:p>
@@ -12528,7 +12434,7 @@
               </a:defRPr>
             </a:pPr>
             <a:r>
-              <a:t>Formalización de 12 Requisitos Funcionales y 8 Requisitos No Funcionales ISO/IEC 25010</a:t>
+              <a:t>Estructuración del Product Backlog (70 Story Points) y cumplimiento estricto del Hito APF1</a:t>
             </a:r>
           </a:p>
         </p:txBody>
@@ -12542,7 +12448,7 @@
         <p:spPr>
           <a:xfrm>
             <a:off x="731520" y="1508760"/>
-            <a:ext cx="2542032" cy="4892040"/>
+            <a:ext cx="5212080" cy="4892040"/>
           </a:xfrm>
           <a:prstGeom prst="roundRect">
             <a:avLst/>
@@ -12550,7 +12456,7 @@
           <a:solidFill>
             <a:srgbClr val="FFFFFF"/>
           </a:solidFill>
-          <a:ln w="27940">
+          <a:ln w="25400">
             <a:solidFill>
               <a:srgbClr val="93C5FD"/>
             </a:solidFill>
@@ -12571,14 +12477,30 @@
           </a:fontRef>
         </p:style>
         <p:txBody>
-          <a:bodyPr rtlCol="0" anchor="t" wrap="square" tIns="182880" lIns="182880"/>
+          <a:bodyPr rtlCol="0" anchor="t" wrap="square" tIns="182880" lIns="228600"/>
           <a:lstStyle/>
           <a:p>
             <a:pPr algn="ctr">
               <a:spcAft>
-                <a:spcPts val="1000"/>
-              </a:spcAft>
-              <a:defRPr sz="1400" b="1">
+                <a:spcPts val="800"/>
+              </a:spcAft>
+              <a:defRPr sz="1500" b="1">
+                <a:solidFill>
+                  <a:srgbClr val="0284C7"/>
+                </a:solidFill>
+                <a:latin typeface="Calibri"/>
+              </a:defRPr>
+            </a:pPr>
+            <a:r>
+              <a:t>🌳 EDT / WBS JERÁRQUICO A 3 NIVELES</a:t>
+            </a:r>
+          </a:p>
+          <a:p>
+            <a:pPr>
+              <a:spcAft>
+                <a:spcPts val="200"/>
+              </a:spcAft>
+              <a:defRPr sz="1300" b="1">
                 <a:solidFill>
                   <a:srgbClr val="0B1F3A"/>
                 </a:solidFill>
@@ -12586,12 +12508,15 @@
               </a:defRPr>
             </a:pPr>
             <a:r>
-              <a:t>👥 4 ACTORES FORMALES</a:t>
-            </a:r>
-          </a:p>
-          <a:p>
-            <a:pPr>
-              <a:defRPr sz="1250">
+              <a:t>1.1 FASE NORMATIVA (Semanas 1-2):</a:t>
+            </a:r>
+          </a:p>
+          <a:p>
+            <a:pPr>
+              <a:spcAft>
+                <a:spcPts val="600"/>
+              </a:spcAft>
+              <a:defRPr sz="1200">
                 <a:solidFill>
                   <a:srgbClr val="334155"/>
                 </a:solidFill>
@@ -12599,24 +12524,103 @@
               </a:defRPr>
             </a:pPr>
             <a:r>
-              <a:t>• Operador NOC (Entidad Financiera)</a:t>
-            </a:r>
-            <a:br/>
-            <a:r>
-              <a:t>• Worker Telemetría (Daemon 30s)</a:t>
-            </a:r>
-            <a:br/>
-            <a:r>
-              <a:t>• Supervisor BCRP (Mesa de Pagos)</a:t>
-            </a:r>
-            <a:br/>
-            <a:r>
-              <a:t>• Administrador TI (Auditoría)</a:t>
-            </a:r>
-            <a:br/>
-            <a:br/>
-            <a:r>
-              <a:t>Interacción sin fricciones mediante control de acceso RBAC estricto.</a:t>
+              <a:t>Marco legal BCRP (Leyes 26123 y 29440, Circular 0011-2023).</a:t>
+            </a:r>
+          </a:p>
+          <a:p>
+            <a:pPr>
+              <a:spcAft>
+                <a:spcPts val="200"/>
+              </a:spcAft>
+              <a:defRPr sz="1300" b="1">
+                <a:solidFill>
+                  <a:srgbClr val="0B1F3A"/>
+                </a:solidFill>
+                <a:latin typeface="Calibri"/>
+              </a:defRPr>
+            </a:pPr>
+            <a:r>
+              <a:t>1.2 FASE ANÁLISIS (Semanas 3-4):</a:t>
+            </a:r>
+          </a:p>
+          <a:p>
+            <a:pPr>
+              <a:spcAft>
+                <a:spcPts val="600"/>
+              </a:spcAft>
+              <a:defRPr sz="1200">
+                <a:solidFill>
+                  <a:srgbClr val="334155"/>
+                </a:solidFill>
+                <a:latin typeface="Calibri"/>
+              </a:defRPr>
+            </a:pPr>
+            <a:r>
+              <a:t>SRS IEEE 830, Diagrama Casos de Uso UML 2.5 y Procesos BPMN 2.0.</a:t>
+            </a:r>
+          </a:p>
+          <a:p>
+            <a:pPr>
+              <a:spcAft>
+                <a:spcPts val="200"/>
+              </a:spcAft>
+              <a:defRPr sz="1300" b="1">
+                <a:solidFill>
+                  <a:srgbClr val="0B1F3A"/>
+                </a:solidFill>
+                <a:latin typeface="Calibri"/>
+              </a:defRPr>
+            </a:pPr>
+            <a:r>
+              <a:t>1.3 FASE DISEÑO (Semanas 3-4):</a:t>
+            </a:r>
+          </a:p>
+          <a:p>
+            <a:pPr>
+              <a:spcAft>
+                <a:spcPts val="600"/>
+              </a:spcAft>
+              <a:defRPr sz="1200">
+                <a:solidFill>
+                  <a:srgbClr val="334155"/>
+                </a:solidFill>
+                <a:latin typeface="Calibri"/>
+              </a:defRPr>
+            </a:pPr>
+            <a:r>
+              <a:t>Arquitectura Hexagonal (Puertos/Adaptadores) y DDL inmutable.</a:t>
+            </a:r>
+          </a:p>
+          <a:p>
+            <a:pPr>
+              <a:spcAft>
+                <a:spcPts val="200"/>
+              </a:spcAft>
+              <a:defRPr sz="1300" b="1">
+                <a:solidFill>
+                  <a:srgbClr val="0B1F3A"/>
+                </a:solidFill>
+                <a:latin typeface="Calibri"/>
+              </a:defRPr>
+            </a:pPr>
+            <a:r>
+              <a:t>1.4 FASE CONSTRUCCIÓN (Hito APF1 - Semana 4):</a:t>
+            </a:r>
+          </a:p>
+          <a:p>
+            <a:pPr>
+              <a:spcAft>
+                <a:spcPts val="600"/>
+              </a:spcAft>
+              <a:defRPr sz="1200">
+                <a:solidFill>
+                  <a:srgbClr val="334155"/>
+                </a:solidFill>
+                <a:latin typeface="Calibri"/>
+              </a:defRPr>
+            </a:pPr>
+            <a:r>
+              <a:t>Backend Java 17, Spring Boot 3 REST, Consola NOC y 8 tests JUnit.</a:t>
             </a:r>
           </a:p>
         </p:txBody>
@@ -12629,8 +12633,8 @@
         </p:nvSpPr>
         <p:spPr>
           <a:xfrm>
-            <a:off x="3456432" y="1508760"/>
-            <a:ext cx="2542032" cy="4892040"/>
+            <a:off x="6217920" y="1508760"/>
+            <a:ext cx="5242255" cy="4892040"/>
           </a:xfrm>
           <a:prstGeom prst="roundRect">
             <a:avLst/>
@@ -12638,9 +12642,9 @@
           <a:solidFill>
             <a:srgbClr val="FFFFFF"/>
           </a:solidFill>
-          <a:ln w="27940">
+          <a:ln w="25400">
             <a:solidFill>
-              <a:srgbClr val="FCD34D"/>
+              <a:srgbClr val="6EE7B7"/>
             </a:solidFill>
           </a:ln>
         </p:spPr>
@@ -12659,27 +12663,46 @@
           </a:fontRef>
         </p:style>
         <p:txBody>
-          <a:bodyPr rtlCol="0" anchor="t" wrap="square" tIns="182880" lIns="182880"/>
+          <a:bodyPr rtlCol="0" anchor="t" wrap="square" tIns="182880" lIns="228600"/>
           <a:lstStyle/>
           <a:p>
             <a:pPr algn="ctr">
               <a:spcAft>
-                <a:spcPts val="1000"/>
-              </a:spcAft>
-              <a:defRPr sz="1400" b="1">
-                <a:solidFill>
-                  <a:srgbClr val="0B1F3A"/>
-                </a:solidFill>
-                <a:latin typeface="Calibri"/>
-              </a:defRPr>
-            </a:pPr>
-            <a:r>
-              <a:t>🔑 REQUISITO CLAVE: RF-01</a:t>
-            </a:r>
-          </a:p>
-          <a:p>
-            <a:pPr>
-              <a:defRPr sz="1250">
+                <a:spcPts val="800"/>
+              </a:spcAft>
+              <a:defRPr sz="1500" b="1">
+                <a:solidFill>
+                  <a:srgbClr val="059669"/>
+                </a:solidFill>
+                <a:latin typeface="Calibri"/>
+              </a:defRPr>
+            </a:pPr>
+            <a:r>
+              <a:t>📅 PLANIFICACIÓN SCRUM &amp; STORY POINTS</a:t>
+            </a:r>
+          </a:p>
+          <a:p>
+            <a:pPr>
+              <a:spcAft>
+                <a:spcPts val="200"/>
+              </a:spcAft>
+              <a:defRPr sz="1300" b="1">
+                <a:solidFill>
+                  <a:srgbClr val="0F172A"/>
+                </a:solidFill>
+                <a:latin typeface="Calibri"/>
+              </a:defRPr>
+            </a:pPr>
+            <a:r>
+              <a:t>• Product Backlog Total:</a:t>
+            </a:r>
+          </a:p>
+          <a:p>
+            <a:pPr>
+              <a:spcAft>
+                <a:spcPts val="600"/>
+              </a:spcAft>
+              <a:defRPr sz="1200">
                 <a:solidFill>
                   <a:srgbClr val="334155"/>
                 </a:solidFill>
@@ -12687,79 +12710,75 @@
               </a:defRPr>
             </a:pPr>
             <a:r>
-              <a:t>• Autenticación Única Centralizada:</a:t>
+              <a:t>70 Story Points estimados con Planning Poker.</a:t>
+            </a:r>
+          </a:p>
+          <a:p>
+            <a:pPr>
+              <a:spcAft>
+                <a:spcPts val="200"/>
+              </a:spcAft>
+              <a:defRPr sz="1300" b="1">
+                <a:solidFill>
+                  <a:srgbClr val="0F172A"/>
+                </a:solidFill>
+                <a:latin typeface="Calibri"/>
+              </a:defRPr>
+            </a:pPr>
+            <a:r>
+              <a:t>• Sprints 1 a 3 (Hito APF1 - Semanas 1 a 4):</a:t>
+            </a:r>
+          </a:p>
+          <a:p>
+            <a:pPr>
+              <a:spcAft>
+                <a:spcPts val="600"/>
+              </a:spcAft>
+              <a:defRPr sz="1200">
+                <a:solidFill>
+                  <a:srgbClr val="334155"/>
+                </a:solidFill>
+                <a:latin typeface="Calibri"/>
+              </a:defRPr>
+            </a:pPr>
+            <a:r>
+              <a:t>100% CULMINADO (38 SP entregados).</a:t>
             </a:r>
             <a:br/>
             <a:r>
-              <a:t>El caso de estudio exige un solo login corporativo contra Directorio Activo (AD/LDAP).</a:t>
+              <a:t>- Sprint 1: Persistencia inmutable y modelos de dominio.</a:t>
             </a:r>
             <a:br/>
+            <a:r>
+              <a:t>- Sprint 2: Core telemétrico y worker de sondeo 30s.</a:t>
+            </a:r>
             <a:br/>
             <a:r>
-              <a:t>Cero credenciales locales dispersas.</a:t>
-            </a:r>
-          </a:p>
-        </p:txBody>
-      </p:sp>
-      <p:sp>
-        <p:nvSpPr>
-          <p:cNvPr id="8" name="Rounded Rectangle 7"/>
-          <p:cNvSpPr/>
-          <p:nvPr/>
-        </p:nvSpPr>
-        <p:spPr>
-          <a:xfrm>
-            <a:off x="6181344" y="1508760"/>
-            <a:ext cx="2542032" cy="4892040"/>
-          </a:xfrm>
-          <a:prstGeom prst="roundRect">
-            <a:avLst/>
-          </a:prstGeom>
-          <a:solidFill>
-            <a:srgbClr val="FFFFFF"/>
-          </a:solidFill>
-          <a:ln w="27940">
-            <a:solidFill>
-              <a:srgbClr val="CBD5E1"/>
-            </a:solidFill>
-          </a:ln>
-        </p:spPr>
-        <p:style>
-          <a:lnRef idx="1">
-            <a:schemeClr val="accent1"/>
-          </a:lnRef>
-          <a:fillRef idx="3">
-            <a:schemeClr val="accent1"/>
-          </a:fillRef>
-          <a:effectRef idx="2">
-            <a:schemeClr val="accent1"/>
-          </a:effectRef>
-          <a:fontRef idx="minor">
-            <a:schemeClr val="lt1"/>
-          </a:fontRef>
-        </p:style>
-        <p:txBody>
-          <a:bodyPr rtlCol="0" anchor="t" wrap="square" tIns="182880" lIns="182880"/>
-          <a:lstStyle/>
-          <a:p>
-            <a:pPr algn="ctr">
-              <a:spcAft>
-                <a:spcPts val="1000"/>
-              </a:spcAft>
-              <a:defRPr sz="1400" b="1">
-                <a:solidFill>
-                  <a:srgbClr val="0B1F3A"/>
-                </a:solidFill>
-                <a:latin typeface="Calibri"/>
-              </a:defRPr>
-            </a:pPr>
-            <a:r>
-              <a:t>⚙️ REQUISITOS CORE RF-02 A RF-08</a:t>
-            </a:r>
-          </a:p>
-          <a:p>
-            <a:pPr>
-              <a:defRPr sz="1250">
+              <a:t>- Sprint 3: Consola Web NOC en tiempo real y reporte SFT.</a:t>
+            </a:r>
+          </a:p>
+          <a:p>
+            <a:pPr>
+              <a:spcAft>
+                <a:spcPts val="200"/>
+              </a:spcAft>
+              <a:defRPr sz="1300" b="1">
+                <a:solidFill>
+                  <a:srgbClr val="0F172A"/>
+                </a:solidFill>
+                <a:latin typeface="Calibri"/>
+              </a:defRPr>
+            </a:pPr>
+            <a:r>
+              <a:t>• Sprints 4 a 6 (Etapa 02 - Semanas 5 a 14):</a:t>
+            </a:r>
+          </a:p>
+          <a:p>
+            <a:pPr>
+              <a:spcAft>
+                <a:spcPts val="600"/>
+              </a:spcAft>
+              <a:defRPr sz="1200">
                 <a:solidFill>
                   <a:srgbClr val="334155"/>
                 </a:solidFill>
@@ -12767,102 +12786,19 @@
               </a:defRPr>
             </a:pPr>
             <a:r>
-              <a:t>• RF-03: Polling asíncrono cada 30 segundos.</a:t>
+              <a:t>32 SP planificados para avance final.</a:t>
             </a:r>
             <a:br/>
             <a:r>
-              <a:t>• RF-04: Auto-categorización HTTP 5xx.</a:t>
+              <a:t>- Sprint 4: Motor de analítica predictiva MTTR/MTTD.</a:t>
             </a:r>
             <a:br/>
             <a:r>
-              <a:t>• RF-06: Máquina de estados formal.</a:t>
+              <a:t>- Sprint 5: Módulo de descargo bancario y notificaciones.</a:t>
             </a:r>
             <a:br/>
             <a:r>
-              <a:t>• RF-08: Compilador SFT con hash SHA-256.</a:t>
-            </a:r>
-          </a:p>
-        </p:txBody>
-      </p:sp>
-      <p:sp>
-        <p:nvSpPr>
-          <p:cNvPr id="9" name="Rounded Rectangle 8"/>
-          <p:cNvSpPr/>
-          <p:nvPr/>
-        </p:nvSpPr>
-        <p:spPr>
-          <a:xfrm>
-            <a:off x="8906256" y="1508760"/>
-            <a:ext cx="2542032" cy="4892040"/>
-          </a:xfrm>
-          <a:prstGeom prst="roundRect">
-            <a:avLst/>
-          </a:prstGeom>
-          <a:solidFill>
-            <a:srgbClr val="FFFFFF"/>
-          </a:solidFill>
-          <a:ln w="27940">
-            <a:solidFill>
-              <a:srgbClr val="6EE7B7"/>
-            </a:solidFill>
-          </a:ln>
-        </p:spPr>
-        <p:style>
-          <a:lnRef idx="1">
-            <a:schemeClr val="accent1"/>
-          </a:lnRef>
-          <a:fillRef idx="3">
-            <a:schemeClr val="accent1"/>
-          </a:fillRef>
-          <a:effectRef idx="2">
-            <a:schemeClr val="accent1"/>
-          </a:effectRef>
-          <a:fontRef idx="minor">
-            <a:schemeClr val="lt1"/>
-          </a:fontRef>
-        </p:style>
-        <p:txBody>
-          <a:bodyPr rtlCol="0" anchor="t" wrap="square" tIns="182880" lIns="182880"/>
-          <a:lstStyle/>
-          <a:p>
-            <a:pPr algn="ctr">
-              <a:spcAft>
-                <a:spcPts val="1000"/>
-              </a:spcAft>
-              <a:defRPr sz="1400" b="1">
-                <a:solidFill>
-                  <a:srgbClr val="0B1F3A"/>
-                </a:solidFill>
-                <a:latin typeface="Calibri"/>
-              </a:defRPr>
-            </a:pPr>
-            <a:r>
-              <a:t>🛡️ RNF BAJO ISO/IEC 25010</a:t>
-            </a:r>
-          </a:p>
-          <a:p>
-            <a:pPr>
-              <a:defRPr sz="1250">
-                <a:solidFill>
-                  <a:srgbClr val="334155"/>
-                </a:solidFill>
-                <a:latin typeface="Calibri"/>
-              </a:defRPr>
-            </a:pPr>
-            <a:r>
-              <a:t>• Rendimiento: Latencia API &lt; 500ms.</a:t>
-            </a:r>
-            <a:br/>
-            <a:r>
-              <a:t>• Seguridad: Cifrado TLS 1.3 / LDAPS.</a:t>
-            </a:r>
-            <a:br/>
-            <a:r>
-              <a:t>• Fiabilidad: SLA 99.9% de disponibilidad.</a:t>
-            </a:r>
-            <a:br/>
-            <a:r>
-              <a:t>• Integridad: Inmutabilidad total en BD.</a:t>
+              <a:t>- Sprint 6: Auditoría de seguridad OWASP y cierre de proyecto.</a:t>
             </a:r>
           </a:p>
         </p:txBody>
@@ -12930,7 +12866,7 @@
       </p:sp>
       <p:sp>
         <p:nvSpPr>
-          <p:cNvPr id="3" name="Rectangle 2"/>
+          <p:cNvPr id="3" name="Rounded Rectangle 2"/>
           <p:cNvSpPr/>
           <p:nvPr/>
         </p:nvSpPr>
@@ -12939,15 +12875,15 @@
             <a:off x="731520" y="320040"/>
             <a:ext cx="10728655" cy="987552"/>
           </a:xfrm>
-          <a:prstGeom prst="rect">
+          <a:prstGeom prst="roundRect">
             <a:avLst/>
           </a:prstGeom>
           <a:solidFill>
             <a:srgbClr val="FFFFFF"/>
           </a:solidFill>
-          <a:ln w="19050">
+          <a:ln w="12700">
             <a:solidFill>
-              <a:srgbClr val="CBD5E1"/>
+              <a:srgbClr val="E2E8F0"/>
             </a:solidFill>
           </a:ln>
         </p:spPr>
@@ -12975,7 +12911,7 @@
       </p:sp>
       <p:sp>
         <p:nvSpPr>
-          <p:cNvPr id="4" name="Rectangle 3"/>
+          <p:cNvPr id="4" name="Rounded Rectangle 3"/>
           <p:cNvSpPr/>
           <p:nvPr/>
         </p:nvSpPr>
@@ -12984,7 +12920,7 @@
             <a:off x="731520" y="320040"/>
             <a:ext cx="128016" cy="987552"/>
           </a:xfrm>
-          <a:prstGeom prst="rect">
+          <a:prstGeom prst="roundRect">
             <a:avLst/>
           </a:prstGeom>
           <a:solidFill>
@@ -13033,16 +12969,13 @@
           <a:noFill/>
         </p:spPr>
         <p:txBody>
-          <a:bodyPr wrap="square" lIns="0" tIns="0" rIns="0" bIns="0" anchor="t">
+          <a:bodyPr wrap="square" lIns="0" tIns="0" rIns="0" bIns="0">
             <a:spAutoFit/>
           </a:bodyPr>
           <a:lstStyle/>
           <a:p>
             <a:pPr>
-              <a:spcAft>
-                <a:spcPts val="200"/>
-              </a:spcAft>
-              <a:defRPr sz="1150" b="1">
+              <a:defRPr sz="1100" b="1">
                 <a:solidFill>
                   <a:srgbClr val="0284C7"/>
                 </a:solidFill>
@@ -13050,28 +12983,25 @@
               </a:defRPr>
             </a:pPr>
             <a:r>
-              <a:t>CRITERIO 4 DE RÚBRICA • 6.0 PUNTOS</a:t>
-            </a:r>
-          </a:p>
-          <a:p>
-            <a:pPr>
-              <a:spcAft>
-                <a:spcPts val="200"/>
-              </a:spcAft>
-              <a:defRPr sz="2200" b="1">
-                <a:solidFill>
-                  <a:srgbClr val="0B1F3A"/>
-                </a:solidFill>
-                <a:latin typeface="Calibri"/>
-              </a:defRPr>
-            </a:pPr>
-            <a:r>
-              <a:t>Diagrama de Casos de Uso del Sistema (UML 2.5)</a:t>
-            </a:r>
-          </a:p>
-          <a:p>
-            <a:pPr>
-              <a:defRPr sz="1200">
+              <a:t>CRITERIO 3 DE RÚBRICA • 3.0 PUNTOS</a:t>
+            </a:r>
+          </a:p>
+          <a:p>
+            <a:pPr>
+              <a:defRPr sz="1600" b="1">
+                <a:solidFill>
+                  <a:srgbClr val="0F172A"/>
+                </a:solidFill>
+                <a:latin typeface="Calibri"/>
+              </a:defRPr>
+            </a:pPr>
+            <a:r>
+              <a:t>Cronograma Visual Gantt de Avance de Ingeniería — Hito APF2 (Semana 8)</a:t>
+            </a:r>
+          </a:p>
+          <a:p>
+            <a:pPr>
+              <a:defRPr sz="1050">
                 <a:solidFill>
                   <a:srgbClr val="64748B"/>
                 </a:solidFill>
@@ -13079,7 +13009,7 @@
               </a:defRPr>
             </a:pPr>
             <a:r>
-              <a:t>Modelado visual de la interacción entre los 4 actores y los casos de uso normativos del sistema</a:t>
+              <a:t>Seguimiento temporal estricto del Product Backlog, Sprints 1 a 4 completados y ruta crítica final</a:t>
             </a:r>
           </a:p>
         </p:txBody>
@@ -13092,8 +13022,8 @@
         </p:nvSpPr>
         <p:spPr>
           <a:xfrm>
-            <a:off x="731520" y="1417320"/>
-            <a:ext cx="10728655" cy="4160520"/>
+            <a:off x="731520" y="1389888"/>
+            <a:ext cx="10728655" cy="3977639"/>
           </a:xfrm>
           <a:prstGeom prst="roundRect">
             <a:avLst/>
@@ -13101,9 +13031,9 @@
           <a:solidFill>
             <a:srgbClr val="0F172A"/>
           </a:solidFill>
-          <a:ln w="22860">
+          <a:ln w="12700">
             <a:solidFill>
-              <a:srgbClr val="38BDF8"/>
+              <a:srgbClr val="1E293B"/>
             </a:solidFill>
           </a:ln>
         </p:spPr>
@@ -13131,7 +13061,7 @@
       </p:sp>
       <p:pic>
         <p:nvPicPr>
-          <p:cNvPr id="7" name="Picture 6" descr="figura2_casos_de_uso.png"/>
+          <p:cNvPr id="7" name="Picture 6" descr="figura13_gantt_avance_apf2.png"/>
           <p:cNvPicPr>
             <a:picLocks noChangeAspect="1"/>
           </p:cNvPicPr>
@@ -13145,8 +13075,8 @@
         </p:blipFill>
         <p:spPr>
           <a:xfrm>
-            <a:off x="2066543" y="1490472"/>
-            <a:ext cx="8046720" cy="3704046"/>
+            <a:off x="2267317" y="1481327"/>
+            <a:ext cx="7657060" cy="3794760"/>
           </a:xfrm>
           <a:prstGeom prst="rect">
             <a:avLst/>
@@ -13161,8 +13091,8 @@
         </p:nvSpPr>
         <p:spPr>
           <a:xfrm>
-            <a:off x="731520" y="5715000"/>
-            <a:ext cx="3447288" cy="777240"/>
+            <a:off x="731520" y="5468112"/>
+            <a:ext cx="3447288" cy="1115568"/>
           </a:xfrm>
           <a:prstGeom prst="roundRect">
             <a:avLst/>
@@ -13170,9 +13100,9 @@
           <a:solidFill>
             <a:srgbClr val="FFFFFF"/>
           </a:solidFill>
-          <a:ln w="25400">
+          <a:ln w="12700">
             <a:solidFill>
-              <a:srgbClr val="93C5FD"/>
+              <a:srgbClr val="E2E8F0"/>
             </a:solidFill>
           </a:ln>
         </p:spPr>
@@ -13191,11 +13121,14 @@
           </a:fontRef>
         </p:style>
         <p:txBody>
-          <a:bodyPr rtlCol="0" anchor="t" wrap="square" tIns="91440" lIns="164592"/>
+          <a:bodyPr rtlCol="0" anchor="ctr" wrap="square" lIns="109728" rIns="109728" tIns="73152" bIns="36576"/>
           <a:lstStyle/>
           <a:p>
             <a:pPr algn="ctr">
-              <a:defRPr sz="1250" b="1">
+              <a:spcAft>
+                <a:spcPts val="200"/>
+              </a:spcAft>
+              <a:defRPr sz="1050" b="1">
                 <a:solidFill>
                   <a:srgbClr val="0B1F3A"/>
                 </a:solidFill>
@@ -13203,12 +13136,12 @@
               </a:defRPr>
             </a:pPr>
             <a:r>
-              <a:t>4 ACTORES ROBUSTOS</a:t>
-            </a:r>
-          </a:p>
-          <a:p>
-            <a:pPr>
-              <a:defRPr sz="1150">
+              <a:t>SPRINTS 1 AL 4 (100% COMPLETOS)</a:t>
+            </a:r>
+          </a:p>
+          <a:p>
+            <a:pPr algn="left">
+              <a:defRPr sz="900">
                 <a:solidFill>
                   <a:srgbClr val="334155"/>
                 </a:solidFill>
@@ -13216,7 +13149,7 @@
               </a:defRPr>
             </a:pPr>
             <a:r>
-              <a:t>Operador NOC, Worker Telemetría, Supervisor BCRP y Administrador TI.</a:t>
+              <a:t>Culminación de levantamiento normativo, especificación SRS IEEE 830, arquitectura hexagonal y persistencia inmutable.</a:t>
             </a:r>
           </a:p>
         </p:txBody>
@@ -13229,8 +13162,8 @@
         </p:nvSpPr>
         <p:spPr>
           <a:xfrm>
-            <a:off x="4361688" y="5715000"/>
-            <a:ext cx="3447288" cy="777240"/>
+            <a:off x="4370832" y="5468112"/>
+            <a:ext cx="3447288" cy="1115568"/>
           </a:xfrm>
           <a:prstGeom prst="roundRect">
             <a:avLst/>
@@ -13238,9 +13171,9 @@
           <a:solidFill>
             <a:srgbClr val="FFFFFF"/>
           </a:solidFill>
-          <a:ln w="25400">
+          <a:ln w="12700">
             <a:solidFill>
-              <a:srgbClr val="FCD34D"/>
+              <a:srgbClr val="E2E8F0"/>
             </a:solidFill>
           </a:ln>
         </p:spPr>
@@ -13259,11 +13192,14 @@
           </a:fontRef>
         </p:style>
         <p:txBody>
-          <a:bodyPr rtlCol="0" anchor="t" wrap="square" tIns="91440" lIns="164592"/>
+          <a:bodyPr rtlCol="0" anchor="ctr" wrap="square" lIns="109728" rIns="109728" tIns="73152" bIns="36576"/>
           <a:lstStyle/>
           <a:p>
             <a:pPr algn="ctr">
-              <a:defRPr sz="1250" b="1">
+              <a:spcAft>
+                <a:spcPts val="200"/>
+              </a:spcAft>
+              <a:defRPr sz="1050" b="1">
                 <a:solidFill>
                   <a:srgbClr val="0B1F3A"/>
                 </a:solidFill>
@@ -13271,12 +13207,12 @@
               </a:defRPr>
             </a:pPr>
             <a:r>
-              <a:t>LÍMITES DEL SISTEMA</a:t>
-            </a:r>
-          </a:p>
-          <a:p>
-            <a:pPr>
-              <a:defRPr sz="1150">
+              <a:t>ENTREGA APF2 (SEMANA 8)</a:t>
+            </a:r>
+          </a:p>
+          <a:p>
+            <a:pPr algn="left">
+              <a:defRPr sz="900">
                 <a:solidFill>
                   <a:srgbClr val="334155"/>
                 </a:solidFill>
@@ -13284,7 +13220,7 @@
               </a:defRPr>
             </a:pPr>
             <a:r>
-              <a:t>Aislamiento estricto de las entidades supervisadas vs el core del BCRP.</a:t>
+              <a:t>15 mockups de pantallas, DER relacional en PostgreSQL 15, clases de diseño Spring Boot 3 y módulo de reportes SFT.</a:t>
             </a:r>
           </a:p>
         </p:txBody>
@@ -13297,8 +13233,8 @@
         </p:nvSpPr>
         <p:spPr>
           <a:xfrm>
-            <a:off x="7991856" y="5715000"/>
-            <a:ext cx="3447288" cy="777240"/>
+            <a:off x="8010144" y="5468112"/>
+            <a:ext cx="3447288" cy="1115568"/>
           </a:xfrm>
           <a:prstGeom prst="roundRect">
             <a:avLst/>
@@ -13306,9 +13242,9 @@
           <a:solidFill>
             <a:srgbClr val="FFFFFF"/>
           </a:solidFill>
-          <a:ln w="25400">
+          <a:ln w="12700">
             <a:solidFill>
-              <a:srgbClr val="6EE7B7"/>
+              <a:srgbClr val="E2E8F0"/>
             </a:solidFill>
           </a:ln>
         </p:spPr>
@@ -13327,11 +13263,14 @@
           </a:fontRef>
         </p:style>
         <p:txBody>
-          <a:bodyPr rtlCol="0" anchor="t" wrap="square" tIns="91440" lIns="164592"/>
+          <a:bodyPr rtlCol="0" anchor="ctr" wrap="square" lIns="109728" rIns="109728" tIns="73152" bIns="36576"/>
           <a:lstStyle/>
           <a:p>
             <a:pPr algn="ctr">
-              <a:defRPr sz="1250" b="1">
+              <a:spcAft>
+                <a:spcPts val="200"/>
+              </a:spcAft>
+              <a:defRPr sz="1050" b="1">
                 <a:solidFill>
                   <a:srgbClr val="0B1F3A"/>
                 </a:solidFill>
@@ -13339,12 +13278,12 @@
               </a:defRPr>
             </a:pPr>
             <a:r>
-              <a:t>TRAZABILIDAD 100%</a:t>
-            </a:r>
-          </a:p>
-          <a:p>
-            <a:pPr>
-              <a:defRPr sz="1150">
+              <a:t>RUTA CRÍTICA (SEMANAS 9 A 14)</a:t>
+            </a:r>
+          </a:p>
+          <a:p>
+            <a:pPr algn="left">
+              <a:defRPr sz="900">
                 <a:solidFill>
                   <a:srgbClr val="334155"/>
                 </a:solidFill>
@@ -13352,7 +13291,7 @@
               </a:defRPr>
             </a:pPr>
             <a:r>
-              <a:t>Cada caso de uso mapea directamente con los 12 RFs del estándar IEEE 830.</a:t>
+              <a:t>Despacho de alertas SMTP, portal bancario de descargo, analítica predictiva MTTR/MTTD y cierre Docker Compose.</a:t>
             </a:r>
           </a:p>
         </p:txBody>
@@ -13540,7 +13479,7 @@
               </a:defRPr>
             </a:pPr>
             <a:r>
-              <a:t>CRITERIO 5 DE RÚBRICA • 4.0 PUNTOS</a:t>
+              <a:t>CRITERIO 4 DE RÚBRICA • 6.0 PUNTOS</a:t>
             </a:r>
           </a:p>
           <a:p>
@@ -13556,7 +13495,7 @@
               </a:defRPr>
             </a:pPr>
             <a:r>
-              <a:t>Modelado de Procesos de Negocio en Notación BPMN 2.0</a:t>
+              <a:t>Especificación de Requisitos de Software (SRS IEEE 830)</a:t>
             </a:r>
           </a:p>
           <a:p>
@@ -13569,7 +13508,7 @@
               </a:defRPr>
             </a:pPr>
             <a:r>
-              <a:t>Optimización de Flujo: De un proceso manual reactivo (180 min) a detección autónoma en &lt; 30 segundos</a:t>
+              <a:t>Formalización de 12 Requisitos Funcionales y 8 Requisitos No Funcionales ISO/IEC 25010</a:t>
             </a:r>
           </a:p>
         </p:txBody>
@@ -13582,18 +13521,18 @@
         </p:nvSpPr>
         <p:spPr>
           <a:xfrm>
-            <a:off x="731520" y="1417320"/>
-            <a:ext cx="10728655" cy="4160520"/>
+            <a:off x="731520" y="1508760"/>
+            <a:ext cx="2542032" cy="4892040"/>
           </a:xfrm>
           <a:prstGeom prst="roundRect">
             <a:avLst/>
           </a:prstGeom>
           <a:solidFill>
-            <a:srgbClr val="0F172A"/>
-          </a:solidFill>
-          <a:ln w="22860">
+            <a:srgbClr val="FFFFFF"/>
+          </a:solidFill>
+          <a:ln w="27940">
             <a:solidFill>
-              <a:srgbClr val="34D399"/>
+              <a:srgbClr val="93C5FD"/>
             </a:solidFill>
           </a:ln>
         </p:spPr>
@@ -13612,47 +13551,66 @@
           </a:fontRef>
         </p:style>
         <p:txBody>
-          <a:bodyPr rtlCol="0" anchor="ctr"/>
-          <a:lstStyle/>
-          <a:p>
-            <a:pPr algn="ctr"/>
-          </a:p>
-        </p:txBody>
-      </p:sp>
-      <p:pic>
-        <p:nvPicPr>
-          <p:cNvPr id="7" name="Picture 6" descr="figura1_bpmn_flujo_proceso.png"/>
-          <p:cNvPicPr>
-            <a:picLocks noChangeAspect="1"/>
-          </p:cNvPicPr>
-          <p:nvPr/>
-        </p:nvPicPr>
-        <p:blipFill>
-          <a:blip r:embed="rId2"/>
-          <a:stretch>
-            <a:fillRect/>
-          </a:stretch>
-        </p:blipFill>
-        <p:spPr>
-          <a:xfrm>
-            <a:off x="3346704" y="1508760"/>
-            <a:ext cx="5492930" cy="3977639"/>
-          </a:xfrm>
-          <a:prstGeom prst="rect">
-            <a:avLst/>
-          </a:prstGeom>
-        </p:spPr>
-      </p:pic>
-      <p:sp>
-        <p:nvSpPr>
-          <p:cNvPr id="8" name="Rounded Rectangle 7"/>
+          <a:bodyPr rtlCol="0" anchor="t" wrap="square" tIns="182880" lIns="182880"/>
+          <a:lstStyle/>
+          <a:p>
+            <a:pPr algn="ctr">
+              <a:spcAft>
+                <a:spcPts val="1000"/>
+              </a:spcAft>
+              <a:defRPr sz="1400" b="1">
+                <a:solidFill>
+                  <a:srgbClr val="0B1F3A"/>
+                </a:solidFill>
+                <a:latin typeface="Calibri"/>
+              </a:defRPr>
+            </a:pPr>
+            <a:r>
+              <a:t>👥 4 ACTORES FORMALES</a:t>
+            </a:r>
+          </a:p>
+          <a:p>
+            <a:pPr>
+              <a:defRPr sz="1250">
+                <a:solidFill>
+                  <a:srgbClr val="334155"/>
+                </a:solidFill>
+                <a:latin typeface="Calibri"/>
+              </a:defRPr>
+            </a:pPr>
+            <a:r>
+              <a:t>• Operador NOC (Entidad Financiera)</a:t>
+            </a:r>
+            <a:br/>
+            <a:r>
+              <a:t>• Worker Telemetría (Daemon 30s)</a:t>
+            </a:r>
+            <a:br/>
+            <a:r>
+              <a:t>• Supervisor BCRP (Mesa de Pagos)</a:t>
+            </a:r>
+            <a:br/>
+            <a:r>
+              <a:t>• Administrador TI (Auditoría)</a:t>
+            </a:r>
+            <a:br/>
+            <a:br/>
+            <a:r>
+              <a:t>Interacción sin fricciones mediante control de acceso RBAC estricto.</a:t>
+            </a:r>
+          </a:p>
+        </p:txBody>
+      </p:sp>
+      <p:sp>
+        <p:nvSpPr>
+          <p:cNvPr id="7" name="Rounded Rectangle 6"/>
           <p:cNvSpPr/>
           <p:nvPr/>
         </p:nvSpPr>
         <p:spPr>
           <a:xfrm>
-            <a:off x="731520" y="5715000"/>
-            <a:ext cx="3447288" cy="777240"/>
+            <a:off x="3456432" y="1508760"/>
+            <a:ext cx="2542032" cy="4892040"/>
           </a:xfrm>
           <a:prstGeom prst="roundRect">
             <a:avLst/>
@@ -13660,9 +13618,9 @@
           <a:solidFill>
             <a:srgbClr val="FFFFFF"/>
           </a:solidFill>
-          <a:ln w="25400">
+          <a:ln w="27940">
             <a:solidFill>
-              <a:srgbClr val="93C5FD"/>
+              <a:srgbClr val="FCD34D"/>
             </a:solidFill>
           </a:ln>
         </p:spPr>
@@ -13681,11 +13639,14 @@
           </a:fontRef>
         </p:style>
         <p:txBody>
-          <a:bodyPr rtlCol="0" anchor="t" wrap="square" tIns="91440" lIns="164592"/>
+          <a:bodyPr rtlCol="0" anchor="t" wrap="square" tIns="182880" lIns="182880"/>
           <a:lstStyle/>
           <a:p>
             <a:pPr algn="ctr">
-              <a:defRPr sz="1250" b="1">
+              <a:spcAft>
+                <a:spcPts val="1000"/>
+              </a:spcAft>
+              <a:defRPr sz="1400" b="1">
                 <a:solidFill>
                   <a:srgbClr val="0B1F3A"/>
                 </a:solidFill>
@@ -13693,12 +13654,12 @@
               </a:defRPr>
             </a:pPr>
             <a:r>
-              <a:t>SONDEO ASÍNCRONO (30s)</a:t>
-            </a:r>
-          </a:p>
-          <a:p>
-            <a:pPr>
-              <a:defRPr sz="1150">
+              <a:t>🔑 REQUISITO CLAVE: RF-01</a:t>
+            </a:r>
+          </a:p>
+          <a:p>
+            <a:pPr>
+              <a:defRPr sz="1250">
                 <a:solidFill>
                   <a:srgbClr val="334155"/>
                 </a:solidFill>
@@ -13706,21 +13667,30 @@
               </a:defRPr>
             </a:pPr>
             <a:r>
-              <a:t>Worker paralelo consulta endpoints sin bloquear el thread principal.</a:t>
-            </a:r>
-          </a:p>
-        </p:txBody>
-      </p:sp>
-      <p:sp>
-        <p:nvSpPr>
-          <p:cNvPr id="9" name="Rounded Rectangle 8"/>
+              <a:t>• Autenticación Única Centralizada:</a:t>
+            </a:r>
+            <a:br/>
+            <a:r>
+              <a:t>El caso de estudio exige un solo login corporativo contra Directorio Activo (AD/LDAP).</a:t>
+            </a:r>
+            <a:br/>
+            <a:br/>
+            <a:r>
+              <a:t>Cero credenciales locales dispersas.</a:t>
+            </a:r>
+          </a:p>
+        </p:txBody>
+      </p:sp>
+      <p:sp>
+        <p:nvSpPr>
+          <p:cNvPr id="8" name="Rounded Rectangle 7"/>
           <p:cNvSpPr/>
           <p:nvPr/>
         </p:nvSpPr>
         <p:spPr>
           <a:xfrm>
-            <a:off x="4361688" y="5715000"/>
-            <a:ext cx="3447288" cy="777240"/>
+            <a:off x="6181344" y="1508760"/>
+            <a:ext cx="2542032" cy="4892040"/>
           </a:xfrm>
           <a:prstGeom prst="roundRect">
             <a:avLst/>
@@ -13728,9 +13698,9 @@
           <a:solidFill>
             <a:srgbClr val="FFFFFF"/>
           </a:solidFill>
-          <a:ln w="25400">
+          <a:ln w="27940">
             <a:solidFill>
-              <a:srgbClr val="FCD34D"/>
+              <a:srgbClr val="CBD5E1"/>
             </a:solidFill>
           </a:ln>
         </p:spPr>
@@ -13749,11 +13719,14 @@
           </a:fontRef>
         </p:style>
         <p:txBody>
-          <a:bodyPr rtlCol="0" anchor="t" wrap="square" tIns="91440" lIns="164592"/>
+          <a:bodyPr rtlCol="0" anchor="t" wrap="square" tIns="182880" lIns="182880"/>
           <a:lstStyle/>
           <a:p>
             <a:pPr algn="ctr">
-              <a:defRPr sz="1250" b="1">
+              <a:spcAft>
+                <a:spcPts val="1000"/>
+              </a:spcAft>
+              <a:defRPr sz="1400" b="1">
                 <a:solidFill>
                   <a:srgbClr val="0B1F3A"/>
                 </a:solidFill>
@@ -13761,12 +13734,12 @@
               </a:defRPr>
             </a:pPr>
             <a:r>
-              <a:t>REGLA RN-01 ANTI-DUPLICADOS</a:t>
-            </a:r>
-          </a:p>
-          <a:p>
-            <a:pPr>
-              <a:defRPr sz="1150">
+              <a:t>⚙️ REQUISITOS CORE RF-02 A RF-08</a:t>
+            </a:r>
+          </a:p>
+          <a:p>
+            <a:pPr>
+              <a:defRPr sz="1250">
                 <a:solidFill>
                   <a:srgbClr val="334155"/>
                 </a:solidFill>
@@ -13774,21 +13747,33 @@
               </a:defRPr>
             </a:pPr>
             <a:r>
-              <a:t>Si ya existe incidente abierto, acumula telemetría sin generar alertas falsas.</a:t>
-            </a:r>
-          </a:p>
-        </p:txBody>
-      </p:sp>
-      <p:sp>
-        <p:nvSpPr>
-          <p:cNvPr id="10" name="Rounded Rectangle 9"/>
+              <a:t>• RF-03: Polling asíncrono cada 30 segundos.</a:t>
+            </a:r>
+            <a:br/>
+            <a:r>
+              <a:t>• RF-04: Auto-categorización HTTP 5xx.</a:t>
+            </a:r>
+            <a:br/>
+            <a:r>
+              <a:t>• RF-06: Máquina de estados formal.</a:t>
+            </a:r>
+            <a:br/>
+            <a:r>
+              <a:t>• RF-08: Compilador SFT con hash SHA-256.</a:t>
+            </a:r>
+          </a:p>
+        </p:txBody>
+      </p:sp>
+      <p:sp>
+        <p:nvSpPr>
+          <p:cNvPr id="9" name="Rounded Rectangle 8"/>
           <p:cNvSpPr/>
           <p:nvPr/>
         </p:nvSpPr>
         <p:spPr>
           <a:xfrm>
-            <a:off x="7991856" y="5715000"/>
-            <a:ext cx="3447288" cy="777240"/>
+            <a:off x="8906256" y="1508760"/>
+            <a:ext cx="2542032" cy="4892040"/>
           </a:xfrm>
           <a:prstGeom prst="roundRect">
             <a:avLst/>
@@ -13796,7 +13781,7 @@
           <a:solidFill>
             <a:srgbClr val="FFFFFF"/>
           </a:solidFill>
-          <a:ln w="25400">
+          <a:ln w="27940">
             <a:solidFill>
               <a:srgbClr val="6EE7B7"/>
             </a:solidFill>
@@ -13817,11 +13802,14 @@
           </a:fontRef>
         </p:style>
         <p:txBody>
-          <a:bodyPr rtlCol="0" anchor="t" wrap="square" tIns="91440" lIns="164592"/>
+          <a:bodyPr rtlCol="0" anchor="t" wrap="square" tIns="182880" lIns="182880"/>
           <a:lstStyle/>
           <a:p>
             <a:pPr algn="ctr">
-              <a:defRPr sz="1250" b="1">
+              <a:spcAft>
+                <a:spcPts val="1000"/>
+              </a:spcAft>
+              <a:defRPr sz="1400" b="1">
                 <a:solidFill>
                   <a:srgbClr val="0B1F3A"/>
                 </a:solidFill>
@@ -13829,12 +13817,12 @@
               </a:defRPr>
             </a:pPr>
             <a:r>
-              <a:t>ERRADICACIÓN DE ASIMETRÍA</a:t>
-            </a:r>
-          </a:p>
-          <a:p>
-            <a:pPr>
-              <a:defRPr sz="1150">
+              <a:t>🛡️ RNF BAJO ISO/IEC 25010</a:t>
+            </a:r>
+          </a:p>
+          <a:p>
+            <a:pPr>
+              <a:defRPr sz="1250">
                 <a:solidFill>
                   <a:srgbClr val="334155"/>
                 </a:solidFill>
@@ -13842,7 +13830,19 @@
               </a:defRPr>
             </a:pPr>
             <a:r>
-              <a:t>Se eliminan las llamadas y demoras de 3 horas; alerta inmediata en consola NOC.</a:t>
+              <a:t>• Rendimiento: Latencia API &lt; 500ms.</a:t>
+            </a:r>
+            <a:br/>
+            <a:r>
+              <a:t>• Seguridad: Cifrado TLS 1.3 / LDAPS.</a:t>
+            </a:r>
+            <a:br/>
+            <a:r>
+              <a:t>• Fiabilidad: SLA 99.9% de disponibilidad.</a:t>
+            </a:r>
+            <a:br/>
+            <a:r>
+              <a:t>• Integridad: Inmutabilidad total en BD.</a:t>
             </a:r>
           </a:p>
         </p:txBody>
